--- a/default/filed parts.pptx
+++ b/default/filed parts.pptx
@@ -16,6 +16,7 @@
     <p:sldId id="264" r:id="rId10"/>
     <p:sldId id="265" r:id="rId11"/>
     <p:sldId id="263" r:id="rId12"/>
+    <p:sldId id="269" r:id="rId13"/>
   </p:sldIdLst>
   <p:sldSz cx="12192000" cy="6858000"/>
   <p:notesSz cx="6858000" cy="9144000"/>
@@ -164,10 +165,9 @@
           </a:lstStyle>
           <a:p>
             <a:r>
-              <a:rPr kumimoji="1" lang="ja-JP" altLang="en-US" smtClean="0"/>
+              <a:rPr kumimoji="1" lang="ja-JP" altLang="en-US"/>
               <a:t>マスター タイトルの書式設定</a:t>
             </a:r>
-            <a:endParaRPr kumimoji="1" lang="ja-JP" altLang="en-US"/>
           </a:p>
         </p:txBody>
       </p:sp>
@@ -229,10 +229,9 @@
           </a:lstStyle>
           <a:p>
             <a:r>
-              <a:rPr kumimoji="1" lang="ja-JP" altLang="en-US" smtClean="0"/>
+              <a:rPr kumimoji="1" lang="ja-JP" altLang="en-US"/>
               <a:t>マスター サブタイトルの書式設定</a:t>
             </a:r>
-            <a:endParaRPr kumimoji="1" lang="ja-JP" altLang="en-US"/>
           </a:p>
         </p:txBody>
       </p:sp>
@@ -253,7 +252,7 @@
           <a:p>
             <a:fld id="{0E085FA6-3BB9-47BA-8D81-299A75D1B58A}" type="datetimeFigureOut">
               <a:rPr kumimoji="1" lang="ja-JP" altLang="en-US" smtClean="0"/>
-              <a:t>2025/7/15</a:t>
+              <a:t>2025/10/21</a:t>
             </a:fld>
             <a:endParaRPr kumimoji="1" lang="ja-JP" altLang="en-US"/>
           </a:p>
@@ -347,10 +346,9 @@
           <a:lstStyle/>
           <a:p>
             <a:r>
-              <a:rPr kumimoji="1" lang="ja-JP" altLang="en-US" smtClean="0"/>
+              <a:rPr kumimoji="1" lang="ja-JP" altLang="en-US"/>
               <a:t>マスター タイトルの書式設定</a:t>
             </a:r>
-            <a:endParaRPr kumimoji="1" lang="ja-JP" altLang="en-US"/>
           </a:p>
         </p:txBody>
       </p:sp>
@@ -371,70 +369,69 @@
           <a:p>
             <a:pPr lvl="0"/>
             <a:r>
-              <a:rPr kumimoji="1" lang="ja-JP" altLang="en-US" smtClean="0"/>
+              <a:rPr kumimoji="1" lang="ja-JP" altLang="en-US"/>
               <a:t>マスター テキストの書式設定</a:t>
             </a:r>
           </a:p>
           <a:p>
             <a:pPr lvl="1"/>
             <a:r>
-              <a:rPr kumimoji="1" lang="ja-JP" altLang="en-US" smtClean="0"/>
+              <a:rPr kumimoji="1" lang="ja-JP" altLang="en-US"/>
               <a:t>第 </a:t>
             </a:r>
             <a:r>
-              <a:rPr kumimoji="1" lang="en-US" altLang="ja-JP" smtClean="0"/>
+              <a:rPr kumimoji="1" lang="en-US" altLang="ja-JP"/>
               <a:t>2 </a:t>
             </a:r>
             <a:r>
-              <a:rPr kumimoji="1" lang="ja-JP" altLang="en-US" smtClean="0"/>
+              <a:rPr kumimoji="1" lang="ja-JP" altLang="en-US"/>
               <a:t>レベル</a:t>
             </a:r>
           </a:p>
           <a:p>
             <a:pPr lvl="2"/>
             <a:r>
-              <a:rPr kumimoji="1" lang="ja-JP" altLang="en-US" smtClean="0"/>
+              <a:rPr kumimoji="1" lang="ja-JP" altLang="en-US"/>
               <a:t>第 </a:t>
             </a:r>
             <a:r>
-              <a:rPr kumimoji="1" lang="en-US" altLang="ja-JP" smtClean="0"/>
+              <a:rPr kumimoji="1" lang="en-US" altLang="ja-JP"/>
               <a:t>3 </a:t>
             </a:r>
             <a:r>
-              <a:rPr kumimoji="1" lang="ja-JP" altLang="en-US" smtClean="0"/>
+              <a:rPr kumimoji="1" lang="ja-JP" altLang="en-US"/>
               <a:t>レベル</a:t>
             </a:r>
           </a:p>
           <a:p>
             <a:pPr lvl="3"/>
             <a:r>
-              <a:rPr kumimoji="1" lang="ja-JP" altLang="en-US" smtClean="0"/>
+              <a:rPr kumimoji="1" lang="ja-JP" altLang="en-US"/>
               <a:t>第 </a:t>
             </a:r>
             <a:r>
-              <a:rPr kumimoji="1" lang="en-US" altLang="ja-JP" smtClean="0"/>
+              <a:rPr kumimoji="1" lang="en-US" altLang="ja-JP"/>
               <a:t>4 </a:t>
             </a:r>
             <a:r>
-              <a:rPr kumimoji="1" lang="ja-JP" altLang="en-US" smtClean="0"/>
+              <a:rPr kumimoji="1" lang="ja-JP" altLang="en-US"/>
               <a:t>レベル</a:t>
             </a:r>
           </a:p>
           <a:p>
             <a:pPr lvl="4"/>
             <a:r>
-              <a:rPr kumimoji="1" lang="ja-JP" altLang="en-US" smtClean="0"/>
+              <a:rPr kumimoji="1" lang="ja-JP" altLang="en-US"/>
               <a:t>第 </a:t>
             </a:r>
             <a:r>
-              <a:rPr kumimoji="1" lang="en-US" altLang="ja-JP" smtClean="0"/>
+              <a:rPr kumimoji="1" lang="en-US" altLang="ja-JP"/>
               <a:t>5 </a:t>
             </a:r>
             <a:r>
-              <a:rPr kumimoji="1" lang="ja-JP" altLang="en-US" smtClean="0"/>
+              <a:rPr kumimoji="1" lang="ja-JP" altLang="en-US"/>
               <a:t>レベル</a:t>
             </a:r>
-            <a:endParaRPr kumimoji="1" lang="ja-JP" altLang="en-US"/>
           </a:p>
         </p:txBody>
       </p:sp>
@@ -455,7 +452,7 @@
           <a:p>
             <a:fld id="{0E085FA6-3BB9-47BA-8D81-299A75D1B58A}" type="datetimeFigureOut">
               <a:rPr kumimoji="1" lang="ja-JP" altLang="en-US" smtClean="0"/>
-              <a:t>2025/7/15</a:t>
+              <a:t>2025/10/21</a:t>
             </a:fld>
             <a:endParaRPr kumimoji="1" lang="ja-JP" altLang="en-US"/>
           </a:p>
@@ -554,10 +551,9 @@
           <a:lstStyle/>
           <a:p>
             <a:r>
-              <a:rPr kumimoji="1" lang="ja-JP" altLang="en-US" smtClean="0"/>
+              <a:rPr kumimoji="1" lang="ja-JP" altLang="en-US"/>
               <a:t>マスター タイトルの書式設定</a:t>
             </a:r>
-            <a:endParaRPr kumimoji="1" lang="ja-JP" altLang="en-US"/>
           </a:p>
         </p:txBody>
       </p:sp>
@@ -583,70 +579,69 @@
           <a:p>
             <a:pPr lvl="0"/>
             <a:r>
-              <a:rPr kumimoji="1" lang="ja-JP" altLang="en-US" smtClean="0"/>
+              <a:rPr kumimoji="1" lang="ja-JP" altLang="en-US"/>
               <a:t>マスター テキストの書式設定</a:t>
             </a:r>
           </a:p>
           <a:p>
             <a:pPr lvl="1"/>
             <a:r>
-              <a:rPr kumimoji="1" lang="ja-JP" altLang="en-US" smtClean="0"/>
+              <a:rPr kumimoji="1" lang="ja-JP" altLang="en-US"/>
               <a:t>第 </a:t>
             </a:r>
             <a:r>
-              <a:rPr kumimoji="1" lang="en-US" altLang="ja-JP" smtClean="0"/>
+              <a:rPr kumimoji="1" lang="en-US" altLang="ja-JP"/>
               <a:t>2 </a:t>
             </a:r>
             <a:r>
-              <a:rPr kumimoji="1" lang="ja-JP" altLang="en-US" smtClean="0"/>
+              <a:rPr kumimoji="1" lang="ja-JP" altLang="en-US"/>
               <a:t>レベル</a:t>
             </a:r>
           </a:p>
           <a:p>
             <a:pPr lvl="2"/>
             <a:r>
-              <a:rPr kumimoji="1" lang="ja-JP" altLang="en-US" smtClean="0"/>
+              <a:rPr kumimoji="1" lang="ja-JP" altLang="en-US"/>
               <a:t>第 </a:t>
             </a:r>
             <a:r>
-              <a:rPr kumimoji="1" lang="en-US" altLang="ja-JP" smtClean="0"/>
+              <a:rPr kumimoji="1" lang="en-US" altLang="ja-JP"/>
               <a:t>3 </a:t>
             </a:r>
             <a:r>
-              <a:rPr kumimoji="1" lang="ja-JP" altLang="en-US" smtClean="0"/>
+              <a:rPr kumimoji="1" lang="ja-JP" altLang="en-US"/>
               <a:t>レベル</a:t>
             </a:r>
           </a:p>
           <a:p>
             <a:pPr lvl="3"/>
             <a:r>
-              <a:rPr kumimoji="1" lang="ja-JP" altLang="en-US" smtClean="0"/>
+              <a:rPr kumimoji="1" lang="ja-JP" altLang="en-US"/>
               <a:t>第 </a:t>
             </a:r>
             <a:r>
-              <a:rPr kumimoji="1" lang="en-US" altLang="ja-JP" smtClean="0"/>
+              <a:rPr kumimoji="1" lang="en-US" altLang="ja-JP"/>
               <a:t>4 </a:t>
             </a:r>
             <a:r>
-              <a:rPr kumimoji="1" lang="ja-JP" altLang="en-US" smtClean="0"/>
+              <a:rPr kumimoji="1" lang="ja-JP" altLang="en-US"/>
               <a:t>レベル</a:t>
             </a:r>
           </a:p>
           <a:p>
             <a:pPr lvl="4"/>
             <a:r>
-              <a:rPr kumimoji="1" lang="ja-JP" altLang="en-US" smtClean="0"/>
+              <a:rPr kumimoji="1" lang="ja-JP" altLang="en-US"/>
               <a:t>第 </a:t>
             </a:r>
             <a:r>
-              <a:rPr kumimoji="1" lang="en-US" altLang="ja-JP" smtClean="0"/>
+              <a:rPr kumimoji="1" lang="en-US" altLang="ja-JP"/>
               <a:t>5 </a:t>
             </a:r>
             <a:r>
-              <a:rPr kumimoji="1" lang="ja-JP" altLang="en-US" smtClean="0"/>
+              <a:rPr kumimoji="1" lang="ja-JP" altLang="en-US"/>
               <a:t>レベル</a:t>
             </a:r>
-            <a:endParaRPr kumimoji="1" lang="ja-JP" altLang="en-US"/>
           </a:p>
         </p:txBody>
       </p:sp>
@@ -667,7 +662,7 @@
           <a:p>
             <a:fld id="{0E085FA6-3BB9-47BA-8D81-299A75D1B58A}" type="datetimeFigureOut">
               <a:rPr kumimoji="1" lang="ja-JP" altLang="en-US" smtClean="0"/>
-              <a:t>2025/7/15</a:t>
+              <a:t>2025/10/21</a:t>
             </a:fld>
             <a:endParaRPr kumimoji="1" lang="ja-JP" altLang="en-US"/>
           </a:p>
@@ -761,10 +756,9 @@
           <a:lstStyle/>
           <a:p>
             <a:r>
-              <a:rPr kumimoji="1" lang="ja-JP" altLang="en-US" smtClean="0"/>
+              <a:rPr kumimoji="1" lang="ja-JP" altLang="en-US"/>
               <a:t>マスター タイトルの書式設定</a:t>
             </a:r>
-            <a:endParaRPr kumimoji="1" lang="ja-JP" altLang="en-US"/>
           </a:p>
         </p:txBody>
       </p:sp>
@@ -785,70 +779,69 @@
           <a:p>
             <a:pPr lvl="0"/>
             <a:r>
-              <a:rPr kumimoji="1" lang="ja-JP" altLang="en-US" smtClean="0"/>
+              <a:rPr kumimoji="1" lang="ja-JP" altLang="en-US"/>
               <a:t>マスター テキストの書式設定</a:t>
             </a:r>
           </a:p>
           <a:p>
             <a:pPr lvl="1"/>
             <a:r>
-              <a:rPr kumimoji="1" lang="ja-JP" altLang="en-US" smtClean="0"/>
+              <a:rPr kumimoji="1" lang="ja-JP" altLang="en-US"/>
               <a:t>第 </a:t>
             </a:r>
             <a:r>
-              <a:rPr kumimoji="1" lang="en-US" altLang="ja-JP" smtClean="0"/>
+              <a:rPr kumimoji="1" lang="en-US" altLang="ja-JP"/>
               <a:t>2 </a:t>
             </a:r>
             <a:r>
-              <a:rPr kumimoji="1" lang="ja-JP" altLang="en-US" smtClean="0"/>
+              <a:rPr kumimoji="1" lang="ja-JP" altLang="en-US"/>
               <a:t>レベル</a:t>
             </a:r>
           </a:p>
           <a:p>
             <a:pPr lvl="2"/>
             <a:r>
-              <a:rPr kumimoji="1" lang="ja-JP" altLang="en-US" smtClean="0"/>
+              <a:rPr kumimoji="1" lang="ja-JP" altLang="en-US"/>
               <a:t>第 </a:t>
             </a:r>
             <a:r>
-              <a:rPr kumimoji="1" lang="en-US" altLang="ja-JP" smtClean="0"/>
+              <a:rPr kumimoji="1" lang="en-US" altLang="ja-JP"/>
               <a:t>3 </a:t>
             </a:r>
             <a:r>
-              <a:rPr kumimoji="1" lang="ja-JP" altLang="en-US" smtClean="0"/>
+              <a:rPr kumimoji="1" lang="ja-JP" altLang="en-US"/>
               <a:t>レベル</a:t>
             </a:r>
           </a:p>
           <a:p>
             <a:pPr lvl="3"/>
             <a:r>
-              <a:rPr kumimoji="1" lang="ja-JP" altLang="en-US" smtClean="0"/>
+              <a:rPr kumimoji="1" lang="ja-JP" altLang="en-US"/>
               <a:t>第 </a:t>
             </a:r>
             <a:r>
-              <a:rPr kumimoji="1" lang="en-US" altLang="ja-JP" smtClean="0"/>
+              <a:rPr kumimoji="1" lang="en-US" altLang="ja-JP"/>
               <a:t>4 </a:t>
             </a:r>
             <a:r>
-              <a:rPr kumimoji="1" lang="ja-JP" altLang="en-US" smtClean="0"/>
+              <a:rPr kumimoji="1" lang="ja-JP" altLang="en-US"/>
               <a:t>レベル</a:t>
             </a:r>
           </a:p>
           <a:p>
             <a:pPr lvl="4"/>
             <a:r>
-              <a:rPr kumimoji="1" lang="ja-JP" altLang="en-US" smtClean="0"/>
+              <a:rPr kumimoji="1" lang="ja-JP" altLang="en-US"/>
               <a:t>第 </a:t>
             </a:r>
             <a:r>
-              <a:rPr kumimoji="1" lang="en-US" altLang="ja-JP" smtClean="0"/>
+              <a:rPr kumimoji="1" lang="en-US" altLang="ja-JP"/>
               <a:t>5 </a:t>
             </a:r>
             <a:r>
-              <a:rPr kumimoji="1" lang="ja-JP" altLang="en-US" smtClean="0"/>
+              <a:rPr kumimoji="1" lang="ja-JP" altLang="en-US"/>
               <a:t>レベル</a:t>
             </a:r>
-            <a:endParaRPr kumimoji="1" lang="ja-JP" altLang="en-US"/>
           </a:p>
         </p:txBody>
       </p:sp>
@@ -869,7 +862,7 @@
           <a:p>
             <a:fld id="{0E085FA6-3BB9-47BA-8D81-299A75D1B58A}" type="datetimeFigureOut">
               <a:rPr kumimoji="1" lang="ja-JP" altLang="en-US" smtClean="0"/>
-              <a:t>2025/7/15</a:t>
+              <a:t>2025/10/21</a:t>
             </a:fld>
             <a:endParaRPr kumimoji="1" lang="ja-JP" altLang="en-US"/>
           </a:p>
@@ -972,10 +965,9 @@
           </a:lstStyle>
           <a:p>
             <a:r>
-              <a:rPr kumimoji="1" lang="ja-JP" altLang="en-US" smtClean="0"/>
+              <a:rPr kumimoji="1" lang="ja-JP" altLang="en-US"/>
               <a:t>マスター タイトルの書式設定</a:t>
             </a:r>
-            <a:endParaRPr kumimoji="1" lang="ja-JP" altLang="en-US"/>
           </a:p>
         </p:txBody>
       </p:sp>
@@ -1092,7 +1084,7 @@
           <a:p>
             <a:pPr lvl="0"/>
             <a:r>
-              <a:rPr kumimoji="1" lang="ja-JP" altLang="en-US" smtClean="0"/>
+              <a:rPr kumimoji="1" lang="ja-JP" altLang="en-US"/>
               <a:t>マスター テキストの書式設定</a:t>
             </a:r>
           </a:p>
@@ -1115,7 +1107,7 @@
           <a:p>
             <a:fld id="{0E085FA6-3BB9-47BA-8D81-299A75D1B58A}" type="datetimeFigureOut">
               <a:rPr kumimoji="1" lang="ja-JP" altLang="en-US" smtClean="0"/>
-              <a:t>2025/7/15</a:t>
+              <a:t>2025/10/21</a:t>
             </a:fld>
             <a:endParaRPr kumimoji="1" lang="ja-JP" altLang="en-US"/>
           </a:p>
@@ -1209,10 +1201,9 @@
           <a:lstStyle/>
           <a:p>
             <a:r>
-              <a:rPr kumimoji="1" lang="ja-JP" altLang="en-US" smtClean="0"/>
+              <a:rPr kumimoji="1" lang="ja-JP" altLang="en-US"/>
               <a:t>マスター タイトルの書式設定</a:t>
             </a:r>
-            <a:endParaRPr kumimoji="1" lang="ja-JP" altLang="en-US"/>
           </a:p>
         </p:txBody>
       </p:sp>
@@ -1238,70 +1229,69 @@
           <a:p>
             <a:pPr lvl="0"/>
             <a:r>
-              <a:rPr kumimoji="1" lang="ja-JP" altLang="en-US" smtClean="0"/>
+              <a:rPr kumimoji="1" lang="ja-JP" altLang="en-US"/>
               <a:t>マスター テキストの書式設定</a:t>
             </a:r>
           </a:p>
           <a:p>
             <a:pPr lvl="1"/>
             <a:r>
-              <a:rPr kumimoji="1" lang="ja-JP" altLang="en-US" smtClean="0"/>
+              <a:rPr kumimoji="1" lang="ja-JP" altLang="en-US"/>
               <a:t>第 </a:t>
             </a:r>
             <a:r>
-              <a:rPr kumimoji="1" lang="en-US" altLang="ja-JP" smtClean="0"/>
+              <a:rPr kumimoji="1" lang="en-US" altLang="ja-JP"/>
               <a:t>2 </a:t>
             </a:r>
             <a:r>
-              <a:rPr kumimoji="1" lang="ja-JP" altLang="en-US" smtClean="0"/>
+              <a:rPr kumimoji="1" lang="ja-JP" altLang="en-US"/>
               <a:t>レベル</a:t>
             </a:r>
           </a:p>
           <a:p>
             <a:pPr lvl="2"/>
             <a:r>
-              <a:rPr kumimoji="1" lang="ja-JP" altLang="en-US" smtClean="0"/>
+              <a:rPr kumimoji="1" lang="ja-JP" altLang="en-US"/>
               <a:t>第 </a:t>
             </a:r>
             <a:r>
-              <a:rPr kumimoji="1" lang="en-US" altLang="ja-JP" smtClean="0"/>
+              <a:rPr kumimoji="1" lang="en-US" altLang="ja-JP"/>
               <a:t>3 </a:t>
             </a:r>
             <a:r>
-              <a:rPr kumimoji="1" lang="ja-JP" altLang="en-US" smtClean="0"/>
+              <a:rPr kumimoji="1" lang="ja-JP" altLang="en-US"/>
               <a:t>レベル</a:t>
             </a:r>
           </a:p>
           <a:p>
             <a:pPr lvl="3"/>
             <a:r>
-              <a:rPr kumimoji="1" lang="ja-JP" altLang="en-US" smtClean="0"/>
+              <a:rPr kumimoji="1" lang="ja-JP" altLang="en-US"/>
               <a:t>第 </a:t>
             </a:r>
             <a:r>
-              <a:rPr kumimoji="1" lang="en-US" altLang="ja-JP" smtClean="0"/>
+              <a:rPr kumimoji="1" lang="en-US" altLang="ja-JP"/>
               <a:t>4 </a:t>
             </a:r>
             <a:r>
-              <a:rPr kumimoji="1" lang="ja-JP" altLang="en-US" smtClean="0"/>
+              <a:rPr kumimoji="1" lang="ja-JP" altLang="en-US"/>
               <a:t>レベル</a:t>
             </a:r>
           </a:p>
           <a:p>
             <a:pPr lvl="4"/>
             <a:r>
-              <a:rPr kumimoji="1" lang="ja-JP" altLang="en-US" smtClean="0"/>
+              <a:rPr kumimoji="1" lang="ja-JP" altLang="en-US"/>
               <a:t>第 </a:t>
             </a:r>
             <a:r>
-              <a:rPr kumimoji="1" lang="en-US" altLang="ja-JP" smtClean="0"/>
+              <a:rPr kumimoji="1" lang="en-US" altLang="ja-JP"/>
               <a:t>5 </a:t>
             </a:r>
             <a:r>
-              <a:rPr kumimoji="1" lang="ja-JP" altLang="en-US" smtClean="0"/>
+              <a:rPr kumimoji="1" lang="ja-JP" altLang="en-US"/>
               <a:t>レベル</a:t>
             </a:r>
-            <a:endParaRPr kumimoji="1" lang="ja-JP" altLang="en-US"/>
           </a:p>
         </p:txBody>
       </p:sp>
@@ -1327,70 +1317,69 @@
           <a:p>
             <a:pPr lvl="0"/>
             <a:r>
-              <a:rPr kumimoji="1" lang="ja-JP" altLang="en-US" smtClean="0"/>
+              <a:rPr kumimoji="1" lang="ja-JP" altLang="en-US"/>
               <a:t>マスター テキストの書式設定</a:t>
             </a:r>
           </a:p>
           <a:p>
             <a:pPr lvl="1"/>
             <a:r>
-              <a:rPr kumimoji="1" lang="ja-JP" altLang="en-US" smtClean="0"/>
+              <a:rPr kumimoji="1" lang="ja-JP" altLang="en-US"/>
               <a:t>第 </a:t>
             </a:r>
             <a:r>
-              <a:rPr kumimoji="1" lang="en-US" altLang="ja-JP" smtClean="0"/>
+              <a:rPr kumimoji="1" lang="en-US" altLang="ja-JP"/>
               <a:t>2 </a:t>
             </a:r>
             <a:r>
-              <a:rPr kumimoji="1" lang="ja-JP" altLang="en-US" smtClean="0"/>
+              <a:rPr kumimoji="1" lang="ja-JP" altLang="en-US"/>
               <a:t>レベル</a:t>
             </a:r>
           </a:p>
           <a:p>
             <a:pPr lvl="2"/>
             <a:r>
-              <a:rPr kumimoji="1" lang="ja-JP" altLang="en-US" smtClean="0"/>
+              <a:rPr kumimoji="1" lang="ja-JP" altLang="en-US"/>
               <a:t>第 </a:t>
             </a:r>
             <a:r>
-              <a:rPr kumimoji="1" lang="en-US" altLang="ja-JP" smtClean="0"/>
+              <a:rPr kumimoji="1" lang="en-US" altLang="ja-JP"/>
               <a:t>3 </a:t>
             </a:r>
             <a:r>
-              <a:rPr kumimoji="1" lang="ja-JP" altLang="en-US" smtClean="0"/>
+              <a:rPr kumimoji="1" lang="ja-JP" altLang="en-US"/>
               <a:t>レベル</a:t>
             </a:r>
           </a:p>
           <a:p>
             <a:pPr lvl="3"/>
             <a:r>
-              <a:rPr kumimoji="1" lang="ja-JP" altLang="en-US" smtClean="0"/>
+              <a:rPr kumimoji="1" lang="ja-JP" altLang="en-US"/>
               <a:t>第 </a:t>
             </a:r>
             <a:r>
-              <a:rPr kumimoji="1" lang="en-US" altLang="ja-JP" smtClean="0"/>
+              <a:rPr kumimoji="1" lang="en-US" altLang="ja-JP"/>
               <a:t>4 </a:t>
             </a:r>
             <a:r>
-              <a:rPr kumimoji="1" lang="ja-JP" altLang="en-US" smtClean="0"/>
+              <a:rPr kumimoji="1" lang="ja-JP" altLang="en-US"/>
               <a:t>レベル</a:t>
             </a:r>
           </a:p>
           <a:p>
             <a:pPr lvl="4"/>
             <a:r>
-              <a:rPr kumimoji="1" lang="ja-JP" altLang="en-US" smtClean="0"/>
+              <a:rPr kumimoji="1" lang="ja-JP" altLang="en-US"/>
               <a:t>第 </a:t>
             </a:r>
             <a:r>
-              <a:rPr kumimoji="1" lang="en-US" altLang="ja-JP" smtClean="0"/>
+              <a:rPr kumimoji="1" lang="en-US" altLang="ja-JP"/>
               <a:t>5 </a:t>
             </a:r>
             <a:r>
-              <a:rPr kumimoji="1" lang="ja-JP" altLang="en-US" smtClean="0"/>
+              <a:rPr kumimoji="1" lang="ja-JP" altLang="en-US"/>
               <a:t>レベル</a:t>
             </a:r>
-            <a:endParaRPr kumimoji="1" lang="ja-JP" altLang="en-US"/>
           </a:p>
         </p:txBody>
       </p:sp>
@@ -1411,7 +1400,7 @@
           <a:p>
             <a:fld id="{0E085FA6-3BB9-47BA-8D81-299A75D1B58A}" type="datetimeFigureOut">
               <a:rPr kumimoji="1" lang="ja-JP" altLang="en-US" smtClean="0"/>
-              <a:t>2025/7/15</a:t>
+              <a:t>2025/10/21</a:t>
             </a:fld>
             <a:endParaRPr kumimoji="1" lang="ja-JP" altLang="en-US"/>
           </a:p>
@@ -1510,10 +1499,9 @@
           <a:lstStyle/>
           <a:p>
             <a:r>
-              <a:rPr kumimoji="1" lang="ja-JP" altLang="en-US" smtClean="0"/>
+              <a:rPr kumimoji="1" lang="ja-JP" altLang="en-US"/>
               <a:t>マスター タイトルの書式設定</a:t>
             </a:r>
-            <a:endParaRPr kumimoji="1" lang="ja-JP" altLang="en-US"/>
           </a:p>
         </p:txBody>
       </p:sp>
@@ -1576,7 +1564,7 @@
           <a:p>
             <a:pPr lvl="0"/>
             <a:r>
-              <a:rPr kumimoji="1" lang="ja-JP" altLang="en-US" smtClean="0"/>
+              <a:rPr kumimoji="1" lang="ja-JP" altLang="en-US"/>
               <a:t>マスター テキストの書式設定</a:t>
             </a:r>
           </a:p>
@@ -1604,70 +1592,69 @@
           <a:p>
             <a:pPr lvl="0"/>
             <a:r>
-              <a:rPr kumimoji="1" lang="ja-JP" altLang="en-US" smtClean="0"/>
+              <a:rPr kumimoji="1" lang="ja-JP" altLang="en-US"/>
               <a:t>マスター テキストの書式設定</a:t>
             </a:r>
           </a:p>
           <a:p>
             <a:pPr lvl="1"/>
             <a:r>
-              <a:rPr kumimoji="1" lang="ja-JP" altLang="en-US" smtClean="0"/>
+              <a:rPr kumimoji="1" lang="ja-JP" altLang="en-US"/>
               <a:t>第 </a:t>
             </a:r>
             <a:r>
-              <a:rPr kumimoji="1" lang="en-US" altLang="ja-JP" smtClean="0"/>
+              <a:rPr kumimoji="1" lang="en-US" altLang="ja-JP"/>
               <a:t>2 </a:t>
             </a:r>
             <a:r>
-              <a:rPr kumimoji="1" lang="ja-JP" altLang="en-US" smtClean="0"/>
+              <a:rPr kumimoji="1" lang="ja-JP" altLang="en-US"/>
               <a:t>レベル</a:t>
             </a:r>
           </a:p>
           <a:p>
             <a:pPr lvl="2"/>
             <a:r>
-              <a:rPr kumimoji="1" lang="ja-JP" altLang="en-US" smtClean="0"/>
+              <a:rPr kumimoji="1" lang="ja-JP" altLang="en-US"/>
               <a:t>第 </a:t>
             </a:r>
             <a:r>
-              <a:rPr kumimoji="1" lang="en-US" altLang="ja-JP" smtClean="0"/>
+              <a:rPr kumimoji="1" lang="en-US" altLang="ja-JP"/>
               <a:t>3 </a:t>
             </a:r>
             <a:r>
-              <a:rPr kumimoji="1" lang="ja-JP" altLang="en-US" smtClean="0"/>
+              <a:rPr kumimoji="1" lang="ja-JP" altLang="en-US"/>
               <a:t>レベル</a:t>
             </a:r>
           </a:p>
           <a:p>
             <a:pPr lvl="3"/>
             <a:r>
-              <a:rPr kumimoji="1" lang="ja-JP" altLang="en-US" smtClean="0"/>
+              <a:rPr kumimoji="1" lang="ja-JP" altLang="en-US"/>
               <a:t>第 </a:t>
             </a:r>
             <a:r>
-              <a:rPr kumimoji="1" lang="en-US" altLang="ja-JP" smtClean="0"/>
+              <a:rPr kumimoji="1" lang="en-US" altLang="ja-JP"/>
               <a:t>4 </a:t>
             </a:r>
             <a:r>
-              <a:rPr kumimoji="1" lang="ja-JP" altLang="en-US" smtClean="0"/>
+              <a:rPr kumimoji="1" lang="ja-JP" altLang="en-US"/>
               <a:t>レベル</a:t>
             </a:r>
           </a:p>
           <a:p>
             <a:pPr lvl="4"/>
             <a:r>
-              <a:rPr kumimoji="1" lang="ja-JP" altLang="en-US" smtClean="0"/>
+              <a:rPr kumimoji="1" lang="ja-JP" altLang="en-US"/>
               <a:t>第 </a:t>
             </a:r>
             <a:r>
-              <a:rPr kumimoji="1" lang="en-US" altLang="ja-JP" smtClean="0"/>
+              <a:rPr kumimoji="1" lang="en-US" altLang="ja-JP"/>
               <a:t>5 </a:t>
             </a:r>
             <a:r>
-              <a:rPr kumimoji="1" lang="ja-JP" altLang="en-US" smtClean="0"/>
+              <a:rPr kumimoji="1" lang="ja-JP" altLang="en-US"/>
               <a:t>レベル</a:t>
             </a:r>
-            <a:endParaRPr kumimoji="1" lang="ja-JP" altLang="en-US"/>
           </a:p>
         </p:txBody>
       </p:sp>
@@ -1730,7 +1717,7 @@
           <a:p>
             <a:pPr lvl="0"/>
             <a:r>
-              <a:rPr kumimoji="1" lang="ja-JP" altLang="en-US" smtClean="0"/>
+              <a:rPr kumimoji="1" lang="ja-JP" altLang="en-US"/>
               <a:t>マスター テキストの書式設定</a:t>
             </a:r>
           </a:p>
@@ -1758,70 +1745,69 @@
           <a:p>
             <a:pPr lvl="0"/>
             <a:r>
-              <a:rPr kumimoji="1" lang="ja-JP" altLang="en-US" smtClean="0"/>
+              <a:rPr kumimoji="1" lang="ja-JP" altLang="en-US"/>
               <a:t>マスター テキストの書式設定</a:t>
             </a:r>
           </a:p>
           <a:p>
             <a:pPr lvl="1"/>
             <a:r>
-              <a:rPr kumimoji="1" lang="ja-JP" altLang="en-US" smtClean="0"/>
+              <a:rPr kumimoji="1" lang="ja-JP" altLang="en-US"/>
               <a:t>第 </a:t>
             </a:r>
             <a:r>
-              <a:rPr kumimoji="1" lang="en-US" altLang="ja-JP" smtClean="0"/>
+              <a:rPr kumimoji="1" lang="en-US" altLang="ja-JP"/>
               <a:t>2 </a:t>
             </a:r>
             <a:r>
-              <a:rPr kumimoji="1" lang="ja-JP" altLang="en-US" smtClean="0"/>
+              <a:rPr kumimoji="1" lang="ja-JP" altLang="en-US"/>
               <a:t>レベル</a:t>
             </a:r>
           </a:p>
           <a:p>
             <a:pPr lvl="2"/>
             <a:r>
-              <a:rPr kumimoji="1" lang="ja-JP" altLang="en-US" smtClean="0"/>
+              <a:rPr kumimoji="1" lang="ja-JP" altLang="en-US"/>
               <a:t>第 </a:t>
             </a:r>
             <a:r>
-              <a:rPr kumimoji="1" lang="en-US" altLang="ja-JP" smtClean="0"/>
+              <a:rPr kumimoji="1" lang="en-US" altLang="ja-JP"/>
               <a:t>3 </a:t>
             </a:r>
             <a:r>
-              <a:rPr kumimoji="1" lang="ja-JP" altLang="en-US" smtClean="0"/>
+              <a:rPr kumimoji="1" lang="ja-JP" altLang="en-US"/>
               <a:t>レベル</a:t>
             </a:r>
           </a:p>
           <a:p>
             <a:pPr lvl="3"/>
             <a:r>
-              <a:rPr kumimoji="1" lang="ja-JP" altLang="en-US" smtClean="0"/>
+              <a:rPr kumimoji="1" lang="ja-JP" altLang="en-US"/>
               <a:t>第 </a:t>
             </a:r>
             <a:r>
-              <a:rPr kumimoji="1" lang="en-US" altLang="ja-JP" smtClean="0"/>
+              <a:rPr kumimoji="1" lang="en-US" altLang="ja-JP"/>
               <a:t>4 </a:t>
             </a:r>
             <a:r>
-              <a:rPr kumimoji="1" lang="ja-JP" altLang="en-US" smtClean="0"/>
+              <a:rPr kumimoji="1" lang="ja-JP" altLang="en-US"/>
               <a:t>レベル</a:t>
             </a:r>
           </a:p>
           <a:p>
             <a:pPr lvl="4"/>
             <a:r>
-              <a:rPr kumimoji="1" lang="ja-JP" altLang="en-US" smtClean="0"/>
+              <a:rPr kumimoji="1" lang="ja-JP" altLang="en-US"/>
               <a:t>第 </a:t>
             </a:r>
             <a:r>
-              <a:rPr kumimoji="1" lang="en-US" altLang="ja-JP" smtClean="0"/>
+              <a:rPr kumimoji="1" lang="en-US" altLang="ja-JP"/>
               <a:t>5 </a:t>
             </a:r>
             <a:r>
-              <a:rPr kumimoji="1" lang="ja-JP" altLang="en-US" smtClean="0"/>
+              <a:rPr kumimoji="1" lang="ja-JP" altLang="en-US"/>
               <a:t>レベル</a:t>
             </a:r>
-            <a:endParaRPr kumimoji="1" lang="ja-JP" altLang="en-US"/>
           </a:p>
         </p:txBody>
       </p:sp>
@@ -1842,7 +1828,7 @@
           <a:p>
             <a:fld id="{0E085FA6-3BB9-47BA-8D81-299A75D1B58A}" type="datetimeFigureOut">
               <a:rPr kumimoji="1" lang="ja-JP" altLang="en-US" smtClean="0"/>
-              <a:t>2025/7/15</a:t>
+              <a:t>2025/10/21</a:t>
             </a:fld>
             <a:endParaRPr kumimoji="1" lang="ja-JP" altLang="en-US"/>
           </a:p>
@@ -1936,10 +1922,9 @@
           <a:lstStyle/>
           <a:p>
             <a:r>
-              <a:rPr kumimoji="1" lang="ja-JP" altLang="en-US" smtClean="0"/>
+              <a:rPr kumimoji="1" lang="ja-JP" altLang="en-US"/>
               <a:t>マスター タイトルの書式設定</a:t>
             </a:r>
-            <a:endParaRPr kumimoji="1" lang="ja-JP" altLang="en-US"/>
           </a:p>
         </p:txBody>
       </p:sp>
@@ -1960,7 +1945,7 @@
           <a:p>
             <a:fld id="{0E085FA6-3BB9-47BA-8D81-299A75D1B58A}" type="datetimeFigureOut">
               <a:rPr kumimoji="1" lang="ja-JP" altLang="en-US" smtClean="0"/>
-              <a:t>2025/7/15</a:t>
+              <a:t>2025/10/21</a:t>
             </a:fld>
             <a:endParaRPr kumimoji="1" lang="ja-JP" altLang="en-US"/>
           </a:p>
@@ -2055,7 +2040,7 @@
           <a:p>
             <a:fld id="{0E085FA6-3BB9-47BA-8D81-299A75D1B58A}" type="datetimeFigureOut">
               <a:rPr kumimoji="1" lang="ja-JP" altLang="en-US" smtClean="0"/>
-              <a:t>2025/7/15</a:t>
+              <a:t>2025/10/21</a:t>
             </a:fld>
             <a:endParaRPr kumimoji="1" lang="ja-JP" altLang="en-US"/>
           </a:p>
@@ -2158,10 +2143,9 @@
           </a:lstStyle>
           <a:p>
             <a:r>
-              <a:rPr kumimoji="1" lang="ja-JP" altLang="en-US" smtClean="0"/>
+              <a:rPr kumimoji="1" lang="ja-JP" altLang="en-US"/>
               <a:t>マスター タイトルの書式設定</a:t>
             </a:r>
-            <a:endParaRPr kumimoji="1" lang="ja-JP" altLang="en-US"/>
           </a:p>
         </p:txBody>
       </p:sp>
@@ -2215,70 +2199,69 @@
           <a:p>
             <a:pPr lvl="0"/>
             <a:r>
-              <a:rPr kumimoji="1" lang="ja-JP" altLang="en-US" smtClean="0"/>
+              <a:rPr kumimoji="1" lang="ja-JP" altLang="en-US"/>
               <a:t>マスター テキストの書式設定</a:t>
             </a:r>
           </a:p>
           <a:p>
             <a:pPr lvl="1"/>
             <a:r>
-              <a:rPr kumimoji="1" lang="ja-JP" altLang="en-US" smtClean="0"/>
+              <a:rPr kumimoji="1" lang="ja-JP" altLang="en-US"/>
               <a:t>第 </a:t>
             </a:r>
             <a:r>
-              <a:rPr kumimoji="1" lang="en-US" altLang="ja-JP" smtClean="0"/>
+              <a:rPr kumimoji="1" lang="en-US" altLang="ja-JP"/>
               <a:t>2 </a:t>
             </a:r>
             <a:r>
-              <a:rPr kumimoji="1" lang="ja-JP" altLang="en-US" smtClean="0"/>
+              <a:rPr kumimoji="1" lang="ja-JP" altLang="en-US"/>
               <a:t>レベル</a:t>
             </a:r>
           </a:p>
           <a:p>
             <a:pPr lvl="2"/>
             <a:r>
-              <a:rPr kumimoji="1" lang="ja-JP" altLang="en-US" smtClean="0"/>
+              <a:rPr kumimoji="1" lang="ja-JP" altLang="en-US"/>
               <a:t>第 </a:t>
             </a:r>
             <a:r>
-              <a:rPr kumimoji="1" lang="en-US" altLang="ja-JP" smtClean="0"/>
+              <a:rPr kumimoji="1" lang="en-US" altLang="ja-JP"/>
               <a:t>3 </a:t>
             </a:r>
             <a:r>
-              <a:rPr kumimoji="1" lang="ja-JP" altLang="en-US" smtClean="0"/>
+              <a:rPr kumimoji="1" lang="ja-JP" altLang="en-US"/>
               <a:t>レベル</a:t>
             </a:r>
           </a:p>
           <a:p>
             <a:pPr lvl="3"/>
             <a:r>
-              <a:rPr kumimoji="1" lang="ja-JP" altLang="en-US" smtClean="0"/>
+              <a:rPr kumimoji="1" lang="ja-JP" altLang="en-US"/>
               <a:t>第 </a:t>
             </a:r>
             <a:r>
-              <a:rPr kumimoji="1" lang="en-US" altLang="ja-JP" smtClean="0"/>
+              <a:rPr kumimoji="1" lang="en-US" altLang="ja-JP"/>
               <a:t>4 </a:t>
             </a:r>
             <a:r>
-              <a:rPr kumimoji="1" lang="ja-JP" altLang="en-US" smtClean="0"/>
+              <a:rPr kumimoji="1" lang="ja-JP" altLang="en-US"/>
               <a:t>レベル</a:t>
             </a:r>
           </a:p>
           <a:p>
             <a:pPr lvl="4"/>
             <a:r>
-              <a:rPr kumimoji="1" lang="ja-JP" altLang="en-US" smtClean="0"/>
+              <a:rPr kumimoji="1" lang="ja-JP" altLang="en-US"/>
               <a:t>第 </a:t>
             </a:r>
             <a:r>
-              <a:rPr kumimoji="1" lang="en-US" altLang="ja-JP" smtClean="0"/>
+              <a:rPr kumimoji="1" lang="en-US" altLang="ja-JP"/>
               <a:t>5 </a:t>
             </a:r>
             <a:r>
-              <a:rPr kumimoji="1" lang="ja-JP" altLang="en-US" smtClean="0"/>
+              <a:rPr kumimoji="1" lang="ja-JP" altLang="en-US"/>
               <a:t>レベル</a:t>
             </a:r>
-            <a:endParaRPr kumimoji="1" lang="ja-JP" altLang="en-US"/>
           </a:p>
         </p:txBody>
       </p:sp>
@@ -2341,7 +2324,7 @@
           <a:p>
             <a:pPr lvl="0"/>
             <a:r>
-              <a:rPr kumimoji="1" lang="ja-JP" altLang="en-US" smtClean="0"/>
+              <a:rPr kumimoji="1" lang="ja-JP" altLang="en-US"/>
               <a:t>マスター テキストの書式設定</a:t>
             </a:r>
           </a:p>
@@ -2364,7 +2347,7 @@
           <a:p>
             <a:fld id="{0E085FA6-3BB9-47BA-8D81-299A75D1B58A}" type="datetimeFigureOut">
               <a:rPr kumimoji="1" lang="ja-JP" altLang="en-US" smtClean="0"/>
-              <a:t>2025/7/15</a:t>
+              <a:t>2025/10/21</a:t>
             </a:fld>
             <a:endParaRPr kumimoji="1" lang="ja-JP" altLang="en-US"/>
           </a:p>
@@ -2467,10 +2450,9 @@
           </a:lstStyle>
           <a:p>
             <a:r>
-              <a:rPr kumimoji="1" lang="ja-JP" altLang="en-US" smtClean="0"/>
+              <a:rPr kumimoji="1" lang="ja-JP" altLang="en-US"/>
               <a:t>マスター タイトルの書式設定</a:t>
             </a:r>
-            <a:endParaRPr kumimoji="1" lang="ja-JP" altLang="en-US"/>
           </a:p>
         </p:txBody>
       </p:sp>
@@ -2594,7 +2576,7 @@
           <a:p>
             <a:pPr lvl="0"/>
             <a:r>
-              <a:rPr kumimoji="1" lang="ja-JP" altLang="en-US" smtClean="0"/>
+              <a:rPr kumimoji="1" lang="ja-JP" altLang="en-US"/>
               <a:t>マスター テキストの書式設定</a:t>
             </a:r>
           </a:p>
@@ -2617,7 +2599,7 @@
           <a:p>
             <a:fld id="{0E085FA6-3BB9-47BA-8D81-299A75D1B58A}" type="datetimeFigureOut">
               <a:rPr kumimoji="1" lang="ja-JP" altLang="en-US" smtClean="0"/>
-              <a:t>2025/7/15</a:t>
+              <a:t>2025/10/21</a:t>
             </a:fld>
             <a:endParaRPr kumimoji="1" lang="ja-JP" altLang="en-US"/>
           </a:p>
@@ -2726,10 +2708,9 @@
           <a:lstStyle/>
           <a:p>
             <a:r>
-              <a:rPr kumimoji="1" lang="ja-JP" altLang="en-US" smtClean="0"/>
+              <a:rPr kumimoji="1" lang="ja-JP" altLang="en-US"/>
               <a:t>マスター タイトルの書式設定</a:t>
             </a:r>
-            <a:endParaRPr kumimoji="1" lang="ja-JP" altLang="en-US"/>
           </a:p>
         </p:txBody>
       </p:sp>
@@ -2760,70 +2741,69 @@
           <a:p>
             <a:pPr lvl="0"/>
             <a:r>
-              <a:rPr kumimoji="1" lang="ja-JP" altLang="en-US" smtClean="0"/>
+              <a:rPr kumimoji="1" lang="ja-JP" altLang="en-US"/>
               <a:t>マスター テキストの書式設定</a:t>
             </a:r>
           </a:p>
           <a:p>
             <a:pPr lvl="1"/>
             <a:r>
-              <a:rPr kumimoji="1" lang="ja-JP" altLang="en-US" smtClean="0"/>
+              <a:rPr kumimoji="1" lang="ja-JP" altLang="en-US"/>
               <a:t>第 </a:t>
             </a:r>
             <a:r>
-              <a:rPr kumimoji="1" lang="en-US" altLang="ja-JP" smtClean="0"/>
+              <a:rPr kumimoji="1" lang="en-US" altLang="ja-JP"/>
               <a:t>2 </a:t>
             </a:r>
             <a:r>
-              <a:rPr kumimoji="1" lang="ja-JP" altLang="en-US" smtClean="0"/>
+              <a:rPr kumimoji="1" lang="ja-JP" altLang="en-US"/>
               <a:t>レベル</a:t>
             </a:r>
           </a:p>
           <a:p>
             <a:pPr lvl="2"/>
             <a:r>
-              <a:rPr kumimoji="1" lang="ja-JP" altLang="en-US" smtClean="0"/>
+              <a:rPr kumimoji="1" lang="ja-JP" altLang="en-US"/>
               <a:t>第 </a:t>
             </a:r>
             <a:r>
-              <a:rPr kumimoji="1" lang="en-US" altLang="ja-JP" smtClean="0"/>
+              <a:rPr kumimoji="1" lang="en-US" altLang="ja-JP"/>
               <a:t>3 </a:t>
             </a:r>
             <a:r>
-              <a:rPr kumimoji="1" lang="ja-JP" altLang="en-US" smtClean="0"/>
+              <a:rPr kumimoji="1" lang="ja-JP" altLang="en-US"/>
               <a:t>レベル</a:t>
             </a:r>
           </a:p>
           <a:p>
             <a:pPr lvl="3"/>
             <a:r>
-              <a:rPr kumimoji="1" lang="ja-JP" altLang="en-US" smtClean="0"/>
+              <a:rPr kumimoji="1" lang="ja-JP" altLang="en-US"/>
               <a:t>第 </a:t>
             </a:r>
             <a:r>
-              <a:rPr kumimoji="1" lang="en-US" altLang="ja-JP" smtClean="0"/>
+              <a:rPr kumimoji="1" lang="en-US" altLang="ja-JP"/>
               <a:t>4 </a:t>
             </a:r>
             <a:r>
-              <a:rPr kumimoji="1" lang="ja-JP" altLang="en-US" smtClean="0"/>
+              <a:rPr kumimoji="1" lang="ja-JP" altLang="en-US"/>
               <a:t>レベル</a:t>
             </a:r>
           </a:p>
           <a:p>
             <a:pPr lvl="4"/>
             <a:r>
-              <a:rPr kumimoji="1" lang="ja-JP" altLang="en-US" smtClean="0"/>
+              <a:rPr kumimoji="1" lang="ja-JP" altLang="en-US"/>
               <a:t>第 </a:t>
             </a:r>
             <a:r>
-              <a:rPr kumimoji="1" lang="en-US" altLang="ja-JP" smtClean="0"/>
+              <a:rPr kumimoji="1" lang="en-US" altLang="ja-JP"/>
               <a:t>5 </a:t>
             </a:r>
             <a:r>
-              <a:rPr kumimoji="1" lang="ja-JP" altLang="en-US" smtClean="0"/>
+              <a:rPr kumimoji="1" lang="ja-JP" altLang="en-US"/>
               <a:t>レベル</a:t>
             </a:r>
-            <a:endParaRPr kumimoji="1" lang="ja-JP" altLang="en-US"/>
           </a:p>
         </p:txBody>
       </p:sp>
@@ -2862,7 +2842,7 @@
           <a:p>
             <a:fld id="{0E085FA6-3BB9-47BA-8D81-299A75D1B58A}" type="datetimeFigureOut">
               <a:rPr kumimoji="1" lang="ja-JP" altLang="en-US" smtClean="0"/>
-              <a:t>2025/7/15</a:t>
+              <a:t>2025/10/21</a:t>
             </a:fld>
             <a:endParaRPr kumimoji="1" lang="ja-JP" altLang="en-US"/>
           </a:p>
@@ -3712,7 +3692,7 @@
         </p:nvSpPr>
         <p:spPr>
           <a:xfrm>
-            <a:off x="5386904" y="566102"/>
+            <a:off x="8255702" y="3818113"/>
             <a:ext cx="2152505" cy="2152505"/>
           </a:xfrm>
           <a:prstGeom prst="rect">
@@ -3816,7 +3796,7 @@
         </p:blipFill>
         <p:spPr>
           <a:xfrm>
-            <a:off x="5643560" y="1004279"/>
+            <a:off x="8512358" y="4256290"/>
             <a:ext cx="1639193" cy="1276150"/>
           </a:xfrm>
           <a:prstGeom prst="rect">
@@ -3875,6 +3855,114 @@
           </a:prstGeom>
         </p:spPr>
       </p:pic>
+      <p:sp>
+        <p:nvSpPr>
+          <p:cNvPr id="6" name="正方形/長方形 5">
+            <a:extLst>
+              <a:ext uri="{FF2B5EF4-FFF2-40B4-BE49-F238E27FC236}">
+                <a16:creationId xmlns:a16="http://schemas.microsoft.com/office/drawing/2014/main" id="{43126AA0-FD02-0A70-48CB-A3EAFC6E4A86}"/>
+              </a:ext>
+            </a:extLst>
+          </p:cNvPr>
+          <p:cNvSpPr/>
+          <p:nvPr/>
+        </p:nvSpPr>
+        <p:spPr>
+          <a:xfrm>
+            <a:off x="8255702" y="566102"/>
+            <a:ext cx="2152505" cy="2152505"/>
+          </a:xfrm>
+          <a:prstGeom prst="rect">
+            <a:avLst/>
+          </a:prstGeom>
+          <a:solidFill>
+            <a:schemeClr val="bg1"/>
+          </a:solidFill>
+          <a:ln>
+            <a:solidFill>
+              <a:schemeClr val="tx1"/>
+            </a:solidFill>
+          </a:ln>
+        </p:spPr>
+        <p:style>
+          <a:lnRef idx="2">
+            <a:schemeClr val="accent1">
+              <a:shade val="50000"/>
+            </a:schemeClr>
+          </a:lnRef>
+          <a:fillRef idx="1">
+            <a:schemeClr val="accent1"/>
+          </a:fillRef>
+          <a:effectRef idx="0">
+            <a:schemeClr val="accent1"/>
+          </a:effectRef>
+          <a:fontRef idx="minor">
+            <a:schemeClr val="lt1"/>
+          </a:fontRef>
+        </p:style>
+        <p:txBody>
+          <a:bodyPr rtlCol="0" anchor="ctr"/>
+          <a:lstStyle/>
+          <a:p>
+            <a:pPr algn="ctr"/>
+            <a:endParaRPr kumimoji="1" lang="ja-JP" altLang="en-US"/>
+          </a:p>
+        </p:txBody>
+      </p:sp>
+      <p:sp>
+        <p:nvSpPr>
+          <p:cNvPr id="8" name="正方形/長方形 7">
+            <a:extLst>
+              <a:ext uri="{FF2B5EF4-FFF2-40B4-BE49-F238E27FC236}">
+                <a16:creationId xmlns:a16="http://schemas.microsoft.com/office/drawing/2014/main" id="{44FCFE19-D45E-5626-A338-B64D550C6890}"/>
+              </a:ext>
+            </a:extLst>
+          </p:cNvPr>
+          <p:cNvSpPr/>
+          <p:nvPr/>
+        </p:nvSpPr>
+        <p:spPr>
+          <a:xfrm>
+            <a:off x="5393232" y="568839"/>
+            <a:ext cx="2152505" cy="2152505"/>
+          </a:xfrm>
+          <a:prstGeom prst="rect">
+            <a:avLst/>
+          </a:prstGeom>
+          <a:solidFill>
+            <a:schemeClr val="bg1"/>
+          </a:solidFill>
+          <a:ln>
+            <a:solidFill>
+              <a:schemeClr val="tx1"/>
+            </a:solidFill>
+          </a:ln>
+        </p:spPr>
+        <p:style>
+          <a:lnRef idx="2">
+            <a:schemeClr val="accent1">
+              <a:shade val="50000"/>
+            </a:schemeClr>
+          </a:lnRef>
+          <a:fillRef idx="1">
+            <a:schemeClr val="accent1"/>
+          </a:fillRef>
+          <a:effectRef idx="0">
+            <a:schemeClr val="accent1"/>
+          </a:effectRef>
+          <a:fontRef idx="minor">
+            <a:schemeClr val="lt1"/>
+          </a:fontRef>
+        </p:style>
+        <p:txBody>
+          <a:bodyPr rtlCol="0" anchor="ctr"/>
+          <a:lstStyle/>
+          <a:p>
+            <a:pPr algn="ctr"/>
+            <a:endParaRPr kumimoji="1" lang="ja-JP" altLang="en-US"/>
+          </a:p>
+        </p:txBody>
+      </p:sp>
     </p:spTree>
     <p:extLst>
       <p:ext uri="{BB962C8B-B14F-4D97-AF65-F5344CB8AC3E}">
@@ -4913,6 +5001,2135 @@
     <p:extLst>
       <p:ext uri="{BB962C8B-B14F-4D97-AF65-F5344CB8AC3E}">
         <p14:creationId xmlns:p14="http://schemas.microsoft.com/office/powerpoint/2010/main" val="3124221191"/>
+      </p:ext>
+    </p:extLst>
+  </p:cSld>
+  <p:clrMapOvr>
+    <a:masterClrMapping/>
+  </p:clrMapOvr>
+</p:sld>
+</file>
+
+<file path=ppt/slides/slide12.xml><?xml version="1.0" encoding="utf-8"?>
+<p:sld xmlns:a="http://schemas.openxmlformats.org/drawingml/2006/main" xmlns:r="http://schemas.openxmlformats.org/officeDocument/2006/relationships" xmlns:p="http://schemas.openxmlformats.org/presentationml/2006/main">
+  <p:cSld>
+    <p:spTree>
+      <p:nvGrpSpPr>
+        <p:cNvPr id="1" name=""/>
+        <p:cNvGrpSpPr/>
+        <p:nvPr/>
+      </p:nvGrpSpPr>
+      <p:grpSpPr>
+        <a:xfrm>
+          <a:off x="0" y="0"/>
+          <a:ext cx="0" cy="0"/>
+          <a:chOff x="0" y="0"/>
+          <a:chExt cx="0" cy="0"/>
+        </a:xfrm>
+      </p:grpSpPr>
+      <p:sp>
+        <p:nvSpPr>
+          <p:cNvPr id="3" name="台形 2">
+            <a:extLst>
+              <a:ext uri="{FF2B5EF4-FFF2-40B4-BE49-F238E27FC236}">
+                <a16:creationId xmlns:a16="http://schemas.microsoft.com/office/drawing/2014/main" id="{08D3D63A-C739-C286-D91E-CF3250881958}"/>
+              </a:ext>
+            </a:extLst>
+          </p:cNvPr>
+          <p:cNvSpPr/>
+          <p:nvPr/>
+        </p:nvSpPr>
+        <p:spPr>
+          <a:xfrm>
+            <a:off x="2808513" y="732453"/>
+            <a:ext cx="5887617" cy="3284375"/>
+          </a:xfrm>
+          <a:prstGeom prst="trapezoid">
+            <a:avLst>
+              <a:gd name="adj" fmla="val 14489"/>
+            </a:avLst>
+          </a:prstGeom>
+          <a:solidFill>
+            <a:srgbClr val="686868"/>
+          </a:solidFill>
+          <a:ln>
+            <a:noFill/>
+          </a:ln>
+          <a:effectLst>
+            <a:innerShdw blurRad="508000" dist="266700" dir="6600000">
+              <a:prstClr val="black">
+                <a:alpha val="50000"/>
+              </a:prstClr>
+            </a:innerShdw>
+          </a:effectLst>
+        </p:spPr>
+        <p:style>
+          <a:lnRef idx="2">
+            <a:schemeClr val="accent1">
+              <a:shade val="15000"/>
+            </a:schemeClr>
+          </a:lnRef>
+          <a:fillRef idx="1">
+            <a:schemeClr val="accent1"/>
+          </a:fillRef>
+          <a:effectRef idx="0">
+            <a:schemeClr val="accent1"/>
+          </a:effectRef>
+          <a:fontRef idx="minor">
+            <a:schemeClr val="lt1"/>
+          </a:fontRef>
+        </p:style>
+        <p:txBody>
+          <a:bodyPr rtlCol="0" anchor="ctr"/>
+          <a:lstStyle/>
+          <a:p>
+            <a:pPr algn="ctr"/>
+            <a:endParaRPr kumimoji="1" lang="ja-JP" altLang="en-US"/>
+          </a:p>
+        </p:txBody>
+      </p:sp>
+      <p:sp>
+        <p:nvSpPr>
+          <p:cNvPr id="4" name="台形 3">
+            <a:extLst>
+              <a:ext uri="{FF2B5EF4-FFF2-40B4-BE49-F238E27FC236}">
+                <a16:creationId xmlns:a16="http://schemas.microsoft.com/office/drawing/2014/main" id="{A557E8F4-6540-F0A5-101F-5E585E0415BE}"/>
+              </a:ext>
+            </a:extLst>
+          </p:cNvPr>
+          <p:cNvSpPr/>
+          <p:nvPr/>
+        </p:nvSpPr>
+        <p:spPr>
+          <a:xfrm>
+            <a:off x="3237718" y="1017037"/>
+            <a:ext cx="5038531" cy="2565918"/>
+          </a:xfrm>
+          <a:prstGeom prst="trapezoid">
+            <a:avLst>
+              <a:gd name="adj" fmla="val 14489"/>
+            </a:avLst>
+          </a:prstGeom>
+          <a:solidFill>
+            <a:schemeClr val="bg2">
+              <a:lumMod val="75000"/>
+            </a:schemeClr>
+          </a:solidFill>
+          <a:ln>
+            <a:noFill/>
+          </a:ln>
+          <a:effectLst>
+            <a:innerShdw blurRad="1270000" dist="800100" dir="5400000">
+              <a:prstClr val="black">
+                <a:alpha val="50000"/>
+              </a:prstClr>
+            </a:innerShdw>
+          </a:effectLst>
+        </p:spPr>
+        <p:style>
+          <a:lnRef idx="2">
+            <a:schemeClr val="accent1">
+              <a:shade val="15000"/>
+            </a:schemeClr>
+          </a:lnRef>
+          <a:fillRef idx="1">
+            <a:schemeClr val="accent1"/>
+          </a:fillRef>
+          <a:effectRef idx="0">
+            <a:schemeClr val="accent1"/>
+          </a:effectRef>
+          <a:fontRef idx="minor">
+            <a:schemeClr val="lt1"/>
+          </a:fontRef>
+        </p:style>
+        <p:txBody>
+          <a:bodyPr rtlCol="0" anchor="ctr"/>
+          <a:lstStyle/>
+          <a:p>
+            <a:pPr algn="ctr"/>
+            <a:endParaRPr kumimoji="1" lang="ja-JP" altLang="en-US"/>
+          </a:p>
+        </p:txBody>
+      </p:sp>
+      <p:sp>
+        <p:nvSpPr>
+          <p:cNvPr id="31" name="台形 30">
+            <a:extLst>
+              <a:ext uri="{FF2B5EF4-FFF2-40B4-BE49-F238E27FC236}">
+                <a16:creationId xmlns:a16="http://schemas.microsoft.com/office/drawing/2014/main" id="{188D50D3-F18E-BDE2-C441-CEC31CFAA71D}"/>
+              </a:ext>
+            </a:extLst>
+          </p:cNvPr>
+          <p:cNvSpPr/>
+          <p:nvPr/>
+        </p:nvSpPr>
+        <p:spPr>
+          <a:xfrm rot="10800000">
+            <a:off x="3601615" y="1017038"/>
+            <a:ext cx="4301414" cy="2565918"/>
+          </a:xfrm>
+          <a:prstGeom prst="trapezoid">
+            <a:avLst>
+              <a:gd name="adj" fmla="val 6489"/>
+            </a:avLst>
+          </a:prstGeom>
+          <a:solidFill>
+            <a:schemeClr val="accent3">
+              <a:lumMod val="40000"/>
+              <a:lumOff val="60000"/>
+            </a:schemeClr>
+          </a:solidFill>
+          <a:ln>
+            <a:noFill/>
+          </a:ln>
+          <a:effectLst>
+            <a:innerShdw blurRad="1270000" dist="800100" dir="16200000">
+              <a:prstClr val="black">
+                <a:alpha val="50000"/>
+              </a:prstClr>
+            </a:innerShdw>
+          </a:effectLst>
+        </p:spPr>
+        <p:style>
+          <a:lnRef idx="2">
+            <a:schemeClr val="accent1">
+              <a:shade val="15000"/>
+            </a:schemeClr>
+          </a:lnRef>
+          <a:fillRef idx="1">
+            <a:schemeClr val="accent1"/>
+          </a:fillRef>
+          <a:effectRef idx="0">
+            <a:schemeClr val="accent1"/>
+          </a:effectRef>
+          <a:fontRef idx="minor">
+            <a:schemeClr val="lt1"/>
+          </a:fontRef>
+        </p:style>
+        <p:txBody>
+          <a:bodyPr rtlCol="0" anchor="ctr"/>
+          <a:lstStyle/>
+          <a:p>
+            <a:pPr algn="ctr"/>
+            <a:endParaRPr kumimoji="1" lang="ja-JP" altLang="en-US"/>
+          </a:p>
+        </p:txBody>
+      </p:sp>
+      <p:sp>
+        <p:nvSpPr>
+          <p:cNvPr id="32" name="円柱 31">
+            <a:extLst>
+              <a:ext uri="{FF2B5EF4-FFF2-40B4-BE49-F238E27FC236}">
+                <a16:creationId xmlns:a16="http://schemas.microsoft.com/office/drawing/2014/main" id="{7159A364-7C69-234B-80E0-4137A411718B}"/>
+              </a:ext>
+            </a:extLst>
+          </p:cNvPr>
+          <p:cNvSpPr/>
+          <p:nvPr/>
+        </p:nvSpPr>
+        <p:spPr>
+          <a:xfrm rot="21328937">
+            <a:off x="4685950" y="867954"/>
+            <a:ext cx="260714" cy="2864084"/>
+          </a:xfrm>
+          <a:prstGeom prst="can">
+            <a:avLst>
+              <a:gd name="adj" fmla="val 49548"/>
+            </a:avLst>
+          </a:prstGeom>
+          <a:solidFill>
+            <a:schemeClr val="accent2">
+              <a:lumMod val="75000"/>
+            </a:schemeClr>
+          </a:solidFill>
+          <a:ln>
+            <a:noFill/>
+          </a:ln>
+          <a:effectLst>
+            <a:innerShdw blurRad="165100" dist="165100" dir="3600000">
+              <a:prstClr val="black">
+                <a:alpha val="50000"/>
+              </a:prstClr>
+            </a:innerShdw>
+          </a:effectLst>
+        </p:spPr>
+        <p:style>
+          <a:lnRef idx="2">
+            <a:schemeClr val="accent1">
+              <a:shade val="15000"/>
+            </a:schemeClr>
+          </a:lnRef>
+          <a:fillRef idx="1">
+            <a:schemeClr val="accent1"/>
+          </a:fillRef>
+          <a:effectRef idx="0">
+            <a:schemeClr val="accent1"/>
+          </a:effectRef>
+          <a:fontRef idx="minor">
+            <a:schemeClr val="lt1"/>
+          </a:fontRef>
+        </p:style>
+        <p:txBody>
+          <a:bodyPr rtlCol="0" anchor="ctr"/>
+          <a:lstStyle/>
+          <a:p>
+            <a:pPr algn="ctr"/>
+            <a:endParaRPr kumimoji="1" lang="ja-JP" altLang="en-US"/>
+          </a:p>
+        </p:txBody>
+      </p:sp>
+      <p:sp>
+        <p:nvSpPr>
+          <p:cNvPr id="34" name="円柱 33">
+            <a:extLst>
+              <a:ext uri="{FF2B5EF4-FFF2-40B4-BE49-F238E27FC236}">
+                <a16:creationId xmlns:a16="http://schemas.microsoft.com/office/drawing/2014/main" id="{B41EA549-604B-EFAE-9D75-6CF23124129E}"/>
+              </a:ext>
+            </a:extLst>
+          </p:cNvPr>
+          <p:cNvSpPr/>
+          <p:nvPr/>
+        </p:nvSpPr>
+        <p:spPr>
+          <a:xfrm rot="5400000">
+            <a:off x="5664858" y="494707"/>
+            <a:ext cx="156898" cy="1893504"/>
+          </a:xfrm>
+          <a:prstGeom prst="can">
+            <a:avLst>
+              <a:gd name="adj" fmla="val 49548"/>
+            </a:avLst>
+          </a:prstGeom>
+          <a:solidFill>
+            <a:schemeClr val="accent2">
+              <a:lumMod val="75000"/>
+            </a:schemeClr>
+          </a:solidFill>
+          <a:ln>
+            <a:noFill/>
+          </a:ln>
+          <a:effectLst>
+            <a:innerShdw blurRad="165100" dist="165100" dir="17400000">
+              <a:prstClr val="black">
+                <a:alpha val="50000"/>
+              </a:prstClr>
+            </a:innerShdw>
+          </a:effectLst>
+        </p:spPr>
+        <p:style>
+          <a:lnRef idx="2">
+            <a:schemeClr val="accent1">
+              <a:shade val="15000"/>
+            </a:schemeClr>
+          </a:lnRef>
+          <a:fillRef idx="1">
+            <a:schemeClr val="accent1"/>
+          </a:fillRef>
+          <a:effectRef idx="0">
+            <a:schemeClr val="accent1"/>
+          </a:effectRef>
+          <a:fontRef idx="minor">
+            <a:schemeClr val="lt1"/>
+          </a:fontRef>
+        </p:style>
+        <p:txBody>
+          <a:bodyPr rtlCol="0" anchor="ctr"/>
+          <a:lstStyle/>
+          <a:p>
+            <a:pPr algn="ctr"/>
+            <a:endParaRPr kumimoji="1" lang="ja-JP" altLang="en-US"/>
+          </a:p>
+        </p:txBody>
+      </p:sp>
+      <p:sp>
+        <p:nvSpPr>
+          <p:cNvPr id="35" name="円柱 34">
+            <a:extLst>
+              <a:ext uri="{FF2B5EF4-FFF2-40B4-BE49-F238E27FC236}">
+                <a16:creationId xmlns:a16="http://schemas.microsoft.com/office/drawing/2014/main" id="{5ECFAAAF-BF08-952D-E5EE-A6B8750616B4}"/>
+              </a:ext>
+            </a:extLst>
+          </p:cNvPr>
+          <p:cNvSpPr/>
+          <p:nvPr/>
+        </p:nvSpPr>
+        <p:spPr>
+          <a:xfrm rot="5400000">
+            <a:off x="5684610" y="1134373"/>
+            <a:ext cx="156898" cy="1893504"/>
+          </a:xfrm>
+          <a:prstGeom prst="can">
+            <a:avLst>
+              <a:gd name="adj" fmla="val 49548"/>
+            </a:avLst>
+          </a:prstGeom>
+          <a:solidFill>
+            <a:schemeClr val="accent2">
+              <a:lumMod val="75000"/>
+            </a:schemeClr>
+          </a:solidFill>
+          <a:ln>
+            <a:noFill/>
+          </a:ln>
+          <a:effectLst>
+            <a:innerShdw blurRad="165100" dist="165100" dir="17400000">
+              <a:prstClr val="black">
+                <a:alpha val="50000"/>
+              </a:prstClr>
+            </a:innerShdw>
+          </a:effectLst>
+        </p:spPr>
+        <p:style>
+          <a:lnRef idx="2">
+            <a:schemeClr val="accent1">
+              <a:shade val="15000"/>
+            </a:schemeClr>
+          </a:lnRef>
+          <a:fillRef idx="1">
+            <a:schemeClr val="accent1"/>
+          </a:fillRef>
+          <a:effectRef idx="0">
+            <a:schemeClr val="accent1"/>
+          </a:effectRef>
+          <a:fontRef idx="minor">
+            <a:schemeClr val="lt1"/>
+          </a:fontRef>
+        </p:style>
+        <p:txBody>
+          <a:bodyPr rtlCol="0" anchor="ctr"/>
+          <a:lstStyle/>
+          <a:p>
+            <a:pPr algn="ctr"/>
+            <a:endParaRPr kumimoji="1" lang="ja-JP" altLang="en-US"/>
+          </a:p>
+        </p:txBody>
+      </p:sp>
+      <p:sp>
+        <p:nvSpPr>
+          <p:cNvPr id="36" name="円柱 35">
+            <a:extLst>
+              <a:ext uri="{FF2B5EF4-FFF2-40B4-BE49-F238E27FC236}">
+                <a16:creationId xmlns:a16="http://schemas.microsoft.com/office/drawing/2014/main" id="{08CCD071-4F08-D9EB-D506-A48A131433A5}"/>
+              </a:ext>
+            </a:extLst>
+          </p:cNvPr>
+          <p:cNvSpPr/>
+          <p:nvPr/>
+        </p:nvSpPr>
+        <p:spPr>
+          <a:xfrm rot="5400000">
+            <a:off x="5669877" y="1839717"/>
+            <a:ext cx="156898" cy="1762148"/>
+          </a:xfrm>
+          <a:prstGeom prst="can">
+            <a:avLst>
+              <a:gd name="adj" fmla="val 49548"/>
+            </a:avLst>
+          </a:prstGeom>
+          <a:solidFill>
+            <a:schemeClr val="accent2">
+              <a:lumMod val="75000"/>
+            </a:schemeClr>
+          </a:solidFill>
+          <a:ln>
+            <a:noFill/>
+          </a:ln>
+          <a:effectLst>
+            <a:innerShdw blurRad="165100" dist="165100" dir="17400000">
+              <a:prstClr val="black">
+                <a:alpha val="50000"/>
+              </a:prstClr>
+            </a:innerShdw>
+          </a:effectLst>
+        </p:spPr>
+        <p:style>
+          <a:lnRef idx="2">
+            <a:schemeClr val="accent1">
+              <a:shade val="15000"/>
+            </a:schemeClr>
+          </a:lnRef>
+          <a:fillRef idx="1">
+            <a:schemeClr val="accent1"/>
+          </a:fillRef>
+          <a:effectRef idx="0">
+            <a:schemeClr val="accent1"/>
+          </a:effectRef>
+          <a:fontRef idx="minor">
+            <a:schemeClr val="lt1"/>
+          </a:fontRef>
+        </p:style>
+        <p:txBody>
+          <a:bodyPr rtlCol="0" anchor="ctr"/>
+          <a:lstStyle/>
+          <a:p>
+            <a:pPr algn="ctr"/>
+            <a:endParaRPr kumimoji="1" lang="ja-JP" altLang="en-US"/>
+          </a:p>
+        </p:txBody>
+      </p:sp>
+      <p:sp>
+        <p:nvSpPr>
+          <p:cNvPr id="37" name="円柱 36">
+            <a:extLst>
+              <a:ext uri="{FF2B5EF4-FFF2-40B4-BE49-F238E27FC236}">
+                <a16:creationId xmlns:a16="http://schemas.microsoft.com/office/drawing/2014/main" id="{2BC4AFF5-8747-018F-E712-06B5706BAECD}"/>
+              </a:ext>
+            </a:extLst>
+          </p:cNvPr>
+          <p:cNvSpPr/>
+          <p:nvPr/>
+        </p:nvSpPr>
+        <p:spPr>
+          <a:xfrm rot="5400000">
+            <a:off x="5659640" y="2552964"/>
+            <a:ext cx="156898" cy="1614983"/>
+          </a:xfrm>
+          <a:prstGeom prst="can">
+            <a:avLst>
+              <a:gd name="adj" fmla="val 49548"/>
+            </a:avLst>
+          </a:prstGeom>
+          <a:solidFill>
+            <a:schemeClr val="accent2">
+              <a:lumMod val="75000"/>
+            </a:schemeClr>
+          </a:solidFill>
+          <a:ln>
+            <a:noFill/>
+          </a:ln>
+          <a:effectLst>
+            <a:innerShdw blurRad="165100" dist="165100" dir="17400000">
+              <a:prstClr val="black">
+                <a:alpha val="50000"/>
+              </a:prstClr>
+            </a:innerShdw>
+          </a:effectLst>
+        </p:spPr>
+        <p:style>
+          <a:lnRef idx="2">
+            <a:schemeClr val="accent1">
+              <a:shade val="15000"/>
+            </a:schemeClr>
+          </a:lnRef>
+          <a:fillRef idx="1">
+            <a:schemeClr val="accent1"/>
+          </a:fillRef>
+          <a:effectRef idx="0">
+            <a:schemeClr val="accent1"/>
+          </a:effectRef>
+          <a:fontRef idx="minor">
+            <a:schemeClr val="lt1"/>
+          </a:fontRef>
+        </p:style>
+        <p:txBody>
+          <a:bodyPr rtlCol="0" anchor="ctr"/>
+          <a:lstStyle/>
+          <a:p>
+            <a:pPr algn="ctr"/>
+            <a:endParaRPr kumimoji="1" lang="ja-JP" altLang="en-US"/>
+          </a:p>
+        </p:txBody>
+      </p:sp>
+      <p:sp>
+        <p:nvSpPr>
+          <p:cNvPr id="33" name="円柱 32">
+            <a:extLst>
+              <a:ext uri="{FF2B5EF4-FFF2-40B4-BE49-F238E27FC236}">
+                <a16:creationId xmlns:a16="http://schemas.microsoft.com/office/drawing/2014/main" id="{B7B98DE5-5DDB-4B96-CF9C-0B4D662CA773}"/>
+              </a:ext>
+            </a:extLst>
+          </p:cNvPr>
+          <p:cNvSpPr/>
+          <p:nvPr/>
+        </p:nvSpPr>
+        <p:spPr>
+          <a:xfrm rot="221817">
+            <a:off x="6512633" y="867559"/>
+            <a:ext cx="260714" cy="2864084"/>
+          </a:xfrm>
+          <a:prstGeom prst="can">
+            <a:avLst>
+              <a:gd name="adj" fmla="val 49548"/>
+            </a:avLst>
+          </a:prstGeom>
+          <a:solidFill>
+            <a:schemeClr val="accent2">
+              <a:lumMod val="75000"/>
+            </a:schemeClr>
+          </a:solidFill>
+          <a:ln>
+            <a:noFill/>
+          </a:ln>
+          <a:effectLst>
+            <a:innerShdw blurRad="165100" dist="165100" dir="3600000">
+              <a:prstClr val="black">
+                <a:alpha val="50000"/>
+              </a:prstClr>
+            </a:innerShdw>
+          </a:effectLst>
+        </p:spPr>
+        <p:style>
+          <a:lnRef idx="2">
+            <a:schemeClr val="accent1">
+              <a:shade val="15000"/>
+            </a:schemeClr>
+          </a:lnRef>
+          <a:fillRef idx="1">
+            <a:schemeClr val="accent1"/>
+          </a:fillRef>
+          <a:effectRef idx="0">
+            <a:schemeClr val="accent1"/>
+          </a:effectRef>
+          <a:fontRef idx="minor">
+            <a:schemeClr val="lt1"/>
+          </a:fontRef>
+        </p:style>
+        <p:txBody>
+          <a:bodyPr rtlCol="0" anchor="ctr"/>
+          <a:lstStyle/>
+          <a:p>
+            <a:pPr algn="ctr"/>
+            <a:endParaRPr kumimoji="1" lang="ja-JP" altLang="en-US"/>
+          </a:p>
+        </p:txBody>
+      </p:sp>
+      <p:sp>
+        <p:nvSpPr>
+          <p:cNvPr id="6" name="台形 5">
+            <a:extLst>
+              <a:ext uri="{FF2B5EF4-FFF2-40B4-BE49-F238E27FC236}">
+                <a16:creationId xmlns:a16="http://schemas.microsoft.com/office/drawing/2014/main" id="{1C25C553-8ECA-974C-D764-73CE46BC436D}"/>
+              </a:ext>
+            </a:extLst>
+          </p:cNvPr>
+          <p:cNvSpPr/>
+          <p:nvPr/>
+        </p:nvSpPr>
+        <p:spPr>
+          <a:xfrm rot="10800000">
+            <a:off x="2808511" y="4016828"/>
+            <a:ext cx="5887617" cy="1441580"/>
+          </a:xfrm>
+          <a:prstGeom prst="trapezoid">
+            <a:avLst>
+              <a:gd name="adj" fmla="val 7369"/>
+            </a:avLst>
+          </a:prstGeom>
+          <a:solidFill>
+            <a:schemeClr val="accent3">
+              <a:lumMod val="75000"/>
+            </a:schemeClr>
+          </a:solidFill>
+          <a:ln>
+            <a:noFill/>
+          </a:ln>
+          <a:effectLst>
+            <a:innerShdw blurRad="508000" dist="266700" dir="6600000">
+              <a:prstClr val="black">
+                <a:alpha val="50000"/>
+              </a:prstClr>
+            </a:innerShdw>
+          </a:effectLst>
+        </p:spPr>
+        <p:style>
+          <a:lnRef idx="2">
+            <a:schemeClr val="accent1">
+              <a:shade val="15000"/>
+            </a:schemeClr>
+          </a:lnRef>
+          <a:fillRef idx="1">
+            <a:schemeClr val="accent1"/>
+          </a:fillRef>
+          <a:effectRef idx="0">
+            <a:schemeClr val="accent1"/>
+          </a:effectRef>
+          <a:fontRef idx="minor">
+            <a:schemeClr val="lt1"/>
+          </a:fontRef>
+        </p:style>
+        <p:txBody>
+          <a:bodyPr rtlCol="0" anchor="ctr"/>
+          <a:lstStyle/>
+          <a:p>
+            <a:pPr algn="ctr"/>
+            <a:endParaRPr kumimoji="1" lang="ja-JP" altLang="en-US"/>
+          </a:p>
+        </p:txBody>
+      </p:sp>
+      <p:sp>
+        <p:nvSpPr>
+          <p:cNvPr id="7" name="台形 6">
+            <a:extLst>
+              <a:ext uri="{FF2B5EF4-FFF2-40B4-BE49-F238E27FC236}">
+                <a16:creationId xmlns:a16="http://schemas.microsoft.com/office/drawing/2014/main" id="{BAF5692C-B855-2D15-BC40-DFE9A6598FD5}"/>
+              </a:ext>
+            </a:extLst>
+          </p:cNvPr>
+          <p:cNvSpPr/>
+          <p:nvPr/>
+        </p:nvSpPr>
+        <p:spPr>
+          <a:xfrm rot="10800000">
+            <a:off x="2808509" y="3989426"/>
+            <a:ext cx="1086582" cy="488677"/>
+          </a:xfrm>
+          <a:prstGeom prst="trapezoid">
+            <a:avLst/>
+          </a:prstGeom>
+          <a:solidFill>
+            <a:schemeClr val="bg1">
+              <a:lumMod val="65000"/>
+            </a:schemeClr>
+          </a:solidFill>
+          <a:ln>
+            <a:noFill/>
+          </a:ln>
+          <a:effectLst>
+            <a:innerShdw blurRad="381000" dist="127000" dir="8100000">
+              <a:prstClr val="black">
+                <a:alpha val="50000"/>
+              </a:prstClr>
+            </a:innerShdw>
+          </a:effectLst>
+          <a:scene3d>
+            <a:camera prst="orthographicFront"/>
+            <a:lightRig rig="threePt" dir="t">
+              <a:rot lat="0" lon="0" rev="8400000"/>
+            </a:lightRig>
+          </a:scene3d>
+          <a:sp3d/>
+        </p:spPr>
+        <p:style>
+          <a:lnRef idx="2">
+            <a:schemeClr val="accent1">
+              <a:shade val="50000"/>
+            </a:schemeClr>
+          </a:lnRef>
+          <a:fillRef idx="1">
+            <a:schemeClr val="accent1"/>
+          </a:fillRef>
+          <a:effectRef idx="0">
+            <a:schemeClr val="accent1"/>
+          </a:effectRef>
+          <a:fontRef idx="minor">
+            <a:schemeClr val="lt1"/>
+          </a:fontRef>
+        </p:style>
+        <p:txBody>
+          <a:bodyPr rtlCol="0" anchor="ctr"/>
+          <a:lstStyle/>
+          <a:p>
+            <a:pPr algn="ctr"/>
+            <a:endParaRPr kumimoji="1" lang="ja-JP" altLang="en-US"/>
+          </a:p>
+        </p:txBody>
+      </p:sp>
+      <p:sp>
+        <p:nvSpPr>
+          <p:cNvPr id="8" name="台形 7">
+            <a:extLst>
+              <a:ext uri="{FF2B5EF4-FFF2-40B4-BE49-F238E27FC236}">
+                <a16:creationId xmlns:a16="http://schemas.microsoft.com/office/drawing/2014/main" id="{25F565C2-9218-5FBD-4759-00ED7F13F8AE}"/>
+              </a:ext>
+            </a:extLst>
+          </p:cNvPr>
+          <p:cNvSpPr/>
+          <p:nvPr/>
+        </p:nvSpPr>
+        <p:spPr>
+          <a:xfrm rot="10800000">
+            <a:off x="3780725" y="4469622"/>
+            <a:ext cx="688638" cy="442354"/>
+          </a:xfrm>
+          <a:prstGeom prst="trapezoid">
+            <a:avLst/>
+          </a:prstGeom>
+          <a:solidFill>
+            <a:schemeClr val="bg1">
+              <a:lumMod val="65000"/>
+            </a:schemeClr>
+          </a:solidFill>
+          <a:ln>
+            <a:noFill/>
+          </a:ln>
+          <a:effectLst>
+            <a:innerShdw blurRad="381000" dist="127000" dir="8100000">
+              <a:prstClr val="black">
+                <a:alpha val="50000"/>
+              </a:prstClr>
+            </a:innerShdw>
+          </a:effectLst>
+          <a:scene3d>
+            <a:camera prst="orthographicFront"/>
+            <a:lightRig rig="threePt" dir="t">
+              <a:rot lat="0" lon="0" rev="8400000"/>
+            </a:lightRig>
+          </a:scene3d>
+          <a:sp3d/>
+        </p:spPr>
+        <p:style>
+          <a:lnRef idx="2">
+            <a:schemeClr val="accent1">
+              <a:shade val="50000"/>
+            </a:schemeClr>
+          </a:lnRef>
+          <a:fillRef idx="1">
+            <a:schemeClr val="accent1"/>
+          </a:fillRef>
+          <a:effectRef idx="0">
+            <a:schemeClr val="accent1"/>
+          </a:effectRef>
+          <a:fontRef idx="minor">
+            <a:schemeClr val="lt1"/>
+          </a:fontRef>
+        </p:style>
+        <p:txBody>
+          <a:bodyPr rtlCol="0" anchor="ctr"/>
+          <a:lstStyle/>
+          <a:p>
+            <a:pPr algn="ctr"/>
+            <a:endParaRPr kumimoji="1" lang="ja-JP" altLang="en-US"/>
+          </a:p>
+        </p:txBody>
+      </p:sp>
+      <p:sp>
+        <p:nvSpPr>
+          <p:cNvPr id="9" name="台形 8">
+            <a:extLst>
+              <a:ext uri="{FF2B5EF4-FFF2-40B4-BE49-F238E27FC236}">
+                <a16:creationId xmlns:a16="http://schemas.microsoft.com/office/drawing/2014/main" id="{C78ADA2E-9BA6-C687-B86D-E4AD166F09EC}"/>
+              </a:ext>
+            </a:extLst>
+          </p:cNvPr>
+          <p:cNvSpPr/>
+          <p:nvPr/>
+        </p:nvSpPr>
+        <p:spPr>
+          <a:xfrm rot="10800000">
+            <a:off x="5329412" y="3984170"/>
+            <a:ext cx="845813" cy="367710"/>
+          </a:xfrm>
+          <a:prstGeom prst="trapezoid">
+            <a:avLst/>
+          </a:prstGeom>
+          <a:solidFill>
+            <a:schemeClr val="bg1">
+              <a:lumMod val="65000"/>
+            </a:schemeClr>
+          </a:solidFill>
+          <a:ln>
+            <a:noFill/>
+          </a:ln>
+          <a:effectLst>
+            <a:innerShdw blurRad="381000" dist="127000" dir="8100000">
+              <a:prstClr val="black">
+                <a:alpha val="50000"/>
+              </a:prstClr>
+            </a:innerShdw>
+          </a:effectLst>
+          <a:scene3d>
+            <a:camera prst="orthographicFront"/>
+            <a:lightRig rig="threePt" dir="t">
+              <a:rot lat="0" lon="0" rev="8400000"/>
+            </a:lightRig>
+          </a:scene3d>
+          <a:sp3d/>
+        </p:spPr>
+        <p:style>
+          <a:lnRef idx="2">
+            <a:schemeClr val="accent1">
+              <a:shade val="50000"/>
+            </a:schemeClr>
+          </a:lnRef>
+          <a:fillRef idx="1">
+            <a:schemeClr val="accent1"/>
+          </a:fillRef>
+          <a:effectRef idx="0">
+            <a:schemeClr val="accent1"/>
+          </a:effectRef>
+          <a:fontRef idx="minor">
+            <a:schemeClr val="lt1"/>
+          </a:fontRef>
+        </p:style>
+        <p:txBody>
+          <a:bodyPr rtlCol="0" anchor="ctr"/>
+          <a:lstStyle/>
+          <a:p>
+            <a:pPr algn="ctr"/>
+            <a:endParaRPr kumimoji="1" lang="ja-JP" altLang="en-US"/>
+          </a:p>
+        </p:txBody>
+      </p:sp>
+      <p:sp>
+        <p:nvSpPr>
+          <p:cNvPr id="10" name="台形 9">
+            <a:extLst>
+              <a:ext uri="{FF2B5EF4-FFF2-40B4-BE49-F238E27FC236}">
+                <a16:creationId xmlns:a16="http://schemas.microsoft.com/office/drawing/2014/main" id="{893D34D0-6F66-C093-A40E-3DE26470B4B0}"/>
+              </a:ext>
+            </a:extLst>
+          </p:cNvPr>
+          <p:cNvSpPr/>
+          <p:nvPr/>
+        </p:nvSpPr>
+        <p:spPr>
+          <a:xfrm rot="10800000">
+            <a:off x="7535881" y="4964652"/>
+            <a:ext cx="1086582" cy="488677"/>
+          </a:xfrm>
+          <a:prstGeom prst="trapezoid">
+            <a:avLst>
+              <a:gd name="adj" fmla="val 5249"/>
+            </a:avLst>
+          </a:prstGeom>
+          <a:solidFill>
+            <a:schemeClr val="bg1">
+              <a:lumMod val="65000"/>
+            </a:schemeClr>
+          </a:solidFill>
+          <a:ln>
+            <a:noFill/>
+          </a:ln>
+          <a:effectLst>
+            <a:innerShdw blurRad="381000" dist="127000" dir="8100000">
+              <a:prstClr val="black">
+                <a:alpha val="50000"/>
+              </a:prstClr>
+            </a:innerShdw>
+          </a:effectLst>
+          <a:scene3d>
+            <a:camera prst="orthographicFront"/>
+            <a:lightRig rig="threePt" dir="t">
+              <a:rot lat="0" lon="0" rev="8400000"/>
+            </a:lightRig>
+          </a:scene3d>
+          <a:sp3d/>
+        </p:spPr>
+        <p:style>
+          <a:lnRef idx="2">
+            <a:schemeClr val="accent1">
+              <a:shade val="50000"/>
+            </a:schemeClr>
+          </a:lnRef>
+          <a:fillRef idx="1">
+            <a:schemeClr val="accent1"/>
+          </a:fillRef>
+          <a:effectRef idx="0">
+            <a:schemeClr val="accent1"/>
+          </a:effectRef>
+          <a:fontRef idx="minor">
+            <a:schemeClr val="lt1"/>
+          </a:fontRef>
+        </p:style>
+        <p:txBody>
+          <a:bodyPr rtlCol="0" anchor="ctr"/>
+          <a:lstStyle/>
+          <a:p>
+            <a:pPr algn="ctr"/>
+            <a:endParaRPr kumimoji="1" lang="ja-JP" altLang="en-US"/>
+          </a:p>
+        </p:txBody>
+      </p:sp>
+      <p:sp>
+        <p:nvSpPr>
+          <p:cNvPr id="11" name="台形 10">
+            <a:extLst>
+              <a:ext uri="{FF2B5EF4-FFF2-40B4-BE49-F238E27FC236}">
+                <a16:creationId xmlns:a16="http://schemas.microsoft.com/office/drawing/2014/main" id="{1C1B04A1-BA14-D061-D1D6-FF84428D4A16}"/>
+              </a:ext>
+            </a:extLst>
+          </p:cNvPr>
+          <p:cNvSpPr/>
+          <p:nvPr/>
+        </p:nvSpPr>
+        <p:spPr>
+          <a:xfrm>
+            <a:off x="5935462" y="4678801"/>
+            <a:ext cx="845814" cy="442356"/>
+          </a:xfrm>
+          <a:prstGeom prst="trapezoid">
+            <a:avLst/>
+          </a:prstGeom>
+          <a:solidFill>
+            <a:schemeClr val="bg1">
+              <a:lumMod val="65000"/>
+            </a:schemeClr>
+          </a:solidFill>
+          <a:ln>
+            <a:noFill/>
+          </a:ln>
+          <a:effectLst>
+            <a:innerShdw blurRad="381000" dist="127000" dir="8100000">
+              <a:prstClr val="black">
+                <a:alpha val="50000"/>
+              </a:prstClr>
+            </a:innerShdw>
+          </a:effectLst>
+          <a:scene3d>
+            <a:camera prst="orthographicFront"/>
+            <a:lightRig rig="threePt" dir="t">
+              <a:rot lat="0" lon="0" rev="8400000"/>
+            </a:lightRig>
+          </a:scene3d>
+          <a:sp3d/>
+        </p:spPr>
+        <p:style>
+          <a:lnRef idx="2">
+            <a:schemeClr val="accent1">
+              <a:shade val="50000"/>
+            </a:schemeClr>
+          </a:lnRef>
+          <a:fillRef idx="1">
+            <a:schemeClr val="accent1"/>
+          </a:fillRef>
+          <a:effectRef idx="0">
+            <a:schemeClr val="accent1"/>
+          </a:effectRef>
+          <a:fontRef idx="minor">
+            <a:schemeClr val="lt1"/>
+          </a:fontRef>
+        </p:style>
+        <p:txBody>
+          <a:bodyPr rtlCol="0" anchor="ctr"/>
+          <a:lstStyle/>
+          <a:p>
+            <a:pPr algn="ctr"/>
+            <a:endParaRPr kumimoji="1" lang="ja-JP" altLang="en-US"/>
+          </a:p>
+        </p:txBody>
+      </p:sp>
+      <p:sp>
+        <p:nvSpPr>
+          <p:cNvPr id="12" name="台形 11">
+            <a:extLst>
+              <a:ext uri="{FF2B5EF4-FFF2-40B4-BE49-F238E27FC236}">
+                <a16:creationId xmlns:a16="http://schemas.microsoft.com/office/drawing/2014/main" id="{A5BE966D-836F-9458-563F-A02D1788C05C}"/>
+              </a:ext>
+            </a:extLst>
+          </p:cNvPr>
+          <p:cNvSpPr/>
+          <p:nvPr/>
+        </p:nvSpPr>
+        <p:spPr>
+          <a:xfrm>
+            <a:off x="2923479" y="4966049"/>
+            <a:ext cx="845815" cy="488677"/>
+          </a:xfrm>
+          <a:prstGeom prst="trapezoid">
+            <a:avLst/>
+          </a:prstGeom>
+          <a:solidFill>
+            <a:srgbClr val="8C8C8C"/>
+          </a:solidFill>
+          <a:ln>
+            <a:noFill/>
+          </a:ln>
+          <a:effectLst>
+            <a:innerShdw blurRad="381000" dist="127000" dir="8100000">
+              <a:prstClr val="black">
+                <a:alpha val="50000"/>
+              </a:prstClr>
+            </a:innerShdw>
+          </a:effectLst>
+          <a:scene3d>
+            <a:camera prst="orthographicFront"/>
+            <a:lightRig rig="threePt" dir="t">
+              <a:rot lat="0" lon="0" rev="8400000"/>
+            </a:lightRig>
+          </a:scene3d>
+          <a:sp3d/>
+        </p:spPr>
+        <p:style>
+          <a:lnRef idx="2">
+            <a:schemeClr val="accent1">
+              <a:shade val="50000"/>
+            </a:schemeClr>
+          </a:lnRef>
+          <a:fillRef idx="1">
+            <a:schemeClr val="accent1"/>
+          </a:fillRef>
+          <a:effectRef idx="0">
+            <a:schemeClr val="accent1"/>
+          </a:effectRef>
+          <a:fontRef idx="minor">
+            <a:schemeClr val="lt1"/>
+          </a:fontRef>
+        </p:style>
+        <p:txBody>
+          <a:bodyPr rtlCol="0" anchor="ctr"/>
+          <a:lstStyle/>
+          <a:p>
+            <a:pPr algn="ctr"/>
+            <a:endParaRPr kumimoji="1" lang="ja-JP" altLang="en-US"/>
+          </a:p>
+        </p:txBody>
+      </p:sp>
+      <p:sp>
+        <p:nvSpPr>
+          <p:cNvPr id="13" name="台形 12">
+            <a:extLst>
+              <a:ext uri="{FF2B5EF4-FFF2-40B4-BE49-F238E27FC236}">
+                <a16:creationId xmlns:a16="http://schemas.microsoft.com/office/drawing/2014/main" id="{A2CFC676-67E3-AD36-31AC-771B05564A82}"/>
+              </a:ext>
+            </a:extLst>
+          </p:cNvPr>
+          <p:cNvSpPr/>
+          <p:nvPr/>
+        </p:nvSpPr>
+        <p:spPr>
+          <a:xfrm>
+            <a:off x="4405096" y="4248941"/>
+            <a:ext cx="845815" cy="488677"/>
+          </a:xfrm>
+          <a:prstGeom prst="trapezoid">
+            <a:avLst/>
+          </a:prstGeom>
+          <a:solidFill>
+            <a:srgbClr val="8C8C8C"/>
+          </a:solidFill>
+          <a:ln>
+            <a:noFill/>
+          </a:ln>
+          <a:effectLst>
+            <a:innerShdw blurRad="381000" dist="127000" dir="8100000">
+              <a:prstClr val="black">
+                <a:alpha val="50000"/>
+              </a:prstClr>
+            </a:innerShdw>
+          </a:effectLst>
+          <a:scene3d>
+            <a:camera prst="orthographicFront"/>
+            <a:lightRig rig="threePt" dir="t">
+              <a:rot lat="0" lon="0" rev="8400000"/>
+            </a:lightRig>
+          </a:scene3d>
+          <a:sp3d/>
+        </p:spPr>
+        <p:style>
+          <a:lnRef idx="2">
+            <a:schemeClr val="accent1">
+              <a:shade val="50000"/>
+            </a:schemeClr>
+          </a:lnRef>
+          <a:fillRef idx="1">
+            <a:schemeClr val="accent1"/>
+          </a:fillRef>
+          <a:effectRef idx="0">
+            <a:schemeClr val="accent1"/>
+          </a:effectRef>
+          <a:fontRef idx="minor">
+            <a:schemeClr val="lt1"/>
+          </a:fontRef>
+        </p:style>
+        <p:txBody>
+          <a:bodyPr rtlCol="0" anchor="ctr"/>
+          <a:lstStyle/>
+          <a:p>
+            <a:pPr algn="ctr"/>
+            <a:endParaRPr kumimoji="1" lang="ja-JP" altLang="en-US"/>
+          </a:p>
+        </p:txBody>
+      </p:sp>
+      <p:sp>
+        <p:nvSpPr>
+          <p:cNvPr id="14" name="台形 13">
+            <a:extLst>
+              <a:ext uri="{FF2B5EF4-FFF2-40B4-BE49-F238E27FC236}">
+                <a16:creationId xmlns:a16="http://schemas.microsoft.com/office/drawing/2014/main" id="{48B9393A-F8C1-5EF7-F4C5-47BCFF6CC0FB}"/>
+              </a:ext>
+            </a:extLst>
+          </p:cNvPr>
+          <p:cNvSpPr/>
+          <p:nvPr/>
+        </p:nvSpPr>
+        <p:spPr>
+          <a:xfrm rot="10800000">
+            <a:off x="6418206" y="4233764"/>
+            <a:ext cx="845815" cy="442357"/>
+          </a:xfrm>
+          <a:prstGeom prst="trapezoid">
+            <a:avLst/>
+          </a:prstGeom>
+          <a:solidFill>
+            <a:srgbClr val="8C8C8C"/>
+          </a:solidFill>
+          <a:ln>
+            <a:noFill/>
+          </a:ln>
+          <a:effectLst>
+            <a:innerShdw blurRad="381000" dist="127000" dir="8100000">
+              <a:prstClr val="black">
+                <a:alpha val="50000"/>
+              </a:prstClr>
+            </a:innerShdw>
+          </a:effectLst>
+          <a:scene3d>
+            <a:camera prst="orthographicFront"/>
+            <a:lightRig rig="threePt" dir="t">
+              <a:rot lat="0" lon="0" rev="8400000"/>
+            </a:lightRig>
+          </a:scene3d>
+          <a:sp3d/>
+        </p:spPr>
+        <p:style>
+          <a:lnRef idx="2">
+            <a:schemeClr val="accent1">
+              <a:shade val="50000"/>
+            </a:schemeClr>
+          </a:lnRef>
+          <a:fillRef idx="1">
+            <a:schemeClr val="accent1"/>
+          </a:fillRef>
+          <a:effectRef idx="0">
+            <a:schemeClr val="accent1"/>
+          </a:effectRef>
+          <a:fontRef idx="minor">
+            <a:schemeClr val="lt1"/>
+          </a:fontRef>
+        </p:style>
+        <p:txBody>
+          <a:bodyPr rtlCol="0" anchor="ctr"/>
+          <a:lstStyle/>
+          <a:p>
+            <a:pPr algn="ctr"/>
+            <a:endParaRPr kumimoji="1" lang="ja-JP" altLang="en-US"/>
+          </a:p>
+        </p:txBody>
+      </p:sp>
+      <p:sp>
+        <p:nvSpPr>
+          <p:cNvPr id="15" name="台形 14">
+            <a:extLst>
+              <a:ext uri="{FF2B5EF4-FFF2-40B4-BE49-F238E27FC236}">
+                <a16:creationId xmlns:a16="http://schemas.microsoft.com/office/drawing/2014/main" id="{DD1FE80B-A2C3-ABD4-8E51-F500EF77E996}"/>
+              </a:ext>
+            </a:extLst>
+          </p:cNvPr>
+          <p:cNvSpPr/>
+          <p:nvPr/>
+        </p:nvSpPr>
+        <p:spPr>
+          <a:xfrm>
+            <a:off x="7776648" y="3979092"/>
+            <a:ext cx="845815" cy="526414"/>
+          </a:xfrm>
+          <a:prstGeom prst="trapezoid">
+            <a:avLst/>
+          </a:prstGeom>
+          <a:solidFill>
+            <a:srgbClr val="8C8C8C"/>
+          </a:solidFill>
+          <a:ln>
+            <a:noFill/>
+          </a:ln>
+          <a:effectLst>
+            <a:innerShdw blurRad="381000" dist="127000" dir="8100000">
+              <a:prstClr val="black">
+                <a:alpha val="50000"/>
+              </a:prstClr>
+            </a:innerShdw>
+          </a:effectLst>
+          <a:scene3d>
+            <a:camera prst="orthographicFront"/>
+            <a:lightRig rig="threePt" dir="t">
+              <a:rot lat="0" lon="0" rev="8400000"/>
+            </a:lightRig>
+          </a:scene3d>
+          <a:sp3d/>
+        </p:spPr>
+        <p:style>
+          <a:lnRef idx="2">
+            <a:schemeClr val="accent1">
+              <a:shade val="50000"/>
+            </a:schemeClr>
+          </a:lnRef>
+          <a:fillRef idx="1">
+            <a:schemeClr val="accent1"/>
+          </a:fillRef>
+          <a:effectRef idx="0">
+            <a:schemeClr val="accent1"/>
+          </a:effectRef>
+          <a:fontRef idx="minor">
+            <a:schemeClr val="lt1"/>
+          </a:fontRef>
+        </p:style>
+        <p:txBody>
+          <a:bodyPr rtlCol="0" anchor="ctr"/>
+          <a:lstStyle/>
+          <a:p>
+            <a:pPr algn="ctr"/>
+            <a:endParaRPr kumimoji="1" lang="ja-JP" altLang="en-US"/>
+          </a:p>
+        </p:txBody>
+      </p:sp>
+      <p:sp>
+        <p:nvSpPr>
+          <p:cNvPr id="16" name="台形 15">
+            <a:extLst>
+              <a:ext uri="{FF2B5EF4-FFF2-40B4-BE49-F238E27FC236}">
+                <a16:creationId xmlns:a16="http://schemas.microsoft.com/office/drawing/2014/main" id="{2F06B6CE-605F-D2A8-A950-9D149404E99B}"/>
+              </a:ext>
+            </a:extLst>
+          </p:cNvPr>
+          <p:cNvSpPr/>
+          <p:nvPr/>
+        </p:nvSpPr>
+        <p:spPr>
+          <a:xfrm>
+            <a:off x="4238000" y="4745599"/>
+            <a:ext cx="1012911" cy="488677"/>
+          </a:xfrm>
+          <a:prstGeom prst="trapezoid">
+            <a:avLst>
+              <a:gd name="adj" fmla="val 28898"/>
+            </a:avLst>
+          </a:prstGeom>
+          <a:solidFill>
+            <a:srgbClr val="686868"/>
+          </a:solidFill>
+          <a:ln>
+            <a:noFill/>
+          </a:ln>
+          <a:effectLst>
+            <a:innerShdw blurRad="381000" dist="127000" dir="8100000">
+              <a:prstClr val="black">
+                <a:alpha val="50000"/>
+              </a:prstClr>
+            </a:innerShdw>
+          </a:effectLst>
+          <a:scene3d>
+            <a:camera prst="orthographicFront"/>
+            <a:lightRig rig="threePt" dir="t">
+              <a:rot lat="0" lon="0" rev="8400000"/>
+            </a:lightRig>
+          </a:scene3d>
+          <a:sp3d/>
+        </p:spPr>
+        <p:style>
+          <a:lnRef idx="2">
+            <a:schemeClr val="accent1">
+              <a:shade val="50000"/>
+            </a:schemeClr>
+          </a:lnRef>
+          <a:fillRef idx="1">
+            <a:schemeClr val="accent1"/>
+          </a:fillRef>
+          <a:effectRef idx="0">
+            <a:schemeClr val="accent1"/>
+          </a:effectRef>
+          <a:fontRef idx="minor">
+            <a:schemeClr val="lt1"/>
+          </a:fontRef>
+        </p:style>
+        <p:txBody>
+          <a:bodyPr rtlCol="0" anchor="ctr"/>
+          <a:lstStyle/>
+          <a:p>
+            <a:pPr algn="ctr"/>
+            <a:endParaRPr kumimoji="1" lang="ja-JP" altLang="en-US"/>
+          </a:p>
+        </p:txBody>
+      </p:sp>
+      <p:sp>
+        <p:nvSpPr>
+          <p:cNvPr id="17" name="台形 16">
+            <a:extLst>
+              <a:ext uri="{FF2B5EF4-FFF2-40B4-BE49-F238E27FC236}">
+                <a16:creationId xmlns:a16="http://schemas.microsoft.com/office/drawing/2014/main" id="{84A68C88-C6E9-5BDF-18F3-65C6DDE773DF}"/>
+              </a:ext>
+            </a:extLst>
+          </p:cNvPr>
+          <p:cNvSpPr/>
+          <p:nvPr/>
+        </p:nvSpPr>
+        <p:spPr>
+          <a:xfrm rot="10800000">
+            <a:off x="6690060" y="4681638"/>
+            <a:ext cx="907079" cy="656453"/>
+          </a:xfrm>
+          <a:prstGeom prst="trapezoid">
+            <a:avLst>
+              <a:gd name="adj" fmla="val 20736"/>
+            </a:avLst>
+          </a:prstGeom>
+          <a:solidFill>
+            <a:srgbClr val="686868"/>
+          </a:solidFill>
+          <a:ln>
+            <a:noFill/>
+          </a:ln>
+          <a:effectLst>
+            <a:innerShdw blurRad="381000" dist="127000" dir="8100000">
+              <a:prstClr val="black">
+                <a:alpha val="50000"/>
+              </a:prstClr>
+            </a:innerShdw>
+          </a:effectLst>
+          <a:scene3d>
+            <a:camera prst="orthographicFront"/>
+            <a:lightRig rig="threePt" dir="t">
+              <a:rot lat="0" lon="0" rev="8400000"/>
+            </a:lightRig>
+          </a:scene3d>
+          <a:sp3d/>
+        </p:spPr>
+        <p:style>
+          <a:lnRef idx="2">
+            <a:schemeClr val="accent1">
+              <a:shade val="50000"/>
+            </a:schemeClr>
+          </a:lnRef>
+          <a:fillRef idx="1">
+            <a:schemeClr val="accent1"/>
+          </a:fillRef>
+          <a:effectRef idx="0">
+            <a:schemeClr val="accent1"/>
+          </a:effectRef>
+          <a:fontRef idx="minor">
+            <a:schemeClr val="lt1"/>
+          </a:fontRef>
+        </p:style>
+        <p:txBody>
+          <a:bodyPr rtlCol="0" anchor="ctr"/>
+          <a:lstStyle/>
+          <a:p>
+            <a:pPr algn="ctr"/>
+            <a:endParaRPr kumimoji="1" lang="ja-JP" altLang="en-US"/>
+          </a:p>
+        </p:txBody>
+      </p:sp>
+      <p:sp>
+        <p:nvSpPr>
+          <p:cNvPr id="18" name="台形 17">
+            <a:extLst>
+              <a:ext uri="{FF2B5EF4-FFF2-40B4-BE49-F238E27FC236}">
+                <a16:creationId xmlns:a16="http://schemas.microsoft.com/office/drawing/2014/main" id="{5C247587-AEF8-8427-3FF6-10557A4603BE}"/>
+              </a:ext>
+            </a:extLst>
+          </p:cNvPr>
+          <p:cNvSpPr/>
+          <p:nvPr/>
+        </p:nvSpPr>
+        <p:spPr>
+          <a:xfrm>
+            <a:off x="3119120" y="4561420"/>
+            <a:ext cx="792249" cy="406836"/>
+          </a:xfrm>
+          <a:prstGeom prst="trapezoid">
+            <a:avLst/>
+          </a:prstGeom>
+          <a:solidFill>
+            <a:srgbClr val="686868"/>
+          </a:solidFill>
+          <a:ln>
+            <a:noFill/>
+          </a:ln>
+          <a:effectLst>
+            <a:innerShdw blurRad="381000" dist="127000" dir="8100000">
+              <a:prstClr val="black">
+                <a:alpha val="50000"/>
+              </a:prstClr>
+            </a:innerShdw>
+          </a:effectLst>
+          <a:scene3d>
+            <a:camera prst="orthographicFront"/>
+            <a:lightRig rig="threePt" dir="t">
+              <a:rot lat="0" lon="0" rev="8400000"/>
+            </a:lightRig>
+          </a:scene3d>
+          <a:sp3d/>
+        </p:spPr>
+        <p:style>
+          <a:lnRef idx="2">
+            <a:schemeClr val="accent1">
+              <a:shade val="50000"/>
+            </a:schemeClr>
+          </a:lnRef>
+          <a:fillRef idx="1">
+            <a:schemeClr val="accent1"/>
+          </a:fillRef>
+          <a:effectRef idx="0">
+            <a:schemeClr val="accent1"/>
+          </a:effectRef>
+          <a:fontRef idx="minor">
+            <a:schemeClr val="lt1"/>
+          </a:fontRef>
+        </p:style>
+        <p:txBody>
+          <a:bodyPr rtlCol="0" anchor="ctr"/>
+          <a:lstStyle/>
+          <a:p>
+            <a:pPr algn="ctr"/>
+            <a:endParaRPr kumimoji="1" lang="ja-JP" altLang="en-US"/>
+          </a:p>
+        </p:txBody>
+      </p:sp>
+      <p:sp>
+        <p:nvSpPr>
+          <p:cNvPr id="19" name="台形 18">
+            <a:extLst>
+              <a:ext uri="{FF2B5EF4-FFF2-40B4-BE49-F238E27FC236}">
+                <a16:creationId xmlns:a16="http://schemas.microsoft.com/office/drawing/2014/main" id="{DFE7D7B3-FD3E-F955-E1F8-347C2FD2A553}"/>
+              </a:ext>
+            </a:extLst>
+          </p:cNvPr>
+          <p:cNvSpPr/>
+          <p:nvPr/>
+        </p:nvSpPr>
+        <p:spPr>
+          <a:xfrm>
+            <a:off x="5205307" y="4351880"/>
+            <a:ext cx="800202" cy="544463"/>
+          </a:xfrm>
+          <a:prstGeom prst="trapezoid">
+            <a:avLst/>
+          </a:prstGeom>
+          <a:solidFill>
+            <a:srgbClr val="686868"/>
+          </a:solidFill>
+          <a:ln>
+            <a:noFill/>
+          </a:ln>
+          <a:effectLst>
+            <a:innerShdw blurRad="381000" dist="127000" dir="8100000">
+              <a:prstClr val="black">
+                <a:alpha val="50000"/>
+              </a:prstClr>
+            </a:innerShdw>
+          </a:effectLst>
+          <a:scene3d>
+            <a:camera prst="orthographicFront"/>
+            <a:lightRig rig="threePt" dir="t">
+              <a:rot lat="0" lon="0" rev="8400000"/>
+            </a:lightRig>
+          </a:scene3d>
+          <a:sp3d/>
+        </p:spPr>
+        <p:style>
+          <a:lnRef idx="2">
+            <a:schemeClr val="accent1">
+              <a:shade val="50000"/>
+            </a:schemeClr>
+          </a:lnRef>
+          <a:fillRef idx="1">
+            <a:schemeClr val="accent1"/>
+          </a:fillRef>
+          <a:effectRef idx="0">
+            <a:schemeClr val="accent1"/>
+          </a:effectRef>
+          <a:fontRef idx="minor">
+            <a:schemeClr val="lt1"/>
+          </a:fontRef>
+        </p:style>
+        <p:txBody>
+          <a:bodyPr rtlCol="0" anchor="ctr"/>
+          <a:lstStyle/>
+          <a:p>
+            <a:pPr algn="ctr"/>
+            <a:endParaRPr kumimoji="1" lang="ja-JP" altLang="en-US"/>
+          </a:p>
+        </p:txBody>
+      </p:sp>
+      <p:sp>
+        <p:nvSpPr>
+          <p:cNvPr id="20" name="台形 19">
+            <a:extLst>
+              <a:ext uri="{FF2B5EF4-FFF2-40B4-BE49-F238E27FC236}">
+                <a16:creationId xmlns:a16="http://schemas.microsoft.com/office/drawing/2014/main" id="{75408815-03E2-CE25-8DE4-2BFD8D19413C}"/>
+              </a:ext>
+            </a:extLst>
+          </p:cNvPr>
+          <p:cNvSpPr/>
+          <p:nvPr/>
+        </p:nvSpPr>
+        <p:spPr>
+          <a:xfrm rot="10800000">
+            <a:off x="4238001" y="3989425"/>
+            <a:ext cx="845815" cy="259515"/>
+          </a:xfrm>
+          <a:prstGeom prst="trapezoid">
+            <a:avLst/>
+          </a:prstGeom>
+          <a:solidFill>
+            <a:srgbClr val="4D4D4D"/>
+          </a:solidFill>
+          <a:ln>
+            <a:noFill/>
+          </a:ln>
+          <a:effectLst>
+            <a:innerShdw blurRad="381000" dist="127000" dir="8100000">
+              <a:prstClr val="black">
+                <a:alpha val="50000"/>
+              </a:prstClr>
+            </a:innerShdw>
+          </a:effectLst>
+          <a:scene3d>
+            <a:camera prst="orthographicFront"/>
+            <a:lightRig rig="threePt" dir="t">
+              <a:rot lat="0" lon="0" rev="8400000"/>
+            </a:lightRig>
+          </a:scene3d>
+          <a:sp3d/>
+        </p:spPr>
+        <p:style>
+          <a:lnRef idx="2">
+            <a:schemeClr val="accent1">
+              <a:shade val="50000"/>
+            </a:schemeClr>
+          </a:lnRef>
+          <a:fillRef idx="1">
+            <a:schemeClr val="accent1"/>
+          </a:fillRef>
+          <a:effectRef idx="0">
+            <a:schemeClr val="accent1"/>
+          </a:effectRef>
+          <a:fontRef idx="minor">
+            <a:schemeClr val="lt1"/>
+          </a:fontRef>
+        </p:style>
+        <p:txBody>
+          <a:bodyPr rtlCol="0" anchor="ctr"/>
+          <a:lstStyle/>
+          <a:p>
+            <a:pPr algn="ctr"/>
+            <a:endParaRPr kumimoji="1" lang="ja-JP" altLang="en-US"/>
+          </a:p>
+        </p:txBody>
+      </p:sp>
+      <p:sp>
+        <p:nvSpPr>
+          <p:cNvPr id="22" name="台形 21">
+            <a:extLst>
+              <a:ext uri="{FF2B5EF4-FFF2-40B4-BE49-F238E27FC236}">
+                <a16:creationId xmlns:a16="http://schemas.microsoft.com/office/drawing/2014/main" id="{BDE6509D-CED0-49EB-4086-9583316142E8}"/>
+              </a:ext>
+            </a:extLst>
+          </p:cNvPr>
+          <p:cNvSpPr/>
+          <p:nvPr/>
+        </p:nvSpPr>
+        <p:spPr>
+          <a:xfrm rot="10800000">
+            <a:off x="5229679" y="5121156"/>
+            <a:ext cx="845815" cy="326921"/>
+          </a:xfrm>
+          <a:prstGeom prst="trapezoid">
+            <a:avLst/>
+          </a:prstGeom>
+          <a:solidFill>
+            <a:srgbClr val="4D4D4D"/>
+          </a:solidFill>
+          <a:ln>
+            <a:noFill/>
+          </a:ln>
+          <a:effectLst>
+            <a:innerShdw blurRad="381000" dist="127000" dir="8100000">
+              <a:prstClr val="black">
+                <a:alpha val="50000"/>
+              </a:prstClr>
+            </a:innerShdw>
+          </a:effectLst>
+          <a:scene3d>
+            <a:camera prst="orthographicFront"/>
+            <a:lightRig rig="threePt" dir="t">
+              <a:rot lat="0" lon="0" rev="8400000"/>
+            </a:lightRig>
+          </a:scene3d>
+          <a:sp3d/>
+        </p:spPr>
+        <p:style>
+          <a:lnRef idx="2">
+            <a:schemeClr val="accent1">
+              <a:shade val="50000"/>
+            </a:schemeClr>
+          </a:lnRef>
+          <a:fillRef idx="1">
+            <a:schemeClr val="accent1"/>
+          </a:fillRef>
+          <a:effectRef idx="0">
+            <a:schemeClr val="accent1"/>
+          </a:effectRef>
+          <a:fontRef idx="minor">
+            <a:schemeClr val="lt1"/>
+          </a:fontRef>
+        </p:style>
+        <p:txBody>
+          <a:bodyPr rtlCol="0" anchor="ctr"/>
+          <a:lstStyle/>
+          <a:p>
+            <a:pPr algn="ctr"/>
+            <a:endParaRPr kumimoji="1" lang="ja-JP" altLang="en-US"/>
+          </a:p>
+        </p:txBody>
+      </p:sp>
+      <p:sp>
+        <p:nvSpPr>
+          <p:cNvPr id="23" name="台形 22">
+            <a:extLst>
+              <a:ext uri="{FF2B5EF4-FFF2-40B4-BE49-F238E27FC236}">
+                <a16:creationId xmlns:a16="http://schemas.microsoft.com/office/drawing/2014/main" id="{8091281B-90CB-2C53-E4B9-822CBEA42283}"/>
+              </a:ext>
+            </a:extLst>
+          </p:cNvPr>
+          <p:cNvSpPr/>
+          <p:nvPr/>
+        </p:nvSpPr>
+        <p:spPr>
+          <a:xfrm>
+            <a:off x="7224090" y="3984170"/>
+            <a:ext cx="566381" cy="466531"/>
+          </a:xfrm>
+          <a:prstGeom prst="trapezoid">
+            <a:avLst/>
+          </a:prstGeom>
+          <a:solidFill>
+            <a:srgbClr val="4D4D4D"/>
+          </a:solidFill>
+          <a:ln>
+            <a:noFill/>
+          </a:ln>
+          <a:effectLst>
+            <a:innerShdw blurRad="381000" dist="127000" dir="8100000">
+              <a:prstClr val="black">
+                <a:alpha val="50000"/>
+              </a:prstClr>
+            </a:innerShdw>
+          </a:effectLst>
+          <a:scene3d>
+            <a:camera prst="orthographicFront"/>
+            <a:lightRig rig="threePt" dir="t">
+              <a:rot lat="0" lon="0" rev="8400000"/>
+            </a:lightRig>
+          </a:scene3d>
+          <a:sp3d/>
+        </p:spPr>
+        <p:style>
+          <a:lnRef idx="2">
+            <a:schemeClr val="accent1">
+              <a:shade val="50000"/>
+            </a:schemeClr>
+          </a:lnRef>
+          <a:fillRef idx="1">
+            <a:schemeClr val="accent1"/>
+          </a:fillRef>
+          <a:effectRef idx="0">
+            <a:schemeClr val="accent1"/>
+          </a:effectRef>
+          <a:fontRef idx="minor">
+            <a:schemeClr val="lt1"/>
+          </a:fontRef>
+        </p:style>
+        <p:txBody>
+          <a:bodyPr rtlCol="0" anchor="ctr"/>
+          <a:lstStyle/>
+          <a:p>
+            <a:pPr algn="ctr"/>
+            <a:endParaRPr kumimoji="1" lang="ja-JP" altLang="en-US"/>
+          </a:p>
+        </p:txBody>
+      </p:sp>
+      <p:sp>
+        <p:nvSpPr>
+          <p:cNvPr id="24" name="台形 23">
+            <a:extLst>
+              <a:ext uri="{FF2B5EF4-FFF2-40B4-BE49-F238E27FC236}">
+                <a16:creationId xmlns:a16="http://schemas.microsoft.com/office/drawing/2014/main" id="{D1A09D5A-0E29-31DB-246D-7D9FF84366B7}"/>
+              </a:ext>
+            </a:extLst>
+          </p:cNvPr>
+          <p:cNvSpPr/>
+          <p:nvPr/>
+        </p:nvSpPr>
+        <p:spPr>
+          <a:xfrm rot="10800000">
+            <a:off x="6175225" y="3992348"/>
+            <a:ext cx="935534" cy="235900"/>
+          </a:xfrm>
+          <a:prstGeom prst="trapezoid">
+            <a:avLst/>
+          </a:prstGeom>
+          <a:solidFill>
+            <a:srgbClr val="4D4D4D"/>
+          </a:solidFill>
+          <a:ln>
+            <a:noFill/>
+          </a:ln>
+          <a:effectLst>
+            <a:innerShdw blurRad="381000" dist="127000" dir="8100000">
+              <a:prstClr val="black">
+                <a:alpha val="50000"/>
+              </a:prstClr>
+            </a:innerShdw>
+          </a:effectLst>
+          <a:scene3d>
+            <a:camera prst="orthographicFront"/>
+            <a:lightRig rig="threePt" dir="t">
+              <a:rot lat="0" lon="0" rev="8400000"/>
+            </a:lightRig>
+          </a:scene3d>
+          <a:sp3d/>
+        </p:spPr>
+        <p:style>
+          <a:lnRef idx="2">
+            <a:schemeClr val="accent1">
+              <a:shade val="50000"/>
+            </a:schemeClr>
+          </a:lnRef>
+          <a:fillRef idx="1">
+            <a:schemeClr val="accent1"/>
+          </a:fillRef>
+          <a:effectRef idx="0">
+            <a:schemeClr val="accent1"/>
+          </a:effectRef>
+          <a:fontRef idx="minor">
+            <a:schemeClr val="lt1"/>
+          </a:fontRef>
+        </p:style>
+        <p:txBody>
+          <a:bodyPr rtlCol="0" anchor="ctr"/>
+          <a:lstStyle/>
+          <a:p>
+            <a:pPr algn="ctr"/>
+            <a:endParaRPr kumimoji="1" lang="ja-JP" altLang="en-US"/>
+          </a:p>
+        </p:txBody>
+      </p:sp>
+      <p:sp>
+        <p:nvSpPr>
+          <p:cNvPr id="25" name="台形 24">
+            <a:extLst>
+              <a:ext uri="{FF2B5EF4-FFF2-40B4-BE49-F238E27FC236}">
+                <a16:creationId xmlns:a16="http://schemas.microsoft.com/office/drawing/2014/main" id="{4784FEC4-8677-5F0B-9BDE-74E7E296BDEC}"/>
+              </a:ext>
+            </a:extLst>
+          </p:cNvPr>
+          <p:cNvSpPr/>
+          <p:nvPr/>
+        </p:nvSpPr>
+        <p:spPr>
+          <a:xfrm>
+            <a:off x="4622398" y="3584968"/>
+            <a:ext cx="845815" cy="367711"/>
+          </a:xfrm>
+          <a:prstGeom prst="trapezoid">
+            <a:avLst/>
+          </a:prstGeom>
+          <a:solidFill>
+            <a:srgbClr val="8C8C8C"/>
+          </a:solidFill>
+          <a:ln>
+            <a:noFill/>
+          </a:ln>
+          <a:effectLst>
+            <a:innerShdw blurRad="381000" dist="127000" dir="8100000">
+              <a:prstClr val="black">
+                <a:alpha val="50000"/>
+              </a:prstClr>
+            </a:innerShdw>
+          </a:effectLst>
+          <a:scene3d>
+            <a:camera prst="orthographicFront"/>
+            <a:lightRig rig="threePt" dir="t">
+              <a:rot lat="0" lon="0" rev="8400000"/>
+            </a:lightRig>
+          </a:scene3d>
+          <a:sp3d/>
+        </p:spPr>
+        <p:style>
+          <a:lnRef idx="2">
+            <a:schemeClr val="accent1">
+              <a:shade val="50000"/>
+            </a:schemeClr>
+          </a:lnRef>
+          <a:fillRef idx="1">
+            <a:schemeClr val="accent1"/>
+          </a:fillRef>
+          <a:effectRef idx="0">
+            <a:schemeClr val="accent1"/>
+          </a:effectRef>
+          <a:fontRef idx="minor">
+            <a:schemeClr val="lt1"/>
+          </a:fontRef>
+        </p:style>
+        <p:txBody>
+          <a:bodyPr rtlCol="0" anchor="ctr"/>
+          <a:lstStyle/>
+          <a:p>
+            <a:pPr algn="ctr"/>
+            <a:endParaRPr kumimoji="1" lang="ja-JP" altLang="en-US"/>
+          </a:p>
+        </p:txBody>
+      </p:sp>
+      <p:sp>
+        <p:nvSpPr>
+          <p:cNvPr id="27" name="台形 26">
+            <a:extLst>
+              <a:ext uri="{FF2B5EF4-FFF2-40B4-BE49-F238E27FC236}">
+                <a16:creationId xmlns:a16="http://schemas.microsoft.com/office/drawing/2014/main" id="{AEB69F98-A569-295F-5A2D-3C3A2FFACBB7}"/>
+              </a:ext>
+            </a:extLst>
+          </p:cNvPr>
+          <p:cNvSpPr/>
+          <p:nvPr/>
+        </p:nvSpPr>
+        <p:spPr>
+          <a:xfrm rot="10800000">
+            <a:off x="6111541" y="3585269"/>
+            <a:ext cx="845815" cy="367711"/>
+          </a:xfrm>
+          <a:prstGeom prst="trapezoid">
+            <a:avLst/>
+          </a:prstGeom>
+          <a:solidFill>
+            <a:srgbClr val="686868"/>
+          </a:solidFill>
+          <a:ln>
+            <a:noFill/>
+          </a:ln>
+          <a:effectLst>
+            <a:innerShdw blurRad="381000" dist="127000" dir="8100000">
+              <a:prstClr val="black">
+                <a:alpha val="50000"/>
+              </a:prstClr>
+            </a:innerShdw>
+          </a:effectLst>
+          <a:scene3d>
+            <a:camera prst="orthographicFront"/>
+            <a:lightRig rig="threePt" dir="t">
+              <a:rot lat="0" lon="0" rev="8400000"/>
+            </a:lightRig>
+          </a:scene3d>
+          <a:sp3d/>
+        </p:spPr>
+        <p:style>
+          <a:lnRef idx="2">
+            <a:schemeClr val="accent1">
+              <a:shade val="50000"/>
+            </a:schemeClr>
+          </a:lnRef>
+          <a:fillRef idx="1">
+            <a:schemeClr val="accent1"/>
+          </a:fillRef>
+          <a:effectRef idx="0">
+            <a:schemeClr val="accent1"/>
+          </a:effectRef>
+          <a:fontRef idx="minor">
+            <a:schemeClr val="lt1"/>
+          </a:fontRef>
+        </p:style>
+        <p:txBody>
+          <a:bodyPr rtlCol="0" anchor="ctr"/>
+          <a:lstStyle/>
+          <a:p>
+            <a:pPr algn="ctr"/>
+            <a:endParaRPr kumimoji="1" lang="ja-JP" altLang="en-US"/>
+          </a:p>
+        </p:txBody>
+      </p:sp>
+      <p:sp>
+        <p:nvSpPr>
+          <p:cNvPr id="28" name="台形 27">
+            <a:extLst>
+              <a:ext uri="{FF2B5EF4-FFF2-40B4-BE49-F238E27FC236}">
+                <a16:creationId xmlns:a16="http://schemas.microsoft.com/office/drawing/2014/main" id="{E4852248-409F-DC1B-38B5-E2B71589A8C1}"/>
+              </a:ext>
+            </a:extLst>
+          </p:cNvPr>
+          <p:cNvSpPr/>
+          <p:nvPr/>
+        </p:nvSpPr>
+        <p:spPr>
+          <a:xfrm>
+            <a:off x="3526951" y="3605422"/>
+            <a:ext cx="845815" cy="367711"/>
+          </a:xfrm>
+          <a:prstGeom prst="trapezoid">
+            <a:avLst/>
+          </a:prstGeom>
+          <a:solidFill>
+            <a:srgbClr val="8C8C8C"/>
+          </a:solidFill>
+          <a:ln>
+            <a:noFill/>
+          </a:ln>
+          <a:effectLst>
+            <a:innerShdw blurRad="381000" dist="127000" dir="8100000">
+              <a:prstClr val="black">
+                <a:alpha val="50000"/>
+              </a:prstClr>
+            </a:innerShdw>
+          </a:effectLst>
+          <a:scene3d>
+            <a:camera prst="orthographicFront"/>
+            <a:lightRig rig="threePt" dir="t">
+              <a:rot lat="0" lon="0" rev="8400000"/>
+            </a:lightRig>
+          </a:scene3d>
+          <a:sp3d/>
+        </p:spPr>
+        <p:style>
+          <a:lnRef idx="2">
+            <a:schemeClr val="accent1">
+              <a:shade val="50000"/>
+            </a:schemeClr>
+          </a:lnRef>
+          <a:fillRef idx="1">
+            <a:schemeClr val="accent1"/>
+          </a:fillRef>
+          <a:effectRef idx="0">
+            <a:schemeClr val="accent1"/>
+          </a:effectRef>
+          <a:fontRef idx="minor">
+            <a:schemeClr val="lt1"/>
+          </a:fontRef>
+        </p:style>
+        <p:txBody>
+          <a:bodyPr rtlCol="0" anchor="ctr"/>
+          <a:lstStyle/>
+          <a:p>
+            <a:pPr algn="ctr"/>
+            <a:endParaRPr kumimoji="1" lang="ja-JP" altLang="en-US"/>
+          </a:p>
+        </p:txBody>
+      </p:sp>
+      <p:sp>
+        <p:nvSpPr>
+          <p:cNvPr id="29" name="台形 28">
+            <a:extLst>
+              <a:ext uri="{FF2B5EF4-FFF2-40B4-BE49-F238E27FC236}">
+                <a16:creationId xmlns:a16="http://schemas.microsoft.com/office/drawing/2014/main" id="{0874D76D-A385-DF64-224D-02903BFD8C20}"/>
+              </a:ext>
+            </a:extLst>
+          </p:cNvPr>
+          <p:cNvSpPr/>
+          <p:nvPr/>
+        </p:nvSpPr>
+        <p:spPr>
+          <a:xfrm>
+            <a:off x="7193895" y="3594313"/>
+            <a:ext cx="845815" cy="367711"/>
+          </a:xfrm>
+          <a:prstGeom prst="trapezoid">
+            <a:avLst/>
+          </a:prstGeom>
+          <a:solidFill>
+            <a:srgbClr val="686868"/>
+          </a:solidFill>
+          <a:ln>
+            <a:noFill/>
+          </a:ln>
+          <a:effectLst>
+            <a:innerShdw blurRad="381000" dist="127000" dir="8100000">
+              <a:prstClr val="black">
+                <a:alpha val="50000"/>
+              </a:prstClr>
+            </a:innerShdw>
+          </a:effectLst>
+          <a:scene3d>
+            <a:camera prst="orthographicFront"/>
+            <a:lightRig rig="threePt" dir="t">
+              <a:rot lat="0" lon="0" rev="8400000"/>
+            </a:lightRig>
+          </a:scene3d>
+          <a:sp3d/>
+        </p:spPr>
+        <p:style>
+          <a:lnRef idx="2">
+            <a:schemeClr val="accent1">
+              <a:shade val="50000"/>
+            </a:schemeClr>
+          </a:lnRef>
+          <a:fillRef idx="1">
+            <a:schemeClr val="accent1"/>
+          </a:fillRef>
+          <a:effectRef idx="0">
+            <a:schemeClr val="accent1"/>
+          </a:effectRef>
+          <a:fontRef idx="minor">
+            <a:schemeClr val="lt1"/>
+          </a:fontRef>
+        </p:style>
+        <p:txBody>
+          <a:bodyPr rtlCol="0" anchor="ctr"/>
+          <a:lstStyle/>
+          <a:p>
+            <a:pPr algn="ctr"/>
+            <a:endParaRPr kumimoji="1" lang="ja-JP" altLang="en-US"/>
+          </a:p>
+        </p:txBody>
+      </p:sp>
+      <p:sp>
+        <p:nvSpPr>
+          <p:cNvPr id="30" name="台形 29">
+            <a:extLst>
+              <a:ext uri="{FF2B5EF4-FFF2-40B4-BE49-F238E27FC236}">
+                <a16:creationId xmlns:a16="http://schemas.microsoft.com/office/drawing/2014/main" id="{8DA2B145-8815-C99F-FB9C-8B2A6CAD88E2}"/>
+              </a:ext>
+            </a:extLst>
+          </p:cNvPr>
+          <p:cNvSpPr/>
+          <p:nvPr/>
+        </p:nvSpPr>
+        <p:spPr>
+          <a:xfrm>
+            <a:off x="2828563" y="3582955"/>
+            <a:ext cx="499152" cy="402788"/>
+          </a:xfrm>
+          <a:prstGeom prst="trapezoid">
+            <a:avLst>
+              <a:gd name="adj" fmla="val 11194"/>
+            </a:avLst>
+          </a:prstGeom>
+          <a:solidFill>
+            <a:srgbClr val="4D4D4D"/>
+          </a:solidFill>
+          <a:ln>
+            <a:noFill/>
+          </a:ln>
+          <a:effectLst>
+            <a:innerShdw blurRad="381000" dist="127000" dir="8100000">
+              <a:prstClr val="black">
+                <a:alpha val="50000"/>
+              </a:prstClr>
+            </a:innerShdw>
+          </a:effectLst>
+          <a:scene3d>
+            <a:camera prst="orthographicFront"/>
+            <a:lightRig rig="threePt" dir="t">
+              <a:rot lat="0" lon="0" rev="8400000"/>
+            </a:lightRig>
+          </a:scene3d>
+          <a:sp3d/>
+        </p:spPr>
+        <p:style>
+          <a:lnRef idx="2">
+            <a:schemeClr val="accent1">
+              <a:shade val="50000"/>
+            </a:schemeClr>
+          </a:lnRef>
+          <a:fillRef idx="1">
+            <a:schemeClr val="accent1"/>
+          </a:fillRef>
+          <a:effectRef idx="0">
+            <a:schemeClr val="accent1"/>
+          </a:effectRef>
+          <a:fontRef idx="minor">
+            <a:schemeClr val="lt1"/>
+          </a:fontRef>
+        </p:style>
+        <p:txBody>
+          <a:bodyPr rtlCol="0" anchor="ctr"/>
+          <a:lstStyle/>
+          <a:p>
+            <a:pPr algn="ctr"/>
+            <a:endParaRPr kumimoji="1" lang="ja-JP" altLang="en-US"/>
+          </a:p>
+        </p:txBody>
+      </p:sp>
+    </p:spTree>
+    <p:extLst>
+      <p:ext uri="{BB962C8B-B14F-4D97-AF65-F5344CB8AC3E}">
+        <p14:creationId xmlns:p14="http://schemas.microsoft.com/office/powerpoint/2010/main" val="3107475420"/>
       </p:ext>
     </p:extLst>
   </p:cSld>

--- a/default/filed parts.pptx
+++ b/default/filed parts.pptx
@@ -17,6 +17,7 @@
     <p:sldId id="265" r:id="rId11"/>
     <p:sldId id="263" r:id="rId12"/>
     <p:sldId id="269" r:id="rId13"/>
+    <p:sldId id="270" r:id="rId14"/>
   </p:sldIdLst>
   <p:sldSz cx="12192000" cy="6858000"/>
   <p:notesSz cx="6858000" cy="9144000"/>
@@ -252,7 +253,7 @@
           <a:p>
             <a:fld id="{0E085FA6-3BB9-47BA-8D81-299A75D1B58A}" type="datetimeFigureOut">
               <a:rPr kumimoji="1" lang="ja-JP" altLang="en-US" smtClean="0"/>
-              <a:t>2025/10/21</a:t>
+              <a:t>2025/10/23</a:t>
             </a:fld>
             <a:endParaRPr kumimoji="1" lang="ja-JP" altLang="en-US"/>
           </a:p>
@@ -452,7 +453,7 @@
           <a:p>
             <a:fld id="{0E085FA6-3BB9-47BA-8D81-299A75D1B58A}" type="datetimeFigureOut">
               <a:rPr kumimoji="1" lang="ja-JP" altLang="en-US" smtClean="0"/>
-              <a:t>2025/10/21</a:t>
+              <a:t>2025/10/23</a:t>
             </a:fld>
             <a:endParaRPr kumimoji="1" lang="ja-JP" altLang="en-US"/>
           </a:p>
@@ -662,7 +663,7 @@
           <a:p>
             <a:fld id="{0E085FA6-3BB9-47BA-8D81-299A75D1B58A}" type="datetimeFigureOut">
               <a:rPr kumimoji="1" lang="ja-JP" altLang="en-US" smtClean="0"/>
-              <a:t>2025/10/21</a:t>
+              <a:t>2025/10/23</a:t>
             </a:fld>
             <a:endParaRPr kumimoji="1" lang="ja-JP" altLang="en-US"/>
           </a:p>
@@ -862,7 +863,7 @@
           <a:p>
             <a:fld id="{0E085FA6-3BB9-47BA-8D81-299A75D1B58A}" type="datetimeFigureOut">
               <a:rPr kumimoji="1" lang="ja-JP" altLang="en-US" smtClean="0"/>
-              <a:t>2025/10/21</a:t>
+              <a:t>2025/10/23</a:t>
             </a:fld>
             <a:endParaRPr kumimoji="1" lang="ja-JP" altLang="en-US"/>
           </a:p>
@@ -1107,7 +1108,7 @@
           <a:p>
             <a:fld id="{0E085FA6-3BB9-47BA-8D81-299A75D1B58A}" type="datetimeFigureOut">
               <a:rPr kumimoji="1" lang="ja-JP" altLang="en-US" smtClean="0"/>
-              <a:t>2025/10/21</a:t>
+              <a:t>2025/10/23</a:t>
             </a:fld>
             <a:endParaRPr kumimoji="1" lang="ja-JP" altLang="en-US"/>
           </a:p>
@@ -1400,7 +1401,7 @@
           <a:p>
             <a:fld id="{0E085FA6-3BB9-47BA-8D81-299A75D1B58A}" type="datetimeFigureOut">
               <a:rPr kumimoji="1" lang="ja-JP" altLang="en-US" smtClean="0"/>
-              <a:t>2025/10/21</a:t>
+              <a:t>2025/10/23</a:t>
             </a:fld>
             <a:endParaRPr kumimoji="1" lang="ja-JP" altLang="en-US"/>
           </a:p>
@@ -1828,7 +1829,7 @@
           <a:p>
             <a:fld id="{0E085FA6-3BB9-47BA-8D81-299A75D1B58A}" type="datetimeFigureOut">
               <a:rPr kumimoji="1" lang="ja-JP" altLang="en-US" smtClean="0"/>
-              <a:t>2025/10/21</a:t>
+              <a:t>2025/10/23</a:t>
             </a:fld>
             <a:endParaRPr kumimoji="1" lang="ja-JP" altLang="en-US"/>
           </a:p>
@@ -1945,7 +1946,7 @@
           <a:p>
             <a:fld id="{0E085FA6-3BB9-47BA-8D81-299A75D1B58A}" type="datetimeFigureOut">
               <a:rPr kumimoji="1" lang="ja-JP" altLang="en-US" smtClean="0"/>
-              <a:t>2025/10/21</a:t>
+              <a:t>2025/10/23</a:t>
             </a:fld>
             <a:endParaRPr kumimoji="1" lang="ja-JP" altLang="en-US"/>
           </a:p>
@@ -2040,7 +2041,7 @@
           <a:p>
             <a:fld id="{0E085FA6-3BB9-47BA-8D81-299A75D1B58A}" type="datetimeFigureOut">
               <a:rPr kumimoji="1" lang="ja-JP" altLang="en-US" smtClean="0"/>
-              <a:t>2025/10/21</a:t>
+              <a:t>2025/10/23</a:t>
             </a:fld>
             <a:endParaRPr kumimoji="1" lang="ja-JP" altLang="en-US"/>
           </a:p>
@@ -2347,7 +2348,7 @@
           <a:p>
             <a:fld id="{0E085FA6-3BB9-47BA-8D81-299A75D1B58A}" type="datetimeFigureOut">
               <a:rPr kumimoji="1" lang="ja-JP" altLang="en-US" smtClean="0"/>
-              <a:t>2025/10/21</a:t>
+              <a:t>2025/10/23</a:t>
             </a:fld>
             <a:endParaRPr kumimoji="1" lang="ja-JP" altLang="en-US"/>
           </a:p>
@@ -2599,7 +2600,7 @@
           <a:p>
             <a:fld id="{0E085FA6-3BB9-47BA-8D81-299A75D1B58A}" type="datetimeFigureOut">
               <a:rPr kumimoji="1" lang="ja-JP" altLang="en-US" smtClean="0"/>
-              <a:t>2025/10/21</a:t>
+              <a:t>2025/10/23</a:t>
             </a:fld>
             <a:endParaRPr kumimoji="1" lang="ja-JP" altLang="en-US"/>
           </a:p>
@@ -2842,7 +2843,7 @@
           <a:p>
             <a:fld id="{0E085FA6-3BB9-47BA-8D81-299A75D1B58A}" type="datetimeFigureOut">
               <a:rPr kumimoji="1" lang="ja-JP" altLang="en-US" smtClean="0"/>
-              <a:t>2025/10/21</a:t>
+              <a:t>2025/10/23</a:t>
             </a:fld>
             <a:endParaRPr kumimoji="1" lang="ja-JP" altLang="en-US"/>
           </a:p>
@@ -3249,13 +3250,13 @@
       </p:grpSpPr>
       <p:sp>
         <p:nvSpPr>
-          <p:cNvPr id="28" name="正方形/長方形 27"/>
+          <p:cNvPr id="27" name="正方形/長方形 26"/>
           <p:cNvSpPr/>
           <p:nvPr/>
         </p:nvSpPr>
         <p:spPr>
           <a:xfrm>
-            <a:off x="1783793" y="3822876"/>
+            <a:off x="8255702" y="3818113"/>
             <a:ext cx="2152505" cy="2152505"/>
           </a:xfrm>
           <a:prstGeom prst="rect">
@@ -3297,7 +3298,13 @@
       </p:sp>
       <p:pic>
         <p:nvPicPr>
-          <p:cNvPr id="3" name="図 2"/>
+          <p:cNvPr id="11" name="図 10">
+            <a:extLst>
+              <a:ext uri="{FF2B5EF4-FFF2-40B4-BE49-F238E27FC236}">
+                <a16:creationId xmlns:a16="http://schemas.microsoft.com/office/drawing/2014/main" id="{7696B076-5506-1253-C00F-5D42A23B076D}"/>
+              </a:ext>
+            </a:extLst>
+          </p:cNvPr>
           <p:cNvPicPr>
             <a:picLocks noChangeAspect="1"/>
           </p:cNvPicPr>
@@ -3311,29 +3318,24 @@
         </p:blipFill>
         <p:spPr>
           <a:xfrm>
-            <a:off x="2211939" y="3839903"/>
-            <a:ext cx="1266319" cy="2023200"/>
+            <a:off x="8577109" y="4255569"/>
+            <a:ext cx="1551600" cy="1219754"/>
           </a:xfrm>
           <a:prstGeom prst="rect">
             <a:avLst/>
           </a:prstGeom>
-          <a:ln>
-            <a:noFill/>
-          </a:ln>
         </p:spPr>
       </p:pic>
       <p:sp>
         <p:nvSpPr>
-          <p:cNvPr id="82" name="正方形/長方形 81"/>
-          <p:cNvSpPr>
-            <a:spLocks noChangeAspect="1"/>
-          </p:cNvSpPr>
+          <p:cNvPr id="28" name="正方形/長方形 27"/>
+          <p:cNvSpPr/>
           <p:nvPr/>
         </p:nvSpPr>
         <p:spPr>
           <a:xfrm>
-            <a:off x="302240" y="1216587"/>
-            <a:ext cx="832630" cy="832630"/>
+            <a:off x="1783793" y="3822876"/>
+            <a:ext cx="2152505" cy="2152505"/>
           </a:xfrm>
           <a:prstGeom prst="rect">
             <a:avLst/>
@@ -3372,201 +3374,9 @@
           </a:p>
         </p:txBody>
       </p:sp>
-      <p:sp>
-        <p:nvSpPr>
-          <p:cNvPr id="83" name="正方形/長方形 82"/>
-          <p:cNvSpPr>
-            <a:spLocks noChangeAspect="1"/>
-          </p:cNvSpPr>
-          <p:nvPr/>
-        </p:nvSpPr>
-        <p:spPr>
-          <a:xfrm>
-            <a:off x="293895" y="2655539"/>
-            <a:ext cx="832630" cy="832630"/>
-          </a:xfrm>
-          <a:prstGeom prst="rect">
-            <a:avLst/>
-          </a:prstGeom>
-          <a:solidFill>
-            <a:schemeClr val="bg1"/>
-          </a:solidFill>
-          <a:ln>
-            <a:solidFill>
-              <a:schemeClr val="tx1"/>
-            </a:solidFill>
-          </a:ln>
-        </p:spPr>
-        <p:style>
-          <a:lnRef idx="2">
-            <a:schemeClr val="accent1">
-              <a:shade val="50000"/>
-            </a:schemeClr>
-          </a:lnRef>
-          <a:fillRef idx="1">
-            <a:schemeClr val="accent1"/>
-          </a:fillRef>
-          <a:effectRef idx="0">
-            <a:schemeClr val="accent1"/>
-          </a:effectRef>
-          <a:fontRef idx="minor">
-            <a:schemeClr val="lt1"/>
-          </a:fontRef>
-        </p:style>
-        <p:txBody>
-          <a:bodyPr rtlCol="0" anchor="ctr"/>
-          <a:lstStyle/>
-          <a:p>
-            <a:pPr algn="ctr"/>
-            <a:endParaRPr kumimoji="1" lang="ja-JP" altLang="en-US"/>
-          </a:p>
-        </p:txBody>
-      </p:sp>
-      <p:sp>
-        <p:nvSpPr>
-          <p:cNvPr id="88" name="正方形/長方形 87"/>
-          <p:cNvSpPr>
-            <a:spLocks noChangeAspect="1"/>
-          </p:cNvSpPr>
-          <p:nvPr/>
-        </p:nvSpPr>
-        <p:spPr>
-          <a:xfrm>
-            <a:off x="302240" y="4101848"/>
-            <a:ext cx="832630" cy="832630"/>
-          </a:xfrm>
-          <a:prstGeom prst="rect">
-            <a:avLst/>
-          </a:prstGeom>
-          <a:solidFill>
-            <a:schemeClr val="bg1"/>
-          </a:solidFill>
-          <a:ln>
-            <a:solidFill>
-              <a:schemeClr val="tx1"/>
-            </a:solidFill>
-          </a:ln>
-        </p:spPr>
-        <p:style>
-          <a:lnRef idx="2">
-            <a:schemeClr val="accent1">
-              <a:shade val="50000"/>
-            </a:schemeClr>
-          </a:lnRef>
-          <a:fillRef idx="1">
-            <a:schemeClr val="accent1"/>
-          </a:fillRef>
-          <a:effectRef idx="0">
-            <a:schemeClr val="accent1"/>
-          </a:effectRef>
-          <a:fontRef idx="minor">
-            <a:schemeClr val="lt1"/>
-          </a:fontRef>
-        </p:style>
-        <p:txBody>
-          <a:bodyPr rtlCol="0" anchor="ctr"/>
-          <a:lstStyle/>
-          <a:p>
-            <a:pPr algn="ctr"/>
-            <a:endParaRPr kumimoji="1" lang="ja-JP" altLang="en-US"/>
-          </a:p>
-        </p:txBody>
-      </p:sp>
-      <p:sp>
-        <p:nvSpPr>
-          <p:cNvPr id="2" name="円/楕円 1"/>
-          <p:cNvSpPr/>
-          <p:nvPr/>
-        </p:nvSpPr>
-        <p:spPr>
-          <a:xfrm>
-            <a:off x="364577" y="1282392"/>
-            <a:ext cx="709251" cy="709251"/>
-          </a:xfrm>
-          <a:prstGeom prst="ellipse">
-            <a:avLst/>
-          </a:prstGeom>
-          <a:noFill/>
-          <a:ln w="57150">
-            <a:solidFill>
-              <a:srgbClr val="FF0000"/>
-            </a:solidFill>
-          </a:ln>
-        </p:spPr>
-        <p:style>
-          <a:lnRef idx="2">
-            <a:schemeClr val="accent1">
-              <a:shade val="50000"/>
-            </a:schemeClr>
-          </a:lnRef>
-          <a:fillRef idx="1">
-            <a:schemeClr val="accent1"/>
-          </a:fillRef>
-          <a:effectRef idx="0">
-            <a:schemeClr val="accent1"/>
-          </a:effectRef>
-          <a:fontRef idx="minor">
-            <a:schemeClr val="lt1"/>
-          </a:fontRef>
-        </p:style>
-        <p:txBody>
-          <a:bodyPr rtlCol="0" anchor="ctr"/>
-          <a:lstStyle/>
-          <a:p>
-            <a:pPr algn="ctr"/>
-            <a:endParaRPr kumimoji="1" lang="ja-JP" altLang="en-US"/>
-          </a:p>
-        </p:txBody>
-      </p:sp>
-      <p:sp>
-        <p:nvSpPr>
-          <p:cNvPr id="18" name="円/楕円 17"/>
-          <p:cNvSpPr/>
-          <p:nvPr/>
-        </p:nvSpPr>
-        <p:spPr>
-          <a:xfrm>
-            <a:off x="357144" y="2721344"/>
-            <a:ext cx="709251" cy="709251"/>
-          </a:xfrm>
-          <a:prstGeom prst="ellipse">
-            <a:avLst/>
-          </a:prstGeom>
-          <a:noFill/>
-          <a:ln w="57150">
-            <a:solidFill>
-              <a:schemeClr val="accent1"/>
-            </a:solidFill>
-          </a:ln>
-        </p:spPr>
-        <p:style>
-          <a:lnRef idx="2">
-            <a:schemeClr val="accent1">
-              <a:shade val="50000"/>
-            </a:schemeClr>
-          </a:lnRef>
-          <a:fillRef idx="1">
-            <a:schemeClr val="accent1"/>
-          </a:fillRef>
-          <a:effectRef idx="0">
-            <a:schemeClr val="accent1"/>
-          </a:effectRef>
-          <a:fontRef idx="minor">
-            <a:schemeClr val="lt1"/>
-          </a:fontRef>
-        </p:style>
-        <p:txBody>
-          <a:bodyPr rtlCol="0" anchor="ctr"/>
-          <a:lstStyle/>
-          <a:p>
-            <a:pPr algn="ctr"/>
-            <a:endParaRPr kumimoji="1" lang="ja-JP" altLang="en-US"/>
-          </a:p>
-        </p:txBody>
-      </p:sp>
       <p:pic>
         <p:nvPicPr>
-          <p:cNvPr id="4" name="図 3"/>
+          <p:cNvPr id="3" name="図 2"/>
           <p:cNvPicPr>
             <a:picLocks noChangeAspect="1"/>
           </p:cNvPicPr>
@@ -3580,6 +3390,275 @@
         </p:blipFill>
         <p:spPr>
           <a:xfrm>
+            <a:off x="2211939" y="3839903"/>
+            <a:ext cx="1266319" cy="2023200"/>
+          </a:xfrm>
+          <a:prstGeom prst="rect">
+            <a:avLst/>
+          </a:prstGeom>
+          <a:ln>
+            <a:noFill/>
+          </a:ln>
+        </p:spPr>
+      </p:pic>
+      <p:sp>
+        <p:nvSpPr>
+          <p:cNvPr id="82" name="正方形/長方形 81"/>
+          <p:cNvSpPr>
+            <a:spLocks noChangeAspect="1"/>
+          </p:cNvSpPr>
+          <p:nvPr/>
+        </p:nvSpPr>
+        <p:spPr>
+          <a:xfrm>
+            <a:off x="302240" y="1216587"/>
+            <a:ext cx="832630" cy="832630"/>
+          </a:xfrm>
+          <a:prstGeom prst="rect">
+            <a:avLst/>
+          </a:prstGeom>
+          <a:solidFill>
+            <a:schemeClr val="bg1"/>
+          </a:solidFill>
+          <a:ln>
+            <a:solidFill>
+              <a:schemeClr val="tx1"/>
+            </a:solidFill>
+          </a:ln>
+        </p:spPr>
+        <p:style>
+          <a:lnRef idx="2">
+            <a:schemeClr val="accent1">
+              <a:shade val="50000"/>
+            </a:schemeClr>
+          </a:lnRef>
+          <a:fillRef idx="1">
+            <a:schemeClr val="accent1"/>
+          </a:fillRef>
+          <a:effectRef idx="0">
+            <a:schemeClr val="accent1"/>
+          </a:effectRef>
+          <a:fontRef idx="minor">
+            <a:schemeClr val="lt1"/>
+          </a:fontRef>
+        </p:style>
+        <p:txBody>
+          <a:bodyPr rtlCol="0" anchor="ctr"/>
+          <a:lstStyle/>
+          <a:p>
+            <a:pPr algn="ctr"/>
+            <a:endParaRPr kumimoji="1" lang="ja-JP" altLang="en-US"/>
+          </a:p>
+        </p:txBody>
+      </p:sp>
+      <p:sp>
+        <p:nvSpPr>
+          <p:cNvPr id="83" name="正方形/長方形 82"/>
+          <p:cNvSpPr>
+            <a:spLocks noChangeAspect="1"/>
+          </p:cNvSpPr>
+          <p:nvPr/>
+        </p:nvSpPr>
+        <p:spPr>
+          <a:xfrm>
+            <a:off x="293895" y="2655539"/>
+            <a:ext cx="832630" cy="832630"/>
+          </a:xfrm>
+          <a:prstGeom prst="rect">
+            <a:avLst/>
+          </a:prstGeom>
+          <a:solidFill>
+            <a:schemeClr val="bg1"/>
+          </a:solidFill>
+          <a:ln>
+            <a:solidFill>
+              <a:schemeClr val="tx1"/>
+            </a:solidFill>
+          </a:ln>
+        </p:spPr>
+        <p:style>
+          <a:lnRef idx="2">
+            <a:schemeClr val="accent1">
+              <a:shade val="50000"/>
+            </a:schemeClr>
+          </a:lnRef>
+          <a:fillRef idx="1">
+            <a:schemeClr val="accent1"/>
+          </a:fillRef>
+          <a:effectRef idx="0">
+            <a:schemeClr val="accent1"/>
+          </a:effectRef>
+          <a:fontRef idx="minor">
+            <a:schemeClr val="lt1"/>
+          </a:fontRef>
+        </p:style>
+        <p:txBody>
+          <a:bodyPr rtlCol="0" anchor="ctr"/>
+          <a:lstStyle/>
+          <a:p>
+            <a:pPr algn="ctr"/>
+            <a:endParaRPr kumimoji="1" lang="ja-JP" altLang="en-US"/>
+          </a:p>
+        </p:txBody>
+      </p:sp>
+      <p:sp>
+        <p:nvSpPr>
+          <p:cNvPr id="88" name="正方形/長方形 87"/>
+          <p:cNvSpPr>
+            <a:spLocks noChangeAspect="1"/>
+          </p:cNvSpPr>
+          <p:nvPr/>
+        </p:nvSpPr>
+        <p:spPr>
+          <a:xfrm>
+            <a:off x="302240" y="4101848"/>
+            <a:ext cx="832630" cy="832630"/>
+          </a:xfrm>
+          <a:prstGeom prst="rect">
+            <a:avLst/>
+          </a:prstGeom>
+          <a:solidFill>
+            <a:schemeClr val="bg1"/>
+          </a:solidFill>
+          <a:ln>
+            <a:solidFill>
+              <a:schemeClr val="tx1"/>
+            </a:solidFill>
+          </a:ln>
+        </p:spPr>
+        <p:style>
+          <a:lnRef idx="2">
+            <a:schemeClr val="accent1">
+              <a:shade val="50000"/>
+            </a:schemeClr>
+          </a:lnRef>
+          <a:fillRef idx="1">
+            <a:schemeClr val="accent1"/>
+          </a:fillRef>
+          <a:effectRef idx="0">
+            <a:schemeClr val="accent1"/>
+          </a:effectRef>
+          <a:fontRef idx="minor">
+            <a:schemeClr val="lt1"/>
+          </a:fontRef>
+        </p:style>
+        <p:txBody>
+          <a:bodyPr rtlCol="0" anchor="ctr"/>
+          <a:lstStyle/>
+          <a:p>
+            <a:pPr algn="ctr"/>
+            <a:endParaRPr kumimoji="1" lang="ja-JP" altLang="en-US"/>
+          </a:p>
+        </p:txBody>
+      </p:sp>
+      <p:sp>
+        <p:nvSpPr>
+          <p:cNvPr id="2" name="円/楕円 1"/>
+          <p:cNvSpPr/>
+          <p:nvPr/>
+        </p:nvSpPr>
+        <p:spPr>
+          <a:xfrm>
+            <a:off x="364577" y="1282392"/>
+            <a:ext cx="709251" cy="709251"/>
+          </a:xfrm>
+          <a:prstGeom prst="ellipse">
+            <a:avLst/>
+          </a:prstGeom>
+          <a:noFill/>
+          <a:ln w="57150">
+            <a:solidFill>
+              <a:srgbClr val="FF0000"/>
+            </a:solidFill>
+          </a:ln>
+        </p:spPr>
+        <p:style>
+          <a:lnRef idx="2">
+            <a:schemeClr val="accent1">
+              <a:shade val="50000"/>
+            </a:schemeClr>
+          </a:lnRef>
+          <a:fillRef idx="1">
+            <a:schemeClr val="accent1"/>
+          </a:fillRef>
+          <a:effectRef idx="0">
+            <a:schemeClr val="accent1"/>
+          </a:effectRef>
+          <a:fontRef idx="minor">
+            <a:schemeClr val="lt1"/>
+          </a:fontRef>
+        </p:style>
+        <p:txBody>
+          <a:bodyPr rtlCol="0" anchor="ctr"/>
+          <a:lstStyle/>
+          <a:p>
+            <a:pPr algn="ctr"/>
+            <a:endParaRPr kumimoji="1" lang="ja-JP" altLang="en-US"/>
+          </a:p>
+        </p:txBody>
+      </p:sp>
+      <p:sp>
+        <p:nvSpPr>
+          <p:cNvPr id="18" name="円/楕円 17"/>
+          <p:cNvSpPr/>
+          <p:nvPr/>
+        </p:nvSpPr>
+        <p:spPr>
+          <a:xfrm>
+            <a:off x="357144" y="2721344"/>
+            <a:ext cx="709251" cy="709251"/>
+          </a:xfrm>
+          <a:prstGeom prst="ellipse">
+            <a:avLst/>
+          </a:prstGeom>
+          <a:noFill/>
+          <a:ln w="57150">
+            <a:solidFill>
+              <a:schemeClr val="accent1"/>
+            </a:solidFill>
+          </a:ln>
+        </p:spPr>
+        <p:style>
+          <a:lnRef idx="2">
+            <a:schemeClr val="accent1">
+              <a:shade val="50000"/>
+            </a:schemeClr>
+          </a:lnRef>
+          <a:fillRef idx="1">
+            <a:schemeClr val="accent1"/>
+          </a:fillRef>
+          <a:effectRef idx="0">
+            <a:schemeClr val="accent1"/>
+          </a:effectRef>
+          <a:fontRef idx="minor">
+            <a:schemeClr val="lt1"/>
+          </a:fontRef>
+        </p:style>
+        <p:txBody>
+          <a:bodyPr rtlCol="0" anchor="ctr"/>
+          <a:lstStyle/>
+          <a:p>
+            <a:pPr algn="ctr"/>
+            <a:endParaRPr kumimoji="1" lang="ja-JP" altLang="en-US"/>
+          </a:p>
+        </p:txBody>
+      </p:sp>
+      <p:pic>
+        <p:nvPicPr>
+          <p:cNvPr id="4" name="図 3"/>
+          <p:cNvPicPr>
+            <a:picLocks noChangeAspect="1"/>
+          </p:cNvPicPr>
+          <p:nvPr/>
+        </p:nvPicPr>
+        <p:blipFill>
+          <a:blip r:embed="rId4"/>
+          <a:stretch>
+            <a:fillRect/>
+          </a:stretch>
+        </p:blipFill>
+        <p:spPr>
+          <a:xfrm>
             <a:off x="333987" y="4137063"/>
             <a:ext cx="768163" cy="762066"/>
           </a:xfrm>
@@ -3597,102 +3676,30 @@
           <p:nvPr/>
         </p:nvPicPr>
         <p:blipFill>
-          <a:blip r:embed="rId4"/>
-          <a:stretch>
-            <a:fillRect/>
-          </a:stretch>
-        </p:blipFill>
-        <p:spPr>
-          <a:xfrm flipH="1" flipV="1">
-            <a:off x="336909" y="4140238"/>
-            <a:ext cx="762066" cy="762066"/>
-          </a:xfrm>
-          <a:prstGeom prst="rtTriangle">
-            <a:avLst/>
-          </a:prstGeom>
-        </p:spPr>
-      </p:pic>
-      <p:sp>
-        <p:nvSpPr>
-          <p:cNvPr id="20" name="正方形/長方形 19"/>
-          <p:cNvSpPr/>
-          <p:nvPr/>
-        </p:nvSpPr>
-        <p:spPr>
-          <a:xfrm>
-            <a:off x="1783793" y="566102"/>
-            <a:ext cx="2152505" cy="2152505"/>
-          </a:xfrm>
-          <a:prstGeom prst="rect">
-            <a:avLst/>
-          </a:prstGeom>
-          <a:solidFill>
-            <a:schemeClr val="bg1"/>
-          </a:solidFill>
-          <a:ln>
-            <a:solidFill>
-              <a:schemeClr val="tx1"/>
-            </a:solidFill>
-          </a:ln>
-        </p:spPr>
-        <p:style>
-          <a:lnRef idx="2">
-            <a:schemeClr val="accent1">
-              <a:shade val="50000"/>
-            </a:schemeClr>
-          </a:lnRef>
-          <a:fillRef idx="1">
-            <a:schemeClr val="accent1"/>
-          </a:fillRef>
-          <a:effectRef idx="0">
-            <a:schemeClr val="accent1"/>
-          </a:effectRef>
-          <a:fontRef idx="minor">
-            <a:schemeClr val="lt1"/>
-          </a:fontRef>
-        </p:style>
-        <p:txBody>
-          <a:bodyPr rtlCol="0" anchor="ctr"/>
-          <a:lstStyle/>
-          <a:p>
-            <a:pPr algn="ctr"/>
-            <a:endParaRPr kumimoji="1" lang="ja-JP" altLang="en-US"/>
-          </a:p>
-        </p:txBody>
-      </p:sp>
-      <p:pic>
-        <p:nvPicPr>
-          <p:cNvPr id="24" name="図 23"/>
-          <p:cNvPicPr>
-            <a:picLocks noChangeAspect="1"/>
-          </p:cNvPicPr>
-          <p:nvPr/>
-        </p:nvPicPr>
-        <p:blipFill>
           <a:blip r:embed="rId5"/>
           <a:stretch>
             <a:fillRect/>
           </a:stretch>
         </p:blipFill>
         <p:spPr>
+          <a:xfrm flipH="1" flipV="1">
+            <a:off x="336909" y="4140238"/>
+            <a:ext cx="762066" cy="762066"/>
+          </a:xfrm>
+          <a:prstGeom prst="rtTriangle">
+            <a:avLst/>
+          </a:prstGeom>
+        </p:spPr>
+      </p:pic>
+      <p:sp>
+        <p:nvSpPr>
+          <p:cNvPr id="20" name="正方形/長方形 19"/>
+          <p:cNvSpPr/>
+          <p:nvPr/>
+        </p:nvSpPr>
+        <p:spPr>
           <a:xfrm>
-            <a:off x="1837667" y="571354"/>
-            <a:ext cx="2044756" cy="2142000"/>
-          </a:xfrm>
-          <a:prstGeom prst="rect">
-            <a:avLst/>
-          </a:prstGeom>
-        </p:spPr>
-      </p:pic>
-      <p:sp>
-        <p:nvSpPr>
-          <p:cNvPr id="27" name="正方形/長方形 26"/>
-          <p:cNvSpPr/>
-          <p:nvPr/>
-        </p:nvSpPr>
-        <p:spPr>
-          <a:xfrm>
-            <a:off x="8255702" y="3818113"/>
+            <a:off x="1783793" y="566102"/>
             <a:ext cx="2152505" cy="2152505"/>
           </a:xfrm>
           <a:prstGeom prst="rect">
@@ -3732,57 +3739,9 @@
           </a:p>
         </p:txBody>
       </p:sp>
-      <p:sp>
-        <p:nvSpPr>
-          <p:cNvPr id="29" name="正方形/長方形 28"/>
-          <p:cNvSpPr/>
-          <p:nvPr/>
-        </p:nvSpPr>
-        <p:spPr>
-          <a:xfrm>
-            <a:off x="5386904" y="3822876"/>
-            <a:ext cx="2152505" cy="2152505"/>
-          </a:xfrm>
-          <a:prstGeom prst="rect">
-            <a:avLst/>
-          </a:prstGeom>
-          <a:solidFill>
-            <a:schemeClr val="bg1"/>
-          </a:solidFill>
-          <a:ln>
-            <a:solidFill>
-              <a:schemeClr val="tx1"/>
-            </a:solidFill>
-          </a:ln>
-        </p:spPr>
-        <p:style>
-          <a:lnRef idx="2">
-            <a:schemeClr val="accent1">
-              <a:shade val="50000"/>
-            </a:schemeClr>
-          </a:lnRef>
-          <a:fillRef idx="1">
-            <a:schemeClr val="accent1"/>
-          </a:fillRef>
-          <a:effectRef idx="0">
-            <a:schemeClr val="accent1"/>
-          </a:effectRef>
-          <a:fontRef idx="minor">
-            <a:schemeClr val="lt1"/>
-          </a:fontRef>
-        </p:style>
-        <p:txBody>
-          <a:bodyPr rtlCol="0" anchor="ctr"/>
-          <a:lstStyle/>
-          <a:p>
-            <a:pPr algn="ctr"/>
-            <a:endParaRPr kumimoji="1" lang="ja-JP" altLang="en-US"/>
-          </a:p>
-        </p:txBody>
-      </p:sp>
       <p:pic>
         <p:nvPicPr>
-          <p:cNvPr id="19" name="図 18"/>
+          <p:cNvPr id="24" name="図 23"/>
           <p:cNvPicPr>
             <a:picLocks noChangeAspect="1"/>
           </p:cNvPicPr>
@@ -3796,14 +3755,62 @@
         </p:blipFill>
         <p:spPr>
           <a:xfrm>
-            <a:off x="8512358" y="4256290"/>
-            <a:ext cx="1639193" cy="1276150"/>
+            <a:off x="1837667" y="571354"/>
+            <a:ext cx="2044756" cy="2142000"/>
           </a:xfrm>
           <a:prstGeom prst="rect">
             <a:avLst/>
           </a:prstGeom>
         </p:spPr>
       </p:pic>
+      <p:sp>
+        <p:nvSpPr>
+          <p:cNvPr id="29" name="正方形/長方形 28"/>
+          <p:cNvSpPr/>
+          <p:nvPr/>
+        </p:nvSpPr>
+        <p:spPr>
+          <a:xfrm>
+            <a:off x="5386904" y="3822876"/>
+            <a:ext cx="2152505" cy="2152505"/>
+          </a:xfrm>
+          <a:prstGeom prst="rect">
+            <a:avLst/>
+          </a:prstGeom>
+          <a:solidFill>
+            <a:schemeClr val="bg1"/>
+          </a:solidFill>
+          <a:ln>
+            <a:solidFill>
+              <a:schemeClr val="tx1"/>
+            </a:solidFill>
+          </a:ln>
+        </p:spPr>
+        <p:style>
+          <a:lnRef idx="2">
+            <a:schemeClr val="accent1">
+              <a:shade val="50000"/>
+            </a:schemeClr>
+          </a:lnRef>
+          <a:fillRef idx="1">
+            <a:schemeClr val="accent1"/>
+          </a:fillRef>
+          <a:effectRef idx="0">
+            <a:schemeClr val="accent1"/>
+          </a:effectRef>
+          <a:fontRef idx="minor">
+            <a:schemeClr val="lt1"/>
+          </a:fontRef>
+        </p:style>
+        <p:txBody>
+          <a:bodyPr rtlCol="0" anchor="ctr"/>
+          <a:lstStyle/>
+          <a:p>
+            <a:pPr algn="ctr"/>
+            <a:endParaRPr kumimoji="1" lang="ja-JP" altLang="en-US"/>
+          </a:p>
+        </p:txBody>
+      </p:sp>
       <p:pic>
         <p:nvPicPr>
           <p:cNvPr id="21" name="図 20"/>
@@ -7139,6 +7146,36 @@
 </p:sld>
 </file>
 
+<file path=ppt/slides/slide13.xml><?xml version="1.0" encoding="utf-8"?>
+<p:sld xmlns:a="http://schemas.openxmlformats.org/drawingml/2006/main" xmlns:r="http://schemas.openxmlformats.org/officeDocument/2006/relationships" xmlns:p="http://schemas.openxmlformats.org/presentationml/2006/main">
+  <p:cSld>
+    <p:spTree>
+      <p:nvGrpSpPr>
+        <p:cNvPr id="1" name=""/>
+        <p:cNvGrpSpPr/>
+        <p:nvPr/>
+      </p:nvGrpSpPr>
+      <p:grpSpPr>
+        <a:xfrm>
+          <a:off x="0" y="0"/>
+          <a:ext cx="0" cy="0"/>
+          <a:chOff x="0" y="0"/>
+          <a:chExt cx="0" cy="0"/>
+        </a:xfrm>
+      </p:grpSpPr>
+    </p:spTree>
+    <p:extLst>
+      <p:ext uri="{BB962C8B-B14F-4D97-AF65-F5344CB8AC3E}">
+        <p14:creationId xmlns:p14="http://schemas.microsoft.com/office/powerpoint/2010/main" val="813084407"/>
+      </p:ext>
+    </p:extLst>
+  </p:cSld>
+  <p:clrMapOvr>
+    <a:masterClrMapping/>
+  </p:clrMapOvr>
+</p:sld>
+</file>
+
 <file path=ppt/slides/slide2.xml><?xml version="1.0" encoding="utf-8"?>
 <p:sld xmlns:a="http://schemas.openxmlformats.org/drawingml/2006/main" xmlns:r="http://schemas.openxmlformats.org/officeDocument/2006/relationships" xmlns:p="http://schemas.openxmlformats.org/presentationml/2006/main">
   <p:cSld>
@@ -17215,6 +17252,771 @@
               <a:schemeClr val="tx1"/>
             </a:solidFill>
           </a:ln>
+          <a:effectLst/>
+          <a:scene3d>
+            <a:camera prst="orthographicFront"/>
+            <a:lightRig rig="threePt" dir="t">
+              <a:rot lat="0" lon="0" rev="15600000"/>
+            </a:lightRig>
+          </a:scene3d>
+          <a:sp3d>
+            <a:bevelT w="152400" h="127000"/>
+          </a:sp3d>
+        </p:spPr>
+        <p:style>
+          <a:lnRef idx="2">
+            <a:schemeClr val="accent1">
+              <a:shade val="50000"/>
+            </a:schemeClr>
+          </a:lnRef>
+          <a:fillRef idx="1">
+            <a:schemeClr val="accent1"/>
+          </a:fillRef>
+          <a:effectRef idx="0">
+            <a:schemeClr val="accent1"/>
+          </a:effectRef>
+          <a:fontRef idx="minor">
+            <a:schemeClr val="lt1"/>
+          </a:fontRef>
+        </p:style>
+        <p:txBody>
+          <a:bodyPr rtlCol="0" anchor="ctr"/>
+          <a:lstStyle/>
+          <a:p>
+            <a:pPr algn="ctr"/>
+            <a:endParaRPr kumimoji="1" lang="ja-JP" altLang="en-US"/>
+          </a:p>
+        </p:txBody>
+      </p:sp>
+      <p:sp>
+        <p:nvSpPr>
+          <p:cNvPr id="5" name="正方形/長方形 4"/>
+          <p:cNvSpPr/>
+          <p:nvPr/>
+        </p:nvSpPr>
+        <p:spPr>
+          <a:xfrm rot="4505116">
+            <a:off x="4510241" y="2805877"/>
+            <a:ext cx="201706" cy="688149"/>
+          </a:xfrm>
+          <a:prstGeom prst="rect">
+            <a:avLst/>
+          </a:prstGeom>
+          <a:solidFill>
+            <a:schemeClr val="bg1">
+              <a:lumMod val="50000"/>
+            </a:schemeClr>
+          </a:solidFill>
+          <a:ln>
+            <a:solidFill>
+              <a:schemeClr val="tx1"/>
+            </a:solidFill>
+          </a:ln>
+          <a:effectLst/>
+          <a:scene3d>
+            <a:camera prst="orthographicFront"/>
+            <a:lightRig rig="threePt" dir="t">
+              <a:rot lat="0" lon="0" rev="9000000"/>
+            </a:lightRig>
+          </a:scene3d>
+          <a:sp3d>
+            <a:bevelT w="152400" h="127000"/>
+          </a:sp3d>
+        </p:spPr>
+        <p:style>
+          <a:lnRef idx="2">
+            <a:schemeClr val="accent1">
+              <a:shade val="50000"/>
+            </a:schemeClr>
+          </a:lnRef>
+          <a:fillRef idx="1">
+            <a:schemeClr val="accent1"/>
+          </a:fillRef>
+          <a:effectRef idx="0">
+            <a:schemeClr val="accent1"/>
+          </a:effectRef>
+          <a:fontRef idx="minor">
+            <a:schemeClr val="lt1"/>
+          </a:fontRef>
+        </p:style>
+        <p:txBody>
+          <a:bodyPr rtlCol="0" anchor="ctr"/>
+          <a:lstStyle/>
+          <a:p>
+            <a:pPr algn="ctr"/>
+            <a:endParaRPr kumimoji="1" lang="ja-JP" altLang="en-US"/>
+          </a:p>
+        </p:txBody>
+      </p:sp>
+      <p:sp>
+        <p:nvSpPr>
+          <p:cNvPr id="6" name="正方形/長方形 5"/>
+          <p:cNvSpPr/>
+          <p:nvPr/>
+        </p:nvSpPr>
+        <p:spPr>
+          <a:xfrm rot="13125307">
+            <a:off x="4615828" y="2956565"/>
+            <a:ext cx="1016631" cy="551767"/>
+          </a:xfrm>
+          <a:prstGeom prst="rect">
+            <a:avLst/>
+          </a:prstGeom>
+          <a:solidFill>
+            <a:schemeClr val="bg2">
+              <a:lumMod val="50000"/>
+            </a:schemeClr>
+          </a:solidFill>
+          <a:ln w="19050">
+            <a:solidFill>
+              <a:schemeClr val="tx1">
+                <a:lumMod val="75000"/>
+                <a:lumOff val="25000"/>
+              </a:schemeClr>
+            </a:solidFill>
+          </a:ln>
+          <a:effectLst/>
+          <a:scene3d>
+            <a:camera prst="orthographicFront"/>
+            <a:lightRig rig="threePt" dir="t">
+              <a:rot lat="0" lon="0" rev="11400000"/>
+            </a:lightRig>
+          </a:scene3d>
+          <a:sp3d>
+            <a:bevelT w="127000" h="127000"/>
+          </a:sp3d>
+        </p:spPr>
+        <p:style>
+          <a:lnRef idx="2">
+            <a:schemeClr val="accent1">
+              <a:shade val="50000"/>
+            </a:schemeClr>
+          </a:lnRef>
+          <a:fillRef idx="1">
+            <a:schemeClr val="accent1"/>
+          </a:fillRef>
+          <a:effectRef idx="0">
+            <a:schemeClr val="accent1"/>
+          </a:effectRef>
+          <a:fontRef idx="minor">
+            <a:schemeClr val="lt1"/>
+          </a:fontRef>
+        </p:style>
+        <p:txBody>
+          <a:bodyPr rtlCol="0" anchor="ctr"/>
+          <a:lstStyle/>
+          <a:p>
+            <a:pPr algn="ctr"/>
+            <a:endParaRPr kumimoji="1" lang="ja-JP" altLang="en-US"/>
+          </a:p>
+        </p:txBody>
+      </p:sp>
+      <p:pic>
+        <p:nvPicPr>
+          <p:cNvPr id="12" name="図 11"/>
+          <p:cNvPicPr>
+            <a:picLocks noChangeAspect="1"/>
+          </p:cNvPicPr>
+          <p:nvPr/>
+        </p:nvPicPr>
+        <p:blipFill>
+          <a:blip r:embed="rId2"/>
+          <a:stretch>
+            <a:fillRect/>
+          </a:stretch>
+        </p:blipFill>
+        <p:spPr>
+          <a:xfrm rot="8925990">
+            <a:off x="4462006" y="3538242"/>
+            <a:ext cx="840917" cy="406189"/>
+          </a:xfrm>
+          <a:prstGeom prst="rect">
+            <a:avLst/>
+          </a:prstGeom>
+        </p:spPr>
+      </p:pic>
+      <p:sp>
+        <p:nvSpPr>
+          <p:cNvPr id="8" name="正方形/長方形 7"/>
+          <p:cNvSpPr/>
+          <p:nvPr/>
+        </p:nvSpPr>
+        <p:spPr>
+          <a:xfrm rot="17243883">
+            <a:off x="4560202" y="3121574"/>
+            <a:ext cx="301546" cy="673625"/>
+          </a:xfrm>
+          <a:prstGeom prst="rect">
+            <a:avLst/>
+          </a:prstGeom>
+          <a:solidFill>
+            <a:schemeClr val="accent2">
+              <a:lumMod val="75000"/>
+            </a:schemeClr>
+          </a:solidFill>
+          <a:ln w="19050">
+            <a:solidFill>
+              <a:schemeClr val="tx1">
+                <a:lumMod val="75000"/>
+                <a:lumOff val="25000"/>
+              </a:schemeClr>
+            </a:solidFill>
+          </a:ln>
+          <a:effectLst>
+            <a:innerShdw blurRad="254000" dist="63500">
+              <a:prstClr val="black">
+                <a:alpha val="70000"/>
+              </a:prstClr>
+            </a:innerShdw>
+          </a:effectLst>
+        </p:spPr>
+        <p:style>
+          <a:lnRef idx="2">
+            <a:schemeClr val="accent1">
+              <a:shade val="50000"/>
+            </a:schemeClr>
+          </a:lnRef>
+          <a:fillRef idx="1">
+            <a:schemeClr val="accent1"/>
+          </a:fillRef>
+          <a:effectRef idx="0">
+            <a:schemeClr val="accent1"/>
+          </a:effectRef>
+          <a:fontRef idx="minor">
+            <a:schemeClr val="lt1"/>
+          </a:fontRef>
+        </p:style>
+        <p:txBody>
+          <a:bodyPr rtlCol="0" anchor="ctr"/>
+          <a:lstStyle/>
+          <a:p>
+            <a:pPr algn="ctr"/>
+            <a:endParaRPr kumimoji="1" lang="ja-JP" altLang="en-US"/>
+          </a:p>
+        </p:txBody>
+      </p:sp>
+      <p:sp>
+        <p:nvSpPr>
+          <p:cNvPr id="9" name="正方形/長方形 8"/>
+          <p:cNvSpPr/>
+          <p:nvPr/>
+        </p:nvSpPr>
+        <p:spPr>
+          <a:xfrm rot="1505741">
+            <a:off x="5481895" y="2147142"/>
+            <a:ext cx="335386" cy="945254"/>
+          </a:xfrm>
+          <a:prstGeom prst="rect">
+            <a:avLst/>
+          </a:prstGeom>
+          <a:solidFill>
+            <a:schemeClr val="accent2">
+              <a:lumMod val="75000"/>
+            </a:schemeClr>
+          </a:solidFill>
+          <a:ln w="19050">
+            <a:solidFill>
+              <a:schemeClr val="tx1">
+                <a:lumMod val="75000"/>
+                <a:lumOff val="25000"/>
+              </a:schemeClr>
+            </a:solidFill>
+          </a:ln>
+          <a:effectLst>
+            <a:innerShdw blurRad="254000" dist="63500">
+              <a:prstClr val="black">
+                <a:alpha val="70000"/>
+              </a:prstClr>
+            </a:innerShdw>
+          </a:effectLst>
+        </p:spPr>
+        <p:style>
+          <a:lnRef idx="2">
+            <a:schemeClr val="accent1">
+              <a:shade val="50000"/>
+            </a:schemeClr>
+          </a:lnRef>
+          <a:fillRef idx="1">
+            <a:schemeClr val="accent1"/>
+          </a:fillRef>
+          <a:effectRef idx="0">
+            <a:schemeClr val="accent1"/>
+          </a:effectRef>
+          <a:fontRef idx="minor">
+            <a:schemeClr val="lt1"/>
+          </a:fontRef>
+        </p:style>
+        <p:txBody>
+          <a:bodyPr rtlCol="0" anchor="ctr"/>
+          <a:lstStyle/>
+          <a:p>
+            <a:pPr algn="ctr"/>
+            <a:endParaRPr kumimoji="1" lang="ja-JP" altLang="en-US"/>
+          </a:p>
+        </p:txBody>
+      </p:sp>
+      <p:pic>
+        <p:nvPicPr>
+          <p:cNvPr id="11" name="図 10"/>
+          <p:cNvPicPr>
+            <a:picLocks noChangeAspect="1"/>
+          </p:cNvPicPr>
+          <p:nvPr/>
+        </p:nvPicPr>
+        <p:blipFill>
+          <a:blip r:embed="rId2"/>
+          <a:stretch>
+            <a:fillRect/>
+          </a:stretch>
+        </p:blipFill>
+        <p:spPr>
+          <a:xfrm rot="13188415">
+            <a:off x="5309938" y="2723665"/>
+            <a:ext cx="1249788" cy="329213"/>
+          </a:xfrm>
+          <a:prstGeom prst="rect">
+            <a:avLst/>
+          </a:prstGeom>
+        </p:spPr>
+      </p:pic>
+      <p:sp>
+        <p:nvSpPr>
+          <p:cNvPr id="7" name="正方形/長方形 6"/>
+          <p:cNvSpPr/>
+          <p:nvPr/>
+        </p:nvSpPr>
+        <p:spPr>
+          <a:xfrm rot="10197354">
+            <a:off x="4765436" y="2549116"/>
+            <a:ext cx="654691" cy="304263"/>
+          </a:xfrm>
+          <a:prstGeom prst="rect">
+            <a:avLst/>
+          </a:prstGeom>
+          <a:solidFill>
+            <a:schemeClr val="bg2">
+              <a:lumMod val="50000"/>
+            </a:schemeClr>
+          </a:solidFill>
+          <a:ln w="19050">
+            <a:solidFill>
+              <a:schemeClr val="tx1">
+                <a:lumMod val="75000"/>
+                <a:lumOff val="25000"/>
+              </a:schemeClr>
+            </a:solidFill>
+          </a:ln>
+          <a:effectLst/>
+          <a:scene3d>
+            <a:camera prst="orthographicFront"/>
+            <a:lightRig rig="threePt" dir="t">
+              <a:rot lat="0" lon="0" rev="12000000"/>
+            </a:lightRig>
+          </a:scene3d>
+          <a:sp3d>
+            <a:bevelT w="127000" h="127000"/>
+          </a:sp3d>
+        </p:spPr>
+        <p:style>
+          <a:lnRef idx="2">
+            <a:schemeClr val="accent1">
+              <a:shade val="50000"/>
+            </a:schemeClr>
+          </a:lnRef>
+          <a:fillRef idx="1">
+            <a:schemeClr val="accent1"/>
+          </a:fillRef>
+          <a:effectRef idx="0">
+            <a:schemeClr val="accent1"/>
+          </a:effectRef>
+          <a:fontRef idx="minor">
+            <a:schemeClr val="lt1"/>
+          </a:fontRef>
+        </p:style>
+        <p:txBody>
+          <a:bodyPr rtlCol="0" anchor="ctr"/>
+          <a:lstStyle/>
+          <a:p>
+            <a:pPr algn="ctr"/>
+            <a:endParaRPr kumimoji="1" lang="ja-JP" altLang="en-US"/>
+          </a:p>
+        </p:txBody>
+      </p:sp>
+      <p:sp>
+        <p:nvSpPr>
+          <p:cNvPr id="13" name="正方形/長方形 12"/>
+          <p:cNvSpPr/>
+          <p:nvPr/>
+        </p:nvSpPr>
+        <p:spPr>
+          <a:xfrm rot="17890649">
+            <a:off x="4776654" y="3501848"/>
+            <a:ext cx="317088" cy="1405842"/>
+          </a:xfrm>
+          <a:prstGeom prst="rect">
+            <a:avLst/>
+          </a:prstGeom>
+          <a:solidFill>
+            <a:schemeClr val="bg1">
+              <a:lumMod val="50000"/>
+            </a:schemeClr>
+          </a:solidFill>
+          <a:ln>
+            <a:solidFill>
+              <a:schemeClr val="tx1"/>
+            </a:solidFill>
+          </a:ln>
+          <a:effectLst/>
+          <a:scene3d>
+            <a:camera prst="orthographicFront"/>
+            <a:lightRig rig="threePt" dir="t">
+              <a:rot lat="0" lon="0" rev="15600000"/>
+            </a:lightRig>
+          </a:scene3d>
+          <a:sp3d>
+            <a:bevelT w="152400" h="127000"/>
+          </a:sp3d>
+        </p:spPr>
+        <p:style>
+          <a:lnRef idx="2">
+            <a:schemeClr val="accent1">
+              <a:shade val="50000"/>
+            </a:schemeClr>
+          </a:lnRef>
+          <a:fillRef idx="1">
+            <a:schemeClr val="accent1"/>
+          </a:fillRef>
+          <a:effectRef idx="0">
+            <a:schemeClr val="accent1"/>
+          </a:effectRef>
+          <a:fontRef idx="minor">
+            <a:schemeClr val="lt1"/>
+          </a:fontRef>
+        </p:style>
+        <p:txBody>
+          <a:bodyPr rtlCol="0" anchor="ctr"/>
+          <a:lstStyle/>
+          <a:p>
+            <a:pPr algn="ctr"/>
+            <a:endParaRPr kumimoji="1" lang="ja-JP" altLang="en-US"/>
+          </a:p>
+        </p:txBody>
+      </p:sp>
+      <p:sp>
+        <p:nvSpPr>
+          <p:cNvPr id="14" name="正方形/長方形 13"/>
+          <p:cNvSpPr/>
+          <p:nvPr/>
+        </p:nvSpPr>
+        <p:spPr>
+          <a:xfrm rot="19282">
+            <a:off x="5216018" y="2179356"/>
+            <a:ext cx="195298" cy="512705"/>
+          </a:xfrm>
+          <a:prstGeom prst="rect">
+            <a:avLst/>
+          </a:prstGeom>
+          <a:solidFill>
+            <a:schemeClr val="bg1">
+              <a:lumMod val="50000"/>
+            </a:schemeClr>
+          </a:solidFill>
+          <a:ln>
+            <a:solidFill>
+              <a:schemeClr val="tx1"/>
+            </a:solidFill>
+          </a:ln>
+          <a:effectLst/>
+          <a:scene3d>
+            <a:camera prst="orthographicFront"/>
+            <a:lightRig rig="threePt" dir="t">
+              <a:rot lat="0" lon="0" rev="9000000"/>
+            </a:lightRig>
+          </a:scene3d>
+          <a:sp3d>
+            <a:bevelT w="152400" h="127000"/>
+          </a:sp3d>
+        </p:spPr>
+        <p:style>
+          <a:lnRef idx="2">
+            <a:schemeClr val="accent1">
+              <a:shade val="50000"/>
+            </a:schemeClr>
+          </a:lnRef>
+          <a:fillRef idx="1">
+            <a:schemeClr val="accent1"/>
+          </a:fillRef>
+          <a:effectRef idx="0">
+            <a:schemeClr val="accent1"/>
+          </a:effectRef>
+          <a:fontRef idx="minor">
+            <a:schemeClr val="lt1"/>
+          </a:fontRef>
+        </p:style>
+        <p:txBody>
+          <a:bodyPr rtlCol="0" anchor="ctr"/>
+          <a:lstStyle/>
+          <a:p>
+            <a:pPr algn="ctr"/>
+            <a:endParaRPr kumimoji="1" lang="ja-JP" altLang="en-US"/>
+          </a:p>
+        </p:txBody>
+      </p:sp>
+      <p:pic>
+        <p:nvPicPr>
+          <p:cNvPr id="16" name="図 15"/>
+          <p:cNvPicPr>
+            <a:picLocks noChangeAspect="1"/>
+          </p:cNvPicPr>
+          <p:nvPr/>
+        </p:nvPicPr>
+        <p:blipFill>
+          <a:blip r:embed="rId2"/>
+          <a:stretch>
+            <a:fillRect/>
+          </a:stretch>
+        </p:blipFill>
+        <p:spPr>
+          <a:xfrm rot="4440156">
+            <a:off x="5233351" y="2229840"/>
+            <a:ext cx="814201" cy="393284"/>
+          </a:xfrm>
+          <a:prstGeom prst="rect">
+            <a:avLst/>
+          </a:prstGeom>
+        </p:spPr>
+      </p:pic>
+      <p:sp>
+        <p:nvSpPr>
+          <p:cNvPr id="17" name="正方形/長方形 16"/>
+          <p:cNvSpPr/>
+          <p:nvPr/>
+        </p:nvSpPr>
+        <p:spPr>
+          <a:xfrm rot="12758049">
+            <a:off x="5195699" y="3195372"/>
+            <a:ext cx="291966" cy="501884"/>
+          </a:xfrm>
+          <a:prstGeom prst="rect">
+            <a:avLst/>
+          </a:prstGeom>
+          <a:solidFill>
+            <a:schemeClr val="accent2">
+              <a:lumMod val="75000"/>
+            </a:schemeClr>
+          </a:solidFill>
+          <a:ln w="19050">
+            <a:solidFill>
+              <a:schemeClr val="tx1">
+                <a:lumMod val="75000"/>
+                <a:lumOff val="25000"/>
+              </a:schemeClr>
+            </a:solidFill>
+          </a:ln>
+          <a:effectLst>
+            <a:innerShdw blurRad="254000" dist="63500">
+              <a:prstClr val="black">
+                <a:alpha val="70000"/>
+              </a:prstClr>
+            </a:innerShdw>
+          </a:effectLst>
+        </p:spPr>
+        <p:style>
+          <a:lnRef idx="2">
+            <a:schemeClr val="accent1">
+              <a:shade val="50000"/>
+            </a:schemeClr>
+          </a:lnRef>
+          <a:fillRef idx="1">
+            <a:schemeClr val="accent1"/>
+          </a:fillRef>
+          <a:effectRef idx="0">
+            <a:schemeClr val="accent1"/>
+          </a:effectRef>
+          <a:fontRef idx="minor">
+            <a:schemeClr val="lt1"/>
+          </a:fontRef>
+        </p:style>
+        <p:txBody>
+          <a:bodyPr rtlCol="0" anchor="ctr"/>
+          <a:lstStyle/>
+          <a:p>
+            <a:pPr algn="ctr"/>
+            <a:endParaRPr kumimoji="1" lang="ja-JP" altLang="en-US"/>
+          </a:p>
+        </p:txBody>
+      </p:sp>
+      <p:sp>
+        <p:nvSpPr>
+          <p:cNvPr id="18" name="正方形/長方形 17"/>
+          <p:cNvSpPr/>
+          <p:nvPr/>
+        </p:nvSpPr>
+        <p:spPr>
+          <a:xfrm rot="18619907">
+            <a:off x="5415593" y="1842589"/>
+            <a:ext cx="249879" cy="915223"/>
+          </a:xfrm>
+          <a:prstGeom prst="rect">
+            <a:avLst/>
+          </a:prstGeom>
+          <a:solidFill>
+            <a:schemeClr val="accent2">
+              <a:lumMod val="75000"/>
+            </a:schemeClr>
+          </a:solidFill>
+          <a:ln w="19050">
+            <a:solidFill>
+              <a:schemeClr val="tx1">
+                <a:lumMod val="75000"/>
+                <a:lumOff val="25000"/>
+              </a:schemeClr>
+            </a:solidFill>
+          </a:ln>
+          <a:effectLst>
+            <a:innerShdw blurRad="254000" dist="63500">
+              <a:prstClr val="black">
+                <a:alpha val="70000"/>
+              </a:prstClr>
+            </a:innerShdw>
+          </a:effectLst>
+        </p:spPr>
+        <p:style>
+          <a:lnRef idx="2">
+            <a:schemeClr val="accent1">
+              <a:shade val="50000"/>
+            </a:schemeClr>
+          </a:lnRef>
+          <a:fillRef idx="1">
+            <a:schemeClr val="accent1"/>
+          </a:fillRef>
+          <a:effectRef idx="0">
+            <a:schemeClr val="accent1"/>
+          </a:effectRef>
+          <a:fontRef idx="minor">
+            <a:schemeClr val="lt1"/>
+          </a:fontRef>
+        </p:style>
+        <p:txBody>
+          <a:bodyPr rtlCol="0" anchor="ctr"/>
+          <a:lstStyle/>
+          <a:p>
+            <a:pPr algn="ctr"/>
+            <a:endParaRPr kumimoji="1" lang="ja-JP" altLang="en-US"/>
+          </a:p>
+        </p:txBody>
+      </p:sp>
+      <p:pic>
+        <p:nvPicPr>
+          <p:cNvPr id="19" name="図 18"/>
+          <p:cNvPicPr>
+            <a:picLocks noChangeAspect="1"/>
+          </p:cNvPicPr>
+          <p:nvPr/>
+        </p:nvPicPr>
+        <p:blipFill>
+          <a:blip r:embed="rId2"/>
+          <a:stretch>
+            <a:fillRect/>
+          </a:stretch>
+        </p:blipFill>
+        <p:spPr>
+          <a:xfrm rot="8262039">
+            <a:off x="4887170" y="2559853"/>
+            <a:ext cx="1210083" cy="318754"/>
+          </a:xfrm>
+          <a:prstGeom prst="rect">
+            <a:avLst/>
+          </a:prstGeom>
+        </p:spPr>
+      </p:pic>
+      <p:sp>
+        <p:nvSpPr>
+          <p:cNvPr id="20" name="正方形/長方形 19"/>
+          <p:cNvSpPr/>
+          <p:nvPr/>
+        </p:nvSpPr>
+        <p:spPr>
+          <a:xfrm rot="5711520">
+            <a:off x="5670533" y="2306569"/>
+            <a:ext cx="487777" cy="294596"/>
+          </a:xfrm>
+          <a:prstGeom prst="rect">
+            <a:avLst/>
+          </a:prstGeom>
+          <a:solidFill>
+            <a:schemeClr val="bg2">
+              <a:lumMod val="50000"/>
+            </a:schemeClr>
+          </a:solidFill>
+          <a:ln w="19050">
+            <a:solidFill>
+              <a:schemeClr val="tx1">
+                <a:lumMod val="75000"/>
+                <a:lumOff val="25000"/>
+              </a:schemeClr>
+            </a:solidFill>
+          </a:ln>
+          <a:effectLst/>
+          <a:scene3d>
+            <a:camera prst="orthographicFront"/>
+            <a:lightRig rig="threePt" dir="t">
+              <a:rot lat="0" lon="0" rev="12000000"/>
+            </a:lightRig>
+          </a:scene3d>
+          <a:sp3d>
+            <a:bevelT w="127000" h="127000"/>
+          </a:sp3d>
+        </p:spPr>
+        <p:style>
+          <a:lnRef idx="2">
+            <a:schemeClr val="accent1">
+              <a:shade val="50000"/>
+            </a:schemeClr>
+          </a:lnRef>
+          <a:fillRef idx="1">
+            <a:schemeClr val="accent1"/>
+          </a:fillRef>
+          <a:effectRef idx="0">
+            <a:schemeClr val="accent1"/>
+          </a:effectRef>
+          <a:fontRef idx="minor">
+            <a:schemeClr val="lt1"/>
+          </a:fontRef>
+        </p:style>
+        <p:txBody>
+          <a:bodyPr rtlCol="0" anchor="ctr"/>
+          <a:lstStyle/>
+          <a:p>
+            <a:pPr algn="ctr"/>
+            <a:endParaRPr kumimoji="1" lang="ja-JP" altLang="en-US"/>
+          </a:p>
+        </p:txBody>
+      </p:sp>
+      <p:sp>
+        <p:nvSpPr>
+          <p:cNvPr id="21" name="正方形/長方形 20"/>
+          <p:cNvSpPr/>
+          <p:nvPr/>
+        </p:nvSpPr>
+        <p:spPr>
+          <a:xfrm rot="3611261">
+            <a:off x="4390855" y="3237981"/>
+            <a:ext cx="440479" cy="1146542"/>
+          </a:xfrm>
+          <a:prstGeom prst="rect">
+            <a:avLst/>
+          </a:prstGeom>
+          <a:solidFill>
+            <a:schemeClr val="bg1">
+              <a:lumMod val="50000"/>
+            </a:schemeClr>
+          </a:solidFill>
+          <a:ln>
+            <a:solidFill>
+              <a:schemeClr val="tx1"/>
+            </a:solidFill>
+          </a:ln>
           <a:effectLst>
             <a:outerShdw blurRad="203200" sx="110000" sy="110000" algn="tl" rotWithShape="0">
               <a:prstClr val="black">
@@ -17259,14 +18061,440 @@
       </p:sp>
       <p:sp>
         <p:nvSpPr>
-          <p:cNvPr id="5" name="正方形/長方形 4"/>
-          <p:cNvSpPr/>
-          <p:nvPr/>
-        </p:nvSpPr>
-        <p:spPr>
-          <a:xfrm rot="4505116">
-            <a:off x="4510241" y="2805877"/>
-            <a:ext cx="201706" cy="688149"/>
+          <p:cNvPr id="22" name="正方形/長方形 21"/>
+          <p:cNvSpPr/>
+          <p:nvPr/>
+        </p:nvSpPr>
+        <p:spPr>
+          <a:xfrm rot="7339894">
+            <a:off x="4775248" y="2982337"/>
+            <a:ext cx="159276" cy="712218"/>
+          </a:xfrm>
+          <a:prstGeom prst="rect">
+            <a:avLst/>
+          </a:prstGeom>
+          <a:solidFill>
+            <a:schemeClr val="bg1">
+              <a:lumMod val="50000"/>
+            </a:schemeClr>
+          </a:solidFill>
+          <a:ln>
+            <a:solidFill>
+              <a:schemeClr val="tx1"/>
+            </a:solidFill>
+          </a:ln>
+          <a:effectLst/>
+          <a:scene3d>
+            <a:camera prst="orthographicFront"/>
+            <a:lightRig rig="threePt" dir="t">
+              <a:rot lat="0" lon="0" rev="9000000"/>
+            </a:lightRig>
+          </a:scene3d>
+          <a:sp3d>
+            <a:bevelT w="152400" h="127000"/>
+          </a:sp3d>
+        </p:spPr>
+        <p:style>
+          <a:lnRef idx="2">
+            <a:schemeClr val="accent1">
+              <a:shade val="50000"/>
+            </a:schemeClr>
+          </a:lnRef>
+          <a:fillRef idx="1">
+            <a:schemeClr val="accent1"/>
+          </a:fillRef>
+          <a:effectRef idx="0">
+            <a:schemeClr val="accent1"/>
+          </a:effectRef>
+          <a:fontRef idx="minor">
+            <a:schemeClr val="lt1"/>
+          </a:fontRef>
+        </p:style>
+        <p:txBody>
+          <a:bodyPr rtlCol="0" anchor="ctr"/>
+          <a:lstStyle/>
+          <a:p>
+            <a:pPr algn="ctr"/>
+            <a:endParaRPr kumimoji="1" lang="ja-JP" altLang="en-US"/>
+          </a:p>
+        </p:txBody>
+      </p:sp>
+      <p:sp>
+        <p:nvSpPr>
+          <p:cNvPr id="23" name="正方形/長方形 22"/>
+          <p:cNvSpPr/>
+          <p:nvPr/>
+        </p:nvSpPr>
+        <p:spPr>
+          <a:xfrm rot="15960085">
+            <a:off x="5394035" y="4459975"/>
+            <a:ext cx="802777" cy="358523"/>
+          </a:xfrm>
+          <a:prstGeom prst="rect">
+            <a:avLst/>
+          </a:prstGeom>
+          <a:solidFill>
+            <a:schemeClr val="bg2">
+              <a:lumMod val="50000"/>
+            </a:schemeClr>
+          </a:solidFill>
+          <a:ln w="19050">
+            <a:solidFill>
+              <a:schemeClr val="tx1">
+                <a:lumMod val="75000"/>
+                <a:lumOff val="25000"/>
+              </a:schemeClr>
+            </a:solidFill>
+          </a:ln>
+          <a:effectLst/>
+          <a:scene3d>
+            <a:camera prst="orthographicFront"/>
+            <a:lightRig rig="threePt" dir="t">
+              <a:rot lat="0" lon="0" rev="11400000"/>
+            </a:lightRig>
+          </a:scene3d>
+          <a:sp3d>
+            <a:bevelT w="127000" h="127000"/>
+          </a:sp3d>
+        </p:spPr>
+        <p:style>
+          <a:lnRef idx="2">
+            <a:schemeClr val="accent1">
+              <a:shade val="50000"/>
+            </a:schemeClr>
+          </a:lnRef>
+          <a:fillRef idx="1">
+            <a:schemeClr val="accent1"/>
+          </a:fillRef>
+          <a:effectRef idx="0">
+            <a:schemeClr val="accent1"/>
+          </a:effectRef>
+          <a:fontRef idx="minor">
+            <a:schemeClr val="lt1"/>
+          </a:fontRef>
+        </p:style>
+        <p:txBody>
+          <a:bodyPr rtlCol="0" anchor="ctr"/>
+          <a:lstStyle/>
+          <a:p>
+            <a:pPr algn="ctr"/>
+            <a:endParaRPr kumimoji="1" lang="ja-JP" altLang="en-US"/>
+          </a:p>
+        </p:txBody>
+      </p:sp>
+      <p:pic>
+        <p:nvPicPr>
+          <p:cNvPr id="24" name="図 23"/>
+          <p:cNvPicPr>
+            <a:picLocks noChangeAspect="1"/>
+          </p:cNvPicPr>
+          <p:nvPr/>
+        </p:nvPicPr>
+        <p:blipFill>
+          <a:blip r:embed="rId2"/>
+          <a:stretch>
+            <a:fillRect/>
+          </a:stretch>
+        </p:blipFill>
+        <p:spPr>
+          <a:xfrm rot="11760768">
+            <a:off x="4101204" y="4208554"/>
+            <a:ext cx="870329" cy="420396"/>
+          </a:xfrm>
+          <a:prstGeom prst="rect">
+            <a:avLst/>
+          </a:prstGeom>
+        </p:spPr>
+      </p:pic>
+      <p:sp>
+        <p:nvSpPr>
+          <p:cNvPr id="25" name="正方形/長方形 24"/>
+          <p:cNvSpPr/>
+          <p:nvPr/>
+        </p:nvSpPr>
+        <p:spPr>
+          <a:xfrm rot="20078661">
+            <a:off x="4525234" y="4009330"/>
+            <a:ext cx="312093" cy="531924"/>
+          </a:xfrm>
+          <a:prstGeom prst="rect">
+            <a:avLst/>
+          </a:prstGeom>
+          <a:solidFill>
+            <a:schemeClr val="accent2">
+              <a:lumMod val="75000"/>
+            </a:schemeClr>
+          </a:solidFill>
+          <a:ln w="19050">
+            <a:solidFill>
+              <a:schemeClr val="tx1">
+                <a:lumMod val="75000"/>
+                <a:lumOff val="25000"/>
+              </a:schemeClr>
+            </a:solidFill>
+          </a:ln>
+          <a:effectLst>
+            <a:innerShdw blurRad="254000" dist="63500">
+              <a:prstClr val="black">
+                <a:alpha val="70000"/>
+              </a:prstClr>
+            </a:innerShdw>
+          </a:effectLst>
+        </p:spPr>
+        <p:style>
+          <a:lnRef idx="2">
+            <a:schemeClr val="accent1">
+              <a:shade val="50000"/>
+            </a:schemeClr>
+          </a:lnRef>
+          <a:fillRef idx="1">
+            <a:schemeClr val="accent1"/>
+          </a:fillRef>
+          <a:effectRef idx="0">
+            <a:schemeClr val="accent1"/>
+          </a:effectRef>
+          <a:fontRef idx="minor">
+            <a:schemeClr val="lt1"/>
+          </a:fontRef>
+        </p:style>
+        <p:txBody>
+          <a:bodyPr rtlCol="0" anchor="ctr"/>
+          <a:lstStyle/>
+          <a:p>
+            <a:pPr algn="ctr"/>
+            <a:endParaRPr kumimoji="1" lang="ja-JP" altLang="en-US"/>
+          </a:p>
+        </p:txBody>
+      </p:sp>
+      <p:sp>
+        <p:nvSpPr>
+          <p:cNvPr id="26" name="正方形/長方形 25"/>
+          <p:cNvSpPr/>
+          <p:nvPr/>
+        </p:nvSpPr>
+        <p:spPr>
+          <a:xfrm rot="4340519">
+            <a:off x="5435439" y="2894046"/>
+            <a:ext cx="264836" cy="978315"/>
+          </a:xfrm>
+          <a:prstGeom prst="rect">
+            <a:avLst/>
+          </a:prstGeom>
+          <a:solidFill>
+            <a:schemeClr val="accent2">
+              <a:lumMod val="75000"/>
+            </a:schemeClr>
+          </a:solidFill>
+          <a:ln w="19050">
+            <a:solidFill>
+              <a:schemeClr val="tx1">
+                <a:lumMod val="75000"/>
+                <a:lumOff val="25000"/>
+              </a:schemeClr>
+            </a:solidFill>
+          </a:ln>
+          <a:effectLst>
+            <a:innerShdw blurRad="254000" dist="63500">
+              <a:prstClr val="black">
+                <a:alpha val="70000"/>
+              </a:prstClr>
+            </a:innerShdw>
+          </a:effectLst>
+        </p:spPr>
+        <p:style>
+          <a:lnRef idx="2">
+            <a:schemeClr val="accent1">
+              <a:shade val="50000"/>
+            </a:schemeClr>
+          </a:lnRef>
+          <a:fillRef idx="1">
+            <a:schemeClr val="accent1"/>
+          </a:fillRef>
+          <a:effectRef idx="0">
+            <a:schemeClr val="accent1"/>
+          </a:effectRef>
+          <a:fontRef idx="minor">
+            <a:schemeClr val="lt1"/>
+          </a:fontRef>
+        </p:style>
+        <p:txBody>
+          <a:bodyPr rtlCol="0" anchor="ctr"/>
+          <a:lstStyle/>
+          <a:p>
+            <a:pPr algn="ctr"/>
+            <a:endParaRPr kumimoji="1" lang="ja-JP" altLang="en-US"/>
+          </a:p>
+        </p:txBody>
+      </p:sp>
+      <p:pic>
+        <p:nvPicPr>
+          <p:cNvPr id="27" name="図 26"/>
+          <p:cNvPicPr>
+            <a:picLocks noChangeAspect="1"/>
+          </p:cNvPicPr>
+          <p:nvPr/>
+        </p:nvPicPr>
+        <p:blipFill>
+          <a:blip r:embed="rId2"/>
+          <a:stretch>
+            <a:fillRect/>
+          </a:stretch>
+        </p:blipFill>
+        <p:spPr>
+          <a:xfrm rot="11766438">
+            <a:off x="4105886" y="4659098"/>
+            <a:ext cx="1293502" cy="340728"/>
+          </a:xfrm>
+          <a:prstGeom prst="rect">
+            <a:avLst/>
+          </a:prstGeom>
+        </p:spPr>
+      </p:pic>
+      <p:sp>
+        <p:nvSpPr>
+          <p:cNvPr id="28" name="正方形/長方形 27"/>
+          <p:cNvSpPr/>
+          <p:nvPr/>
+        </p:nvSpPr>
+        <p:spPr>
+          <a:xfrm rot="13032132">
+            <a:off x="4822419" y="3603514"/>
+            <a:ext cx="677590" cy="240261"/>
+          </a:xfrm>
+          <a:prstGeom prst="rect">
+            <a:avLst/>
+          </a:prstGeom>
+          <a:solidFill>
+            <a:schemeClr val="bg2">
+              <a:lumMod val="50000"/>
+            </a:schemeClr>
+          </a:solidFill>
+          <a:ln w="19050">
+            <a:solidFill>
+              <a:schemeClr val="tx1">
+                <a:lumMod val="75000"/>
+                <a:lumOff val="25000"/>
+              </a:schemeClr>
+            </a:solidFill>
+          </a:ln>
+          <a:effectLst>
+            <a:outerShdw blurRad="127000" dist="127000" dir="8100000" algn="tr" rotWithShape="0">
+              <a:prstClr val="black">
+                <a:alpha val="50000"/>
+              </a:prstClr>
+            </a:outerShdw>
+          </a:effectLst>
+          <a:scene3d>
+            <a:camera prst="orthographicFront"/>
+            <a:lightRig rig="threePt" dir="t">
+              <a:rot lat="0" lon="0" rev="12000000"/>
+            </a:lightRig>
+          </a:scene3d>
+          <a:sp3d>
+            <a:bevelT w="127000" h="127000"/>
+          </a:sp3d>
+        </p:spPr>
+        <p:style>
+          <a:lnRef idx="2">
+            <a:schemeClr val="accent1">
+              <a:shade val="50000"/>
+            </a:schemeClr>
+          </a:lnRef>
+          <a:fillRef idx="1">
+            <a:schemeClr val="accent1"/>
+          </a:fillRef>
+          <a:effectRef idx="0">
+            <a:schemeClr val="accent1"/>
+          </a:effectRef>
+          <a:fontRef idx="minor">
+            <a:schemeClr val="lt1"/>
+          </a:fontRef>
+        </p:style>
+        <p:txBody>
+          <a:bodyPr rtlCol="0" anchor="ctr"/>
+          <a:lstStyle/>
+          <a:p>
+            <a:pPr algn="ctr"/>
+            <a:endParaRPr kumimoji="1" lang="ja-JP" altLang="en-US"/>
+          </a:p>
+        </p:txBody>
+      </p:sp>
+      <p:sp>
+        <p:nvSpPr>
+          <p:cNvPr id="29" name="正方形/長方形 28"/>
+          <p:cNvSpPr/>
+          <p:nvPr/>
+        </p:nvSpPr>
+        <p:spPr>
+          <a:xfrm rot="3293102">
+            <a:off x="5492993" y="2914171"/>
+            <a:ext cx="359438" cy="1451972"/>
+          </a:xfrm>
+          <a:prstGeom prst="rect">
+            <a:avLst/>
+          </a:prstGeom>
+          <a:solidFill>
+            <a:schemeClr val="bg1">
+              <a:lumMod val="50000"/>
+            </a:schemeClr>
+          </a:solidFill>
+          <a:ln>
+            <a:solidFill>
+              <a:schemeClr val="tx1"/>
+            </a:solidFill>
+          </a:ln>
+          <a:effectLst>
+            <a:outerShdw blurRad="203200" sx="110000" sy="110000" algn="tl" rotWithShape="0">
+              <a:prstClr val="black">
+                <a:alpha val="70000"/>
+              </a:prstClr>
+            </a:outerShdw>
+          </a:effectLst>
+          <a:scene3d>
+            <a:camera prst="orthographicFront"/>
+            <a:lightRig rig="threePt" dir="t">
+              <a:rot lat="0" lon="0" rev="15600000"/>
+            </a:lightRig>
+          </a:scene3d>
+          <a:sp3d>
+            <a:bevelT w="152400" h="127000"/>
+          </a:sp3d>
+        </p:spPr>
+        <p:style>
+          <a:lnRef idx="2">
+            <a:schemeClr val="accent1">
+              <a:shade val="50000"/>
+            </a:schemeClr>
+          </a:lnRef>
+          <a:fillRef idx="1">
+            <a:schemeClr val="accent1"/>
+          </a:fillRef>
+          <a:effectRef idx="0">
+            <a:schemeClr val="accent1"/>
+          </a:effectRef>
+          <a:fontRef idx="minor">
+            <a:schemeClr val="lt1"/>
+          </a:fontRef>
+        </p:style>
+        <p:txBody>
+          <a:bodyPr rtlCol="0" anchor="ctr"/>
+          <a:lstStyle/>
+          <a:p>
+            <a:pPr algn="ctr"/>
+            <a:endParaRPr kumimoji="1" lang="ja-JP" altLang="en-US"/>
+          </a:p>
+        </p:txBody>
+      </p:sp>
+      <p:sp>
+        <p:nvSpPr>
+          <p:cNvPr id="30" name="正方形/長方形 29"/>
+          <p:cNvSpPr/>
+          <p:nvPr/>
+        </p:nvSpPr>
+        <p:spPr>
+          <a:xfrm rot="7021735">
+            <a:off x="5958912" y="3160800"/>
+            <a:ext cx="201706" cy="581182"/>
           </a:xfrm>
           <a:prstGeom prst="rect">
             <a:avLst/>
@@ -17325,14 +18553,14 @@
       </p:sp>
       <p:sp>
         <p:nvSpPr>
-          <p:cNvPr id="6" name="正方形/長方形 5"/>
-          <p:cNvSpPr/>
-          <p:nvPr/>
-        </p:nvSpPr>
-        <p:spPr>
-          <a:xfrm rot="13125307">
-            <a:off x="4615828" y="2956565"/>
-            <a:ext cx="1016631" cy="551767"/>
+          <p:cNvPr id="31" name="正方形/長方形 30"/>
+          <p:cNvSpPr/>
+          <p:nvPr/>
+        </p:nvSpPr>
+        <p:spPr>
+          <a:xfrm rot="20945210">
+            <a:off x="6561241" y="4459672"/>
+            <a:ext cx="858604" cy="419572"/>
           </a:xfrm>
           <a:prstGeom prst="rect">
             <a:avLst/>
@@ -17350,13 +18578,7 @@
               </a:schemeClr>
             </a:solidFill>
           </a:ln>
-          <a:effectLst>
-            <a:outerShdw blurRad="190500" dist="127000" dir="8100000" algn="tr" rotWithShape="0">
-              <a:prstClr val="black">
-                <a:alpha val="50000"/>
-              </a:prstClr>
-            </a:outerShdw>
-          </a:effectLst>
+          <a:effectLst/>
           <a:scene3d>
             <a:camera prst="orthographicFront"/>
             <a:lightRig rig="threePt" dir="t">
@@ -17394,7 +18616,7 @@
       </p:sp>
       <p:pic>
         <p:nvPicPr>
-          <p:cNvPr id="12" name="図 11"/>
+          <p:cNvPr id="32" name="図 31"/>
           <p:cNvPicPr>
             <a:picLocks noChangeAspect="1"/>
           </p:cNvPicPr>
@@ -17407,9 +18629,9 @@
           </a:stretch>
         </p:blipFill>
         <p:spPr>
-          <a:xfrm rot="8925990">
-            <a:off x="4462006" y="3538242"/>
-            <a:ext cx="840917" cy="406189"/>
+          <a:xfrm rot="11442609">
+            <a:off x="5004951" y="3870158"/>
+            <a:ext cx="840917" cy="343050"/>
           </a:xfrm>
           <a:prstGeom prst="rect">
             <a:avLst/>
@@ -17418,14 +18640,14 @@
       </p:pic>
       <p:sp>
         <p:nvSpPr>
-          <p:cNvPr id="8" name="正方形/長方形 7"/>
-          <p:cNvSpPr/>
-          <p:nvPr/>
-        </p:nvSpPr>
-        <p:spPr>
-          <a:xfrm rot="17243883">
-            <a:off x="4560202" y="3121574"/>
-            <a:ext cx="301546" cy="673625"/>
+          <p:cNvPr id="33" name="正方形/長方形 32"/>
+          <p:cNvSpPr/>
+          <p:nvPr/>
+        </p:nvSpPr>
+        <p:spPr>
+          <a:xfrm rot="19760502">
+            <a:off x="6228347" y="4016491"/>
+            <a:ext cx="301546" cy="568916"/>
           </a:xfrm>
           <a:prstGeom prst="rect">
             <a:avLst/>
@@ -17478,14 +18700,14 @@
       </p:sp>
       <p:sp>
         <p:nvSpPr>
-          <p:cNvPr id="9" name="正方形/長方形 8"/>
-          <p:cNvSpPr/>
-          <p:nvPr/>
-        </p:nvSpPr>
-        <p:spPr>
-          <a:xfrm rot="1505741">
-            <a:off x="5481895" y="2147142"/>
-            <a:ext cx="335386" cy="945254"/>
+          <p:cNvPr id="34" name="正方形/長方形 33"/>
+          <p:cNvSpPr/>
+          <p:nvPr/>
+        </p:nvSpPr>
+        <p:spPr>
+          <a:xfrm rot="4022360">
+            <a:off x="5953596" y="3249923"/>
+            <a:ext cx="283253" cy="945254"/>
           </a:xfrm>
           <a:prstGeom prst="rect">
             <a:avLst/>
@@ -17538,7 +18760,7 @@
       </p:sp>
       <p:pic>
         <p:nvPicPr>
-          <p:cNvPr id="11" name="図 10"/>
+          <p:cNvPr id="35" name="図 34"/>
           <p:cNvPicPr>
             <a:picLocks noChangeAspect="1"/>
           </p:cNvPicPr>
@@ -17551,9 +18773,9 @@
           </a:stretch>
         </p:blipFill>
         <p:spPr>
-          <a:xfrm rot="13188415">
-            <a:off x="5309938" y="2723665"/>
-            <a:ext cx="1249788" cy="329213"/>
+          <a:xfrm rot="15264492">
+            <a:off x="5992501" y="4304477"/>
+            <a:ext cx="1055519" cy="329213"/>
           </a:xfrm>
           <a:prstGeom prst="rect">
             <a:avLst/>
@@ -17562,14 +18784,14 @@
       </p:pic>
       <p:sp>
         <p:nvSpPr>
-          <p:cNvPr id="7" name="正方形/長方形 6"/>
-          <p:cNvSpPr/>
-          <p:nvPr/>
-        </p:nvSpPr>
-        <p:spPr>
-          <a:xfrm rot="10197354">
-            <a:off x="4765436" y="2549116"/>
-            <a:ext cx="654691" cy="304263"/>
+          <p:cNvPr id="36" name="正方形/長方形 35"/>
+          <p:cNvSpPr/>
+          <p:nvPr/>
+        </p:nvSpPr>
+        <p:spPr>
+          <a:xfrm rot="9033098">
+            <a:off x="6092140" y="3679964"/>
+            <a:ext cx="552925" cy="304263"/>
           </a:xfrm>
           <a:prstGeom prst="rect">
             <a:avLst/>
@@ -17631,14 +18853,14 @@
       </p:sp>
       <p:sp>
         <p:nvSpPr>
-          <p:cNvPr id="13" name="正方形/長方形 12"/>
-          <p:cNvSpPr/>
-          <p:nvPr/>
-        </p:nvSpPr>
-        <p:spPr>
-          <a:xfrm rot="17890649">
-            <a:off x="4776654" y="3501848"/>
-            <a:ext cx="317088" cy="1405842"/>
+          <p:cNvPr id="37" name="正方形/長方形 36"/>
+          <p:cNvSpPr/>
+          <p:nvPr/>
+        </p:nvSpPr>
+        <p:spPr>
+          <a:xfrm rot="17088104">
+            <a:off x="5843030" y="2409650"/>
+            <a:ext cx="425593" cy="1165543"/>
           </a:xfrm>
           <a:prstGeom prst="rect">
             <a:avLst/>
@@ -17653,13 +18875,7 @@
               <a:schemeClr val="tx1"/>
             </a:solidFill>
           </a:ln>
-          <a:effectLst>
-            <a:outerShdw blurRad="203200" sx="110000" sy="110000" algn="tl" rotWithShape="0">
-              <a:prstClr val="black">
-                <a:alpha val="70000"/>
-              </a:prstClr>
-            </a:outerShdw>
-          </a:effectLst>
+          <a:effectLst/>
           <a:scene3d>
             <a:camera prst="orthographicFront"/>
             <a:lightRig rig="threePt" dir="t">
@@ -17697,14 +18913,14 @@
       </p:sp>
       <p:sp>
         <p:nvSpPr>
-          <p:cNvPr id="14" name="正方形/長方形 13"/>
-          <p:cNvSpPr/>
-          <p:nvPr/>
-        </p:nvSpPr>
-        <p:spPr>
-          <a:xfrm rot="19282">
-            <a:off x="5216018" y="2179356"/>
-            <a:ext cx="195298" cy="512705"/>
+          <p:cNvPr id="38" name="正方形/長方形 37"/>
+          <p:cNvSpPr/>
+          <p:nvPr/>
+        </p:nvSpPr>
+        <p:spPr>
+          <a:xfrm rot="20816737">
+            <a:off x="6279888" y="2331204"/>
+            <a:ext cx="161916" cy="688149"/>
           </a:xfrm>
           <a:prstGeom prst="rect">
             <a:avLst/>
@@ -17719,13 +18935,7 @@
               <a:schemeClr val="tx1"/>
             </a:solidFill>
           </a:ln>
-          <a:effectLst>
-            <a:outerShdw blurRad="203200" sx="110000" sy="110000" algn="tl" rotWithShape="0">
-              <a:prstClr val="black">
-                <a:alpha val="70000"/>
-              </a:prstClr>
-            </a:outerShdw>
-          </a:effectLst>
+          <a:effectLst/>
           <a:scene3d>
             <a:camera prst="orthographicFront"/>
             <a:lightRig rig="threePt" dir="t">
@@ -17761,9 +18971,72 @@
           </a:p>
         </p:txBody>
       </p:sp>
+      <p:sp>
+        <p:nvSpPr>
+          <p:cNvPr id="39" name="正方形/長方形 38"/>
+          <p:cNvSpPr/>
+          <p:nvPr/>
+        </p:nvSpPr>
+        <p:spPr>
+          <a:xfrm rot="7836928">
+            <a:off x="6562010" y="3479793"/>
+            <a:ext cx="1016631" cy="442921"/>
+          </a:xfrm>
+          <a:prstGeom prst="rect">
+            <a:avLst/>
+          </a:prstGeom>
+          <a:solidFill>
+            <a:schemeClr val="bg2">
+              <a:lumMod val="50000"/>
+            </a:schemeClr>
+          </a:solidFill>
+          <a:ln w="19050">
+            <a:solidFill>
+              <a:schemeClr val="tx1">
+                <a:lumMod val="75000"/>
+                <a:lumOff val="25000"/>
+              </a:schemeClr>
+            </a:solidFill>
+          </a:ln>
+          <a:effectLst/>
+          <a:scene3d>
+            <a:camera prst="orthographicFront"/>
+            <a:lightRig rig="threePt" dir="t">
+              <a:rot lat="0" lon="0" rev="11400000"/>
+            </a:lightRig>
+          </a:scene3d>
+          <a:sp3d>
+            <a:bevelT w="127000" h="127000"/>
+          </a:sp3d>
+        </p:spPr>
+        <p:style>
+          <a:lnRef idx="2">
+            <a:schemeClr val="accent1">
+              <a:shade val="50000"/>
+            </a:schemeClr>
+          </a:lnRef>
+          <a:fillRef idx="1">
+            <a:schemeClr val="accent1"/>
+          </a:fillRef>
+          <a:effectRef idx="0">
+            <a:schemeClr val="accent1"/>
+          </a:effectRef>
+          <a:fontRef idx="minor">
+            <a:schemeClr val="lt1"/>
+          </a:fontRef>
+        </p:style>
+        <p:txBody>
+          <a:bodyPr rtlCol="0" anchor="ctr"/>
+          <a:lstStyle/>
+          <a:p>
+            <a:pPr algn="ctr"/>
+            <a:endParaRPr kumimoji="1" lang="ja-JP" altLang="en-US"/>
+          </a:p>
+        </p:txBody>
+      </p:sp>
       <p:pic>
         <p:nvPicPr>
-          <p:cNvPr id="16" name="図 15"/>
+          <p:cNvPr id="40" name="図 39"/>
           <p:cNvPicPr>
             <a:picLocks noChangeAspect="1"/>
           </p:cNvPicPr>
@@ -17776,9 +19049,9 @@
           </a:stretch>
         </p:blipFill>
         <p:spPr>
-          <a:xfrm rot="4440156">
-            <a:off x="5006528" y="2238432"/>
-            <a:ext cx="814201" cy="393284"/>
+          <a:xfrm rot="3637611">
+            <a:off x="4788156" y="4195602"/>
+            <a:ext cx="840917" cy="326060"/>
           </a:xfrm>
           <a:prstGeom prst="rect">
             <a:avLst/>
@@ -17787,14 +19060,14 @@
       </p:pic>
       <p:sp>
         <p:nvSpPr>
-          <p:cNvPr id="17" name="正方形/長方形 16"/>
-          <p:cNvSpPr/>
-          <p:nvPr/>
-        </p:nvSpPr>
-        <p:spPr>
-          <a:xfrm rot="12758049">
-            <a:off x="5195699" y="3195372"/>
-            <a:ext cx="291966" cy="501884"/>
+          <p:cNvPr id="41" name="正方形/長方形 40"/>
+          <p:cNvSpPr/>
+          <p:nvPr/>
+        </p:nvSpPr>
+        <p:spPr>
+          <a:xfrm rot="11955504">
+            <a:off x="6217704" y="2586617"/>
+            <a:ext cx="242060" cy="673625"/>
           </a:xfrm>
           <a:prstGeom prst="rect">
             <a:avLst/>
@@ -17847,14 +19120,14 @@
       </p:sp>
       <p:sp>
         <p:nvSpPr>
-          <p:cNvPr id="18" name="正方形/長方形 17"/>
-          <p:cNvSpPr/>
-          <p:nvPr/>
-        </p:nvSpPr>
-        <p:spPr>
-          <a:xfrm rot="18619907">
-            <a:off x="5710968" y="1835608"/>
-            <a:ext cx="249879" cy="915223"/>
+          <p:cNvPr id="42" name="正方形/長方形 41"/>
+          <p:cNvSpPr/>
+          <p:nvPr/>
+        </p:nvSpPr>
+        <p:spPr>
+          <a:xfrm rot="17817362">
+            <a:off x="6529853" y="2753550"/>
+            <a:ext cx="335386" cy="758785"/>
           </a:xfrm>
           <a:prstGeom prst="rect">
             <a:avLst/>
@@ -17907,7 +19180,7 @@
       </p:sp>
       <p:pic>
         <p:nvPicPr>
-          <p:cNvPr id="19" name="図 18"/>
+          <p:cNvPr id="43" name="図 42"/>
           <p:cNvPicPr>
             <a:picLocks noChangeAspect="1"/>
           </p:cNvPicPr>
@@ -17920,9 +19193,9 @@
           </a:stretch>
         </p:blipFill>
         <p:spPr>
-          <a:xfrm rot="8262039">
-            <a:off x="4887170" y="2559853"/>
-            <a:ext cx="1210083" cy="318754"/>
+          <a:xfrm rot="7459494">
+            <a:off x="6036205" y="3477147"/>
+            <a:ext cx="1249788" cy="264269"/>
           </a:xfrm>
           <a:prstGeom prst="rect">
             <a:avLst/>
@@ -17931,14 +19204,14 @@
       </p:pic>
       <p:sp>
         <p:nvSpPr>
-          <p:cNvPr id="20" name="正方形/長方形 19"/>
-          <p:cNvSpPr/>
-          <p:nvPr/>
-        </p:nvSpPr>
-        <p:spPr>
-          <a:xfrm rot="5711520">
-            <a:off x="5670533" y="2306569"/>
-            <a:ext cx="487777" cy="294596"/>
+          <p:cNvPr id="44" name="正方形/長方形 43"/>
+          <p:cNvSpPr/>
+          <p:nvPr/>
+        </p:nvSpPr>
+        <p:spPr>
+          <a:xfrm rot="4908975">
+            <a:off x="7156513" y="4113930"/>
+            <a:ext cx="654691" cy="244241"/>
           </a:xfrm>
           <a:prstGeom prst="rect">
             <a:avLst/>
@@ -17956,13 +19229,7 @@
               </a:schemeClr>
             </a:solidFill>
           </a:ln>
-          <a:effectLst>
-            <a:outerShdw blurRad="127000" dist="127000" dir="8100000" algn="tr" rotWithShape="0">
-              <a:prstClr val="black">
-                <a:alpha val="50000"/>
-              </a:prstClr>
-            </a:outerShdw>
-          </a:effectLst>
+          <a:effectLst/>
           <a:scene3d>
             <a:camera prst="orthographicFront"/>
             <a:lightRig rig="threePt" dir="t">
@@ -18000,153 +19267,21 @@
       </p:sp>
       <p:sp>
         <p:nvSpPr>
-          <p:cNvPr id="21" name="正方形/長方形 20"/>
-          <p:cNvSpPr/>
-          <p:nvPr/>
-        </p:nvSpPr>
-        <p:spPr>
-          <a:xfrm rot="3611261">
-            <a:off x="4390855" y="3237981"/>
-            <a:ext cx="440479" cy="1146542"/>
+          <p:cNvPr id="45" name="正方形/長方形 44"/>
+          <p:cNvSpPr/>
+          <p:nvPr/>
+        </p:nvSpPr>
+        <p:spPr>
+          <a:xfrm rot="4691546">
+            <a:off x="4243017" y="3317083"/>
+            <a:ext cx="335386" cy="945254"/>
           </a:xfrm>
           <a:prstGeom prst="rect">
             <a:avLst/>
           </a:prstGeom>
           <a:solidFill>
-            <a:schemeClr val="bg1">
-              <a:lumMod val="50000"/>
-            </a:schemeClr>
-          </a:solidFill>
-          <a:ln>
-            <a:solidFill>
-              <a:schemeClr val="tx1"/>
-            </a:solidFill>
-          </a:ln>
-          <a:effectLst>
-            <a:outerShdw blurRad="203200" sx="110000" sy="110000" algn="tl" rotWithShape="0">
-              <a:prstClr val="black">
-                <a:alpha val="70000"/>
-              </a:prstClr>
-            </a:outerShdw>
-          </a:effectLst>
-          <a:scene3d>
-            <a:camera prst="orthographicFront"/>
-            <a:lightRig rig="threePt" dir="t">
-              <a:rot lat="0" lon="0" rev="15600000"/>
-            </a:lightRig>
-          </a:scene3d>
-          <a:sp3d>
-            <a:bevelT w="152400" h="127000"/>
-          </a:sp3d>
-        </p:spPr>
-        <p:style>
-          <a:lnRef idx="2">
-            <a:schemeClr val="accent1">
-              <a:shade val="50000"/>
-            </a:schemeClr>
-          </a:lnRef>
-          <a:fillRef idx="1">
-            <a:schemeClr val="accent1"/>
-          </a:fillRef>
-          <a:effectRef idx="0">
-            <a:schemeClr val="accent1"/>
-          </a:effectRef>
-          <a:fontRef idx="minor">
-            <a:schemeClr val="lt1"/>
-          </a:fontRef>
-        </p:style>
-        <p:txBody>
-          <a:bodyPr rtlCol="0" anchor="ctr"/>
-          <a:lstStyle/>
-          <a:p>
-            <a:pPr algn="ctr"/>
-            <a:endParaRPr kumimoji="1" lang="ja-JP" altLang="en-US"/>
-          </a:p>
-        </p:txBody>
-      </p:sp>
-      <p:sp>
-        <p:nvSpPr>
-          <p:cNvPr id="22" name="正方形/長方形 21"/>
-          <p:cNvSpPr/>
-          <p:nvPr/>
-        </p:nvSpPr>
-        <p:spPr>
-          <a:xfrm rot="7339894">
-            <a:off x="4775248" y="2982337"/>
-            <a:ext cx="159276" cy="712218"/>
-          </a:xfrm>
-          <a:prstGeom prst="rect">
-            <a:avLst/>
-          </a:prstGeom>
-          <a:solidFill>
-            <a:schemeClr val="bg1">
-              <a:lumMod val="50000"/>
-            </a:schemeClr>
-          </a:solidFill>
-          <a:ln>
-            <a:solidFill>
-              <a:schemeClr val="tx1"/>
-            </a:solidFill>
-          </a:ln>
-          <a:effectLst>
-            <a:outerShdw blurRad="203200" sx="110000" sy="110000" algn="tl" rotWithShape="0">
-              <a:prstClr val="black">
-                <a:alpha val="70000"/>
-              </a:prstClr>
-            </a:outerShdw>
-          </a:effectLst>
-          <a:scene3d>
-            <a:camera prst="orthographicFront"/>
-            <a:lightRig rig="threePt" dir="t">
-              <a:rot lat="0" lon="0" rev="9000000"/>
-            </a:lightRig>
-          </a:scene3d>
-          <a:sp3d>
-            <a:bevelT w="152400" h="127000"/>
-          </a:sp3d>
-        </p:spPr>
-        <p:style>
-          <a:lnRef idx="2">
-            <a:schemeClr val="accent1">
-              <a:shade val="50000"/>
-            </a:schemeClr>
-          </a:lnRef>
-          <a:fillRef idx="1">
-            <a:schemeClr val="accent1"/>
-          </a:fillRef>
-          <a:effectRef idx="0">
-            <a:schemeClr val="accent1"/>
-          </a:effectRef>
-          <a:fontRef idx="minor">
-            <a:schemeClr val="lt1"/>
-          </a:fontRef>
-        </p:style>
-        <p:txBody>
-          <a:bodyPr rtlCol="0" anchor="ctr"/>
-          <a:lstStyle/>
-          <a:p>
-            <a:pPr algn="ctr"/>
-            <a:endParaRPr kumimoji="1" lang="ja-JP" altLang="en-US"/>
-          </a:p>
-        </p:txBody>
-      </p:sp>
-      <p:sp>
-        <p:nvSpPr>
-          <p:cNvPr id="23" name="正方形/長方形 22"/>
-          <p:cNvSpPr/>
-          <p:nvPr/>
-        </p:nvSpPr>
-        <p:spPr>
-          <a:xfrm rot="15960085">
-            <a:off x="5394035" y="4459975"/>
-            <a:ext cx="802777" cy="358523"/>
-          </a:xfrm>
-          <a:prstGeom prst="rect">
-            <a:avLst/>
-          </a:prstGeom>
-          <a:solidFill>
-            <a:schemeClr val="bg2">
-              <a:lumMod val="50000"/>
+            <a:schemeClr val="accent2">
+              <a:lumMod val="75000"/>
             </a:schemeClr>
           </a:solidFill>
           <a:ln w="19050">
@@ -18158,81 +19293,48 @@
             </a:solidFill>
           </a:ln>
           <a:effectLst>
-            <a:outerShdw blurRad="190500" dist="127000" dir="8100000" algn="tr" rotWithShape="0">
+            <a:innerShdw blurRad="254000" dist="63500">
               <a:prstClr val="black">
-                <a:alpha val="50000"/>
+                <a:alpha val="70000"/>
               </a:prstClr>
-            </a:outerShdw>
+            </a:innerShdw>
           </a:effectLst>
-          <a:scene3d>
-            <a:camera prst="orthographicFront"/>
-            <a:lightRig rig="threePt" dir="t">
-              <a:rot lat="0" lon="0" rev="11400000"/>
-            </a:lightRig>
-          </a:scene3d>
-          <a:sp3d>
-            <a:bevelT w="127000" h="127000"/>
-          </a:sp3d>
-        </p:spPr>
-        <p:style>
-          <a:lnRef idx="2">
-            <a:schemeClr val="accent1">
-              <a:shade val="50000"/>
-            </a:schemeClr>
-          </a:lnRef>
-          <a:fillRef idx="1">
-            <a:schemeClr val="accent1"/>
-          </a:fillRef>
-          <a:effectRef idx="0">
-            <a:schemeClr val="accent1"/>
-          </a:effectRef>
-          <a:fontRef idx="minor">
-            <a:schemeClr val="lt1"/>
-          </a:fontRef>
-        </p:style>
-        <p:txBody>
-          <a:bodyPr rtlCol="0" anchor="ctr"/>
-          <a:lstStyle/>
-          <a:p>
-            <a:pPr algn="ctr"/>
-            <a:endParaRPr kumimoji="1" lang="ja-JP" altLang="en-US"/>
-          </a:p>
-        </p:txBody>
-      </p:sp>
-      <p:pic>
-        <p:nvPicPr>
-          <p:cNvPr id="24" name="図 23"/>
-          <p:cNvPicPr>
-            <a:picLocks noChangeAspect="1"/>
-          </p:cNvPicPr>
-          <p:nvPr/>
-        </p:nvPicPr>
-        <p:blipFill>
-          <a:blip r:embed="rId2"/>
-          <a:stretch>
-            <a:fillRect/>
-          </a:stretch>
-        </p:blipFill>
-        <p:spPr>
-          <a:xfrm rot="11760768">
-            <a:off x="4101204" y="4208554"/>
-            <a:ext cx="870329" cy="420396"/>
-          </a:xfrm>
-          <a:prstGeom prst="rect">
-            <a:avLst/>
-          </a:prstGeom>
-        </p:spPr>
-      </p:pic>
-      <p:sp>
-        <p:nvSpPr>
-          <p:cNvPr id="25" name="正方形/長方形 24"/>
-          <p:cNvSpPr/>
-          <p:nvPr/>
-        </p:nvSpPr>
-        <p:spPr>
-          <a:xfrm rot="20078661">
-            <a:off x="4525234" y="4009330"/>
-            <a:ext cx="312093" cy="531924"/>
+        </p:spPr>
+        <p:style>
+          <a:lnRef idx="2">
+            <a:schemeClr val="accent1">
+              <a:shade val="50000"/>
+            </a:schemeClr>
+          </a:lnRef>
+          <a:fillRef idx="1">
+            <a:schemeClr val="accent1"/>
+          </a:fillRef>
+          <a:effectRef idx="0">
+            <a:schemeClr val="accent1"/>
+          </a:effectRef>
+          <a:fontRef idx="minor">
+            <a:schemeClr val="lt1"/>
+          </a:fontRef>
+        </p:style>
+        <p:txBody>
+          <a:bodyPr rtlCol="0" anchor="ctr"/>
+          <a:lstStyle/>
+          <a:p>
+            <a:pPr algn="ctr"/>
+            <a:endParaRPr kumimoji="1" lang="ja-JP" altLang="en-US"/>
+          </a:p>
+        </p:txBody>
+      </p:sp>
+      <p:sp>
+        <p:nvSpPr>
+          <p:cNvPr id="46" name="正方形/長方形 45"/>
+          <p:cNvSpPr/>
+          <p:nvPr/>
+        </p:nvSpPr>
+        <p:spPr>
+          <a:xfrm rot="15943854">
+            <a:off x="4853410" y="4420255"/>
+            <a:ext cx="291966" cy="501884"/>
           </a:xfrm>
           <a:prstGeom prst="rect">
             <a:avLst/>
@@ -18285,1162 +19387,13 @@
       </p:sp>
       <p:sp>
         <p:nvSpPr>
-          <p:cNvPr id="26" name="正方形/長方形 25"/>
-          <p:cNvSpPr/>
-          <p:nvPr/>
-        </p:nvSpPr>
-        <p:spPr>
-          <a:xfrm rot="4340519">
-            <a:off x="5435439" y="2894046"/>
-            <a:ext cx="264836" cy="978315"/>
-          </a:xfrm>
-          <a:prstGeom prst="rect">
-            <a:avLst/>
-          </a:prstGeom>
-          <a:solidFill>
-            <a:schemeClr val="accent2">
-              <a:lumMod val="75000"/>
-            </a:schemeClr>
-          </a:solidFill>
-          <a:ln w="19050">
-            <a:solidFill>
-              <a:schemeClr val="tx1">
-                <a:lumMod val="75000"/>
-                <a:lumOff val="25000"/>
-              </a:schemeClr>
-            </a:solidFill>
-          </a:ln>
-          <a:effectLst>
-            <a:innerShdw blurRad="254000" dist="63500">
-              <a:prstClr val="black">
-                <a:alpha val="70000"/>
-              </a:prstClr>
-            </a:innerShdw>
-          </a:effectLst>
-        </p:spPr>
-        <p:style>
-          <a:lnRef idx="2">
-            <a:schemeClr val="accent1">
-              <a:shade val="50000"/>
-            </a:schemeClr>
-          </a:lnRef>
-          <a:fillRef idx="1">
-            <a:schemeClr val="accent1"/>
-          </a:fillRef>
-          <a:effectRef idx="0">
-            <a:schemeClr val="accent1"/>
-          </a:effectRef>
-          <a:fontRef idx="minor">
-            <a:schemeClr val="lt1"/>
-          </a:fontRef>
-        </p:style>
-        <p:txBody>
-          <a:bodyPr rtlCol="0" anchor="ctr"/>
-          <a:lstStyle/>
-          <a:p>
-            <a:pPr algn="ctr"/>
-            <a:endParaRPr kumimoji="1" lang="ja-JP" altLang="en-US"/>
-          </a:p>
-        </p:txBody>
-      </p:sp>
-      <p:pic>
-        <p:nvPicPr>
-          <p:cNvPr id="27" name="図 26"/>
-          <p:cNvPicPr>
-            <a:picLocks noChangeAspect="1"/>
-          </p:cNvPicPr>
-          <p:nvPr/>
-        </p:nvPicPr>
-        <p:blipFill>
-          <a:blip r:embed="rId2"/>
-          <a:stretch>
-            <a:fillRect/>
-          </a:stretch>
-        </p:blipFill>
-        <p:spPr>
-          <a:xfrm rot="11766438">
-            <a:off x="4105886" y="4659098"/>
-            <a:ext cx="1293502" cy="340728"/>
-          </a:xfrm>
-          <a:prstGeom prst="rect">
-            <a:avLst/>
-          </a:prstGeom>
-        </p:spPr>
-      </p:pic>
-      <p:sp>
-        <p:nvSpPr>
-          <p:cNvPr id="28" name="正方形/長方形 27"/>
-          <p:cNvSpPr/>
-          <p:nvPr/>
-        </p:nvSpPr>
-        <p:spPr>
-          <a:xfrm rot="13032132">
-            <a:off x="4822419" y="3603514"/>
-            <a:ext cx="677590" cy="240261"/>
-          </a:xfrm>
-          <a:prstGeom prst="rect">
-            <a:avLst/>
-          </a:prstGeom>
-          <a:solidFill>
-            <a:schemeClr val="bg2">
-              <a:lumMod val="50000"/>
-            </a:schemeClr>
-          </a:solidFill>
-          <a:ln w="19050">
-            <a:solidFill>
-              <a:schemeClr val="tx1">
-                <a:lumMod val="75000"/>
-                <a:lumOff val="25000"/>
-              </a:schemeClr>
-            </a:solidFill>
-          </a:ln>
-          <a:effectLst>
-            <a:outerShdw blurRad="127000" dist="127000" dir="8100000" algn="tr" rotWithShape="0">
-              <a:prstClr val="black">
-                <a:alpha val="50000"/>
-              </a:prstClr>
-            </a:outerShdw>
-          </a:effectLst>
-          <a:scene3d>
-            <a:camera prst="orthographicFront"/>
-            <a:lightRig rig="threePt" dir="t">
-              <a:rot lat="0" lon="0" rev="12000000"/>
-            </a:lightRig>
-          </a:scene3d>
-          <a:sp3d>
-            <a:bevelT w="127000" h="127000"/>
-          </a:sp3d>
-        </p:spPr>
-        <p:style>
-          <a:lnRef idx="2">
-            <a:schemeClr val="accent1">
-              <a:shade val="50000"/>
-            </a:schemeClr>
-          </a:lnRef>
-          <a:fillRef idx="1">
-            <a:schemeClr val="accent1"/>
-          </a:fillRef>
-          <a:effectRef idx="0">
-            <a:schemeClr val="accent1"/>
-          </a:effectRef>
-          <a:fontRef idx="minor">
-            <a:schemeClr val="lt1"/>
-          </a:fontRef>
-        </p:style>
-        <p:txBody>
-          <a:bodyPr rtlCol="0" anchor="ctr"/>
-          <a:lstStyle/>
-          <a:p>
-            <a:pPr algn="ctr"/>
-            <a:endParaRPr kumimoji="1" lang="ja-JP" altLang="en-US"/>
-          </a:p>
-        </p:txBody>
-      </p:sp>
-      <p:sp>
-        <p:nvSpPr>
-          <p:cNvPr id="29" name="正方形/長方形 28"/>
-          <p:cNvSpPr/>
-          <p:nvPr/>
-        </p:nvSpPr>
-        <p:spPr>
-          <a:xfrm rot="3293102">
-            <a:off x="5492993" y="2914171"/>
-            <a:ext cx="359438" cy="1451972"/>
-          </a:xfrm>
-          <a:prstGeom prst="rect">
-            <a:avLst/>
-          </a:prstGeom>
-          <a:solidFill>
-            <a:schemeClr val="bg1">
-              <a:lumMod val="50000"/>
-            </a:schemeClr>
-          </a:solidFill>
-          <a:ln>
-            <a:solidFill>
-              <a:schemeClr val="tx1"/>
-            </a:solidFill>
-          </a:ln>
-          <a:effectLst>
-            <a:outerShdw blurRad="203200" sx="110000" sy="110000" algn="tl" rotWithShape="0">
-              <a:prstClr val="black">
-                <a:alpha val="70000"/>
-              </a:prstClr>
-            </a:outerShdw>
-          </a:effectLst>
-          <a:scene3d>
-            <a:camera prst="orthographicFront"/>
-            <a:lightRig rig="threePt" dir="t">
-              <a:rot lat="0" lon="0" rev="15600000"/>
-            </a:lightRig>
-          </a:scene3d>
-          <a:sp3d>
-            <a:bevelT w="152400" h="127000"/>
-          </a:sp3d>
-        </p:spPr>
-        <p:style>
-          <a:lnRef idx="2">
-            <a:schemeClr val="accent1">
-              <a:shade val="50000"/>
-            </a:schemeClr>
-          </a:lnRef>
-          <a:fillRef idx="1">
-            <a:schemeClr val="accent1"/>
-          </a:fillRef>
-          <a:effectRef idx="0">
-            <a:schemeClr val="accent1"/>
-          </a:effectRef>
-          <a:fontRef idx="minor">
-            <a:schemeClr val="lt1"/>
-          </a:fontRef>
-        </p:style>
-        <p:txBody>
-          <a:bodyPr rtlCol="0" anchor="ctr"/>
-          <a:lstStyle/>
-          <a:p>
-            <a:pPr algn="ctr"/>
-            <a:endParaRPr kumimoji="1" lang="ja-JP" altLang="en-US"/>
-          </a:p>
-        </p:txBody>
-      </p:sp>
-      <p:sp>
-        <p:nvSpPr>
-          <p:cNvPr id="30" name="正方形/長方形 29"/>
-          <p:cNvSpPr/>
-          <p:nvPr/>
-        </p:nvSpPr>
-        <p:spPr>
-          <a:xfrm rot="7021735">
-            <a:off x="5958912" y="3160800"/>
-            <a:ext cx="201706" cy="581182"/>
-          </a:xfrm>
-          <a:prstGeom prst="rect">
-            <a:avLst/>
-          </a:prstGeom>
-          <a:solidFill>
-            <a:schemeClr val="bg1">
-              <a:lumMod val="50000"/>
-            </a:schemeClr>
-          </a:solidFill>
-          <a:ln>
-            <a:solidFill>
-              <a:schemeClr val="tx1"/>
-            </a:solidFill>
-          </a:ln>
-          <a:effectLst>
-            <a:outerShdw blurRad="203200" sx="110000" sy="110000" algn="tl" rotWithShape="0">
-              <a:prstClr val="black">
-                <a:alpha val="70000"/>
-              </a:prstClr>
-            </a:outerShdw>
-          </a:effectLst>
-          <a:scene3d>
-            <a:camera prst="orthographicFront"/>
-            <a:lightRig rig="threePt" dir="t">
-              <a:rot lat="0" lon="0" rev="9000000"/>
-            </a:lightRig>
-          </a:scene3d>
-          <a:sp3d>
-            <a:bevelT w="152400" h="127000"/>
-          </a:sp3d>
-        </p:spPr>
-        <p:style>
-          <a:lnRef idx="2">
-            <a:schemeClr val="accent1">
-              <a:shade val="50000"/>
-            </a:schemeClr>
-          </a:lnRef>
-          <a:fillRef idx="1">
-            <a:schemeClr val="accent1"/>
-          </a:fillRef>
-          <a:effectRef idx="0">
-            <a:schemeClr val="accent1"/>
-          </a:effectRef>
-          <a:fontRef idx="minor">
-            <a:schemeClr val="lt1"/>
-          </a:fontRef>
-        </p:style>
-        <p:txBody>
-          <a:bodyPr rtlCol="0" anchor="ctr"/>
-          <a:lstStyle/>
-          <a:p>
-            <a:pPr algn="ctr"/>
-            <a:endParaRPr kumimoji="1" lang="ja-JP" altLang="en-US"/>
-          </a:p>
-        </p:txBody>
-      </p:sp>
-      <p:sp>
-        <p:nvSpPr>
-          <p:cNvPr id="31" name="正方形/長方形 30"/>
-          <p:cNvSpPr/>
-          <p:nvPr/>
-        </p:nvSpPr>
-        <p:spPr>
-          <a:xfrm rot="20945210">
-            <a:off x="6561241" y="4459672"/>
-            <a:ext cx="858604" cy="419572"/>
-          </a:xfrm>
-          <a:prstGeom prst="rect">
-            <a:avLst/>
-          </a:prstGeom>
-          <a:solidFill>
-            <a:schemeClr val="bg2">
-              <a:lumMod val="50000"/>
-            </a:schemeClr>
-          </a:solidFill>
-          <a:ln w="19050">
-            <a:solidFill>
-              <a:schemeClr val="tx1">
-                <a:lumMod val="75000"/>
-                <a:lumOff val="25000"/>
-              </a:schemeClr>
-            </a:solidFill>
-          </a:ln>
-          <a:effectLst>
-            <a:outerShdw blurRad="190500" dist="127000" dir="8100000" algn="tr" rotWithShape="0">
-              <a:prstClr val="black">
-                <a:alpha val="50000"/>
-              </a:prstClr>
-            </a:outerShdw>
-          </a:effectLst>
-          <a:scene3d>
-            <a:camera prst="orthographicFront"/>
-            <a:lightRig rig="threePt" dir="t">
-              <a:rot lat="0" lon="0" rev="11400000"/>
-            </a:lightRig>
-          </a:scene3d>
-          <a:sp3d>
-            <a:bevelT w="127000" h="127000"/>
-          </a:sp3d>
-        </p:spPr>
-        <p:style>
-          <a:lnRef idx="2">
-            <a:schemeClr val="accent1">
-              <a:shade val="50000"/>
-            </a:schemeClr>
-          </a:lnRef>
-          <a:fillRef idx="1">
-            <a:schemeClr val="accent1"/>
-          </a:fillRef>
-          <a:effectRef idx="0">
-            <a:schemeClr val="accent1"/>
-          </a:effectRef>
-          <a:fontRef idx="minor">
-            <a:schemeClr val="lt1"/>
-          </a:fontRef>
-        </p:style>
-        <p:txBody>
-          <a:bodyPr rtlCol="0" anchor="ctr"/>
-          <a:lstStyle/>
-          <a:p>
-            <a:pPr algn="ctr"/>
-            <a:endParaRPr kumimoji="1" lang="ja-JP" altLang="en-US"/>
-          </a:p>
-        </p:txBody>
-      </p:sp>
-      <p:pic>
-        <p:nvPicPr>
-          <p:cNvPr id="32" name="図 31"/>
-          <p:cNvPicPr>
-            <a:picLocks noChangeAspect="1"/>
-          </p:cNvPicPr>
-          <p:nvPr/>
-        </p:nvPicPr>
-        <p:blipFill>
-          <a:blip r:embed="rId2"/>
-          <a:stretch>
-            <a:fillRect/>
-          </a:stretch>
-        </p:blipFill>
-        <p:spPr>
-          <a:xfrm rot="11442609">
-            <a:off x="5004951" y="3870158"/>
-            <a:ext cx="840917" cy="343050"/>
-          </a:xfrm>
-          <a:prstGeom prst="rect">
-            <a:avLst/>
-          </a:prstGeom>
-        </p:spPr>
-      </p:pic>
-      <p:sp>
-        <p:nvSpPr>
-          <p:cNvPr id="33" name="正方形/長方形 32"/>
-          <p:cNvSpPr/>
-          <p:nvPr/>
-        </p:nvSpPr>
-        <p:spPr>
-          <a:xfrm rot="19760502">
-            <a:off x="6228347" y="4016491"/>
-            <a:ext cx="301546" cy="568916"/>
-          </a:xfrm>
-          <a:prstGeom prst="rect">
-            <a:avLst/>
-          </a:prstGeom>
-          <a:solidFill>
-            <a:schemeClr val="accent2">
-              <a:lumMod val="75000"/>
-            </a:schemeClr>
-          </a:solidFill>
-          <a:ln w="19050">
-            <a:solidFill>
-              <a:schemeClr val="tx1">
-                <a:lumMod val="75000"/>
-                <a:lumOff val="25000"/>
-              </a:schemeClr>
-            </a:solidFill>
-          </a:ln>
-          <a:effectLst>
-            <a:innerShdw blurRad="254000" dist="63500">
-              <a:prstClr val="black">
-                <a:alpha val="70000"/>
-              </a:prstClr>
-            </a:innerShdw>
-          </a:effectLst>
-        </p:spPr>
-        <p:style>
-          <a:lnRef idx="2">
-            <a:schemeClr val="accent1">
-              <a:shade val="50000"/>
-            </a:schemeClr>
-          </a:lnRef>
-          <a:fillRef idx="1">
-            <a:schemeClr val="accent1"/>
-          </a:fillRef>
-          <a:effectRef idx="0">
-            <a:schemeClr val="accent1"/>
-          </a:effectRef>
-          <a:fontRef idx="minor">
-            <a:schemeClr val="lt1"/>
-          </a:fontRef>
-        </p:style>
-        <p:txBody>
-          <a:bodyPr rtlCol="0" anchor="ctr"/>
-          <a:lstStyle/>
-          <a:p>
-            <a:pPr algn="ctr"/>
-            <a:endParaRPr kumimoji="1" lang="ja-JP" altLang="en-US"/>
-          </a:p>
-        </p:txBody>
-      </p:sp>
-      <p:sp>
-        <p:nvSpPr>
-          <p:cNvPr id="34" name="正方形/長方形 33"/>
-          <p:cNvSpPr/>
-          <p:nvPr/>
-        </p:nvSpPr>
-        <p:spPr>
-          <a:xfrm rot="4022360">
-            <a:off x="5953596" y="3249923"/>
-            <a:ext cx="283253" cy="945254"/>
-          </a:xfrm>
-          <a:prstGeom prst="rect">
-            <a:avLst/>
-          </a:prstGeom>
-          <a:solidFill>
-            <a:schemeClr val="accent2">
-              <a:lumMod val="75000"/>
-            </a:schemeClr>
-          </a:solidFill>
-          <a:ln w="19050">
-            <a:solidFill>
-              <a:schemeClr val="tx1">
-                <a:lumMod val="75000"/>
-                <a:lumOff val="25000"/>
-              </a:schemeClr>
-            </a:solidFill>
-          </a:ln>
-          <a:effectLst>
-            <a:innerShdw blurRad="254000" dist="63500">
-              <a:prstClr val="black">
-                <a:alpha val="70000"/>
-              </a:prstClr>
-            </a:innerShdw>
-          </a:effectLst>
-        </p:spPr>
-        <p:style>
-          <a:lnRef idx="2">
-            <a:schemeClr val="accent1">
-              <a:shade val="50000"/>
-            </a:schemeClr>
-          </a:lnRef>
-          <a:fillRef idx="1">
-            <a:schemeClr val="accent1"/>
-          </a:fillRef>
-          <a:effectRef idx="0">
-            <a:schemeClr val="accent1"/>
-          </a:effectRef>
-          <a:fontRef idx="minor">
-            <a:schemeClr val="lt1"/>
-          </a:fontRef>
-        </p:style>
-        <p:txBody>
-          <a:bodyPr rtlCol="0" anchor="ctr"/>
-          <a:lstStyle/>
-          <a:p>
-            <a:pPr algn="ctr"/>
-            <a:endParaRPr kumimoji="1" lang="ja-JP" altLang="en-US"/>
-          </a:p>
-        </p:txBody>
-      </p:sp>
-      <p:pic>
-        <p:nvPicPr>
-          <p:cNvPr id="35" name="図 34"/>
-          <p:cNvPicPr>
-            <a:picLocks noChangeAspect="1"/>
-          </p:cNvPicPr>
-          <p:nvPr/>
-        </p:nvPicPr>
-        <p:blipFill>
-          <a:blip r:embed="rId2"/>
-          <a:stretch>
-            <a:fillRect/>
-          </a:stretch>
-        </p:blipFill>
-        <p:spPr>
-          <a:xfrm rot="15264492">
-            <a:off x="5992501" y="4304477"/>
-            <a:ext cx="1055519" cy="329213"/>
-          </a:xfrm>
-          <a:prstGeom prst="rect">
-            <a:avLst/>
-          </a:prstGeom>
-        </p:spPr>
-      </p:pic>
-      <p:sp>
-        <p:nvSpPr>
-          <p:cNvPr id="36" name="正方形/長方形 35"/>
-          <p:cNvSpPr/>
-          <p:nvPr/>
-        </p:nvSpPr>
-        <p:spPr>
-          <a:xfrm rot="9033098">
-            <a:off x="6092140" y="3679964"/>
-            <a:ext cx="552925" cy="304263"/>
-          </a:xfrm>
-          <a:prstGeom prst="rect">
-            <a:avLst/>
-          </a:prstGeom>
-          <a:solidFill>
-            <a:schemeClr val="bg2">
-              <a:lumMod val="50000"/>
-            </a:schemeClr>
-          </a:solidFill>
-          <a:ln w="19050">
-            <a:solidFill>
-              <a:schemeClr val="tx1">
-                <a:lumMod val="75000"/>
-                <a:lumOff val="25000"/>
-              </a:schemeClr>
-            </a:solidFill>
-          </a:ln>
-          <a:effectLst>
-            <a:outerShdw blurRad="127000" dist="127000" dir="8100000" algn="tr" rotWithShape="0">
-              <a:prstClr val="black">
-                <a:alpha val="50000"/>
-              </a:prstClr>
-            </a:outerShdw>
-          </a:effectLst>
-          <a:scene3d>
-            <a:camera prst="orthographicFront"/>
-            <a:lightRig rig="threePt" dir="t">
-              <a:rot lat="0" lon="0" rev="12000000"/>
-            </a:lightRig>
-          </a:scene3d>
-          <a:sp3d>
-            <a:bevelT w="127000" h="127000"/>
-          </a:sp3d>
-        </p:spPr>
-        <p:style>
-          <a:lnRef idx="2">
-            <a:schemeClr val="accent1">
-              <a:shade val="50000"/>
-            </a:schemeClr>
-          </a:lnRef>
-          <a:fillRef idx="1">
-            <a:schemeClr val="accent1"/>
-          </a:fillRef>
-          <a:effectRef idx="0">
-            <a:schemeClr val="accent1"/>
-          </a:effectRef>
-          <a:fontRef idx="minor">
-            <a:schemeClr val="lt1"/>
-          </a:fontRef>
-        </p:style>
-        <p:txBody>
-          <a:bodyPr rtlCol="0" anchor="ctr"/>
-          <a:lstStyle/>
-          <a:p>
-            <a:pPr algn="ctr"/>
-            <a:endParaRPr kumimoji="1" lang="ja-JP" altLang="en-US"/>
-          </a:p>
-        </p:txBody>
-      </p:sp>
-      <p:sp>
-        <p:nvSpPr>
-          <p:cNvPr id="37" name="正方形/長方形 36"/>
-          <p:cNvSpPr/>
-          <p:nvPr/>
-        </p:nvSpPr>
-        <p:spPr>
-          <a:xfrm rot="17088104">
-            <a:off x="5843030" y="2409650"/>
-            <a:ext cx="425593" cy="1165543"/>
-          </a:xfrm>
-          <a:prstGeom prst="rect">
-            <a:avLst/>
-          </a:prstGeom>
-          <a:solidFill>
-            <a:schemeClr val="bg1">
-              <a:lumMod val="50000"/>
-            </a:schemeClr>
-          </a:solidFill>
-          <a:ln>
-            <a:solidFill>
-              <a:schemeClr val="tx1"/>
-            </a:solidFill>
-          </a:ln>
-          <a:effectLst>
-            <a:outerShdw blurRad="203200" sx="110000" sy="110000" algn="tl" rotWithShape="0">
-              <a:prstClr val="black">
-                <a:alpha val="70000"/>
-              </a:prstClr>
-            </a:outerShdw>
-          </a:effectLst>
-          <a:scene3d>
-            <a:camera prst="orthographicFront"/>
-            <a:lightRig rig="threePt" dir="t">
-              <a:rot lat="0" lon="0" rev="15600000"/>
-            </a:lightRig>
-          </a:scene3d>
-          <a:sp3d>
-            <a:bevelT w="152400" h="127000"/>
-          </a:sp3d>
-        </p:spPr>
-        <p:style>
-          <a:lnRef idx="2">
-            <a:schemeClr val="accent1">
-              <a:shade val="50000"/>
-            </a:schemeClr>
-          </a:lnRef>
-          <a:fillRef idx="1">
-            <a:schemeClr val="accent1"/>
-          </a:fillRef>
-          <a:effectRef idx="0">
-            <a:schemeClr val="accent1"/>
-          </a:effectRef>
-          <a:fontRef idx="minor">
-            <a:schemeClr val="lt1"/>
-          </a:fontRef>
-        </p:style>
-        <p:txBody>
-          <a:bodyPr rtlCol="0" anchor="ctr"/>
-          <a:lstStyle/>
-          <a:p>
-            <a:pPr algn="ctr"/>
-            <a:endParaRPr kumimoji="1" lang="ja-JP" altLang="en-US"/>
-          </a:p>
-        </p:txBody>
-      </p:sp>
-      <p:sp>
-        <p:nvSpPr>
-          <p:cNvPr id="38" name="正方形/長方形 37"/>
-          <p:cNvSpPr/>
-          <p:nvPr/>
-        </p:nvSpPr>
-        <p:spPr>
-          <a:xfrm rot="20816737">
-            <a:off x="6279888" y="2331204"/>
-            <a:ext cx="161916" cy="688149"/>
-          </a:xfrm>
-          <a:prstGeom prst="rect">
-            <a:avLst/>
-          </a:prstGeom>
-          <a:solidFill>
-            <a:schemeClr val="bg1">
-              <a:lumMod val="50000"/>
-            </a:schemeClr>
-          </a:solidFill>
-          <a:ln>
-            <a:solidFill>
-              <a:schemeClr val="tx1"/>
-            </a:solidFill>
-          </a:ln>
-          <a:effectLst>
-            <a:outerShdw blurRad="203200" sx="110000" sy="110000" algn="tl" rotWithShape="0">
-              <a:prstClr val="black">
-                <a:alpha val="70000"/>
-              </a:prstClr>
-            </a:outerShdw>
-          </a:effectLst>
-          <a:scene3d>
-            <a:camera prst="orthographicFront"/>
-            <a:lightRig rig="threePt" dir="t">
-              <a:rot lat="0" lon="0" rev="9000000"/>
-            </a:lightRig>
-          </a:scene3d>
-          <a:sp3d>
-            <a:bevelT w="152400" h="127000"/>
-          </a:sp3d>
-        </p:spPr>
-        <p:style>
-          <a:lnRef idx="2">
-            <a:schemeClr val="accent1">
-              <a:shade val="50000"/>
-            </a:schemeClr>
-          </a:lnRef>
-          <a:fillRef idx="1">
-            <a:schemeClr val="accent1"/>
-          </a:fillRef>
-          <a:effectRef idx="0">
-            <a:schemeClr val="accent1"/>
-          </a:effectRef>
-          <a:fontRef idx="minor">
-            <a:schemeClr val="lt1"/>
-          </a:fontRef>
-        </p:style>
-        <p:txBody>
-          <a:bodyPr rtlCol="0" anchor="ctr"/>
-          <a:lstStyle/>
-          <a:p>
-            <a:pPr algn="ctr"/>
-            <a:endParaRPr kumimoji="1" lang="ja-JP" altLang="en-US"/>
-          </a:p>
-        </p:txBody>
-      </p:sp>
-      <p:sp>
-        <p:nvSpPr>
-          <p:cNvPr id="39" name="正方形/長方形 38"/>
-          <p:cNvSpPr/>
-          <p:nvPr/>
-        </p:nvSpPr>
-        <p:spPr>
-          <a:xfrm rot="7836928">
-            <a:off x="6562010" y="3479793"/>
-            <a:ext cx="1016631" cy="442921"/>
-          </a:xfrm>
-          <a:prstGeom prst="rect">
-            <a:avLst/>
-          </a:prstGeom>
-          <a:solidFill>
-            <a:schemeClr val="bg2">
-              <a:lumMod val="50000"/>
-            </a:schemeClr>
-          </a:solidFill>
-          <a:ln w="19050">
-            <a:solidFill>
-              <a:schemeClr val="tx1">
-                <a:lumMod val="75000"/>
-                <a:lumOff val="25000"/>
-              </a:schemeClr>
-            </a:solidFill>
-          </a:ln>
-          <a:effectLst>
-            <a:outerShdw blurRad="190500" dist="127000" dir="8100000" algn="tr" rotWithShape="0">
-              <a:prstClr val="black">
-                <a:alpha val="50000"/>
-              </a:prstClr>
-            </a:outerShdw>
-          </a:effectLst>
-          <a:scene3d>
-            <a:camera prst="orthographicFront"/>
-            <a:lightRig rig="threePt" dir="t">
-              <a:rot lat="0" lon="0" rev="11400000"/>
-            </a:lightRig>
-          </a:scene3d>
-          <a:sp3d>
-            <a:bevelT w="127000" h="127000"/>
-          </a:sp3d>
-        </p:spPr>
-        <p:style>
-          <a:lnRef idx="2">
-            <a:schemeClr val="accent1">
-              <a:shade val="50000"/>
-            </a:schemeClr>
-          </a:lnRef>
-          <a:fillRef idx="1">
-            <a:schemeClr val="accent1"/>
-          </a:fillRef>
-          <a:effectRef idx="0">
-            <a:schemeClr val="accent1"/>
-          </a:effectRef>
-          <a:fontRef idx="minor">
-            <a:schemeClr val="lt1"/>
-          </a:fontRef>
-        </p:style>
-        <p:txBody>
-          <a:bodyPr rtlCol="0" anchor="ctr"/>
-          <a:lstStyle/>
-          <a:p>
-            <a:pPr algn="ctr"/>
-            <a:endParaRPr kumimoji="1" lang="ja-JP" altLang="en-US"/>
-          </a:p>
-        </p:txBody>
-      </p:sp>
-      <p:pic>
-        <p:nvPicPr>
-          <p:cNvPr id="40" name="図 39"/>
-          <p:cNvPicPr>
-            <a:picLocks noChangeAspect="1"/>
-          </p:cNvPicPr>
-          <p:nvPr/>
-        </p:nvPicPr>
-        <p:blipFill>
-          <a:blip r:embed="rId2"/>
-          <a:stretch>
-            <a:fillRect/>
-          </a:stretch>
-        </p:blipFill>
-        <p:spPr>
-          <a:xfrm rot="3637611">
-            <a:off x="4825035" y="4220060"/>
-            <a:ext cx="840917" cy="326060"/>
-          </a:xfrm>
-          <a:prstGeom prst="rect">
-            <a:avLst/>
-          </a:prstGeom>
-        </p:spPr>
-      </p:pic>
-      <p:sp>
-        <p:nvSpPr>
-          <p:cNvPr id="41" name="正方形/長方形 40"/>
-          <p:cNvSpPr/>
-          <p:nvPr/>
-        </p:nvSpPr>
-        <p:spPr>
-          <a:xfrm rot="11955504">
-            <a:off x="6217704" y="2586617"/>
-            <a:ext cx="242060" cy="673625"/>
-          </a:xfrm>
-          <a:prstGeom prst="rect">
-            <a:avLst/>
-          </a:prstGeom>
-          <a:solidFill>
-            <a:schemeClr val="accent2">
-              <a:lumMod val="75000"/>
-            </a:schemeClr>
-          </a:solidFill>
-          <a:ln w="19050">
-            <a:solidFill>
-              <a:schemeClr val="tx1">
-                <a:lumMod val="75000"/>
-                <a:lumOff val="25000"/>
-              </a:schemeClr>
-            </a:solidFill>
-          </a:ln>
-          <a:effectLst>
-            <a:innerShdw blurRad="254000" dist="63500">
-              <a:prstClr val="black">
-                <a:alpha val="70000"/>
-              </a:prstClr>
-            </a:innerShdw>
-          </a:effectLst>
-        </p:spPr>
-        <p:style>
-          <a:lnRef idx="2">
-            <a:schemeClr val="accent1">
-              <a:shade val="50000"/>
-            </a:schemeClr>
-          </a:lnRef>
-          <a:fillRef idx="1">
-            <a:schemeClr val="accent1"/>
-          </a:fillRef>
-          <a:effectRef idx="0">
-            <a:schemeClr val="accent1"/>
-          </a:effectRef>
-          <a:fontRef idx="minor">
-            <a:schemeClr val="lt1"/>
-          </a:fontRef>
-        </p:style>
-        <p:txBody>
-          <a:bodyPr rtlCol="0" anchor="ctr"/>
-          <a:lstStyle/>
-          <a:p>
-            <a:pPr algn="ctr"/>
-            <a:endParaRPr kumimoji="1" lang="ja-JP" altLang="en-US"/>
-          </a:p>
-        </p:txBody>
-      </p:sp>
-      <p:sp>
-        <p:nvSpPr>
-          <p:cNvPr id="42" name="正方形/長方形 41"/>
-          <p:cNvSpPr/>
-          <p:nvPr/>
-        </p:nvSpPr>
-        <p:spPr>
-          <a:xfrm rot="17817362">
-            <a:off x="6529853" y="2753550"/>
-            <a:ext cx="335386" cy="758785"/>
-          </a:xfrm>
-          <a:prstGeom prst="rect">
-            <a:avLst/>
-          </a:prstGeom>
-          <a:solidFill>
-            <a:schemeClr val="accent2">
-              <a:lumMod val="75000"/>
-            </a:schemeClr>
-          </a:solidFill>
-          <a:ln w="19050">
-            <a:solidFill>
-              <a:schemeClr val="tx1">
-                <a:lumMod val="75000"/>
-                <a:lumOff val="25000"/>
-              </a:schemeClr>
-            </a:solidFill>
-          </a:ln>
-          <a:effectLst>
-            <a:innerShdw blurRad="254000" dist="63500">
-              <a:prstClr val="black">
-                <a:alpha val="70000"/>
-              </a:prstClr>
-            </a:innerShdw>
-          </a:effectLst>
-        </p:spPr>
-        <p:style>
-          <a:lnRef idx="2">
-            <a:schemeClr val="accent1">
-              <a:shade val="50000"/>
-            </a:schemeClr>
-          </a:lnRef>
-          <a:fillRef idx="1">
-            <a:schemeClr val="accent1"/>
-          </a:fillRef>
-          <a:effectRef idx="0">
-            <a:schemeClr val="accent1"/>
-          </a:effectRef>
-          <a:fontRef idx="minor">
-            <a:schemeClr val="lt1"/>
-          </a:fontRef>
-        </p:style>
-        <p:txBody>
-          <a:bodyPr rtlCol="0" anchor="ctr"/>
-          <a:lstStyle/>
-          <a:p>
-            <a:pPr algn="ctr"/>
-            <a:endParaRPr kumimoji="1" lang="ja-JP" altLang="en-US"/>
-          </a:p>
-        </p:txBody>
-      </p:sp>
-      <p:pic>
-        <p:nvPicPr>
-          <p:cNvPr id="43" name="図 42"/>
-          <p:cNvPicPr>
-            <a:picLocks noChangeAspect="1"/>
-          </p:cNvPicPr>
-          <p:nvPr/>
-        </p:nvPicPr>
-        <p:blipFill>
-          <a:blip r:embed="rId2"/>
-          <a:stretch>
-            <a:fillRect/>
-          </a:stretch>
-        </p:blipFill>
-        <p:spPr>
-          <a:xfrm rot="7459494">
-            <a:off x="6036205" y="3477147"/>
-            <a:ext cx="1249788" cy="264269"/>
-          </a:xfrm>
-          <a:prstGeom prst="rect">
-            <a:avLst/>
-          </a:prstGeom>
-        </p:spPr>
-      </p:pic>
-      <p:sp>
-        <p:nvSpPr>
-          <p:cNvPr id="44" name="正方形/長方形 43"/>
-          <p:cNvSpPr/>
-          <p:nvPr/>
-        </p:nvSpPr>
-        <p:spPr>
-          <a:xfrm rot="4908975">
-            <a:off x="7156513" y="4113930"/>
-            <a:ext cx="654691" cy="244241"/>
-          </a:xfrm>
-          <a:prstGeom prst="rect">
-            <a:avLst/>
-          </a:prstGeom>
-          <a:solidFill>
-            <a:schemeClr val="bg2">
-              <a:lumMod val="50000"/>
-            </a:schemeClr>
-          </a:solidFill>
-          <a:ln w="19050">
-            <a:solidFill>
-              <a:schemeClr val="tx1">
-                <a:lumMod val="75000"/>
-                <a:lumOff val="25000"/>
-              </a:schemeClr>
-            </a:solidFill>
-          </a:ln>
-          <a:effectLst>
-            <a:outerShdw blurRad="127000" dist="127000" dir="8100000" algn="tr" rotWithShape="0">
-              <a:prstClr val="black">
-                <a:alpha val="50000"/>
-              </a:prstClr>
-            </a:outerShdw>
-          </a:effectLst>
-          <a:scene3d>
-            <a:camera prst="orthographicFront"/>
-            <a:lightRig rig="threePt" dir="t">
-              <a:rot lat="0" lon="0" rev="12000000"/>
-            </a:lightRig>
-          </a:scene3d>
-          <a:sp3d>
-            <a:bevelT w="127000" h="127000"/>
-          </a:sp3d>
-        </p:spPr>
-        <p:style>
-          <a:lnRef idx="2">
-            <a:schemeClr val="accent1">
-              <a:shade val="50000"/>
-            </a:schemeClr>
-          </a:lnRef>
-          <a:fillRef idx="1">
-            <a:schemeClr val="accent1"/>
-          </a:fillRef>
-          <a:effectRef idx="0">
-            <a:schemeClr val="accent1"/>
-          </a:effectRef>
-          <a:fontRef idx="minor">
-            <a:schemeClr val="lt1"/>
-          </a:fontRef>
-        </p:style>
-        <p:txBody>
-          <a:bodyPr rtlCol="0" anchor="ctr"/>
-          <a:lstStyle/>
-          <a:p>
-            <a:pPr algn="ctr"/>
-            <a:endParaRPr kumimoji="1" lang="ja-JP" altLang="en-US"/>
-          </a:p>
-        </p:txBody>
-      </p:sp>
-      <p:sp>
-        <p:nvSpPr>
-          <p:cNvPr id="45" name="正方形/長方形 44"/>
-          <p:cNvSpPr/>
-          <p:nvPr/>
-        </p:nvSpPr>
-        <p:spPr>
-          <a:xfrm rot="4691546">
-            <a:off x="4243017" y="3317083"/>
-            <a:ext cx="335386" cy="945254"/>
-          </a:xfrm>
-          <a:prstGeom prst="rect">
-            <a:avLst/>
-          </a:prstGeom>
-          <a:solidFill>
-            <a:schemeClr val="accent2">
-              <a:lumMod val="75000"/>
-            </a:schemeClr>
-          </a:solidFill>
-          <a:ln w="19050">
-            <a:solidFill>
-              <a:schemeClr val="tx1">
-                <a:lumMod val="75000"/>
-                <a:lumOff val="25000"/>
-              </a:schemeClr>
-            </a:solidFill>
-          </a:ln>
-          <a:effectLst>
-            <a:innerShdw blurRad="254000" dist="63500">
-              <a:prstClr val="black">
-                <a:alpha val="70000"/>
-              </a:prstClr>
-            </a:innerShdw>
-          </a:effectLst>
-        </p:spPr>
-        <p:style>
-          <a:lnRef idx="2">
-            <a:schemeClr val="accent1">
-              <a:shade val="50000"/>
-            </a:schemeClr>
-          </a:lnRef>
-          <a:fillRef idx="1">
-            <a:schemeClr val="accent1"/>
-          </a:fillRef>
-          <a:effectRef idx="0">
-            <a:schemeClr val="accent1"/>
-          </a:effectRef>
-          <a:fontRef idx="minor">
-            <a:schemeClr val="lt1"/>
-          </a:fontRef>
-        </p:style>
-        <p:txBody>
-          <a:bodyPr rtlCol="0" anchor="ctr"/>
-          <a:lstStyle/>
-          <a:p>
-            <a:pPr algn="ctr"/>
-            <a:endParaRPr kumimoji="1" lang="ja-JP" altLang="en-US"/>
-          </a:p>
-        </p:txBody>
-      </p:sp>
-      <p:sp>
-        <p:nvSpPr>
-          <p:cNvPr id="46" name="正方形/長方形 45"/>
-          <p:cNvSpPr/>
-          <p:nvPr/>
-        </p:nvSpPr>
-        <p:spPr>
-          <a:xfrm rot="15943854">
-            <a:off x="4853410" y="4420255"/>
-            <a:ext cx="291966" cy="501884"/>
-          </a:xfrm>
-          <a:prstGeom prst="rect">
-            <a:avLst/>
-          </a:prstGeom>
-          <a:solidFill>
-            <a:schemeClr val="accent2">
-              <a:lumMod val="75000"/>
-            </a:schemeClr>
-          </a:solidFill>
-          <a:ln w="19050">
-            <a:solidFill>
-              <a:schemeClr val="tx1">
-                <a:lumMod val="75000"/>
-                <a:lumOff val="25000"/>
-              </a:schemeClr>
-            </a:solidFill>
-          </a:ln>
-          <a:effectLst>
-            <a:innerShdw blurRad="254000" dist="63500">
-              <a:prstClr val="black">
-                <a:alpha val="70000"/>
-              </a:prstClr>
-            </a:innerShdw>
-          </a:effectLst>
-        </p:spPr>
-        <p:style>
-          <a:lnRef idx="2">
-            <a:schemeClr val="accent1">
-              <a:shade val="50000"/>
-            </a:schemeClr>
-          </a:lnRef>
-          <a:fillRef idx="1">
-            <a:schemeClr val="accent1"/>
-          </a:fillRef>
-          <a:effectRef idx="0">
-            <a:schemeClr val="accent1"/>
-          </a:effectRef>
-          <a:fontRef idx="minor">
-            <a:schemeClr val="lt1"/>
-          </a:fontRef>
-        </p:style>
-        <p:txBody>
-          <a:bodyPr rtlCol="0" anchor="ctr"/>
-          <a:lstStyle/>
-          <a:p>
-            <a:pPr algn="ctr"/>
-            <a:endParaRPr kumimoji="1" lang="ja-JP" altLang="en-US"/>
-          </a:p>
-        </p:txBody>
-      </p:sp>
-      <p:sp>
-        <p:nvSpPr>
           <p:cNvPr id="47" name="正方形/長方形 46"/>
           <p:cNvSpPr/>
           <p:nvPr/>
         </p:nvSpPr>
         <p:spPr>
           <a:xfrm rot="205712">
-            <a:off x="5774079" y="2266388"/>
+            <a:off x="5642407" y="2333209"/>
             <a:ext cx="249879" cy="915223"/>
           </a:xfrm>
           <a:prstGeom prst="rect">

--- a/default/filed parts.pptx
+++ b/default/filed parts.pptx
@@ -7163,6 +7163,5285 @@
           <a:chExt cx="0" cy="0"/>
         </a:xfrm>
       </p:grpSpPr>
+      <p:sp>
+        <p:nvSpPr>
+          <p:cNvPr id="123" name="楕円 122">
+            <a:extLst>
+              <a:ext uri="{FF2B5EF4-FFF2-40B4-BE49-F238E27FC236}">
+                <a16:creationId xmlns:a16="http://schemas.microsoft.com/office/drawing/2014/main" id="{8AC29B7E-BE1B-0249-A16A-237B3613BF16}"/>
+              </a:ext>
+            </a:extLst>
+          </p:cNvPr>
+          <p:cNvSpPr/>
+          <p:nvPr/>
+        </p:nvSpPr>
+        <p:spPr>
+          <a:xfrm>
+            <a:off x="6703471" y="3382804"/>
+            <a:ext cx="118298" cy="76694"/>
+          </a:xfrm>
+          <a:prstGeom prst="ellipse">
+            <a:avLst/>
+          </a:prstGeom>
+          <a:solidFill>
+            <a:srgbClr val="FFDF79"/>
+          </a:solidFill>
+          <a:ln>
+            <a:noFill/>
+          </a:ln>
+          <a:effectLst>
+            <a:innerShdw blurRad="63500" dist="50800" dir="19800000">
+              <a:prstClr val="black">
+                <a:alpha val="50000"/>
+              </a:prstClr>
+            </a:innerShdw>
+          </a:effectLst>
+        </p:spPr>
+        <p:style>
+          <a:lnRef idx="2">
+            <a:schemeClr val="accent1">
+              <a:shade val="15000"/>
+            </a:schemeClr>
+          </a:lnRef>
+          <a:fillRef idx="1">
+            <a:schemeClr val="accent1"/>
+          </a:fillRef>
+          <a:effectRef idx="0">
+            <a:schemeClr val="accent1"/>
+          </a:effectRef>
+          <a:fontRef idx="minor">
+            <a:schemeClr val="lt1"/>
+          </a:fontRef>
+        </p:style>
+        <p:txBody>
+          <a:bodyPr rtlCol="0" anchor="ctr"/>
+          <a:lstStyle/>
+          <a:p>
+            <a:pPr algn="ctr"/>
+            <a:endParaRPr kumimoji="1" lang="ja-JP" altLang="en-US"/>
+          </a:p>
+        </p:txBody>
+      </p:sp>
+      <p:sp>
+        <p:nvSpPr>
+          <p:cNvPr id="125" name="楕円 124">
+            <a:extLst>
+              <a:ext uri="{FF2B5EF4-FFF2-40B4-BE49-F238E27FC236}">
+                <a16:creationId xmlns:a16="http://schemas.microsoft.com/office/drawing/2014/main" id="{A8BD63B6-E79D-9849-3E2D-83049D8E77CA}"/>
+              </a:ext>
+            </a:extLst>
+          </p:cNvPr>
+          <p:cNvSpPr/>
+          <p:nvPr/>
+        </p:nvSpPr>
+        <p:spPr>
+          <a:xfrm>
+            <a:off x="6703471" y="3765414"/>
+            <a:ext cx="118298" cy="76694"/>
+          </a:xfrm>
+          <a:prstGeom prst="ellipse">
+            <a:avLst/>
+          </a:prstGeom>
+          <a:solidFill>
+            <a:srgbClr val="FFDF79"/>
+          </a:solidFill>
+          <a:ln>
+            <a:noFill/>
+          </a:ln>
+          <a:effectLst>
+            <a:innerShdw blurRad="63500" dist="50800" dir="19800000">
+              <a:prstClr val="black">
+                <a:alpha val="50000"/>
+              </a:prstClr>
+            </a:innerShdw>
+          </a:effectLst>
+        </p:spPr>
+        <p:style>
+          <a:lnRef idx="2">
+            <a:schemeClr val="accent1">
+              <a:shade val="15000"/>
+            </a:schemeClr>
+          </a:lnRef>
+          <a:fillRef idx="1">
+            <a:schemeClr val="accent1"/>
+          </a:fillRef>
+          <a:effectRef idx="0">
+            <a:schemeClr val="accent1"/>
+          </a:effectRef>
+          <a:fontRef idx="minor">
+            <a:schemeClr val="lt1"/>
+          </a:fontRef>
+        </p:style>
+        <p:txBody>
+          <a:bodyPr rtlCol="0" anchor="ctr"/>
+          <a:lstStyle/>
+          <a:p>
+            <a:pPr algn="ctr"/>
+            <a:endParaRPr kumimoji="1" lang="ja-JP" altLang="en-US"/>
+          </a:p>
+        </p:txBody>
+      </p:sp>
+      <p:sp>
+        <p:nvSpPr>
+          <p:cNvPr id="23" name="楕円 22">
+            <a:extLst>
+              <a:ext uri="{FF2B5EF4-FFF2-40B4-BE49-F238E27FC236}">
+                <a16:creationId xmlns:a16="http://schemas.microsoft.com/office/drawing/2014/main" id="{5F864F1B-B3DB-33C7-3E87-C672940ECB5D}"/>
+              </a:ext>
+            </a:extLst>
+          </p:cNvPr>
+          <p:cNvSpPr/>
+          <p:nvPr/>
+        </p:nvSpPr>
+        <p:spPr>
+          <a:xfrm>
+            <a:off x="3769317" y="1867625"/>
+            <a:ext cx="118298" cy="76694"/>
+          </a:xfrm>
+          <a:prstGeom prst="ellipse">
+            <a:avLst/>
+          </a:prstGeom>
+          <a:solidFill>
+            <a:srgbClr val="FFDF79"/>
+          </a:solidFill>
+          <a:ln>
+            <a:noFill/>
+          </a:ln>
+          <a:effectLst>
+            <a:innerShdw blurRad="63500" dist="50800" dir="19800000">
+              <a:prstClr val="black">
+                <a:alpha val="50000"/>
+              </a:prstClr>
+            </a:innerShdw>
+          </a:effectLst>
+        </p:spPr>
+        <p:style>
+          <a:lnRef idx="2">
+            <a:schemeClr val="accent1">
+              <a:shade val="15000"/>
+            </a:schemeClr>
+          </a:lnRef>
+          <a:fillRef idx="1">
+            <a:schemeClr val="accent1"/>
+          </a:fillRef>
+          <a:effectRef idx="0">
+            <a:schemeClr val="accent1"/>
+          </a:effectRef>
+          <a:fontRef idx="minor">
+            <a:schemeClr val="lt1"/>
+          </a:fontRef>
+        </p:style>
+        <p:txBody>
+          <a:bodyPr rtlCol="0" anchor="ctr"/>
+          <a:lstStyle/>
+          <a:p>
+            <a:pPr algn="ctr"/>
+            <a:endParaRPr kumimoji="1" lang="ja-JP" altLang="en-US"/>
+          </a:p>
+        </p:txBody>
+      </p:sp>
+      <p:sp>
+        <p:nvSpPr>
+          <p:cNvPr id="25" name="楕円 24">
+            <a:extLst>
+              <a:ext uri="{FF2B5EF4-FFF2-40B4-BE49-F238E27FC236}">
+                <a16:creationId xmlns:a16="http://schemas.microsoft.com/office/drawing/2014/main" id="{EDDA5EE9-7708-E99A-3FC1-2FAAEEC6A6D3}"/>
+              </a:ext>
+            </a:extLst>
+          </p:cNvPr>
+          <p:cNvSpPr/>
+          <p:nvPr/>
+        </p:nvSpPr>
+        <p:spPr>
+          <a:xfrm>
+            <a:off x="3769317" y="1477382"/>
+            <a:ext cx="118298" cy="76694"/>
+          </a:xfrm>
+          <a:prstGeom prst="ellipse">
+            <a:avLst/>
+          </a:prstGeom>
+          <a:solidFill>
+            <a:srgbClr val="FFDF79"/>
+          </a:solidFill>
+          <a:ln>
+            <a:noFill/>
+          </a:ln>
+          <a:effectLst>
+            <a:innerShdw blurRad="63500" dist="50800" dir="19800000">
+              <a:prstClr val="black">
+                <a:alpha val="50000"/>
+              </a:prstClr>
+            </a:innerShdw>
+          </a:effectLst>
+        </p:spPr>
+        <p:style>
+          <a:lnRef idx="2">
+            <a:schemeClr val="accent1">
+              <a:shade val="15000"/>
+            </a:schemeClr>
+          </a:lnRef>
+          <a:fillRef idx="1">
+            <a:schemeClr val="accent1"/>
+          </a:fillRef>
+          <a:effectRef idx="0">
+            <a:schemeClr val="accent1"/>
+          </a:effectRef>
+          <a:fontRef idx="minor">
+            <a:schemeClr val="lt1"/>
+          </a:fontRef>
+        </p:style>
+        <p:txBody>
+          <a:bodyPr rtlCol="0" anchor="ctr"/>
+          <a:lstStyle/>
+          <a:p>
+            <a:pPr algn="ctr"/>
+            <a:endParaRPr kumimoji="1" lang="ja-JP" altLang="en-US"/>
+          </a:p>
+        </p:txBody>
+      </p:sp>
+      <p:sp>
+        <p:nvSpPr>
+          <p:cNvPr id="27" name="楕円 26">
+            <a:extLst>
+              <a:ext uri="{FF2B5EF4-FFF2-40B4-BE49-F238E27FC236}">
+                <a16:creationId xmlns:a16="http://schemas.microsoft.com/office/drawing/2014/main" id="{A1AFBE79-2030-2795-8B54-624753A0DEC2}"/>
+              </a:ext>
+            </a:extLst>
+          </p:cNvPr>
+          <p:cNvSpPr/>
+          <p:nvPr/>
+        </p:nvSpPr>
+        <p:spPr>
+          <a:xfrm>
+            <a:off x="3769317" y="2257868"/>
+            <a:ext cx="118298" cy="76694"/>
+          </a:xfrm>
+          <a:prstGeom prst="ellipse">
+            <a:avLst/>
+          </a:prstGeom>
+          <a:solidFill>
+            <a:srgbClr val="FFDF79"/>
+          </a:solidFill>
+          <a:ln>
+            <a:noFill/>
+          </a:ln>
+          <a:effectLst>
+            <a:innerShdw blurRad="63500" dist="50800" dir="19800000">
+              <a:prstClr val="black">
+                <a:alpha val="50000"/>
+              </a:prstClr>
+            </a:innerShdw>
+          </a:effectLst>
+        </p:spPr>
+        <p:style>
+          <a:lnRef idx="2">
+            <a:schemeClr val="accent1">
+              <a:shade val="15000"/>
+            </a:schemeClr>
+          </a:lnRef>
+          <a:fillRef idx="1">
+            <a:schemeClr val="accent1"/>
+          </a:fillRef>
+          <a:effectRef idx="0">
+            <a:schemeClr val="accent1"/>
+          </a:effectRef>
+          <a:fontRef idx="minor">
+            <a:schemeClr val="lt1"/>
+          </a:fontRef>
+        </p:style>
+        <p:txBody>
+          <a:bodyPr rtlCol="0" anchor="ctr"/>
+          <a:lstStyle/>
+          <a:p>
+            <a:pPr algn="ctr"/>
+            <a:endParaRPr kumimoji="1" lang="ja-JP" altLang="en-US"/>
+          </a:p>
+        </p:txBody>
+      </p:sp>
+      <p:sp>
+        <p:nvSpPr>
+          <p:cNvPr id="29" name="楕円 28">
+            <a:extLst>
+              <a:ext uri="{FF2B5EF4-FFF2-40B4-BE49-F238E27FC236}">
+                <a16:creationId xmlns:a16="http://schemas.microsoft.com/office/drawing/2014/main" id="{5A1C53A3-88B1-3749-BC2E-C30A8D7410A0}"/>
+              </a:ext>
+            </a:extLst>
+          </p:cNvPr>
+          <p:cNvSpPr/>
+          <p:nvPr/>
+        </p:nvSpPr>
+        <p:spPr>
+          <a:xfrm>
+            <a:off x="3769317" y="2648111"/>
+            <a:ext cx="118298" cy="76694"/>
+          </a:xfrm>
+          <a:prstGeom prst="ellipse">
+            <a:avLst/>
+          </a:prstGeom>
+          <a:solidFill>
+            <a:srgbClr val="FFDF79"/>
+          </a:solidFill>
+          <a:ln>
+            <a:noFill/>
+          </a:ln>
+          <a:effectLst>
+            <a:innerShdw blurRad="63500" dist="50800" dir="19800000">
+              <a:prstClr val="black">
+                <a:alpha val="50000"/>
+              </a:prstClr>
+            </a:innerShdw>
+          </a:effectLst>
+        </p:spPr>
+        <p:style>
+          <a:lnRef idx="2">
+            <a:schemeClr val="accent1">
+              <a:shade val="15000"/>
+            </a:schemeClr>
+          </a:lnRef>
+          <a:fillRef idx="1">
+            <a:schemeClr val="accent1"/>
+          </a:fillRef>
+          <a:effectRef idx="0">
+            <a:schemeClr val="accent1"/>
+          </a:effectRef>
+          <a:fontRef idx="minor">
+            <a:schemeClr val="lt1"/>
+          </a:fontRef>
+        </p:style>
+        <p:txBody>
+          <a:bodyPr rtlCol="0" anchor="ctr"/>
+          <a:lstStyle/>
+          <a:p>
+            <a:pPr algn="ctr"/>
+            <a:endParaRPr kumimoji="1" lang="ja-JP" altLang="en-US"/>
+          </a:p>
+        </p:txBody>
+      </p:sp>
+      <p:sp>
+        <p:nvSpPr>
+          <p:cNvPr id="31" name="楕円 30">
+            <a:extLst>
+              <a:ext uri="{FF2B5EF4-FFF2-40B4-BE49-F238E27FC236}">
+                <a16:creationId xmlns:a16="http://schemas.microsoft.com/office/drawing/2014/main" id="{ECE1AB2F-15A0-FAC4-2C3D-81F4B327B65C}"/>
+              </a:ext>
+            </a:extLst>
+          </p:cNvPr>
+          <p:cNvSpPr/>
+          <p:nvPr/>
+        </p:nvSpPr>
+        <p:spPr>
+          <a:xfrm>
+            <a:off x="3769317" y="3038352"/>
+            <a:ext cx="118298" cy="76694"/>
+          </a:xfrm>
+          <a:prstGeom prst="ellipse">
+            <a:avLst/>
+          </a:prstGeom>
+          <a:solidFill>
+            <a:srgbClr val="FFDF79"/>
+          </a:solidFill>
+          <a:ln>
+            <a:noFill/>
+          </a:ln>
+          <a:effectLst>
+            <a:innerShdw blurRad="63500" dist="50800" dir="19800000">
+              <a:prstClr val="black">
+                <a:alpha val="50000"/>
+              </a:prstClr>
+            </a:innerShdw>
+          </a:effectLst>
+        </p:spPr>
+        <p:style>
+          <a:lnRef idx="2">
+            <a:schemeClr val="accent1">
+              <a:shade val="15000"/>
+            </a:schemeClr>
+          </a:lnRef>
+          <a:fillRef idx="1">
+            <a:schemeClr val="accent1"/>
+          </a:fillRef>
+          <a:effectRef idx="0">
+            <a:schemeClr val="accent1"/>
+          </a:effectRef>
+          <a:fontRef idx="minor">
+            <a:schemeClr val="lt1"/>
+          </a:fontRef>
+        </p:style>
+        <p:txBody>
+          <a:bodyPr rtlCol="0" anchor="ctr"/>
+          <a:lstStyle/>
+          <a:p>
+            <a:pPr algn="ctr"/>
+            <a:endParaRPr kumimoji="1" lang="ja-JP" altLang="en-US"/>
+          </a:p>
+        </p:txBody>
+      </p:sp>
+      <p:sp>
+        <p:nvSpPr>
+          <p:cNvPr id="19" name="楕円 18">
+            <a:extLst>
+              <a:ext uri="{FF2B5EF4-FFF2-40B4-BE49-F238E27FC236}">
+                <a16:creationId xmlns:a16="http://schemas.microsoft.com/office/drawing/2014/main" id="{14CC0299-9369-AB2B-6D9D-F3FBD6B33704}"/>
+              </a:ext>
+            </a:extLst>
+          </p:cNvPr>
+          <p:cNvSpPr/>
+          <p:nvPr/>
+        </p:nvSpPr>
+        <p:spPr>
+          <a:xfrm>
+            <a:off x="3769317" y="1087139"/>
+            <a:ext cx="118298" cy="76694"/>
+          </a:xfrm>
+          <a:prstGeom prst="ellipse">
+            <a:avLst/>
+          </a:prstGeom>
+          <a:solidFill>
+            <a:srgbClr val="FFDF79"/>
+          </a:solidFill>
+          <a:ln>
+            <a:noFill/>
+          </a:ln>
+          <a:effectLst>
+            <a:innerShdw blurRad="63500" dist="50800" dir="19800000">
+              <a:prstClr val="black">
+                <a:alpha val="50000"/>
+              </a:prstClr>
+            </a:innerShdw>
+          </a:effectLst>
+        </p:spPr>
+        <p:style>
+          <a:lnRef idx="2">
+            <a:schemeClr val="accent1">
+              <a:shade val="15000"/>
+            </a:schemeClr>
+          </a:lnRef>
+          <a:fillRef idx="1">
+            <a:schemeClr val="accent1"/>
+          </a:fillRef>
+          <a:effectRef idx="0">
+            <a:schemeClr val="accent1"/>
+          </a:effectRef>
+          <a:fontRef idx="minor">
+            <a:schemeClr val="lt1"/>
+          </a:fontRef>
+        </p:style>
+        <p:txBody>
+          <a:bodyPr rtlCol="0" anchor="ctr"/>
+          <a:lstStyle/>
+          <a:p>
+            <a:pPr algn="ctr"/>
+            <a:endParaRPr kumimoji="1" lang="ja-JP" altLang="en-US"/>
+          </a:p>
+        </p:txBody>
+      </p:sp>
+      <p:sp>
+        <p:nvSpPr>
+          <p:cNvPr id="11" name="楕円 10">
+            <a:extLst>
+              <a:ext uri="{FF2B5EF4-FFF2-40B4-BE49-F238E27FC236}">
+                <a16:creationId xmlns:a16="http://schemas.microsoft.com/office/drawing/2014/main" id="{977FD3EC-FC04-6377-D8AC-0E698F7B431E}"/>
+              </a:ext>
+            </a:extLst>
+          </p:cNvPr>
+          <p:cNvSpPr/>
+          <p:nvPr/>
+        </p:nvSpPr>
+        <p:spPr>
+          <a:xfrm>
+            <a:off x="2718190" y="589988"/>
+            <a:ext cx="79148" cy="104140"/>
+          </a:xfrm>
+          <a:prstGeom prst="ellipse">
+            <a:avLst/>
+          </a:prstGeom>
+          <a:solidFill>
+            <a:srgbClr val="FFDF79"/>
+          </a:solidFill>
+          <a:ln>
+            <a:noFill/>
+          </a:ln>
+          <a:effectLst>
+            <a:innerShdw blurRad="63500" dist="50800" dir="12000000">
+              <a:prstClr val="black">
+                <a:alpha val="50000"/>
+              </a:prstClr>
+            </a:innerShdw>
+          </a:effectLst>
+        </p:spPr>
+        <p:style>
+          <a:lnRef idx="2">
+            <a:schemeClr val="accent1">
+              <a:shade val="15000"/>
+            </a:schemeClr>
+          </a:lnRef>
+          <a:fillRef idx="1">
+            <a:schemeClr val="accent1"/>
+          </a:fillRef>
+          <a:effectRef idx="0">
+            <a:schemeClr val="accent1"/>
+          </a:effectRef>
+          <a:fontRef idx="minor">
+            <a:schemeClr val="lt1"/>
+          </a:fontRef>
+        </p:style>
+        <p:txBody>
+          <a:bodyPr rtlCol="0" anchor="ctr"/>
+          <a:lstStyle/>
+          <a:p>
+            <a:pPr algn="ctr"/>
+            <a:endParaRPr kumimoji="1" lang="ja-JP" altLang="en-US"/>
+          </a:p>
+        </p:txBody>
+      </p:sp>
+      <p:sp>
+        <p:nvSpPr>
+          <p:cNvPr id="13" name="楕円 12">
+            <a:extLst>
+              <a:ext uri="{FF2B5EF4-FFF2-40B4-BE49-F238E27FC236}">
+                <a16:creationId xmlns:a16="http://schemas.microsoft.com/office/drawing/2014/main" id="{6D176412-F26E-5B71-1557-23BF34297B40}"/>
+              </a:ext>
+            </a:extLst>
+          </p:cNvPr>
+          <p:cNvSpPr/>
+          <p:nvPr/>
+        </p:nvSpPr>
+        <p:spPr>
+          <a:xfrm>
+            <a:off x="3021586" y="589988"/>
+            <a:ext cx="79148" cy="104140"/>
+          </a:xfrm>
+          <a:prstGeom prst="ellipse">
+            <a:avLst/>
+          </a:prstGeom>
+          <a:solidFill>
+            <a:srgbClr val="FFDF79"/>
+          </a:solidFill>
+          <a:ln>
+            <a:noFill/>
+          </a:ln>
+          <a:effectLst>
+            <a:innerShdw blurRad="63500" dist="50800" dir="12000000">
+              <a:prstClr val="black">
+                <a:alpha val="50000"/>
+              </a:prstClr>
+            </a:innerShdw>
+          </a:effectLst>
+        </p:spPr>
+        <p:style>
+          <a:lnRef idx="2">
+            <a:schemeClr val="accent1">
+              <a:shade val="15000"/>
+            </a:schemeClr>
+          </a:lnRef>
+          <a:fillRef idx="1">
+            <a:schemeClr val="accent1"/>
+          </a:fillRef>
+          <a:effectRef idx="0">
+            <a:schemeClr val="accent1"/>
+          </a:effectRef>
+          <a:fontRef idx="minor">
+            <a:schemeClr val="lt1"/>
+          </a:fontRef>
+        </p:style>
+        <p:txBody>
+          <a:bodyPr rtlCol="0" anchor="ctr"/>
+          <a:lstStyle/>
+          <a:p>
+            <a:pPr algn="ctr"/>
+            <a:endParaRPr kumimoji="1" lang="ja-JP" altLang="en-US"/>
+          </a:p>
+        </p:txBody>
+      </p:sp>
+      <p:sp>
+        <p:nvSpPr>
+          <p:cNvPr id="15" name="楕円 14">
+            <a:extLst>
+              <a:ext uri="{FF2B5EF4-FFF2-40B4-BE49-F238E27FC236}">
+                <a16:creationId xmlns:a16="http://schemas.microsoft.com/office/drawing/2014/main" id="{E472ADDE-8409-80A8-C034-6B9FDBC2F90B}"/>
+              </a:ext>
+            </a:extLst>
+          </p:cNvPr>
+          <p:cNvSpPr/>
+          <p:nvPr/>
+        </p:nvSpPr>
+        <p:spPr>
+          <a:xfrm>
+            <a:off x="3324982" y="589988"/>
+            <a:ext cx="79148" cy="104140"/>
+          </a:xfrm>
+          <a:prstGeom prst="ellipse">
+            <a:avLst/>
+          </a:prstGeom>
+          <a:solidFill>
+            <a:srgbClr val="FFDF79"/>
+          </a:solidFill>
+          <a:ln>
+            <a:noFill/>
+          </a:ln>
+          <a:effectLst>
+            <a:innerShdw blurRad="63500" dist="50800" dir="12000000">
+              <a:prstClr val="black">
+                <a:alpha val="50000"/>
+              </a:prstClr>
+            </a:innerShdw>
+          </a:effectLst>
+        </p:spPr>
+        <p:style>
+          <a:lnRef idx="2">
+            <a:schemeClr val="accent1">
+              <a:shade val="15000"/>
+            </a:schemeClr>
+          </a:lnRef>
+          <a:fillRef idx="1">
+            <a:schemeClr val="accent1"/>
+          </a:fillRef>
+          <a:effectRef idx="0">
+            <a:schemeClr val="accent1"/>
+          </a:effectRef>
+          <a:fontRef idx="minor">
+            <a:schemeClr val="lt1"/>
+          </a:fontRef>
+        </p:style>
+        <p:txBody>
+          <a:bodyPr rtlCol="0" anchor="ctr"/>
+          <a:lstStyle/>
+          <a:p>
+            <a:pPr algn="ctr"/>
+            <a:endParaRPr kumimoji="1" lang="ja-JP" altLang="en-US"/>
+          </a:p>
+        </p:txBody>
+      </p:sp>
+      <p:sp>
+        <p:nvSpPr>
+          <p:cNvPr id="10" name="楕円 9">
+            <a:extLst>
+              <a:ext uri="{FF2B5EF4-FFF2-40B4-BE49-F238E27FC236}">
+                <a16:creationId xmlns:a16="http://schemas.microsoft.com/office/drawing/2014/main" id="{6F762CDB-F06F-5AAE-2937-72A76650A439}"/>
+              </a:ext>
+            </a:extLst>
+          </p:cNvPr>
+          <p:cNvSpPr/>
+          <p:nvPr/>
+        </p:nvSpPr>
+        <p:spPr>
+          <a:xfrm>
+            <a:off x="2414794" y="589988"/>
+            <a:ext cx="79148" cy="104140"/>
+          </a:xfrm>
+          <a:prstGeom prst="ellipse">
+            <a:avLst/>
+          </a:prstGeom>
+          <a:solidFill>
+            <a:srgbClr val="FFDF79"/>
+          </a:solidFill>
+          <a:ln>
+            <a:noFill/>
+          </a:ln>
+          <a:effectLst>
+            <a:innerShdw blurRad="63500" dist="50800" dir="12000000">
+              <a:prstClr val="black">
+                <a:alpha val="50000"/>
+              </a:prstClr>
+            </a:innerShdw>
+          </a:effectLst>
+        </p:spPr>
+        <p:style>
+          <a:lnRef idx="2">
+            <a:schemeClr val="accent1">
+              <a:shade val="15000"/>
+            </a:schemeClr>
+          </a:lnRef>
+          <a:fillRef idx="1">
+            <a:schemeClr val="accent1"/>
+          </a:fillRef>
+          <a:effectRef idx="0">
+            <a:schemeClr val="accent1"/>
+          </a:effectRef>
+          <a:fontRef idx="minor">
+            <a:schemeClr val="lt1"/>
+          </a:fontRef>
+        </p:style>
+        <p:txBody>
+          <a:bodyPr rtlCol="0" anchor="ctr"/>
+          <a:lstStyle/>
+          <a:p>
+            <a:pPr algn="ctr"/>
+            <a:endParaRPr kumimoji="1" lang="ja-JP" altLang="en-US"/>
+          </a:p>
+        </p:txBody>
+      </p:sp>
+      <p:sp>
+        <p:nvSpPr>
+          <p:cNvPr id="3" name="円柱 2">
+            <a:extLst>
+              <a:ext uri="{FF2B5EF4-FFF2-40B4-BE49-F238E27FC236}">
+                <a16:creationId xmlns:a16="http://schemas.microsoft.com/office/drawing/2014/main" id="{7B57057D-F6AF-FFDE-7D8B-9074EF4EA9CC}"/>
+              </a:ext>
+            </a:extLst>
+          </p:cNvPr>
+          <p:cNvSpPr/>
+          <p:nvPr/>
+        </p:nvSpPr>
+        <p:spPr>
+          <a:xfrm rot="5400000">
+            <a:off x="2865273" y="-97175"/>
+            <a:ext cx="219075" cy="1707311"/>
+          </a:xfrm>
+          <a:prstGeom prst="can">
+            <a:avLst/>
+          </a:prstGeom>
+          <a:solidFill>
+            <a:schemeClr val="bg2">
+              <a:lumMod val="50000"/>
+            </a:schemeClr>
+          </a:solidFill>
+          <a:ln>
+            <a:noFill/>
+          </a:ln>
+          <a:effectLst>
+            <a:innerShdw blurRad="177800" dist="127000" dir="18000000">
+              <a:prstClr val="black">
+                <a:alpha val="50000"/>
+              </a:prstClr>
+            </a:innerShdw>
+          </a:effectLst>
+        </p:spPr>
+        <p:style>
+          <a:lnRef idx="2">
+            <a:schemeClr val="accent1">
+              <a:shade val="15000"/>
+            </a:schemeClr>
+          </a:lnRef>
+          <a:fillRef idx="1">
+            <a:schemeClr val="accent1"/>
+          </a:fillRef>
+          <a:effectRef idx="0">
+            <a:schemeClr val="accent1"/>
+          </a:effectRef>
+          <a:fontRef idx="minor">
+            <a:schemeClr val="lt1"/>
+          </a:fontRef>
+        </p:style>
+        <p:txBody>
+          <a:bodyPr rtlCol="0" anchor="ctr"/>
+          <a:lstStyle/>
+          <a:p>
+            <a:pPr algn="ctr"/>
+            <a:endParaRPr kumimoji="1" lang="ja-JP" altLang="en-US"/>
+          </a:p>
+        </p:txBody>
+      </p:sp>
+      <p:sp>
+        <p:nvSpPr>
+          <p:cNvPr id="2" name="円柱 1">
+            <a:extLst>
+              <a:ext uri="{FF2B5EF4-FFF2-40B4-BE49-F238E27FC236}">
+                <a16:creationId xmlns:a16="http://schemas.microsoft.com/office/drawing/2014/main" id="{ECB7DC6B-D78B-E385-12E9-BBBBA836C9D0}"/>
+              </a:ext>
+            </a:extLst>
+          </p:cNvPr>
+          <p:cNvSpPr/>
+          <p:nvPr/>
+        </p:nvSpPr>
+        <p:spPr>
+          <a:xfrm>
+            <a:off x="3539218" y="465967"/>
+            <a:ext cx="289249" cy="5907406"/>
+          </a:xfrm>
+          <a:prstGeom prst="can">
+            <a:avLst/>
+          </a:prstGeom>
+          <a:solidFill>
+            <a:schemeClr val="bg2">
+              <a:lumMod val="50000"/>
+            </a:schemeClr>
+          </a:solidFill>
+          <a:ln>
+            <a:noFill/>
+          </a:ln>
+          <a:effectLst>
+            <a:innerShdw blurRad="177800" dist="127000" dir="1200000">
+              <a:prstClr val="black">
+                <a:alpha val="50000"/>
+              </a:prstClr>
+            </a:innerShdw>
+          </a:effectLst>
+        </p:spPr>
+        <p:style>
+          <a:lnRef idx="2">
+            <a:schemeClr val="accent1">
+              <a:shade val="15000"/>
+            </a:schemeClr>
+          </a:lnRef>
+          <a:fillRef idx="1">
+            <a:schemeClr val="accent1"/>
+          </a:fillRef>
+          <a:effectRef idx="0">
+            <a:schemeClr val="accent1"/>
+          </a:effectRef>
+          <a:fontRef idx="minor">
+            <a:schemeClr val="lt1"/>
+          </a:fontRef>
+        </p:style>
+        <p:txBody>
+          <a:bodyPr rtlCol="0" anchor="ctr"/>
+          <a:lstStyle/>
+          <a:p>
+            <a:pPr algn="ctr"/>
+            <a:endParaRPr kumimoji="1" lang="ja-JP" altLang="en-US"/>
+          </a:p>
+        </p:txBody>
+      </p:sp>
+      <p:sp>
+        <p:nvSpPr>
+          <p:cNvPr id="4" name="波線 3">
+            <a:extLst>
+              <a:ext uri="{FF2B5EF4-FFF2-40B4-BE49-F238E27FC236}">
+                <a16:creationId xmlns:a16="http://schemas.microsoft.com/office/drawing/2014/main" id="{1FF34661-F961-34BF-ED45-67836BBA93DD}"/>
+              </a:ext>
+            </a:extLst>
+          </p:cNvPr>
+          <p:cNvSpPr/>
+          <p:nvPr/>
+        </p:nvSpPr>
+        <p:spPr>
+          <a:xfrm rot="16200000" flipH="1">
+            <a:off x="1614004" y="1286090"/>
+            <a:ext cx="2419350" cy="1579206"/>
+          </a:xfrm>
+          <a:prstGeom prst="wave">
+            <a:avLst>
+              <a:gd name="adj1" fmla="val 5131"/>
+              <a:gd name="adj2" fmla="val 0"/>
+            </a:avLst>
+          </a:prstGeom>
+          <a:solidFill>
+            <a:srgbClr val="FFDF79"/>
+          </a:solidFill>
+          <a:ln>
+            <a:noFill/>
+          </a:ln>
+          <a:effectLst>
+            <a:innerShdw blurRad="533400" dist="228600" dir="2700000">
+              <a:prstClr val="black">
+                <a:alpha val="50000"/>
+              </a:prstClr>
+            </a:innerShdw>
+          </a:effectLst>
+        </p:spPr>
+        <p:style>
+          <a:lnRef idx="2">
+            <a:schemeClr val="accent1">
+              <a:shade val="15000"/>
+            </a:schemeClr>
+          </a:lnRef>
+          <a:fillRef idx="1">
+            <a:schemeClr val="accent1"/>
+          </a:fillRef>
+          <a:effectRef idx="0">
+            <a:schemeClr val="accent1"/>
+          </a:effectRef>
+          <a:fontRef idx="minor">
+            <a:schemeClr val="lt1"/>
+          </a:fontRef>
+        </p:style>
+        <p:txBody>
+          <a:bodyPr rtlCol="0" anchor="ctr"/>
+          <a:lstStyle/>
+          <a:p>
+            <a:pPr algn="ctr"/>
+            <a:endParaRPr kumimoji="1" lang="ja-JP" altLang="en-US"/>
+          </a:p>
+        </p:txBody>
+      </p:sp>
+      <p:sp>
+        <p:nvSpPr>
+          <p:cNvPr id="5" name="テキスト ボックス 4">
+            <a:extLst>
+              <a:ext uri="{FF2B5EF4-FFF2-40B4-BE49-F238E27FC236}">
+                <a16:creationId xmlns:a16="http://schemas.microsoft.com/office/drawing/2014/main" id="{FAB2B3BA-6B45-5EA7-031A-E8F9931E7965}"/>
+              </a:ext>
+            </a:extLst>
+          </p:cNvPr>
+          <p:cNvSpPr txBox="1"/>
+          <p:nvPr/>
+        </p:nvSpPr>
+        <p:spPr>
+          <a:xfrm rot="289478">
+            <a:off x="2261990" y="1633800"/>
+            <a:ext cx="1099460" cy="1323439"/>
+          </a:xfrm>
+          <a:prstGeom prst="rect">
+            <a:avLst/>
+          </a:prstGeom>
+          <a:noFill/>
+        </p:spPr>
+        <p:txBody>
+          <a:bodyPr wrap="square" rtlCol="0">
+            <a:spAutoFit/>
+          </a:bodyPr>
+          <a:lstStyle/>
+          <a:p>
+            <a:r>
+              <a:rPr kumimoji="1" lang="ja-JP" altLang="en-US" sz="8000" dirty="0">
+                <a:latin typeface="HGP行書体" panose="03000600000000000000" pitchFamily="66" charset="-128"/>
+                <a:ea typeface="HGP行書体" panose="03000600000000000000" pitchFamily="66" charset="-128"/>
+              </a:rPr>
+              <a:t>幡</a:t>
+            </a:r>
+          </a:p>
+        </p:txBody>
+      </p:sp>
+      <p:sp>
+        <p:nvSpPr>
+          <p:cNvPr id="6" name="テキスト ボックス 5">
+            <a:extLst>
+              <a:ext uri="{FF2B5EF4-FFF2-40B4-BE49-F238E27FC236}">
+                <a16:creationId xmlns:a16="http://schemas.microsoft.com/office/drawing/2014/main" id="{DA65FE31-55E0-2934-EE2D-52A84C6FA389}"/>
+              </a:ext>
+            </a:extLst>
+          </p:cNvPr>
+          <p:cNvSpPr txBox="1"/>
+          <p:nvPr/>
+        </p:nvSpPr>
+        <p:spPr>
+          <a:xfrm rot="289478">
+            <a:off x="2201788" y="846420"/>
+            <a:ext cx="1099460" cy="1323439"/>
+          </a:xfrm>
+          <a:prstGeom prst="rect">
+            <a:avLst/>
+          </a:prstGeom>
+          <a:noFill/>
+        </p:spPr>
+        <p:txBody>
+          <a:bodyPr wrap="square" rtlCol="0">
+            <a:spAutoFit/>
+          </a:bodyPr>
+          <a:lstStyle/>
+          <a:p>
+            <a:r>
+              <a:rPr kumimoji="1" lang="ja-JP" altLang="en-US" sz="8000" dirty="0">
+                <a:latin typeface="HGP行書体" panose="03000600000000000000" pitchFamily="66" charset="-128"/>
+                <a:ea typeface="HGP行書体" panose="03000600000000000000" pitchFamily="66" charset="-128"/>
+              </a:rPr>
+              <a:t>八</a:t>
+            </a:r>
+          </a:p>
+        </p:txBody>
+      </p:sp>
+      <p:sp>
+        <p:nvSpPr>
+          <p:cNvPr id="9" name="アーチ 8">
+            <a:extLst>
+              <a:ext uri="{FF2B5EF4-FFF2-40B4-BE49-F238E27FC236}">
+                <a16:creationId xmlns:a16="http://schemas.microsoft.com/office/drawing/2014/main" id="{75220C1B-7034-1AA6-D367-0F36B67144B8}"/>
+              </a:ext>
+            </a:extLst>
+          </p:cNvPr>
+          <p:cNvSpPr/>
+          <p:nvPr/>
+        </p:nvSpPr>
+        <p:spPr>
+          <a:xfrm rot="16842141">
+            <a:off x="2255479" y="658145"/>
+            <a:ext cx="338692" cy="196670"/>
+          </a:xfrm>
+          <a:prstGeom prst="blockArc">
+            <a:avLst>
+              <a:gd name="adj1" fmla="val 10800000"/>
+              <a:gd name="adj2" fmla="val 58862"/>
+              <a:gd name="adj3" fmla="val 30068"/>
+            </a:avLst>
+          </a:prstGeom>
+          <a:solidFill>
+            <a:srgbClr val="FFDF79"/>
+          </a:solidFill>
+          <a:ln>
+            <a:noFill/>
+          </a:ln>
+          <a:effectLst>
+            <a:innerShdw blurRad="50800" dist="25400" dir="7800000">
+              <a:prstClr val="black">
+                <a:alpha val="50000"/>
+              </a:prstClr>
+            </a:innerShdw>
+          </a:effectLst>
+        </p:spPr>
+        <p:style>
+          <a:lnRef idx="2">
+            <a:schemeClr val="accent1">
+              <a:shade val="15000"/>
+            </a:schemeClr>
+          </a:lnRef>
+          <a:fillRef idx="1">
+            <a:schemeClr val="accent1"/>
+          </a:fillRef>
+          <a:effectRef idx="0">
+            <a:schemeClr val="accent1"/>
+          </a:effectRef>
+          <a:fontRef idx="minor">
+            <a:schemeClr val="lt1"/>
+          </a:fontRef>
+        </p:style>
+        <p:txBody>
+          <a:bodyPr rtlCol="0" anchor="ctr"/>
+          <a:lstStyle/>
+          <a:p>
+            <a:pPr algn="ctr"/>
+            <a:endParaRPr kumimoji="1" lang="ja-JP" altLang="en-US">
+              <a:solidFill>
+                <a:schemeClr val="tx1"/>
+              </a:solidFill>
+            </a:endParaRPr>
+          </a:p>
+        </p:txBody>
+      </p:sp>
+      <p:sp>
+        <p:nvSpPr>
+          <p:cNvPr id="12" name="アーチ 11">
+            <a:extLst>
+              <a:ext uri="{FF2B5EF4-FFF2-40B4-BE49-F238E27FC236}">
+                <a16:creationId xmlns:a16="http://schemas.microsoft.com/office/drawing/2014/main" id="{FC285D1E-20DB-E143-065B-1A1BD59ECA3E}"/>
+              </a:ext>
+            </a:extLst>
+          </p:cNvPr>
+          <p:cNvSpPr/>
+          <p:nvPr/>
+        </p:nvSpPr>
+        <p:spPr>
+          <a:xfrm rot="16842141">
+            <a:off x="2558875" y="658145"/>
+            <a:ext cx="338692" cy="196670"/>
+          </a:xfrm>
+          <a:prstGeom prst="blockArc">
+            <a:avLst>
+              <a:gd name="adj1" fmla="val 10800000"/>
+              <a:gd name="adj2" fmla="val 58862"/>
+              <a:gd name="adj3" fmla="val 30068"/>
+            </a:avLst>
+          </a:prstGeom>
+          <a:solidFill>
+            <a:srgbClr val="FFDF79"/>
+          </a:solidFill>
+          <a:ln>
+            <a:noFill/>
+          </a:ln>
+          <a:effectLst>
+            <a:innerShdw blurRad="50800" dist="25400" dir="7800000">
+              <a:prstClr val="black">
+                <a:alpha val="50000"/>
+              </a:prstClr>
+            </a:innerShdw>
+          </a:effectLst>
+        </p:spPr>
+        <p:style>
+          <a:lnRef idx="2">
+            <a:schemeClr val="accent1">
+              <a:shade val="15000"/>
+            </a:schemeClr>
+          </a:lnRef>
+          <a:fillRef idx="1">
+            <a:schemeClr val="accent1"/>
+          </a:fillRef>
+          <a:effectRef idx="0">
+            <a:schemeClr val="accent1"/>
+          </a:effectRef>
+          <a:fontRef idx="minor">
+            <a:schemeClr val="lt1"/>
+          </a:fontRef>
+        </p:style>
+        <p:txBody>
+          <a:bodyPr rtlCol="0" anchor="ctr"/>
+          <a:lstStyle/>
+          <a:p>
+            <a:pPr algn="ctr"/>
+            <a:endParaRPr kumimoji="1" lang="ja-JP" altLang="en-US">
+              <a:solidFill>
+                <a:schemeClr val="tx1"/>
+              </a:solidFill>
+            </a:endParaRPr>
+          </a:p>
+        </p:txBody>
+      </p:sp>
+      <p:sp>
+        <p:nvSpPr>
+          <p:cNvPr id="14" name="アーチ 13">
+            <a:extLst>
+              <a:ext uri="{FF2B5EF4-FFF2-40B4-BE49-F238E27FC236}">
+                <a16:creationId xmlns:a16="http://schemas.microsoft.com/office/drawing/2014/main" id="{9B42D4D8-ED26-0764-2FB3-9A6D93CB2D34}"/>
+              </a:ext>
+            </a:extLst>
+          </p:cNvPr>
+          <p:cNvSpPr/>
+          <p:nvPr/>
+        </p:nvSpPr>
+        <p:spPr>
+          <a:xfrm rot="16842141">
+            <a:off x="2862271" y="658145"/>
+            <a:ext cx="338692" cy="196670"/>
+          </a:xfrm>
+          <a:prstGeom prst="blockArc">
+            <a:avLst>
+              <a:gd name="adj1" fmla="val 10800000"/>
+              <a:gd name="adj2" fmla="val 58862"/>
+              <a:gd name="adj3" fmla="val 30068"/>
+            </a:avLst>
+          </a:prstGeom>
+          <a:solidFill>
+            <a:srgbClr val="FFDF79"/>
+          </a:solidFill>
+          <a:ln>
+            <a:noFill/>
+          </a:ln>
+          <a:effectLst>
+            <a:innerShdw blurRad="50800" dist="25400" dir="7800000">
+              <a:prstClr val="black">
+                <a:alpha val="50000"/>
+              </a:prstClr>
+            </a:innerShdw>
+          </a:effectLst>
+        </p:spPr>
+        <p:style>
+          <a:lnRef idx="2">
+            <a:schemeClr val="accent1">
+              <a:shade val="15000"/>
+            </a:schemeClr>
+          </a:lnRef>
+          <a:fillRef idx="1">
+            <a:schemeClr val="accent1"/>
+          </a:fillRef>
+          <a:effectRef idx="0">
+            <a:schemeClr val="accent1"/>
+          </a:effectRef>
+          <a:fontRef idx="minor">
+            <a:schemeClr val="lt1"/>
+          </a:fontRef>
+        </p:style>
+        <p:txBody>
+          <a:bodyPr rtlCol="0" anchor="ctr"/>
+          <a:lstStyle/>
+          <a:p>
+            <a:pPr algn="ctr"/>
+            <a:endParaRPr kumimoji="1" lang="ja-JP" altLang="en-US">
+              <a:solidFill>
+                <a:schemeClr val="tx1"/>
+              </a:solidFill>
+            </a:endParaRPr>
+          </a:p>
+        </p:txBody>
+      </p:sp>
+      <p:sp>
+        <p:nvSpPr>
+          <p:cNvPr id="16" name="アーチ 15">
+            <a:extLst>
+              <a:ext uri="{FF2B5EF4-FFF2-40B4-BE49-F238E27FC236}">
+                <a16:creationId xmlns:a16="http://schemas.microsoft.com/office/drawing/2014/main" id="{7ECF8903-FCF0-3180-F23E-D581C98A71C4}"/>
+              </a:ext>
+            </a:extLst>
+          </p:cNvPr>
+          <p:cNvSpPr/>
+          <p:nvPr/>
+        </p:nvSpPr>
+        <p:spPr>
+          <a:xfrm rot="16842141">
+            <a:off x="3165667" y="658145"/>
+            <a:ext cx="338692" cy="196670"/>
+          </a:xfrm>
+          <a:prstGeom prst="blockArc">
+            <a:avLst>
+              <a:gd name="adj1" fmla="val 10800000"/>
+              <a:gd name="adj2" fmla="val 58862"/>
+              <a:gd name="adj3" fmla="val 30068"/>
+            </a:avLst>
+          </a:prstGeom>
+          <a:solidFill>
+            <a:srgbClr val="FFDF79"/>
+          </a:solidFill>
+          <a:ln>
+            <a:noFill/>
+          </a:ln>
+          <a:effectLst>
+            <a:innerShdw blurRad="50800" dist="25400" dir="7800000">
+              <a:prstClr val="black">
+                <a:alpha val="50000"/>
+              </a:prstClr>
+            </a:innerShdw>
+          </a:effectLst>
+        </p:spPr>
+        <p:style>
+          <a:lnRef idx="2">
+            <a:schemeClr val="accent1">
+              <a:shade val="15000"/>
+            </a:schemeClr>
+          </a:lnRef>
+          <a:fillRef idx="1">
+            <a:schemeClr val="accent1"/>
+          </a:fillRef>
+          <a:effectRef idx="0">
+            <a:schemeClr val="accent1"/>
+          </a:effectRef>
+          <a:fontRef idx="minor">
+            <a:schemeClr val="lt1"/>
+          </a:fontRef>
+        </p:style>
+        <p:txBody>
+          <a:bodyPr rtlCol="0" anchor="ctr"/>
+          <a:lstStyle/>
+          <a:p>
+            <a:pPr algn="ctr"/>
+            <a:endParaRPr kumimoji="1" lang="ja-JP" altLang="en-US">
+              <a:solidFill>
+                <a:schemeClr val="tx1"/>
+              </a:solidFill>
+            </a:endParaRPr>
+          </a:p>
+        </p:txBody>
+      </p:sp>
+      <p:sp>
+        <p:nvSpPr>
+          <p:cNvPr id="20" name="アーチ 19">
+            <a:extLst>
+              <a:ext uri="{FF2B5EF4-FFF2-40B4-BE49-F238E27FC236}">
+                <a16:creationId xmlns:a16="http://schemas.microsoft.com/office/drawing/2014/main" id="{E978C236-1AF7-A165-9E5D-6B41153313EE}"/>
+              </a:ext>
+            </a:extLst>
+          </p:cNvPr>
+          <p:cNvSpPr/>
+          <p:nvPr/>
+        </p:nvSpPr>
+        <p:spPr>
+          <a:xfrm rot="413176">
+            <a:off x="3402271" y="993884"/>
+            <a:ext cx="486889" cy="196670"/>
+          </a:xfrm>
+          <a:prstGeom prst="blockArc">
+            <a:avLst>
+              <a:gd name="adj1" fmla="val 10800000"/>
+              <a:gd name="adj2" fmla="val 58862"/>
+              <a:gd name="adj3" fmla="val 30068"/>
+            </a:avLst>
+          </a:prstGeom>
+          <a:solidFill>
+            <a:srgbClr val="FFDF79"/>
+          </a:solidFill>
+          <a:ln>
+            <a:noFill/>
+          </a:ln>
+          <a:effectLst>
+            <a:innerShdw blurRad="50800" dist="25400" dir="7800000">
+              <a:prstClr val="black">
+                <a:alpha val="50000"/>
+              </a:prstClr>
+            </a:innerShdw>
+          </a:effectLst>
+        </p:spPr>
+        <p:style>
+          <a:lnRef idx="2">
+            <a:schemeClr val="accent1">
+              <a:shade val="15000"/>
+            </a:schemeClr>
+          </a:lnRef>
+          <a:fillRef idx="1">
+            <a:schemeClr val="accent1"/>
+          </a:fillRef>
+          <a:effectRef idx="0">
+            <a:schemeClr val="accent1"/>
+          </a:effectRef>
+          <a:fontRef idx="minor">
+            <a:schemeClr val="lt1"/>
+          </a:fontRef>
+        </p:style>
+        <p:txBody>
+          <a:bodyPr rtlCol="0" anchor="ctr"/>
+          <a:lstStyle/>
+          <a:p>
+            <a:pPr algn="ctr"/>
+            <a:endParaRPr kumimoji="1" lang="ja-JP" altLang="en-US">
+              <a:solidFill>
+                <a:schemeClr val="tx1"/>
+              </a:solidFill>
+            </a:endParaRPr>
+          </a:p>
+        </p:txBody>
+      </p:sp>
+      <p:sp>
+        <p:nvSpPr>
+          <p:cNvPr id="24" name="アーチ 23">
+            <a:extLst>
+              <a:ext uri="{FF2B5EF4-FFF2-40B4-BE49-F238E27FC236}">
+                <a16:creationId xmlns:a16="http://schemas.microsoft.com/office/drawing/2014/main" id="{33D53D2D-5502-6316-E1C1-745D377684D9}"/>
+              </a:ext>
+            </a:extLst>
+          </p:cNvPr>
+          <p:cNvSpPr/>
+          <p:nvPr/>
+        </p:nvSpPr>
+        <p:spPr>
+          <a:xfrm rot="413176">
+            <a:off x="3417565" y="1773481"/>
+            <a:ext cx="472045" cy="196670"/>
+          </a:xfrm>
+          <a:prstGeom prst="blockArc">
+            <a:avLst>
+              <a:gd name="adj1" fmla="val 10800000"/>
+              <a:gd name="adj2" fmla="val 58862"/>
+              <a:gd name="adj3" fmla="val 30068"/>
+            </a:avLst>
+          </a:prstGeom>
+          <a:solidFill>
+            <a:srgbClr val="FFDF79"/>
+          </a:solidFill>
+          <a:ln>
+            <a:noFill/>
+          </a:ln>
+          <a:effectLst>
+            <a:innerShdw blurRad="50800" dist="25400" dir="7800000">
+              <a:prstClr val="black">
+                <a:alpha val="50000"/>
+              </a:prstClr>
+            </a:innerShdw>
+          </a:effectLst>
+        </p:spPr>
+        <p:style>
+          <a:lnRef idx="2">
+            <a:schemeClr val="accent1">
+              <a:shade val="15000"/>
+            </a:schemeClr>
+          </a:lnRef>
+          <a:fillRef idx="1">
+            <a:schemeClr val="accent1"/>
+          </a:fillRef>
+          <a:effectRef idx="0">
+            <a:schemeClr val="accent1"/>
+          </a:effectRef>
+          <a:fontRef idx="minor">
+            <a:schemeClr val="lt1"/>
+          </a:fontRef>
+        </p:style>
+        <p:txBody>
+          <a:bodyPr rtlCol="0" anchor="ctr"/>
+          <a:lstStyle/>
+          <a:p>
+            <a:pPr algn="ctr"/>
+            <a:endParaRPr kumimoji="1" lang="ja-JP" altLang="en-US">
+              <a:solidFill>
+                <a:schemeClr val="tx1"/>
+              </a:solidFill>
+            </a:endParaRPr>
+          </a:p>
+        </p:txBody>
+      </p:sp>
+      <p:sp>
+        <p:nvSpPr>
+          <p:cNvPr id="26" name="アーチ 25">
+            <a:extLst>
+              <a:ext uri="{FF2B5EF4-FFF2-40B4-BE49-F238E27FC236}">
+                <a16:creationId xmlns:a16="http://schemas.microsoft.com/office/drawing/2014/main" id="{BEC4FAC7-D6F4-9D61-8523-67934F803A8B}"/>
+              </a:ext>
+            </a:extLst>
+          </p:cNvPr>
+          <p:cNvSpPr/>
+          <p:nvPr/>
+        </p:nvSpPr>
+        <p:spPr>
+          <a:xfrm rot="413176">
+            <a:off x="3379326" y="1385538"/>
+            <a:ext cx="510420" cy="196670"/>
+          </a:xfrm>
+          <a:prstGeom prst="blockArc">
+            <a:avLst>
+              <a:gd name="adj1" fmla="val 10800000"/>
+              <a:gd name="adj2" fmla="val 58862"/>
+              <a:gd name="adj3" fmla="val 30068"/>
+            </a:avLst>
+          </a:prstGeom>
+          <a:solidFill>
+            <a:srgbClr val="FFDF79"/>
+          </a:solidFill>
+          <a:ln>
+            <a:noFill/>
+          </a:ln>
+          <a:effectLst>
+            <a:innerShdw blurRad="50800" dist="25400" dir="7800000">
+              <a:prstClr val="black">
+                <a:alpha val="50000"/>
+              </a:prstClr>
+            </a:innerShdw>
+          </a:effectLst>
+        </p:spPr>
+        <p:style>
+          <a:lnRef idx="2">
+            <a:schemeClr val="accent1">
+              <a:shade val="15000"/>
+            </a:schemeClr>
+          </a:lnRef>
+          <a:fillRef idx="1">
+            <a:schemeClr val="accent1"/>
+          </a:fillRef>
+          <a:effectRef idx="0">
+            <a:schemeClr val="accent1"/>
+          </a:effectRef>
+          <a:fontRef idx="minor">
+            <a:schemeClr val="lt1"/>
+          </a:fontRef>
+        </p:style>
+        <p:txBody>
+          <a:bodyPr rtlCol="0" anchor="ctr"/>
+          <a:lstStyle/>
+          <a:p>
+            <a:pPr algn="ctr"/>
+            <a:endParaRPr kumimoji="1" lang="ja-JP" altLang="en-US">
+              <a:solidFill>
+                <a:schemeClr val="tx1"/>
+              </a:solidFill>
+            </a:endParaRPr>
+          </a:p>
+        </p:txBody>
+      </p:sp>
+      <p:sp>
+        <p:nvSpPr>
+          <p:cNvPr id="28" name="アーチ 27">
+            <a:extLst>
+              <a:ext uri="{FF2B5EF4-FFF2-40B4-BE49-F238E27FC236}">
+                <a16:creationId xmlns:a16="http://schemas.microsoft.com/office/drawing/2014/main" id="{95C462C8-553D-93AB-9EEC-F604BD896D60}"/>
+              </a:ext>
+            </a:extLst>
+          </p:cNvPr>
+          <p:cNvSpPr/>
+          <p:nvPr/>
+        </p:nvSpPr>
+        <p:spPr>
+          <a:xfrm rot="413176">
+            <a:off x="3482571" y="2173117"/>
+            <a:ext cx="406299" cy="196670"/>
+          </a:xfrm>
+          <a:prstGeom prst="blockArc">
+            <a:avLst>
+              <a:gd name="adj1" fmla="val 10800000"/>
+              <a:gd name="adj2" fmla="val 58862"/>
+              <a:gd name="adj3" fmla="val 30068"/>
+            </a:avLst>
+          </a:prstGeom>
+          <a:solidFill>
+            <a:srgbClr val="FFDF79"/>
+          </a:solidFill>
+          <a:ln>
+            <a:noFill/>
+          </a:ln>
+          <a:effectLst>
+            <a:innerShdw blurRad="50800" dist="25400" dir="7800000">
+              <a:prstClr val="black">
+                <a:alpha val="50000"/>
+              </a:prstClr>
+            </a:innerShdw>
+          </a:effectLst>
+        </p:spPr>
+        <p:style>
+          <a:lnRef idx="2">
+            <a:schemeClr val="accent1">
+              <a:shade val="15000"/>
+            </a:schemeClr>
+          </a:lnRef>
+          <a:fillRef idx="1">
+            <a:schemeClr val="accent1"/>
+          </a:fillRef>
+          <a:effectRef idx="0">
+            <a:schemeClr val="accent1"/>
+          </a:effectRef>
+          <a:fontRef idx="minor">
+            <a:schemeClr val="lt1"/>
+          </a:fontRef>
+        </p:style>
+        <p:txBody>
+          <a:bodyPr rtlCol="0" anchor="ctr"/>
+          <a:lstStyle/>
+          <a:p>
+            <a:pPr algn="ctr"/>
+            <a:endParaRPr kumimoji="1" lang="ja-JP" altLang="en-US">
+              <a:solidFill>
+                <a:schemeClr val="tx1"/>
+              </a:solidFill>
+            </a:endParaRPr>
+          </a:p>
+        </p:txBody>
+      </p:sp>
+      <p:sp>
+        <p:nvSpPr>
+          <p:cNvPr id="30" name="アーチ 29">
+            <a:extLst>
+              <a:ext uri="{FF2B5EF4-FFF2-40B4-BE49-F238E27FC236}">
+                <a16:creationId xmlns:a16="http://schemas.microsoft.com/office/drawing/2014/main" id="{2EBF0882-1687-5C8F-1AE2-AE696ABD15F9}"/>
+              </a:ext>
+            </a:extLst>
+          </p:cNvPr>
+          <p:cNvSpPr/>
+          <p:nvPr/>
+        </p:nvSpPr>
+        <p:spPr>
+          <a:xfrm rot="413176">
+            <a:off x="3541841" y="2565528"/>
+            <a:ext cx="347124" cy="196670"/>
+          </a:xfrm>
+          <a:prstGeom prst="blockArc">
+            <a:avLst>
+              <a:gd name="adj1" fmla="val 10800000"/>
+              <a:gd name="adj2" fmla="val 58862"/>
+              <a:gd name="adj3" fmla="val 30068"/>
+            </a:avLst>
+          </a:prstGeom>
+          <a:solidFill>
+            <a:srgbClr val="FFDF79"/>
+          </a:solidFill>
+          <a:ln>
+            <a:noFill/>
+          </a:ln>
+          <a:effectLst>
+            <a:innerShdw blurRad="50800" dist="25400" dir="7800000">
+              <a:prstClr val="black">
+                <a:alpha val="50000"/>
+              </a:prstClr>
+            </a:innerShdw>
+          </a:effectLst>
+        </p:spPr>
+        <p:style>
+          <a:lnRef idx="2">
+            <a:schemeClr val="accent1">
+              <a:shade val="15000"/>
+            </a:schemeClr>
+          </a:lnRef>
+          <a:fillRef idx="1">
+            <a:schemeClr val="accent1"/>
+          </a:fillRef>
+          <a:effectRef idx="0">
+            <a:schemeClr val="accent1"/>
+          </a:effectRef>
+          <a:fontRef idx="minor">
+            <a:schemeClr val="lt1"/>
+          </a:fontRef>
+        </p:style>
+        <p:txBody>
+          <a:bodyPr rtlCol="0" anchor="ctr"/>
+          <a:lstStyle/>
+          <a:p>
+            <a:pPr algn="ctr"/>
+            <a:endParaRPr kumimoji="1" lang="ja-JP" altLang="en-US">
+              <a:solidFill>
+                <a:schemeClr val="tx1"/>
+              </a:solidFill>
+            </a:endParaRPr>
+          </a:p>
+        </p:txBody>
+      </p:sp>
+      <p:sp>
+        <p:nvSpPr>
+          <p:cNvPr id="32" name="アーチ 31">
+            <a:extLst>
+              <a:ext uri="{FF2B5EF4-FFF2-40B4-BE49-F238E27FC236}">
+                <a16:creationId xmlns:a16="http://schemas.microsoft.com/office/drawing/2014/main" id="{3C5AFFCD-AEE4-4F01-86D0-139B08EA1284}"/>
+              </a:ext>
+            </a:extLst>
+          </p:cNvPr>
+          <p:cNvSpPr/>
+          <p:nvPr/>
+        </p:nvSpPr>
+        <p:spPr>
+          <a:xfrm rot="413176">
+            <a:off x="3515073" y="2953569"/>
+            <a:ext cx="373992" cy="196670"/>
+          </a:xfrm>
+          <a:prstGeom prst="blockArc">
+            <a:avLst>
+              <a:gd name="adj1" fmla="val 10800000"/>
+              <a:gd name="adj2" fmla="val 58862"/>
+              <a:gd name="adj3" fmla="val 30068"/>
+            </a:avLst>
+          </a:prstGeom>
+          <a:solidFill>
+            <a:srgbClr val="FFDF79"/>
+          </a:solidFill>
+          <a:ln>
+            <a:noFill/>
+          </a:ln>
+          <a:effectLst>
+            <a:innerShdw blurRad="50800" dist="25400" dir="7800000">
+              <a:prstClr val="black">
+                <a:alpha val="50000"/>
+              </a:prstClr>
+            </a:innerShdw>
+          </a:effectLst>
+        </p:spPr>
+        <p:style>
+          <a:lnRef idx="2">
+            <a:schemeClr val="accent1">
+              <a:shade val="15000"/>
+            </a:schemeClr>
+          </a:lnRef>
+          <a:fillRef idx="1">
+            <a:schemeClr val="accent1"/>
+          </a:fillRef>
+          <a:effectRef idx="0">
+            <a:schemeClr val="accent1"/>
+          </a:effectRef>
+          <a:fontRef idx="minor">
+            <a:schemeClr val="lt1"/>
+          </a:fontRef>
+        </p:style>
+        <p:txBody>
+          <a:bodyPr rtlCol="0" anchor="ctr"/>
+          <a:lstStyle/>
+          <a:p>
+            <a:pPr algn="ctr"/>
+            <a:endParaRPr kumimoji="1" lang="ja-JP" altLang="en-US">
+              <a:solidFill>
+                <a:schemeClr val="tx1"/>
+              </a:solidFill>
+            </a:endParaRPr>
+          </a:p>
+        </p:txBody>
+      </p:sp>
+      <p:sp>
+        <p:nvSpPr>
+          <p:cNvPr id="33" name="楕円 32">
+            <a:extLst>
+              <a:ext uri="{FF2B5EF4-FFF2-40B4-BE49-F238E27FC236}">
+                <a16:creationId xmlns:a16="http://schemas.microsoft.com/office/drawing/2014/main" id="{0EC88562-C9DD-1119-77A4-6017F19E3F7B}"/>
+              </a:ext>
+            </a:extLst>
+          </p:cNvPr>
+          <p:cNvSpPr/>
+          <p:nvPr/>
+        </p:nvSpPr>
+        <p:spPr>
+          <a:xfrm>
+            <a:off x="9512398" y="1867625"/>
+            <a:ext cx="118298" cy="76694"/>
+          </a:xfrm>
+          <a:prstGeom prst="ellipse">
+            <a:avLst/>
+          </a:prstGeom>
+          <a:solidFill>
+            <a:srgbClr val="EAEAEA"/>
+          </a:solidFill>
+          <a:ln>
+            <a:noFill/>
+          </a:ln>
+          <a:effectLst>
+            <a:innerShdw blurRad="63500" dist="50800" dir="19800000">
+              <a:prstClr val="black">
+                <a:alpha val="50000"/>
+              </a:prstClr>
+            </a:innerShdw>
+          </a:effectLst>
+        </p:spPr>
+        <p:style>
+          <a:lnRef idx="2">
+            <a:schemeClr val="accent1">
+              <a:shade val="15000"/>
+            </a:schemeClr>
+          </a:lnRef>
+          <a:fillRef idx="1">
+            <a:schemeClr val="accent1"/>
+          </a:fillRef>
+          <a:effectRef idx="0">
+            <a:schemeClr val="accent1"/>
+          </a:effectRef>
+          <a:fontRef idx="minor">
+            <a:schemeClr val="lt1"/>
+          </a:fontRef>
+        </p:style>
+        <p:txBody>
+          <a:bodyPr rtlCol="0" anchor="ctr"/>
+          <a:lstStyle/>
+          <a:p>
+            <a:pPr algn="ctr"/>
+            <a:endParaRPr kumimoji="1" lang="ja-JP" altLang="en-US"/>
+          </a:p>
+        </p:txBody>
+      </p:sp>
+      <p:sp>
+        <p:nvSpPr>
+          <p:cNvPr id="34" name="楕円 33">
+            <a:extLst>
+              <a:ext uri="{FF2B5EF4-FFF2-40B4-BE49-F238E27FC236}">
+                <a16:creationId xmlns:a16="http://schemas.microsoft.com/office/drawing/2014/main" id="{EE2A8B7E-6EA9-6911-A9C5-3201641F0745}"/>
+              </a:ext>
+            </a:extLst>
+          </p:cNvPr>
+          <p:cNvSpPr/>
+          <p:nvPr/>
+        </p:nvSpPr>
+        <p:spPr>
+          <a:xfrm>
+            <a:off x="9512398" y="1477382"/>
+            <a:ext cx="118298" cy="76694"/>
+          </a:xfrm>
+          <a:prstGeom prst="ellipse">
+            <a:avLst/>
+          </a:prstGeom>
+          <a:solidFill>
+            <a:srgbClr val="EAEAEA"/>
+          </a:solidFill>
+          <a:ln>
+            <a:noFill/>
+          </a:ln>
+          <a:effectLst>
+            <a:innerShdw blurRad="63500" dist="50800" dir="19800000">
+              <a:prstClr val="black">
+                <a:alpha val="50000"/>
+              </a:prstClr>
+            </a:innerShdw>
+          </a:effectLst>
+        </p:spPr>
+        <p:style>
+          <a:lnRef idx="2">
+            <a:schemeClr val="accent1">
+              <a:shade val="15000"/>
+            </a:schemeClr>
+          </a:lnRef>
+          <a:fillRef idx="1">
+            <a:schemeClr val="accent1"/>
+          </a:fillRef>
+          <a:effectRef idx="0">
+            <a:schemeClr val="accent1"/>
+          </a:effectRef>
+          <a:fontRef idx="minor">
+            <a:schemeClr val="lt1"/>
+          </a:fontRef>
+        </p:style>
+        <p:txBody>
+          <a:bodyPr rtlCol="0" anchor="ctr"/>
+          <a:lstStyle/>
+          <a:p>
+            <a:pPr algn="ctr"/>
+            <a:endParaRPr kumimoji="1" lang="ja-JP" altLang="en-US"/>
+          </a:p>
+        </p:txBody>
+      </p:sp>
+      <p:sp>
+        <p:nvSpPr>
+          <p:cNvPr id="35" name="楕円 34">
+            <a:extLst>
+              <a:ext uri="{FF2B5EF4-FFF2-40B4-BE49-F238E27FC236}">
+                <a16:creationId xmlns:a16="http://schemas.microsoft.com/office/drawing/2014/main" id="{C6D74754-E214-478E-16DF-EB4D40B83E9B}"/>
+              </a:ext>
+            </a:extLst>
+          </p:cNvPr>
+          <p:cNvSpPr/>
+          <p:nvPr/>
+        </p:nvSpPr>
+        <p:spPr>
+          <a:xfrm>
+            <a:off x="9512398" y="2257868"/>
+            <a:ext cx="118298" cy="76694"/>
+          </a:xfrm>
+          <a:prstGeom prst="ellipse">
+            <a:avLst/>
+          </a:prstGeom>
+          <a:solidFill>
+            <a:srgbClr val="EAEAEA"/>
+          </a:solidFill>
+          <a:ln>
+            <a:noFill/>
+          </a:ln>
+          <a:effectLst>
+            <a:innerShdw blurRad="63500" dist="50800" dir="19800000">
+              <a:prstClr val="black">
+                <a:alpha val="50000"/>
+              </a:prstClr>
+            </a:innerShdw>
+          </a:effectLst>
+        </p:spPr>
+        <p:style>
+          <a:lnRef idx="2">
+            <a:schemeClr val="accent1">
+              <a:shade val="15000"/>
+            </a:schemeClr>
+          </a:lnRef>
+          <a:fillRef idx="1">
+            <a:schemeClr val="accent1"/>
+          </a:fillRef>
+          <a:effectRef idx="0">
+            <a:schemeClr val="accent1"/>
+          </a:effectRef>
+          <a:fontRef idx="minor">
+            <a:schemeClr val="lt1"/>
+          </a:fontRef>
+        </p:style>
+        <p:txBody>
+          <a:bodyPr rtlCol="0" anchor="ctr"/>
+          <a:lstStyle/>
+          <a:p>
+            <a:pPr algn="ctr"/>
+            <a:endParaRPr kumimoji="1" lang="ja-JP" altLang="en-US"/>
+          </a:p>
+        </p:txBody>
+      </p:sp>
+      <p:sp>
+        <p:nvSpPr>
+          <p:cNvPr id="36" name="楕円 35">
+            <a:extLst>
+              <a:ext uri="{FF2B5EF4-FFF2-40B4-BE49-F238E27FC236}">
+                <a16:creationId xmlns:a16="http://schemas.microsoft.com/office/drawing/2014/main" id="{DECED97E-BAEF-A4BD-061A-01383A602FBF}"/>
+              </a:ext>
+            </a:extLst>
+          </p:cNvPr>
+          <p:cNvSpPr/>
+          <p:nvPr/>
+        </p:nvSpPr>
+        <p:spPr>
+          <a:xfrm>
+            <a:off x="9512398" y="2648111"/>
+            <a:ext cx="118298" cy="76694"/>
+          </a:xfrm>
+          <a:prstGeom prst="ellipse">
+            <a:avLst/>
+          </a:prstGeom>
+          <a:solidFill>
+            <a:srgbClr val="EAEAEA"/>
+          </a:solidFill>
+          <a:ln>
+            <a:noFill/>
+          </a:ln>
+          <a:effectLst>
+            <a:innerShdw blurRad="63500" dist="50800" dir="19800000">
+              <a:prstClr val="black">
+                <a:alpha val="50000"/>
+              </a:prstClr>
+            </a:innerShdw>
+          </a:effectLst>
+        </p:spPr>
+        <p:style>
+          <a:lnRef idx="2">
+            <a:schemeClr val="accent1">
+              <a:shade val="15000"/>
+            </a:schemeClr>
+          </a:lnRef>
+          <a:fillRef idx="1">
+            <a:schemeClr val="accent1"/>
+          </a:fillRef>
+          <a:effectRef idx="0">
+            <a:schemeClr val="accent1"/>
+          </a:effectRef>
+          <a:fontRef idx="minor">
+            <a:schemeClr val="lt1"/>
+          </a:fontRef>
+        </p:style>
+        <p:txBody>
+          <a:bodyPr rtlCol="0" anchor="ctr"/>
+          <a:lstStyle/>
+          <a:p>
+            <a:pPr algn="ctr"/>
+            <a:endParaRPr kumimoji="1" lang="ja-JP" altLang="en-US"/>
+          </a:p>
+        </p:txBody>
+      </p:sp>
+      <p:sp>
+        <p:nvSpPr>
+          <p:cNvPr id="37" name="楕円 36">
+            <a:extLst>
+              <a:ext uri="{FF2B5EF4-FFF2-40B4-BE49-F238E27FC236}">
+                <a16:creationId xmlns:a16="http://schemas.microsoft.com/office/drawing/2014/main" id="{EDEAD5C3-5B19-3A3A-5EA2-8204E33CAE9C}"/>
+              </a:ext>
+            </a:extLst>
+          </p:cNvPr>
+          <p:cNvSpPr/>
+          <p:nvPr/>
+        </p:nvSpPr>
+        <p:spPr>
+          <a:xfrm>
+            <a:off x="9512398" y="3038352"/>
+            <a:ext cx="118298" cy="76694"/>
+          </a:xfrm>
+          <a:prstGeom prst="ellipse">
+            <a:avLst/>
+          </a:prstGeom>
+          <a:solidFill>
+            <a:srgbClr val="EAEAEA"/>
+          </a:solidFill>
+          <a:ln>
+            <a:noFill/>
+          </a:ln>
+          <a:effectLst>
+            <a:innerShdw blurRad="63500" dist="50800" dir="19800000">
+              <a:prstClr val="black">
+                <a:alpha val="50000"/>
+              </a:prstClr>
+            </a:innerShdw>
+          </a:effectLst>
+        </p:spPr>
+        <p:style>
+          <a:lnRef idx="2">
+            <a:schemeClr val="accent1">
+              <a:shade val="15000"/>
+            </a:schemeClr>
+          </a:lnRef>
+          <a:fillRef idx="1">
+            <a:schemeClr val="accent1"/>
+          </a:fillRef>
+          <a:effectRef idx="0">
+            <a:schemeClr val="accent1"/>
+          </a:effectRef>
+          <a:fontRef idx="minor">
+            <a:schemeClr val="lt1"/>
+          </a:fontRef>
+        </p:style>
+        <p:txBody>
+          <a:bodyPr rtlCol="0" anchor="ctr"/>
+          <a:lstStyle/>
+          <a:p>
+            <a:pPr algn="ctr"/>
+            <a:endParaRPr kumimoji="1" lang="ja-JP" altLang="en-US"/>
+          </a:p>
+        </p:txBody>
+      </p:sp>
+      <p:sp>
+        <p:nvSpPr>
+          <p:cNvPr id="38" name="楕円 37">
+            <a:extLst>
+              <a:ext uri="{FF2B5EF4-FFF2-40B4-BE49-F238E27FC236}">
+                <a16:creationId xmlns:a16="http://schemas.microsoft.com/office/drawing/2014/main" id="{F60C1257-B84E-2A3D-CE6A-BDE77B2F30CF}"/>
+              </a:ext>
+            </a:extLst>
+          </p:cNvPr>
+          <p:cNvSpPr/>
+          <p:nvPr/>
+        </p:nvSpPr>
+        <p:spPr>
+          <a:xfrm>
+            <a:off x="9512398" y="1087139"/>
+            <a:ext cx="118298" cy="76694"/>
+          </a:xfrm>
+          <a:prstGeom prst="ellipse">
+            <a:avLst/>
+          </a:prstGeom>
+          <a:solidFill>
+            <a:srgbClr val="EAEAEA"/>
+          </a:solidFill>
+          <a:ln>
+            <a:noFill/>
+          </a:ln>
+          <a:effectLst>
+            <a:innerShdw blurRad="63500" dist="50800" dir="19800000">
+              <a:prstClr val="black">
+                <a:alpha val="50000"/>
+              </a:prstClr>
+            </a:innerShdw>
+          </a:effectLst>
+        </p:spPr>
+        <p:style>
+          <a:lnRef idx="2">
+            <a:schemeClr val="accent1">
+              <a:shade val="15000"/>
+            </a:schemeClr>
+          </a:lnRef>
+          <a:fillRef idx="1">
+            <a:schemeClr val="accent1"/>
+          </a:fillRef>
+          <a:effectRef idx="0">
+            <a:schemeClr val="accent1"/>
+          </a:effectRef>
+          <a:fontRef idx="minor">
+            <a:schemeClr val="lt1"/>
+          </a:fontRef>
+        </p:style>
+        <p:txBody>
+          <a:bodyPr rtlCol="0" anchor="ctr"/>
+          <a:lstStyle/>
+          <a:p>
+            <a:pPr algn="ctr"/>
+            <a:endParaRPr kumimoji="1" lang="ja-JP" altLang="en-US"/>
+          </a:p>
+        </p:txBody>
+      </p:sp>
+      <p:sp>
+        <p:nvSpPr>
+          <p:cNvPr id="39" name="楕円 38">
+            <a:extLst>
+              <a:ext uri="{FF2B5EF4-FFF2-40B4-BE49-F238E27FC236}">
+                <a16:creationId xmlns:a16="http://schemas.microsoft.com/office/drawing/2014/main" id="{D8CE3D0F-1EC9-B0BD-57A6-54CF3D7A2E00}"/>
+              </a:ext>
+            </a:extLst>
+          </p:cNvPr>
+          <p:cNvSpPr/>
+          <p:nvPr/>
+        </p:nvSpPr>
+        <p:spPr>
+          <a:xfrm>
+            <a:off x="8461271" y="589988"/>
+            <a:ext cx="79148" cy="104140"/>
+          </a:xfrm>
+          <a:prstGeom prst="ellipse">
+            <a:avLst/>
+          </a:prstGeom>
+          <a:solidFill>
+            <a:srgbClr val="EAEAEA"/>
+          </a:solidFill>
+          <a:ln>
+            <a:noFill/>
+          </a:ln>
+          <a:effectLst>
+            <a:innerShdw blurRad="63500" dist="50800" dir="12000000">
+              <a:prstClr val="black">
+                <a:alpha val="50000"/>
+              </a:prstClr>
+            </a:innerShdw>
+          </a:effectLst>
+        </p:spPr>
+        <p:style>
+          <a:lnRef idx="2">
+            <a:schemeClr val="accent1">
+              <a:shade val="15000"/>
+            </a:schemeClr>
+          </a:lnRef>
+          <a:fillRef idx="1">
+            <a:schemeClr val="accent1"/>
+          </a:fillRef>
+          <a:effectRef idx="0">
+            <a:schemeClr val="accent1"/>
+          </a:effectRef>
+          <a:fontRef idx="minor">
+            <a:schemeClr val="lt1"/>
+          </a:fontRef>
+        </p:style>
+        <p:txBody>
+          <a:bodyPr rtlCol="0" anchor="ctr"/>
+          <a:lstStyle/>
+          <a:p>
+            <a:pPr algn="ctr"/>
+            <a:endParaRPr kumimoji="1" lang="ja-JP" altLang="en-US"/>
+          </a:p>
+        </p:txBody>
+      </p:sp>
+      <p:sp>
+        <p:nvSpPr>
+          <p:cNvPr id="40" name="楕円 39">
+            <a:extLst>
+              <a:ext uri="{FF2B5EF4-FFF2-40B4-BE49-F238E27FC236}">
+                <a16:creationId xmlns:a16="http://schemas.microsoft.com/office/drawing/2014/main" id="{685D71B4-B61A-0D30-8A8A-2DE19D6F5A28}"/>
+              </a:ext>
+            </a:extLst>
+          </p:cNvPr>
+          <p:cNvSpPr/>
+          <p:nvPr/>
+        </p:nvSpPr>
+        <p:spPr>
+          <a:xfrm>
+            <a:off x="8764667" y="589988"/>
+            <a:ext cx="79148" cy="104140"/>
+          </a:xfrm>
+          <a:prstGeom prst="ellipse">
+            <a:avLst/>
+          </a:prstGeom>
+          <a:solidFill>
+            <a:srgbClr val="EAEAEA"/>
+          </a:solidFill>
+          <a:ln>
+            <a:noFill/>
+          </a:ln>
+          <a:effectLst>
+            <a:innerShdw blurRad="63500" dist="50800" dir="12000000">
+              <a:prstClr val="black">
+                <a:alpha val="50000"/>
+              </a:prstClr>
+            </a:innerShdw>
+          </a:effectLst>
+        </p:spPr>
+        <p:style>
+          <a:lnRef idx="2">
+            <a:schemeClr val="accent1">
+              <a:shade val="15000"/>
+            </a:schemeClr>
+          </a:lnRef>
+          <a:fillRef idx="1">
+            <a:schemeClr val="accent1"/>
+          </a:fillRef>
+          <a:effectRef idx="0">
+            <a:schemeClr val="accent1"/>
+          </a:effectRef>
+          <a:fontRef idx="minor">
+            <a:schemeClr val="lt1"/>
+          </a:fontRef>
+        </p:style>
+        <p:txBody>
+          <a:bodyPr rtlCol="0" anchor="ctr"/>
+          <a:lstStyle/>
+          <a:p>
+            <a:pPr algn="ctr"/>
+            <a:endParaRPr kumimoji="1" lang="ja-JP" altLang="en-US"/>
+          </a:p>
+        </p:txBody>
+      </p:sp>
+      <p:sp>
+        <p:nvSpPr>
+          <p:cNvPr id="41" name="楕円 40">
+            <a:extLst>
+              <a:ext uri="{FF2B5EF4-FFF2-40B4-BE49-F238E27FC236}">
+                <a16:creationId xmlns:a16="http://schemas.microsoft.com/office/drawing/2014/main" id="{A26F1714-693E-689C-F4DE-27CC0E17A9CD}"/>
+              </a:ext>
+            </a:extLst>
+          </p:cNvPr>
+          <p:cNvSpPr/>
+          <p:nvPr/>
+        </p:nvSpPr>
+        <p:spPr>
+          <a:xfrm>
+            <a:off x="9068063" y="589988"/>
+            <a:ext cx="79148" cy="104140"/>
+          </a:xfrm>
+          <a:prstGeom prst="ellipse">
+            <a:avLst/>
+          </a:prstGeom>
+          <a:solidFill>
+            <a:srgbClr val="EAEAEA"/>
+          </a:solidFill>
+          <a:ln>
+            <a:noFill/>
+          </a:ln>
+          <a:effectLst>
+            <a:innerShdw blurRad="63500" dist="50800" dir="12000000">
+              <a:prstClr val="black">
+                <a:alpha val="50000"/>
+              </a:prstClr>
+            </a:innerShdw>
+          </a:effectLst>
+        </p:spPr>
+        <p:style>
+          <a:lnRef idx="2">
+            <a:schemeClr val="accent1">
+              <a:shade val="15000"/>
+            </a:schemeClr>
+          </a:lnRef>
+          <a:fillRef idx="1">
+            <a:schemeClr val="accent1"/>
+          </a:fillRef>
+          <a:effectRef idx="0">
+            <a:schemeClr val="accent1"/>
+          </a:effectRef>
+          <a:fontRef idx="minor">
+            <a:schemeClr val="lt1"/>
+          </a:fontRef>
+        </p:style>
+        <p:txBody>
+          <a:bodyPr rtlCol="0" anchor="ctr"/>
+          <a:lstStyle/>
+          <a:p>
+            <a:pPr algn="ctr"/>
+            <a:endParaRPr kumimoji="1" lang="ja-JP" altLang="en-US"/>
+          </a:p>
+        </p:txBody>
+      </p:sp>
+      <p:sp>
+        <p:nvSpPr>
+          <p:cNvPr id="42" name="楕円 41">
+            <a:extLst>
+              <a:ext uri="{FF2B5EF4-FFF2-40B4-BE49-F238E27FC236}">
+                <a16:creationId xmlns:a16="http://schemas.microsoft.com/office/drawing/2014/main" id="{9891E61D-44DC-9FCE-DAC0-A3889ABD0700}"/>
+              </a:ext>
+            </a:extLst>
+          </p:cNvPr>
+          <p:cNvSpPr/>
+          <p:nvPr/>
+        </p:nvSpPr>
+        <p:spPr>
+          <a:xfrm>
+            <a:off x="8157875" y="589988"/>
+            <a:ext cx="79148" cy="104140"/>
+          </a:xfrm>
+          <a:prstGeom prst="ellipse">
+            <a:avLst/>
+          </a:prstGeom>
+          <a:solidFill>
+            <a:srgbClr val="EAEAEA"/>
+          </a:solidFill>
+          <a:ln>
+            <a:noFill/>
+          </a:ln>
+          <a:effectLst>
+            <a:innerShdw blurRad="63500" dist="50800" dir="12000000">
+              <a:prstClr val="black">
+                <a:alpha val="50000"/>
+              </a:prstClr>
+            </a:innerShdw>
+          </a:effectLst>
+        </p:spPr>
+        <p:style>
+          <a:lnRef idx="2">
+            <a:schemeClr val="accent1">
+              <a:shade val="15000"/>
+            </a:schemeClr>
+          </a:lnRef>
+          <a:fillRef idx="1">
+            <a:schemeClr val="accent1"/>
+          </a:fillRef>
+          <a:effectRef idx="0">
+            <a:schemeClr val="accent1"/>
+          </a:effectRef>
+          <a:fontRef idx="minor">
+            <a:schemeClr val="lt1"/>
+          </a:fontRef>
+        </p:style>
+        <p:txBody>
+          <a:bodyPr rtlCol="0" anchor="ctr"/>
+          <a:lstStyle/>
+          <a:p>
+            <a:pPr algn="ctr"/>
+            <a:endParaRPr kumimoji="1" lang="ja-JP" altLang="en-US"/>
+          </a:p>
+        </p:txBody>
+      </p:sp>
+      <p:sp>
+        <p:nvSpPr>
+          <p:cNvPr id="43" name="円柱 42">
+            <a:extLst>
+              <a:ext uri="{FF2B5EF4-FFF2-40B4-BE49-F238E27FC236}">
+                <a16:creationId xmlns:a16="http://schemas.microsoft.com/office/drawing/2014/main" id="{C14E5303-1079-4402-7FF3-4E719412717D}"/>
+              </a:ext>
+            </a:extLst>
+          </p:cNvPr>
+          <p:cNvSpPr/>
+          <p:nvPr/>
+        </p:nvSpPr>
+        <p:spPr>
+          <a:xfrm rot="5400000">
+            <a:off x="8608354" y="-97175"/>
+            <a:ext cx="219075" cy="1707311"/>
+          </a:xfrm>
+          <a:prstGeom prst="can">
+            <a:avLst/>
+          </a:prstGeom>
+          <a:solidFill>
+            <a:schemeClr val="bg2">
+              <a:lumMod val="50000"/>
+            </a:schemeClr>
+          </a:solidFill>
+          <a:ln>
+            <a:noFill/>
+          </a:ln>
+          <a:effectLst>
+            <a:innerShdw blurRad="177800" dist="127000" dir="18000000">
+              <a:prstClr val="black">
+                <a:alpha val="50000"/>
+              </a:prstClr>
+            </a:innerShdw>
+          </a:effectLst>
+        </p:spPr>
+        <p:style>
+          <a:lnRef idx="2">
+            <a:schemeClr val="accent1">
+              <a:shade val="15000"/>
+            </a:schemeClr>
+          </a:lnRef>
+          <a:fillRef idx="1">
+            <a:schemeClr val="accent1"/>
+          </a:fillRef>
+          <a:effectRef idx="0">
+            <a:schemeClr val="accent1"/>
+          </a:effectRef>
+          <a:fontRef idx="minor">
+            <a:schemeClr val="lt1"/>
+          </a:fontRef>
+        </p:style>
+        <p:txBody>
+          <a:bodyPr rtlCol="0" anchor="ctr"/>
+          <a:lstStyle/>
+          <a:p>
+            <a:pPr algn="ctr"/>
+            <a:endParaRPr kumimoji="1" lang="ja-JP" altLang="en-US"/>
+          </a:p>
+        </p:txBody>
+      </p:sp>
+      <p:sp>
+        <p:nvSpPr>
+          <p:cNvPr id="44" name="円柱 43">
+            <a:extLst>
+              <a:ext uri="{FF2B5EF4-FFF2-40B4-BE49-F238E27FC236}">
+                <a16:creationId xmlns:a16="http://schemas.microsoft.com/office/drawing/2014/main" id="{B4963520-EAA9-85E7-9FC7-5B04FB265F46}"/>
+              </a:ext>
+            </a:extLst>
+          </p:cNvPr>
+          <p:cNvSpPr/>
+          <p:nvPr/>
+        </p:nvSpPr>
+        <p:spPr>
+          <a:xfrm>
+            <a:off x="9282299" y="465967"/>
+            <a:ext cx="289249" cy="5907406"/>
+          </a:xfrm>
+          <a:prstGeom prst="can">
+            <a:avLst/>
+          </a:prstGeom>
+          <a:solidFill>
+            <a:schemeClr val="bg2">
+              <a:lumMod val="50000"/>
+            </a:schemeClr>
+          </a:solidFill>
+          <a:ln>
+            <a:noFill/>
+          </a:ln>
+          <a:effectLst>
+            <a:innerShdw blurRad="177800" dist="127000" dir="1200000">
+              <a:prstClr val="black">
+                <a:alpha val="50000"/>
+              </a:prstClr>
+            </a:innerShdw>
+          </a:effectLst>
+        </p:spPr>
+        <p:style>
+          <a:lnRef idx="2">
+            <a:schemeClr val="accent1">
+              <a:shade val="15000"/>
+            </a:schemeClr>
+          </a:lnRef>
+          <a:fillRef idx="1">
+            <a:schemeClr val="accent1"/>
+          </a:fillRef>
+          <a:effectRef idx="0">
+            <a:schemeClr val="accent1"/>
+          </a:effectRef>
+          <a:fontRef idx="minor">
+            <a:schemeClr val="lt1"/>
+          </a:fontRef>
+        </p:style>
+        <p:txBody>
+          <a:bodyPr rtlCol="0" anchor="ctr"/>
+          <a:lstStyle/>
+          <a:p>
+            <a:pPr algn="ctr"/>
+            <a:endParaRPr kumimoji="1" lang="ja-JP" altLang="en-US"/>
+          </a:p>
+        </p:txBody>
+      </p:sp>
+      <p:sp>
+        <p:nvSpPr>
+          <p:cNvPr id="45" name="波線 44">
+            <a:extLst>
+              <a:ext uri="{FF2B5EF4-FFF2-40B4-BE49-F238E27FC236}">
+                <a16:creationId xmlns:a16="http://schemas.microsoft.com/office/drawing/2014/main" id="{5807F13D-774E-EF4A-2957-81D495DE0686}"/>
+              </a:ext>
+            </a:extLst>
+          </p:cNvPr>
+          <p:cNvSpPr/>
+          <p:nvPr/>
+        </p:nvSpPr>
+        <p:spPr>
+          <a:xfrm rot="16200000" flipH="1">
+            <a:off x="7357085" y="1286090"/>
+            <a:ext cx="2419350" cy="1579206"/>
+          </a:xfrm>
+          <a:prstGeom prst="wave">
+            <a:avLst>
+              <a:gd name="adj1" fmla="val 5131"/>
+              <a:gd name="adj2" fmla="val 0"/>
+            </a:avLst>
+          </a:prstGeom>
+          <a:solidFill>
+            <a:srgbClr val="EAEAEA"/>
+          </a:solidFill>
+          <a:ln>
+            <a:noFill/>
+          </a:ln>
+          <a:effectLst>
+            <a:innerShdw blurRad="533400" dist="228600" dir="2700000">
+              <a:prstClr val="black">
+                <a:alpha val="50000"/>
+              </a:prstClr>
+            </a:innerShdw>
+          </a:effectLst>
+        </p:spPr>
+        <p:style>
+          <a:lnRef idx="2">
+            <a:schemeClr val="accent1">
+              <a:shade val="15000"/>
+            </a:schemeClr>
+          </a:lnRef>
+          <a:fillRef idx="1">
+            <a:schemeClr val="accent1"/>
+          </a:fillRef>
+          <a:effectRef idx="0">
+            <a:schemeClr val="accent1"/>
+          </a:effectRef>
+          <a:fontRef idx="minor">
+            <a:schemeClr val="lt1"/>
+          </a:fontRef>
+        </p:style>
+        <p:txBody>
+          <a:bodyPr rtlCol="0" anchor="ctr"/>
+          <a:lstStyle/>
+          <a:p>
+            <a:pPr algn="ctr"/>
+            <a:endParaRPr kumimoji="1" lang="ja-JP" altLang="en-US"/>
+          </a:p>
+        </p:txBody>
+      </p:sp>
+      <p:sp>
+        <p:nvSpPr>
+          <p:cNvPr id="48" name="アーチ 47">
+            <a:extLst>
+              <a:ext uri="{FF2B5EF4-FFF2-40B4-BE49-F238E27FC236}">
+                <a16:creationId xmlns:a16="http://schemas.microsoft.com/office/drawing/2014/main" id="{1723EB5D-7FE7-45EB-26FA-98A09A8CE4A6}"/>
+              </a:ext>
+            </a:extLst>
+          </p:cNvPr>
+          <p:cNvSpPr/>
+          <p:nvPr/>
+        </p:nvSpPr>
+        <p:spPr>
+          <a:xfrm rot="16842141">
+            <a:off x="7998560" y="658145"/>
+            <a:ext cx="338692" cy="196670"/>
+          </a:xfrm>
+          <a:prstGeom prst="blockArc">
+            <a:avLst>
+              <a:gd name="adj1" fmla="val 10800000"/>
+              <a:gd name="adj2" fmla="val 58862"/>
+              <a:gd name="adj3" fmla="val 30068"/>
+            </a:avLst>
+          </a:prstGeom>
+          <a:solidFill>
+            <a:srgbClr val="EAEAEA"/>
+          </a:solidFill>
+          <a:ln>
+            <a:noFill/>
+          </a:ln>
+          <a:effectLst>
+            <a:innerShdw blurRad="50800" dist="25400" dir="7800000">
+              <a:prstClr val="black">
+                <a:alpha val="50000"/>
+              </a:prstClr>
+            </a:innerShdw>
+          </a:effectLst>
+        </p:spPr>
+        <p:style>
+          <a:lnRef idx="2">
+            <a:schemeClr val="accent1">
+              <a:shade val="15000"/>
+            </a:schemeClr>
+          </a:lnRef>
+          <a:fillRef idx="1">
+            <a:schemeClr val="accent1"/>
+          </a:fillRef>
+          <a:effectRef idx="0">
+            <a:schemeClr val="accent1"/>
+          </a:effectRef>
+          <a:fontRef idx="minor">
+            <a:schemeClr val="lt1"/>
+          </a:fontRef>
+        </p:style>
+        <p:txBody>
+          <a:bodyPr rtlCol="0" anchor="ctr"/>
+          <a:lstStyle/>
+          <a:p>
+            <a:pPr algn="ctr"/>
+            <a:endParaRPr kumimoji="1" lang="ja-JP" altLang="en-US">
+              <a:solidFill>
+                <a:schemeClr val="tx1"/>
+              </a:solidFill>
+            </a:endParaRPr>
+          </a:p>
+        </p:txBody>
+      </p:sp>
+      <p:sp>
+        <p:nvSpPr>
+          <p:cNvPr id="49" name="アーチ 48">
+            <a:extLst>
+              <a:ext uri="{FF2B5EF4-FFF2-40B4-BE49-F238E27FC236}">
+                <a16:creationId xmlns:a16="http://schemas.microsoft.com/office/drawing/2014/main" id="{639A13FD-69FE-B24E-B1B2-69207EB2A750}"/>
+              </a:ext>
+            </a:extLst>
+          </p:cNvPr>
+          <p:cNvSpPr/>
+          <p:nvPr/>
+        </p:nvSpPr>
+        <p:spPr>
+          <a:xfrm rot="16842141">
+            <a:off x="8301956" y="658145"/>
+            <a:ext cx="338692" cy="196670"/>
+          </a:xfrm>
+          <a:prstGeom prst="blockArc">
+            <a:avLst>
+              <a:gd name="adj1" fmla="val 10800000"/>
+              <a:gd name="adj2" fmla="val 58862"/>
+              <a:gd name="adj3" fmla="val 30068"/>
+            </a:avLst>
+          </a:prstGeom>
+          <a:solidFill>
+            <a:srgbClr val="EAEAEA"/>
+          </a:solidFill>
+          <a:ln>
+            <a:noFill/>
+          </a:ln>
+          <a:effectLst>
+            <a:innerShdw blurRad="50800" dist="25400" dir="7800000">
+              <a:prstClr val="black">
+                <a:alpha val="50000"/>
+              </a:prstClr>
+            </a:innerShdw>
+          </a:effectLst>
+        </p:spPr>
+        <p:style>
+          <a:lnRef idx="2">
+            <a:schemeClr val="accent1">
+              <a:shade val="15000"/>
+            </a:schemeClr>
+          </a:lnRef>
+          <a:fillRef idx="1">
+            <a:schemeClr val="accent1"/>
+          </a:fillRef>
+          <a:effectRef idx="0">
+            <a:schemeClr val="accent1"/>
+          </a:effectRef>
+          <a:fontRef idx="minor">
+            <a:schemeClr val="lt1"/>
+          </a:fontRef>
+        </p:style>
+        <p:txBody>
+          <a:bodyPr rtlCol="0" anchor="ctr"/>
+          <a:lstStyle/>
+          <a:p>
+            <a:pPr algn="ctr"/>
+            <a:endParaRPr kumimoji="1" lang="ja-JP" altLang="en-US">
+              <a:solidFill>
+                <a:schemeClr val="tx1"/>
+              </a:solidFill>
+            </a:endParaRPr>
+          </a:p>
+        </p:txBody>
+      </p:sp>
+      <p:sp>
+        <p:nvSpPr>
+          <p:cNvPr id="50" name="アーチ 49">
+            <a:extLst>
+              <a:ext uri="{FF2B5EF4-FFF2-40B4-BE49-F238E27FC236}">
+                <a16:creationId xmlns:a16="http://schemas.microsoft.com/office/drawing/2014/main" id="{4F3BF1E3-7227-6C2D-6822-9FBC8AB6A5B1}"/>
+              </a:ext>
+            </a:extLst>
+          </p:cNvPr>
+          <p:cNvSpPr/>
+          <p:nvPr/>
+        </p:nvSpPr>
+        <p:spPr>
+          <a:xfrm rot="16842141">
+            <a:off x="8605352" y="658145"/>
+            <a:ext cx="338692" cy="196670"/>
+          </a:xfrm>
+          <a:prstGeom prst="blockArc">
+            <a:avLst>
+              <a:gd name="adj1" fmla="val 10800000"/>
+              <a:gd name="adj2" fmla="val 58862"/>
+              <a:gd name="adj3" fmla="val 30068"/>
+            </a:avLst>
+          </a:prstGeom>
+          <a:solidFill>
+            <a:srgbClr val="EAEAEA"/>
+          </a:solidFill>
+          <a:ln>
+            <a:noFill/>
+          </a:ln>
+          <a:effectLst>
+            <a:innerShdw blurRad="50800" dist="25400" dir="7800000">
+              <a:prstClr val="black">
+                <a:alpha val="50000"/>
+              </a:prstClr>
+            </a:innerShdw>
+          </a:effectLst>
+        </p:spPr>
+        <p:style>
+          <a:lnRef idx="2">
+            <a:schemeClr val="accent1">
+              <a:shade val="15000"/>
+            </a:schemeClr>
+          </a:lnRef>
+          <a:fillRef idx="1">
+            <a:schemeClr val="accent1"/>
+          </a:fillRef>
+          <a:effectRef idx="0">
+            <a:schemeClr val="accent1"/>
+          </a:effectRef>
+          <a:fontRef idx="minor">
+            <a:schemeClr val="lt1"/>
+          </a:fontRef>
+        </p:style>
+        <p:txBody>
+          <a:bodyPr rtlCol="0" anchor="ctr"/>
+          <a:lstStyle/>
+          <a:p>
+            <a:pPr algn="ctr"/>
+            <a:endParaRPr kumimoji="1" lang="ja-JP" altLang="en-US">
+              <a:solidFill>
+                <a:schemeClr val="tx1"/>
+              </a:solidFill>
+            </a:endParaRPr>
+          </a:p>
+        </p:txBody>
+      </p:sp>
+      <p:sp>
+        <p:nvSpPr>
+          <p:cNvPr id="51" name="アーチ 50">
+            <a:extLst>
+              <a:ext uri="{FF2B5EF4-FFF2-40B4-BE49-F238E27FC236}">
+                <a16:creationId xmlns:a16="http://schemas.microsoft.com/office/drawing/2014/main" id="{D862D196-520F-E3E1-3DAA-7546D7141445}"/>
+              </a:ext>
+            </a:extLst>
+          </p:cNvPr>
+          <p:cNvSpPr/>
+          <p:nvPr/>
+        </p:nvSpPr>
+        <p:spPr>
+          <a:xfrm rot="16842141">
+            <a:off x="8908748" y="658145"/>
+            <a:ext cx="338692" cy="196670"/>
+          </a:xfrm>
+          <a:prstGeom prst="blockArc">
+            <a:avLst>
+              <a:gd name="adj1" fmla="val 10800000"/>
+              <a:gd name="adj2" fmla="val 58862"/>
+              <a:gd name="adj3" fmla="val 30068"/>
+            </a:avLst>
+          </a:prstGeom>
+          <a:solidFill>
+            <a:srgbClr val="EAEAEA"/>
+          </a:solidFill>
+          <a:ln>
+            <a:noFill/>
+          </a:ln>
+          <a:effectLst>
+            <a:innerShdw blurRad="50800" dist="25400" dir="7800000">
+              <a:prstClr val="black">
+                <a:alpha val="50000"/>
+              </a:prstClr>
+            </a:innerShdw>
+          </a:effectLst>
+        </p:spPr>
+        <p:style>
+          <a:lnRef idx="2">
+            <a:schemeClr val="accent1">
+              <a:shade val="15000"/>
+            </a:schemeClr>
+          </a:lnRef>
+          <a:fillRef idx="1">
+            <a:schemeClr val="accent1"/>
+          </a:fillRef>
+          <a:effectRef idx="0">
+            <a:schemeClr val="accent1"/>
+          </a:effectRef>
+          <a:fontRef idx="minor">
+            <a:schemeClr val="lt1"/>
+          </a:fontRef>
+        </p:style>
+        <p:txBody>
+          <a:bodyPr rtlCol="0" anchor="ctr"/>
+          <a:lstStyle/>
+          <a:p>
+            <a:pPr algn="ctr"/>
+            <a:endParaRPr kumimoji="1" lang="ja-JP" altLang="en-US">
+              <a:solidFill>
+                <a:schemeClr val="tx1"/>
+              </a:solidFill>
+            </a:endParaRPr>
+          </a:p>
+        </p:txBody>
+      </p:sp>
+      <p:sp>
+        <p:nvSpPr>
+          <p:cNvPr id="52" name="アーチ 51">
+            <a:extLst>
+              <a:ext uri="{FF2B5EF4-FFF2-40B4-BE49-F238E27FC236}">
+                <a16:creationId xmlns:a16="http://schemas.microsoft.com/office/drawing/2014/main" id="{8F776753-3B42-8DA8-AD5E-FC195ED92A28}"/>
+              </a:ext>
+            </a:extLst>
+          </p:cNvPr>
+          <p:cNvSpPr/>
+          <p:nvPr/>
+        </p:nvSpPr>
+        <p:spPr>
+          <a:xfrm rot="413176">
+            <a:off x="9145352" y="993884"/>
+            <a:ext cx="486889" cy="196670"/>
+          </a:xfrm>
+          <a:prstGeom prst="blockArc">
+            <a:avLst>
+              <a:gd name="adj1" fmla="val 10800000"/>
+              <a:gd name="adj2" fmla="val 58862"/>
+              <a:gd name="adj3" fmla="val 30068"/>
+            </a:avLst>
+          </a:prstGeom>
+          <a:solidFill>
+            <a:srgbClr val="EAEAEA"/>
+          </a:solidFill>
+          <a:ln>
+            <a:noFill/>
+          </a:ln>
+          <a:effectLst>
+            <a:innerShdw blurRad="50800" dist="25400" dir="7800000">
+              <a:prstClr val="black">
+                <a:alpha val="50000"/>
+              </a:prstClr>
+            </a:innerShdw>
+          </a:effectLst>
+        </p:spPr>
+        <p:style>
+          <a:lnRef idx="2">
+            <a:schemeClr val="accent1">
+              <a:shade val="15000"/>
+            </a:schemeClr>
+          </a:lnRef>
+          <a:fillRef idx="1">
+            <a:schemeClr val="accent1"/>
+          </a:fillRef>
+          <a:effectRef idx="0">
+            <a:schemeClr val="accent1"/>
+          </a:effectRef>
+          <a:fontRef idx="minor">
+            <a:schemeClr val="lt1"/>
+          </a:fontRef>
+        </p:style>
+        <p:txBody>
+          <a:bodyPr rtlCol="0" anchor="ctr"/>
+          <a:lstStyle/>
+          <a:p>
+            <a:pPr algn="ctr"/>
+            <a:endParaRPr kumimoji="1" lang="ja-JP" altLang="en-US">
+              <a:solidFill>
+                <a:schemeClr val="tx1"/>
+              </a:solidFill>
+            </a:endParaRPr>
+          </a:p>
+        </p:txBody>
+      </p:sp>
+      <p:sp>
+        <p:nvSpPr>
+          <p:cNvPr id="53" name="アーチ 52">
+            <a:extLst>
+              <a:ext uri="{FF2B5EF4-FFF2-40B4-BE49-F238E27FC236}">
+                <a16:creationId xmlns:a16="http://schemas.microsoft.com/office/drawing/2014/main" id="{344EEEAC-4269-A366-EBF4-11B97D95F8D0}"/>
+              </a:ext>
+            </a:extLst>
+          </p:cNvPr>
+          <p:cNvSpPr/>
+          <p:nvPr/>
+        </p:nvSpPr>
+        <p:spPr>
+          <a:xfrm rot="413176">
+            <a:off x="9160646" y="1773481"/>
+            <a:ext cx="472045" cy="196670"/>
+          </a:xfrm>
+          <a:prstGeom prst="blockArc">
+            <a:avLst>
+              <a:gd name="adj1" fmla="val 10800000"/>
+              <a:gd name="adj2" fmla="val 58862"/>
+              <a:gd name="adj3" fmla="val 30068"/>
+            </a:avLst>
+          </a:prstGeom>
+          <a:solidFill>
+            <a:srgbClr val="EAEAEA"/>
+          </a:solidFill>
+          <a:ln>
+            <a:noFill/>
+          </a:ln>
+          <a:effectLst>
+            <a:innerShdw blurRad="50800" dist="25400" dir="7800000">
+              <a:prstClr val="black">
+                <a:alpha val="50000"/>
+              </a:prstClr>
+            </a:innerShdw>
+          </a:effectLst>
+        </p:spPr>
+        <p:style>
+          <a:lnRef idx="2">
+            <a:schemeClr val="accent1">
+              <a:shade val="15000"/>
+            </a:schemeClr>
+          </a:lnRef>
+          <a:fillRef idx="1">
+            <a:schemeClr val="accent1"/>
+          </a:fillRef>
+          <a:effectRef idx="0">
+            <a:schemeClr val="accent1"/>
+          </a:effectRef>
+          <a:fontRef idx="minor">
+            <a:schemeClr val="lt1"/>
+          </a:fontRef>
+        </p:style>
+        <p:txBody>
+          <a:bodyPr rtlCol="0" anchor="ctr"/>
+          <a:lstStyle/>
+          <a:p>
+            <a:pPr algn="ctr"/>
+            <a:endParaRPr kumimoji="1" lang="ja-JP" altLang="en-US">
+              <a:solidFill>
+                <a:schemeClr val="tx1"/>
+              </a:solidFill>
+            </a:endParaRPr>
+          </a:p>
+        </p:txBody>
+      </p:sp>
+      <p:sp>
+        <p:nvSpPr>
+          <p:cNvPr id="54" name="アーチ 53">
+            <a:extLst>
+              <a:ext uri="{FF2B5EF4-FFF2-40B4-BE49-F238E27FC236}">
+                <a16:creationId xmlns:a16="http://schemas.microsoft.com/office/drawing/2014/main" id="{4C967474-F4E0-4DCD-83E1-936A7B716926}"/>
+              </a:ext>
+            </a:extLst>
+          </p:cNvPr>
+          <p:cNvSpPr/>
+          <p:nvPr/>
+        </p:nvSpPr>
+        <p:spPr>
+          <a:xfrm rot="413176">
+            <a:off x="9122407" y="1385538"/>
+            <a:ext cx="510420" cy="196670"/>
+          </a:xfrm>
+          <a:prstGeom prst="blockArc">
+            <a:avLst>
+              <a:gd name="adj1" fmla="val 10800000"/>
+              <a:gd name="adj2" fmla="val 58862"/>
+              <a:gd name="adj3" fmla="val 30068"/>
+            </a:avLst>
+          </a:prstGeom>
+          <a:solidFill>
+            <a:srgbClr val="EAEAEA"/>
+          </a:solidFill>
+          <a:ln>
+            <a:noFill/>
+          </a:ln>
+          <a:effectLst>
+            <a:innerShdw blurRad="50800" dist="25400" dir="7800000">
+              <a:prstClr val="black">
+                <a:alpha val="50000"/>
+              </a:prstClr>
+            </a:innerShdw>
+          </a:effectLst>
+        </p:spPr>
+        <p:style>
+          <a:lnRef idx="2">
+            <a:schemeClr val="accent1">
+              <a:shade val="15000"/>
+            </a:schemeClr>
+          </a:lnRef>
+          <a:fillRef idx="1">
+            <a:schemeClr val="accent1"/>
+          </a:fillRef>
+          <a:effectRef idx="0">
+            <a:schemeClr val="accent1"/>
+          </a:effectRef>
+          <a:fontRef idx="minor">
+            <a:schemeClr val="lt1"/>
+          </a:fontRef>
+        </p:style>
+        <p:txBody>
+          <a:bodyPr rtlCol="0" anchor="ctr"/>
+          <a:lstStyle/>
+          <a:p>
+            <a:pPr algn="ctr"/>
+            <a:endParaRPr kumimoji="1" lang="ja-JP" altLang="en-US">
+              <a:solidFill>
+                <a:schemeClr val="tx1"/>
+              </a:solidFill>
+            </a:endParaRPr>
+          </a:p>
+        </p:txBody>
+      </p:sp>
+      <p:sp>
+        <p:nvSpPr>
+          <p:cNvPr id="55" name="アーチ 54">
+            <a:extLst>
+              <a:ext uri="{FF2B5EF4-FFF2-40B4-BE49-F238E27FC236}">
+                <a16:creationId xmlns:a16="http://schemas.microsoft.com/office/drawing/2014/main" id="{92F3D2C7-BEF8-A7F2-C008-EA294A0E14A8}"/>
+              </a:ext>
+            </a:extLst>
+          </p:cNvPr>
+          <p:cNvSpPr/>
+          <p:nvPr/>
+        </p:nvSpPr>
+        <p:spPr>
+          <a:xfrm rot="413176">
+            <a:off x="9225652" y="2173117"/>
+            <a:ext cx="406299" cy="196670"/>
+          </a:xfrm>
+          <a:prstGeom prst="blockArc">
+            <a:avLst>
+              <a:gd name="adj1" fmla="val 10800000"/>
+              <a:gd name="adj2" fmla="val 58862"/>
+              <a:gd name="adj3" fmla="val 30068"/>
+            </a:avLst>
+          </a:prstGeom>
+          <a:solidFill>
+            <a:srgbClr val="EAEAEA"/>
+          </a:solidFill>
+          <a:ln>
+            <a:noFill/>
+          </a:ln>
+          <a:effectLst>
+            <a:innerShdw blurRad="50800" dist="25400" dir="7800000">
+              <a:prstClr val="black">
+                <a:alpha val="50000"/>
+              </a:prstClr>
+            </a:innerShdw>
+          </a:effectLst>
+        </p:spPr>
+        <p:style>
+          <a:lnRef idx="2">
+            <a:schemeClr val="accent1">
+              <a:shade val="15000"/>
+            </a:schemeClr>
+          </a:lnRef>
+          <a:fillRef idx="1">
+            <a:schemeClr val="accent1"/>
+          </a:fillRef>
+          <a:effectRef idx="0">
+            <a:schemeClr val="accent1"/>
+          </a:effectRef>
+          <a:fontRef idx="minor">
+            <a:schemeClr val="lt1"/>
+          </a:fontRef>
+        </p:style>
+        <p:txBody>
+          <a:bodyPr rtlCol="0" anchor="ctr"/>
+          <a:lstStyle/>
+          <a:p>
+            <a:pPr algn="ctr"/>
+            <a:endParaRPr kumimoji="1" lang="ja-JP" altLang="en-US">
+              <a:solidFill>
+                <a:schemeClr val="tx1"/>
+              </a:solidFill>
+            </a:endParaRPr>
+          </a:p>
+        </p:txBody>
+      </p:sp>
+      <p:sp>
+        <p:nvSpPr>
+          <p:cNvPr id="56" name="アーチ 55">
+            <a:extLst>
+              <a:ext uri="{FF2B5EF4-FFF2-40B4-BE49-F238E27FC236}">
+                <a16:creationId xmlns:a16="http://schemas.microsoft.com/office/drawing/2014/main" id="{98C7FF51-D276-1ED1-068D-CC580D580810}"/>
+              </a:ext>
+            </a:extLst>
+          </p:cNvPr>
+          <p:cNvSpPr/>
+          <p:nvPr/>
+        </p:nvSpPr>
+        <p:spPr>
+          <a:xfrm rot="413176">
+            <a:off x="9284922" y="2565528"/>
+            <a:ext cx="347124" cy="196670"/>
+          </a:xfrm>
+          <a:prstGeom prst="blockArc">
+            <a:avLst>
+              <a:gd name="adj1" fmla="val 10800000"/>
+              <a:gd name="adj2" fmla="val 58862"/>
+              <a:gd name="adj3" fmla="val 30068"/>
+            </a:avLst>
+          </a:prstGeom>
+          <a:solidFill>
+            <a:srgbClr val="EAEAEA"/>
+          </a:solidFill>
+          <a:ln>
+            <a:noFill/>
+          </a:ln>
+          <a:effectLst>
+            <a:innerShdw blurRad="50800" dist="25400" dir="7800000">
+              <a:prstClr val="black">
+                <a:alpha val="50000"/>
+              </a:prstClr>
+            </a:innerShdw>
+          </a:effectLst>
+        </p:spPr>
+        <p:style>
+          <a:lnRef idx="2">
+            <a:schemeClr val="accent1">
+              <a:shade val="15000"/>
+            </a:schemeClr>
+          </a:lnRef>
+          <a:fillRef idx="1">
+            <a:schemeClr val="accent1"/>
+          </a:fillRef>
+          <a:effectRef idx="0">
+            <a:schemeClr val="accent1"/>
+          </a:effectRef>
+          <a:fontRef idx="minor">
+            <a:schemeClr val="lt1"/>
+          </a:fontRef>
+        </p:style>
+        <p:txBody>
+          <a:bodyPr rtlCol="0" anchor="ctr"/>
+          <a:lstStyle/>
+          <a:p>
+            <a:pPr algn="ctr"/>
+            <a:endParaRPr kumimoji="1" lang="ja-JP" altLang="en-US">
+              <a:solidFill>
+                <a:schemeClr val="tx1"/>
+              </a:solidFill>
+            </a:endParaRPr>
+          </a:p>
+        </p:txBody>
+      </p:sp>
+      <p:sp>
+        <p:nvSpPr>
+          <p:cNvPr id="57" name="アーチ 56">
+            <a:extLst>
+              <a:ext uri="{FF2B5EF4-FFF2-40B4-BE49-F238E27FC236}">
+                <a16:creationId xmlns:a16="http://schemas.microsoft.com/office/drawing/2014/main" id="{7D0E530E-CA9B-E5C8-20D6-943461A2AEF9}"/>
+              </a:ext>
+            </a:extLst>
+          </p:cNvPr>
+          <p:cNvSpPr/>
+          <p:nvPr/>
+        </p:nvSpPr>
+        <p:spPr>
+          <a:xfrm rot="413176">
+            <a:off x="9258154" y="2953569"/>
+            <a:ext cx="373992" cy="196670"/>
+          </a:xfrm>
+          <a:prstGeom prst="blockArc">
+            <a:avLst>
+              <a:gd name="adj1" fmla="val 10800000"/>
+              <a:gd name="adj2" fmla="val 58862"/>
+              <a:gd name="adj3" fmla="val 30068"/>
+            </a:avLst>
+          </a:prstGeom>
+          <a:solidFill>
+            <a:srgbClr val="EAEAEA"/>
+          </a:solidFill>
+          <a:ln>
+            <a:noFill/>
+          </a:ln>
+          <a:effectLst>
+            <a:innerShdw blurRad="50800" dist="25400" dir="7800000">
+              <a:prstClr val="black">
+                <a:alpha val="50000"/>
+              </a:prstClr>
+            </a:innerShdw>
+          </a:effectLst>
+        </p:spPr>
+        <p:style>
+          <a:lnRef idx="2">
+            <a:schemeClr val="accent1">
+              <a:shade val="15000"/>
+            </a:schemeClr>
+          </a:lnRef>
+          <a:fillRef idx="1">
+            <a:schemeClr val="accent1"/>
+          </a:fillRef>
+          <a:effectRef idx="0">
+            <a:schemeClr val="accent1"/>
+          </a:effectRef>
+          <a:fontRef idx="minor">
+            <a:schemeClr val="lt1"/>
+          </a:fontRef>
+        </p:style>
+        <p:txBody>
+          <a:bodyPr rtlCol="0" anchor="ctr"/>
+          <a:lstStyle/>
+          <a:p>
+            <a:pPr algn="ctr"/>
+            <a:endParaRPr kumimoji="1" lang="ja-JP" altLang="en-US">
+              <a:solidFill>
+                <a:schemeClr val="tx1"/>
+              </a:solidFill>
+            </a:endParaRPr>
+          </a:p>
+        </p:txBody>
+      </p:sp>
+      <p:sp>
+        <p:nvSpPr>
+          <p:cNvPr id="58" name="テキスト ボックス 57">
+            <a:extLst>
+              <a:ext uri="{FF2B5EF4-FFF2-40B4-BE49-F238E27FC236}">
+                <a16:creationId xmlns:a16="http://schemas.microsoft.com/office/drawing/2014/main" id="{482EB812-3258-8658-1B79-F14C1AE26DA0}"/>
+              </a:ext>
+            </a:extLst>
+          </p:cNvPr>
+          <p:cNvSpPr txBox="1"/>
+          <p:nvPr/>
+        </p:nvSpPr>
+        <p:spPr>
+          <a:xfrm rot="289478">
+            <a:off x="7807323" y="734427"/>
+            <a:ext cx="1463230" cy="1569660"/>
+          </a:xfrm>
+          <a:prstGeom prst="rect">
+            <a:avLst/>
+          </a:prstGeom>
+          <a:noFill/>
+        </p:spPr>
+        <p:txBody>
+          <a:bodyPr wrap="square" rtlCol="0">
+            <a:spAutoFit/>
+          </a:bodyPr>
+          <a:lstStyle/>
+          <a:p>
+            <a:r>
+              <a:rPr lang="ja-JP" altLang="en-US" sz="9600" dirty="0">
+                <a:latin typeface="HGP行書体" panose="03000600000000000000" pitchFamily="66" charset="-128"/>
+                <a:ea typeface="HGP行書体" panose="03000600000000000000" pitchFamily="66" charset="-128"/>
+              </a:rPr>
+              <a:t>毘</a:t>
+            </a:r>
+            <a:endParaRPr kumimoji="1" lang="ja-JP" altLang="en-US" sz="9600" dirty="0">
+              <a:latin typeface="HGP行書体" panose="03000600000000000000" pitchFamily="66" charset="-128"/>
+              <a:ea typeface="HGP行書体" panose="03000600000000000000" pitchFamily="66" charset="-128"/>
+            </a:endParaRPr>
+          </a:p>
+        </p:txBody>
+      </p:sp>
+      <p:sp>
+        <p:nvSpPr>
+          <p:cNvPr id="83" name="楕円 82">
+            <a:extLst>
+              <a:ext uri="{FF2B5EF4-FFF2-40B4-BE49-F238E27FC236}">
+                <a16:creationId xmlns:a16="http://schemas.microsoft.com/office/drawing/2014/main" id="{7C1E5F2C-C77F-9E08-1889-6E7620978E99}"/>
+              </a:ext>
+            </a:extLst>
+          </p:cNvPr>
+          <p:cNvSpPr/>
+          <p:nvPr/>
+        </p:nvSpPr>
+        <p:spPr>
+          <a:xfrm>
+            <a:off x="6703471" y="1852360"/>
+            <a:ext cx="118298" cy="76694"/>
+          </a:xfrm>
+          <a:prstGeom prst="ellipse">
+            <a:avLst/>
+          </a:prstGeom>
+          <a:solidFill>
+            <a:srgbClr val="FFDF79"/>
+          </a:solidFill>
+          <a:ln>
+            <a:noFill/>
+          </a:ln>
+          <a:effectLst>
+            <a:innerShdw blurRad="63500" dist="50800" dir="19800000">
+              <a:prstClr val="black">
+                <a:alpha val="50000"/>
+              </a:prstClr>
+            </a:innerShdw>
+          </a:effectLst>
+        </p:spPr>
+        <p:style>
+          <a:lnRef idx="2">
+            <a:schemeClr val="accent1">
+              <a:shade val="15000"/>
+            </a:schemeClr>
+          </a:lnRef>
+          <a:fillRef idx="1">
+            <a:schemeClr val="accent1"/>
+          </a:fillRef>
+          <a:effectRef idx="0">
+            <a:schemeClr val="accent1"/>
+          </a:effectRef>
+          <a:fontRef idx="minor">
+            <a:schemeClr val="lt1"/>
+          </a:fontRef>
+        </p:style>
+        <p:txBody>
+          <a:bodyPr rtlCol="0" anchor="ctr"/>
+          <a:lstStyle/>
+          <a:p>
+            <a:pPr algn="ctr"/>
+            <a:endParaRPr kumimoji="1" lang="ja-JP" altLang="en-US"/>
+          </a:p>
+        </p:txBody>
+      </p:sp>
+      <p:sp>
+        <p:nvSpPr>
+          <p:cNvPr id="84" name="楕円 83">
+            <a:extLst>
+              <a:ext uri="{FF2B5EF4-FFF2-40B4-BE49-F238E27FC236}">
+                <a16:creationId xmlns:a16="http://schemas.microsoft.com/office/drawing/2014/main" id="{9D5F3F7B-0D53-B8A1-4A22-DED728695477}"/>
+              </a:ext>
+            </a:extLst>
+          </p:cNvPr>
+          <p:cNvSpPr/>
+          <p:nvPr/>
+        </p:nvSpPr>
+        <p:spPr>
+          <a:xfrm>
+            <a:off x="6703471" y="1469749"/>
+            <a:ext cx="118298" cy="76694"/>
+          </a:xfrm>
+          <a:prstGeom prst="ellipse">
+            <a:avLst/>
+          </a:prstGeom>
+          <a:solidFill>
+            <a:srgbClr val="FFDF79"/>
+          </a:solidFill>
+          <a:ln>
+            <a:noFill/>
+          </a:ln>
+          <a:effectLst>
+            <a:innerShdw blurRad="63500" dist="50800" dir="19800000">
+              <a:prstClr val="black">
+                <a:alpha val="50000"/>
+              </a:prstClr>
+            </a:innerShdw>
+          </a:effectLst>
+        </p:spPr>
+        <p:style>
+          <a:lnRef idx="2">
+            <a:schemeClr val="accent1">
+              <a:shade val="15000"/>
+            </a:schemeClr>
+          </a:lnRef>
+          <a:fillRef idx="1">
+            <a:schemeClr val="accent1"/>
+          </a:fillRef>
+          <a:effectRef idx="0">
+            <a:schemeClr val="accent1"/>
+          </a:effectRef>
+          <a:fontRef idx="minor">
+            <a:schemeClr val="lt1"/>
+          </a:fontRef>
+        </p:style>
+        <p:txBody>
+          <a:bodyPr rtlCol="0" anchor="ctr"/>
+          <a:lstStyle/>
+          <a:p>
+            <a:pPr algn="ctr"/>
+            <a:endParaRPr kumimoji="1" lang="ja-JP" altLang="en-US"/>
+          </a:p>
+        </p:txBody>
+      </p:sp>
+      <p:sp>
+        <p:nvSpPr>
+          <p:cNvPr id="85" name="楕円 84">
+            <a:extLst>
+              <a:ext uri="{FF2B5EF4-FFF2-40B4-BE49-F238E27FC236}">
+                <a16:creationId xmlns:a16="http://schemas.microsoft.com/office/drawing/2014/main" id="{B2CAD418-401E-0E21-4C98-5FE57AF75CAF}"/>
+              </a:ext>
+            </a:extLst>
+          </p:cNvPr>
+          <p:cNvSpPr/>
+          <p:nvPr/>
+        </p:nvSpPr>
+        <p:spPr>
+          <a:xfrm>
+            <a:off x="6703471" y="2234971"/>
+            <a:ext cx="118298" cy="76694"/>
+          </a:xfrm>
+          <a:prstGeom prst="ellipse">
+            <a:avLst/>
+          </a:prstGeom>
+          <a:solidFill>
+            <a:srgbClr val="FFDF79"/>
+          </a:solidFill>
+          <a:ln>
+            <a:noFill/>
+          </a:ln>
+          <a:effectLst>
+            <a:innerShdw blurRad="63500" dist="50800" dir="19800000">
+              <a:prstClr val="black">
+                <a:alpha val="50000"/>
+              </a:prstClr>
+            </a:innerShdw>
+          </a:effectLst>
+        </p:spPr>
+        <p:style>
+          <a:lnRef idx="2">
+            <a:schemeClr val="accent1">
+              <a:shade val="15000"/>
+            </a:schemeClr>
+          </a:lnRef>
+          <a:fillRef idx="1">
+            <a:schemeClr val="accent1"/>
+          </a:fillRef>
+          <a:effectRef idx="0">
+            <a:schemeClr val="accent1"/>
+          </a:effectRef>
+          <a:fontRef idx="minor">
+            <a:schemeClr val="lt1"/>
+          </a:fontRef>
+        </p:style>
+        <p:txBody>
+          <a:bodyPr rtlCol="0" anchor="ctr"/>
+          <a:lstStyle/>
+          <a:p>
+            <a:pPr algn="ctr"/>
+            <a:endParaRPr kumimoji="1" lang="ja-JP" altLang="en-US"/>
+          </a:p>
+        </p:txBody>
+      </p:sp>
+      <p:sp>
+        <p:nvSpPr>
+          <p:cNvPr id="86" name="楕円 85">
+            <a:extLst>
+              <a:ext uri="{FF2B5EF4-FFF2-40B4-BE49-F238E27FC236}">
+                <a16:creationId xmlns:a16="http://schemas.microsoft.com/office/drawing/2014/main" id="{74A683BB-3672-D856-3C40-F97A4CCE4B0F}"/>
+              </a:ext>
+            </a:extLst>
+          </p:cNvPr>
+          <p:cNvSpPr/>
+          <p:nvPr/>
+        </p:nvSpPr>
+        <p:spPr>
+          <a:xfrm>
+            <a:off x="6703471" y="2617582"/>
+            <a:ext cx="118298" cy="76694"/>
+          </a:xfrm>
+          <a:prstGeom prst="ellipse">
+            <a:avLst/>
+          </a:prstGeom>
+          <a:solidFill>
+            <a:srgbClr val="FFDF79"/>
+          </a:solidFill>
+          <a:ln>
+            <a:noFill/>
+          </a:ln>
+          <a:effectLst>
+            <a:innerShdw blurRad="63500" dist="50800" dir="19800000">
+              <a:prstClr val="black">
+                <a:alpha val="50000"/>
+              </a:prstClr>
+            </a:innerShdw>
+          </a:effectLst>
+        </p:spPr>
+        <p:style>
+          <a:lnRef idx="2">
+            <a:schemeClr val="accent1">
+              <a:shade val="15000"/>
+            </a:schemeClr>
+          </a:lnRef>
+          <a:fillRef idx="1">
+            <a:schemeClr val="accent1"/>
+          </a:fillRef>
+          <a:effectRef idx="0">
+            <a:schemeClr val="accent1"/>
+          </a:effectRef>
+          <a:fontRef idx="minor">
+            <a:schemeClr val="lt1"/>
+          </a:fontRef>
+        </p:style>
+        <p:txBody>
+          <a:bodyPr rtlCol="0" anchor="ctr"/>
+          <a:lstStyle/>
+          <a:p>
+            <a:pPr algn="ctr"/>
+            <a:endParaRPr kumimoji="1" lang="ja-JP" altLang="en-US"/>
+          </a:p>
+        </p:txBody>
+      </p:sp>
+      <p:sp>
+        <p:nvSpPr>
+          <p:cNvPr id="87" name="楕円 86">
+            <a:extLst>
+              <a:ext uri="{FF2B5EF4-FFF2-40B4-BE49-F238E27FC236}">
+                <a16:creationId xmlns:a16="http://schemas.microsoft.com/office/drawing/2014/main" id="{FC31480D-F734-7D5D-D6A1-8AA47DDA08BD}"/>
+              </a:ext>
+            </a:extLst>
+          </p:cNvPr>
+          <p:cNvSpPr/>
+          <p:nvPr/>
+        </p:nvSpPr>
+        <p:spPr>
+          <a:xfrm>
+            <a:off x="6703471" y="3000193"/>
+            <a:ext cx="118298" cy="76694"/>
+          </a:xfrm>
+          <a:prstGeom prst="ellipse">
+            <a:avLst/>
+          </a:prstGeom>
+          <a:solidFill>
+            <a:srgbClr val="FFDF79"/>
+          </a:solidFill>
+          <a:ln>
+            <a:noFill/>
+          </a:ln>
+          <a:effectLst>
+            <a:innerShdw blurRad="63500" dist="50800" dir="19800000">
+              <a:prstClr val="black">
+                <a:alpha val="50000"/>
+              </a:prstClr>
+            </a:innerShdw>
+          </a:effectLst>
+        </p:spPr>
+        <p:style>
+          <a:lnRef idx="2">
+            <a:schemeClr val="accent1">
+              <a:shade val="15000"/>
+            </a:schemeClr>
+          </a:lnRef>
+          <a:fillRef idx="1">
+            <a:schemeClr val="accent1"/>
+          </a:fillRef>
+          <a:effectRef idx="0">
+            <a:schemeClr val="accent1"/>
+          </a:effectRef>
+          <a:fontRef idx="minor">
+            <a:schemeClr val="lt1"/>
+          </a:fontRef>
+        </p:style>
+        <p:txBody>
+          <a:bodyPr rtlCol="0" anchor="ctr"/>
+          <a:lstStyle/>
+          <a:p>
+            <a:pPr algn="ctr"/>
+            <a:endParaRPr kumimoji="1" lang="ja-JP" altLang="en-US"/>
+          </a:p>
+        </p:txBody>
+      </p:sp>
+      <p:sp>
+        <p:nvSpPr>
+          <p:cNvPr id="88" name="楕円 87">
+            <a:extLst>
+              <a:ext uri="{FF2B5EF4-FFF2-40B4-BE49-F238E27FC236}">
+                <a16:creationId xmlns:a16="http://schemas.microsoft.com/office/drawing/2014/main" id="{93CA0403-87AE-1832-3B43-263117EFF6FB}"/>
+              </a:ext>
+            </a:extLst>
+          </p:cNvPr>
+          <p:cNvSpPr/>
+          <p:nvPr/>
+        </p:nvSpPr>
+        <p:spPr>
+          <a:xfrm>
+            <a:off x="6703471" y="1087138"/>
+            <a:ext cx="118298" cy="76694"/>
+          </a:xfrm>
+          <a:prstGeom prst="ellipse">
+            <a:avLst/>
+          </a:prstGeom>
+          <a:solidFill>
+            <a:srgbClr val="FFDF79"/>
+          </a:solidFill>
+          <a:ln>
+            <a:noFill/>
+          </a:ln>
+          <a:effectLst>
+            <a:innerShdw blurRad="63500" dist="50800" dir="19800000">
+              <a:prstClr val="black">
+                <a:alpha val="50000"/>
+              </a:prstClr>
+            </a:innerShdw>
+          </a:effectLst>
+        </p:spPr>
+        <p:style>
+          <a:lnRef idx="2">
+            <a:schemeClr val="accent1">
+              <a:shade val="15000"/>
+            </a:schemeClr>
+          </a:lnRef>
+          <a:fillRef idx="1">
+            <a:schemeClr val="accent1"/>
+          </a:fillRef>
+          <a:effectRef idx="0">
+            <a:schemeClr val="accent1"/>
+          </a:effectRef>
+          <a:fontRef idx="minor">
+            <a:schemeClr val="lt1"/>
+          </a:fontRef>
+        </p:style>
+        <p:txBody>
+          <a:bodyPr rtlCol="0" anchor="ctr"/>
+          <a:lstStyle/>
+          <a:p>
+            <a:pPr algn="ctr"/>
+            <a:endParaRPr kumimoji="1" lang="ja-JP" altLang="en-US"/>
+          </a:p>
+        </p:txBody>
+      </p:sp>
+      <p:sp>
+        <p:nvSpPr>
+          <p:cNvPr id="89" name="楕円 88">
+            <a:extLst>
+              <a:ext uri="{FF2B5EF4-FFF2-40B4-BE49-F238E27FC236}">
+                <a16:creationId xmlns:a16="http://schemas.microsoft.com/office/drawing/2014/main" id="{B198B1DA-750F-5085-A153-684F4AC834C8}"/>
+              </a:ext>
+            </a:extLst>
+          </p:cNvPr>
+          <p:cNvSpPr/>
+          <p:nvPr/>
+        </p:nvSpPr>
+        <p:spPr>
+          <a:xfrm>
+            <a:off x="5652344" y="589987"/>
+            <a:ext cx="79148" cy="104140"/>
+          </a:xfrm>
+          <a:prstGeom prst="ellipse">
+            <a:avLst/>
+          </a:prstGeom>
+          <a:solidFill>
+            <a:srgbClr val="FFDF79"/>
+          </a:solidFill>
+          <a:ln>
+            <a:noFill/>
+          </a:ln>
+          <a:effectLst>
+            <a:innerShdw blurRad="63500" dist="50800" dir="12000000">
+              <a:prstClr val="black">
+                <a:alpha val="50000"/>
+              </a:prstClr>
+            </a:innerShdw>
+          </a:effectLst>
+        </p:spPr>
+        <p:style>
+          <a:lnRef idx="2">
+            <a:schemeClr val="accent1">
+              <a:shade val="15000"/>
+            </a:schemeClr>
+          </a:lnRef>
+          <a:fillRef idx="1">
+            <a:schemeClr val="accent1"/>
+          </a:fillRef>
+          <a:effectRef idx="0">
+            <a:schemeClr val="accent1"/>
+          </a:effectRef>
+          <a:fontRef idx="minor">
+            <a:schemeClr val="lt1"/>
+          </a:fontRef>
+        </p:style>
+        <p:txBody>
+          <a:bodyPr rtlCol="0" anchor="ctr"/>
+          <a:lstStyle/>
+          <a:p>
+            <a:pPr algn="ctr"/>
+            <a:endParaRPr kumimoji="1" lang="ja-JP" altLang="en-US"/>
+          </a:p>
+        </p:txBody>
+      </p:sp>
+      <p:sp>
+        <p:nvSpPr>
+          <p:cNvPr id="90" name="楕円 89">
+            <a:extLst>
+              <a:ext uri="{FF2B5EF4-FFF2-40B4-BE49-F238E27FC236}">
+                <a16:creationId xmlns:a16="http://schemas.microsoft.com/office/drawing/2014/main" id="{B9A4D05A-38D7-E2C8-EC97-CFDB5041C20C}"/>
+              </a:ext>
+            </a:extLst>
+          </p:cNvPr>
+          <p:cNvSpPr/>
+          <p:nvPr/>
+        </p:nvSpPr>
+        <p:spPr>
+          <a:xfrm>
+            <a:off x="5955740" y="589987"/>
+            <a:ext cx="79148" cy="104140"/>
+          </a:xfrm>
+          <a:prstGeom prst="ellipse">
+            <a:avLst/>
+          </a:prstGeom>
+          <a:solidFill>
+            <a:srgbClr val="FFDF79"/>
+          </a:solidFill>
+          <a:ln>
+            <a:noFill/>
+          </a:ln>
+          <a:effectLst>
+            <a:innerShdw blurRad="63500" dist="50800" dir="12000000">
+              <a:prstClr val="black">
+                <a:alpha val="50000"/>
+              </a:prstClr>
+            </a:innerShdw>
+          </a:effectLst>
+        </p:spPr>
+        <p:style>
+          <a:lnRef idx="2">
+            <a:schemeClr val="accent1">
+              <a:shade val="15000"/>
+            </a:schemeClr>
+          </a:lnRef>
+          <a:fillRef idx="1">
+            <a:schemeClr val="accent1"/>
+          </a:fillRef>
+          <a:effectRef idx="0">
+            <a:schemeClr val="accent1"/>
+          </a:effectRef>
+          <a:fontRef idx="minor">
+            <a:schemeClr val="lt1"/>
+          </a:fontRef>
+        </p:style>
+        <p:txBody>
+          <a:bodyPr rtlCol="0" anchor="ctr"/>
+          <a:lstStyle/>
+          <a:p>
+            <a:pPr algn="ctr"/>
+            <a:endParaRPr kumimoji="1" lang="ja-JP" altLang="en-US"/>
+          </a:p>
+        </p:txBody>
+      </p:sp>
+      <p:sp>
+        <p:nvSpPr>
+          <p:cNvPr id="91" name="楕円 90">
+            <a:extLst>
+              <a:ext uri="{FF2B5EF4-FFF2-40B4-BE49-F238E27FC236}">
+                <a16:creationId xmlns:a16="http://schemas.microsoft.com/office/drawing/2014/main" id="{E4F10522-BD88-D9B9-5BC7-5822344194AE}"/>
+              </a:ext>
+            </a:extLst>
+          </p:cNvPr>
+          <p:cNvSpPr/>
+          <p:nvPr/>
+        </p:nvSpPr>
+        <p:spPr>
+          <a:xfrm>
+            <a:off x="6259136" y="589987"/>
+            <a:ext cx="79148" cy="104140"/>
+          </a:xfrm>
+          <a:prstGeom prst="ellipse">
+            <a:avLst/>
+          </a:prstGeom>
+          <a:solidFill>
+            <a:srgbClr val="FFDF79"/>
+          </a:solidFill>
+          <a:ln>
+            <a:noFill/>
+          </a:ln>
+          <a:effectLst>
+            <a:innerShdw blurRad="63500" dist="50800" dir="12000000">
+              <a:prstClr val="black">
+                <a:alpha val="50000"/>
+              </a:prstClr>
+            </a:innerShdw>
+          </a:effectLst>
+        </p:spPr>
+        <p:style>
+          <a:lnRef idx="2">
+            <a:schemeClr val="accent1">
+              <a:shade val="15000"/>
+            </a:schemeClr>
+          </a:lnRef>
+          <a:fillRef idx="1">
+            <a:schemeClr val="accent1"/>
+          </a:fillRef>
+          <a:effectRef idx="0">
+            <a:schemeClr val="accent1"/>
+          </a:effectRef>
+          <a:fontRef idx="minor">
+            <a:schemeClr val="lt1"/>
+          </a:fontRef>
+        </p:style>
+        <p:txBody>
+          <a:bodyPr rtlCol="0" anchor="ctr"/>
+          <a:lstStyle/>
+          <a:p>
+            <a:pPr algn="ctr"/>
+            <a:endParaRPr kumimoji="1" lang="ja-JP" altLang="en-US"/>
+          </a:p>
+        </p:txBody>
+      </p:sp>
+      <p:sp>
+        <p:nvSpPr>
+          <p:cNvPr id="92" name="楕円 91">
+            <a:extLst>
+              <a:ext uri="{FF2B5EF4-FFF2-40B4-BE49-F238E27FC236}">
+                <a16:creationId xmlns:a16="http://schemas.microsoft.com/office/drawing/2014/main" id="{93CC2F61-1897-12AF-36DD-0B01F2C634F3}"/>
+              </a:ext>
+            </a:extLst>
+          </p:cNvPr>
+          <p:cNvSpPr/>
+          <p:nvPr/>
+        </p:nvSpPr>
+        <p:spPr>
+          <a:xfrm>
+            <a:off x="5348948" y="589987"/>
+            <a:ext cx="79148" cy="104140"/>
+          </a:xfrm>
+          <a:prstGeom prst="ellipse">
+            <a:avLst/>
+          </a:prstGeom>
+          <a:solidFill>
+            <a:srgbClr val="FFDF79"/>
+          </a:solidFill>
+          <a:ln>
+            <a:noFill/>
+          </a:ln>
+          <a:effectLst>
+            <a:innerShdw blurRad="63500" dist="50800" dir="12000000">
+              <a:prstClr val="black">
+                <a:alpha val="50000"/>
+              </a:prstClr>
+            </a:innerShdw>
+          </a:effectLst>
+        </p:spPr>
+        <p:style>
+          <a:lnRef idx="2">
+            <a:schemeClr val="accent1">
+              <a:shade val="15000"/>
+            </a:schemeClr>
+          </a:lnRef>
+          <a:fillRef idx="1">
+            <a:schemeClr val="accent1"/>
+          </a:fillRef>
+          <a:effectRef idx="0">
+            <a:schemeClr val="accent1"/>
+          </a:effectRef>
+          <a:fontRef idx="minor">
+            <a:schemeClr val="lt1"/>
+          </a:fontRef>
+        </p:style>
+        <p:txBody>
+          <a:bodyPr rtlCol="0" anchor="ctr"/>
+          <a:lstStyle/>
+          <a:p>
+            <a:pPr algn="ctr"/>
+            <a:endParaRPr kumimoji="1" lang="ja-JP" altLang="en-US"/>
+          </a:p>
+        </p:txBody>
+      </p:sp>
+      <p:sp>
+        <p:nvSpPr>
+          <p:cNvPr id="93" name="円柱 92">
+            <a:extLst>
+              <a:ext uri="{FF2B5EF4-FFF2-40B4-BE49-F238E27FC236}">
+                <a16:creationId xmlns:a16="http://schemas.microsoft.com/office/drawing/2014/main" id="{B81EFDAA-5297-21DD-59A2-FC345557B724}"/>
+              </a:ext>
+            </a:extLst>
+          </p:cNvPr>
+          <p:cNvSpPr/>
+          <p:nvPr/>
+        </p:nvSpPr>
+        <p:spPr>
+          <a:xfrm rot="5400000">
+            <a:off x="5799427" y="-97176"/>
+            <a:ext cx="219075" cy="1707311"/>
+          </a:xfrm>
+          <a:prstGeom prst="can">
+            <a:avLst/>
+          </a:prstGeom>
+          <a:solidFill>
+            <a:schemeClr val="bg2">
+              <a:lumMod val="50000"/>
+            </a:schemeClr>
+          </a:solidFill>
+          <a:ln>
+            <a:noFill/>
+          </a:ln>
+          <a:effectLst>
+            <a:innerShdw blurRad="177800" dist="127000" dir="18000000">
+              <a:prstClr val="black">
+                <a:alpha val="50000"/>
+              </a:prstClr>
+            </a:innerShdw>
+          </a:effectLst>
+        </p:spPr>
+        <p:style>
+          <a:lnRef idx="2">
+            <a:schemeClr val="accent1">
+              <a:shade val="15000"/>
+            </a:schemeClr>
+          </a:lnRef>
+          <a:fillRef idx="1">
+            <a:schemeClr val="accent1"/>
+          </a:fillRef>
+          <a:effectRef idx="0">
+            <a:schemeClr val="accent1"/>
+          </a:effectRef>
+          <a:fontRef idx="minor">
+            <a:schemeClr val="lt1"/>
+          </a:fontRef>
+        </p:style>
+        <p:txBody>
+          <a:bodyPr rtlCol="0" anchor="ctr"/>
+          <a:lstStyle/>
+          <a:p>
+            <a:pPr algn="ctr"/>
+            <a:endParaRPr kumimoji="1" lang="ja-JP" altLang="en-US"/>
+          </a:p>
+        </p:txBody>
+      </p:sp>
+      <p:sp>
+        <p:nvSpPr>
+          <p:cNvPr id="94" name="円柱 93">
+            <a:extLst>
+              <a:ext uri="{FF2B5EF4-FFF2-40B4-BE49-F238E27FC236}">
+                <a16:creationId xmlns:a16="http://schemas.microsoft.com/office/drawing/2014/main" id="{AFCD08EC-6F23-815F-A098-4F2B6E7100C0}"/>
+              </a:ext>
+            </a:extLst>
+          </p:cNvPr>
+          <p:cNvSpPr/>
+          <p:nvPr/>
+        </p:nvSpPr>
+        <p:spPr>
+          <a:xfrm>
+            <a:off x="6473372" y="465966"/>
+            <a:ext cx="289249" cy="5907406"/>
+          </a:xfrm>
+          <a:prstGeom prst="can">
+            <a:avLst/>
+          </a:prstGeom>
+          <a:solidFill>
+            <a:schemeClr val="bg2">
+              <a:lumMod val="50000"/>
+            </a:schemeClr>
+          </a:solidFill>
+          <a:ln>
+            <a:noFill/>
+          </a:ln>
+          <a:effectLst>
+            <a:innerShdw blurRad="177800" dist="127000" dir="1200000">
+              <a:prstClr val="black">
+                <a:alpha val="50000"/>
+              </a:prstClr>
+            </a:innerShdw>
+          </a:effectLst>
+        </p:spPr>
+        <p:style>
+          <a:lnRef idx="2">
+            <a:schemeClr val="accent1">
+              <a:shade val="15000"/>
+            </a:schemeClr>
+          </a:lnRef>
+          <a:fillRef idx="1">
+            <a:schemeClr val="accent1"/>
+          </a:fillRef>
+          <a:effectRef idx="0">
+            <a:schemeClr val="accent1"/>
+          </a:effectRef>
+          <a:fontRef idx="minor">
+            <a:schemeClr val="lt1"/>
+          </a:fontRef>
+        </p:style>
+        <p:txBody>
+          <a:bodyPr rtlCol="0" anchor="ctr"/>
+          <a:lstStyle/>
+          <a:p>
+            <a:pPr algn="ctr"/>
+            <a:endParaRPr kumimoji="1" lang="ja-JP" altLang="en-US"/>
+          </a:p>
+        </p:txBody>
+      </p:sp>
+      <p:sp>
+        <p:nvSpPr>
+          <p:cNvPr id="95" name="波線 94">
+            <a:extLst>
+              <a:ext uri="{FF2B5EF4-FFF2-40B4-BE49-F238E27FC236}">
+                <a16:creationId xmlns:a16="http://schemas.microsoft.com/office/drawing/2014/main" id="{DF6BFA1F-A320-5E7B-A5D4-40553946BF52}"/>
+              </a:ext>
+            </a:extLst>
+          </p:cNvPr>
+          <p:cNvSpPr/>
+          <p:nvPr/>
+        </p:nvSpPr>
+        <p:spPr>
+          <a:xfrm rot="16200000" flipH="1">
+            <a:off x="4259404" y="1574842"/>
+            <a:ext cx="2996857" cy="1579206"/>
+          </a:xfrm>
+          <a:prstGeom prst="wave">
+            <a:avLst>
+              <a:gd name="adj1" fmla="val 5131"/>
+              <a:gd name="adj2" fmla="val 0"/>
+            </a:avLst>
+          </a:prstGeom>
+          <a:solidFill>
+            <a:schemeClr val="tx1">
+              <a:lumMod val="50000"/>
+              <a:lumOff val="50000"/>
+            </a:schemeClr>
+          </a:solidFill>
+          <a:ln>
+            <a:noFill/>
+          </a:ln>
+          <a:effectLst>
+            <a:innerShdw blurRad="533400" dist="228600" dir="2700000">
+              <a:prstClr val="black">
+                <a:alpha val="50000"/>
+              </a:prstClr>
+            </a:innerShdw>
+          </a:effectLst>
+        </p:spPr>
+        <p:style>
+          <a:lnRef idx="2">
+            <a:schemeClr val="accent1">
+              <a:shade val="15000"/>
+            </a:schemeClr>
+          </a:lnRef>
+          <a:fillRef idx="1">
+            <a:schemeClr val="accent1"/>
+          </a:fillRef>
+          <a:effectRef idx="0">
+            <a:schemeClr val="accent1"/>
+          </a:effectRef>
+          <a:fontRef idx="minor">
+            <a:schemeClr val="lt1"/>
+          </a:fontRef>
+        </p:style>
+        <p:txBody>
+          <a:bodyPr rtlCol="0" anchor="ctr"/>
+          <a:lstStyle/>
+          <a:p>
+            <a:pPr algn="ctr"/>
+            <a:endParaRPr kumimoji="1" lang="ja-JP" altLang="en-US"/>
+          </a:p>
+        </p:txBody>
+      </p:sp>
+      <p:sp>
+        <p:nvSpPr>
+          <p:cNvPr id="97" name="テキスト ボックス 96">
+            <a:extLst>
+              <a:ext uri="{FF2B5EF4-FFF2-40B4-BE49-F238E27FC236}">
+                <a16:creationId xmlns:a16="http://schemas.microsoft.com/office/drawing/2014/main" id="{3A77F08D-197E-9D31-35D9-59ABD3360D38}"/>
+              </a:ext>
+            </a:extLst>
+          </p:cNvPr>
+          <p:cNvSpPr txBox="1"/>
+          <p:nvPr/>
+        </p:nvSpPr>
+        <p:spPr>
+          <a:xfrm rot="289478">
+            <a:off x="5687784" y="867214"/>
+            <a:ext cx="644317" cy="584775"/>
+          </a:xfrm>
+          <a:prstGeom prst="rect">
+            <a:avLst/>
+          </a:prstGeom>
+          <a:noFill/>
+        </p:spPr>
+        <p:txBody>
+          <a:bodyPr wrap="square" rtlCol="0">
+            <a:spAutoFit/>
+          </a:bodyPr>
+          <a:lstStyle/>
+          <a:p>
+            <a:r>
+              <a:rPr kumimoji="1" lang="ja-JP" altLang="en-US" sz="3200" dirty="0">
+                <a:solidFill>
+                  <a:srgbClr val="DEA900"/>
+                </a:solidFill>
+                <a:latin typeface="HGP行書体" panose="03000600000000000000" pitchFamily="66" charset="-128"/>
+                <a:ea typeface="HGP行書体" panose="03000600000000000000" pitchFamily="66" charset="-128"/>
+              </a:rPr>
+              <a:t>疾</a:t>
+            </a:r>
+          </a:p>
+        </p:txBody>
+      </p:sp>
+      <p:sp>
+        <p:nvSpPr>
+          <p:cNvPr id="98" name="アーチ 97">
+            <a:extLst>
+              <a:ext uri="{FF2B5EF4-FFF2-40B4-BE49-F238E27FC236}">
+                <a16:creationId xmlns:a16="http://schemas.microsoft.com/office/drawing/2014/main" id="{89396353-75EE-D3A5-2D14-07386B9F3442}"/>
+              </a:ext>
+            </a:extLst>
+          </p:cNvPr>
+          <p:cNvSpPr/>
+          <p:nvPr/>
+        </p:nvSpPr>
+        <p:spPr>
+          <a:xfrm rot="16842141">
+            <a:off x="5189633" y="658144"/>
+            <a:ext cx="338692" cy="196670"/>
+          </a:xfrm>
+          <a:prstGeom prst="blockArc">
+            <a:avLst>
+              <a:gd name="adj1" fmla="val 10800000"/>
+              <a:gd name="adj2" fmla="val 58862"/>
+              <a:gd name="adj3" fmla="val 30068"/>
+            </a:avLst>
+          </a:prstGeom>
+          <a:solidFill>
+            <a:srgbClr val="FFDF79"/>
+          </a:solidFill>
+          <a:ln>
+            <a:noFill/>
+          </a:ln>
+          <a:effectLst>
+            <a:innerShdw blurRad="50800" dist="25400" dir="7800000">
+              <a:prstClr val="black">
+                <a:alpha val="50000"/>
+              </a:prstClr>
+            </a:innerShdw>
+          </a:effectLst>
+        </p:spPr>
+        <p:style>
+          <a:lnRef idx="2">
+            <a:schemeClr val="accent1">
+              <a:shade val="15000"/>
+            </a:schemeClr>
+          </a:lnRef>
+          <a:fillRef idx="1">
+            <a:schemeClr val="accent1"/>
+          </a:fillRef>
+          <a:effectRef idx="0">
+            <a:schemeClr val="accent1"/>
+          </a:effectRef>
+          <a:fontRef idx="minor">
+            <a:schemeClr val="lt1"/>
+          </a:fontRef>
+        </p:style>
+        <p:txBody>
+          <a:bodyPr rtlCol="0" anchor="ctr"/>
+          <a:lstStyle/>
+          <a:p>
+            <a:pPr algn="ctr"/>
+            <a:endParaRPr kumimoji="1" lang="ja-JP" altLang="en-US">
+              <a:solidFill>
+                <a:schemeClr val="tx1"/>
+              </a:solidFill>
+            </a:endParaRPr>
+          </a:p>
+        </p:txBody>
+      </p:sp>
+      <p:sp>
+        <p:nvSpPr>
+          <p:cNvPr id="99" name="アーチ 98">
+            <a:extLst>
+              <a:ext uri="{FF2B5EF4-FFF2-40B4-BE49-F238E27FC236}">
+                <a16:creationId xmlns:a16="http://schemas.microsoft.com/office/drawing/2014/main" id="{53C78C30-80D5-1567-28C8-E290B0EB38ED}"/>
+              </a:ext>
+            </a:extLst>
+          </p:cNvPr>
+          <p:cNvSpPr/>
+          <p:nvPr/>
+        </p:nvSpPr>
+        <p:spPr>
+          <a:xfrm rot="16842141">
+            <a:off x="5493029" y="658144"/>
+            <a:ext cx="338692" cy="196670"/>
+          </a:xfrm>
+          <a:prstGeom prst="blockArc">
+            <a:avLst>
+              <a:gd name="adj1" fmla="val 10800000"/>
+              <a:gd name="adj2" fmla="val 58862"/>
+              <a:gd name="adj3" fmla="val 30068"/>
+            </a:avLst>
+          </a:prstGeom>
+          <a:solidFill>
+            <a:srgbClr val="FFDF79"/>
+          </a:solidFill>
+          <a:ln>
+            <a:noFill/>
+          </a:ln>
+          <a:effectLst>
+            <a:innerShdw blurRad="50800" dist="25400" dir="7800000">
+              <a:prstClr val="black">
+                <a:alpha val="50000"/>
+              </a:prstClr>
+            </a:innerShdw>
+          </a:effectLst>
+        </p:spPr>
+        <p:style>
+          <a:lnRef idx="2">
+            <a:schemeClr val="accent1">
+              <a:shade val="15000"/>
+            </a:schemeClr>
+          </a:lnRef>
+          <a:fillRef idx="1">
+            <a:schemeClr val="accent1"/>
+          </a:fillRef>
+          <a:effectRef idx="0">
+            <a:schemeClr val="accent1"/>
+          </a:effectRef>
+          <a:fontRef idx="minor">
+            <a:schemeClr val="lt1"/>
+          </a:fontRef>
+        </p:style>
+        <p:txBody>
+          <a:bodyPr rtlCol="0" anchor="ctr"/>
+          <a:lstStyle/>
+          <a:p>
+            <a:pPr algn="ctr"/>
+            <a:endParaRPr kumimoji="1" lang="ja-JP" altLang="en-US">
+              <a:solidFill>
+                <a:schemeClr val="tx1"/>
+              </a:solidFill>
+            </a:endParaRPr>
+          </a:p>
+        </p:txBody>
+      </p:sp>
+      <p:sp>
+        <p:nvSpPr>
+          <p:cNvPr id="100" name="アーチ 99">
+            <a:extLst>
+              <a:ext uri="{FF2B5EF4-FFF2-40B4-BE49-F238E27FC236}">
+                <a16:creationId xmlns:a16="http://schemas.microsoft.com/office/drawing/2014/main" id="{1A6F1663-25FE-0561-3E4E-354B84AF3163}"/>
+              </a:ext>
+            </a:extLst>
+          </p:cNvPr>
+          <p:cNvSpPr/>
+          <p:nvPr/>
+        </p:nvSpPr>
+        <p:spPr>
+          <a:xfrm rot="16842141">
+            <a:off x="5796425" y="658144"/>
+            <a:ext cx="338692" cy="196670"/>
+          </a:xfrm>
+          <a:prstGeom prst="blockArc">
+            <a:avLst>
+              <a:gd name="adj1" fmla="val 10800000"/>
+              <a:gd name="adj2" fmla="val 58862"/>
+              <a:gd name="adj3" fmla="val 30068"/>
+            </a:avLst>
+          </a:prstGeom>
+          <a:solidFill>
+            <a:srgbClr val="FFDF79"/>
+          </a:solidFill>
+          <a:ln>
+            <a:noFill/>
+          </a:ln>
+          <a:effectLst>
+            <a:innerShdw blurRad="50800" dist="25400" dir="7800000">
+              <a:prstClr val="black">
+                <a:alpha val="50000"/>
+              </a:prstClr>
+            </a:innerShdw>
+          </a:effectLst>
+        </p:spPr>
+        <p:style>
+          <a:lnRef idx="2">
+            <a:schemeClr val="accent1">
+              <a:shade val="15000"/>
+            </a:schemeClr>
+          </a:lnRef>
+          <a:fillRef idx="1">
+            <a:schemeClr val="accent1"/>
+          </a:fillRef>
+          <a:effectRef idx="0">
+            <a:schemeClr val="accent1"/>
+          </a:effectRef>
+          <a:fontRef idx="minor">
+            <a:schemeClr val="lt1"/>
+          </a:fontRef>
+        </p:style>
+        <p:txBody>
+          <a:bodyPr rtlCol="0" anchor="ctr"/>
+          <a:lstStyle/>
+          <a:p>
+            <a:pPr algn="ctr"/>
+            <a:endParaRPr kumimoji="1" lang="ja-JP" altLang="en-US">
+              <a:solidFill>
+                <a:schemeClr val="tx1"/>
+              </a:solidFill>
+            </a:endParaRPr>
+          </a:p>
+        </p:txBody>
+      </p:sp>
+      <p:sp>
+        <p:nvSpPr>
+          <p:cNvPr id="101" name="アーチ 100">
+            <a:extLst>
+              <a:ext uri="{FF2B5EF4-FFF2-40B4-BE49-F238E27FC236}">
+                <a16:creationId xmlns:a16="http://schemas.microsoft.com/office/drawing/2014/main" id="{A5452589-6492-89EF-6E4A-134EEB8D9340}"/>
+              </a:ext>
+            </a:extLst>
+          </p:cNvPr>
+          <p:cNvSpPr/>
+          <p:nvPr/>
+        </p:nvSpPr>
+        <p:spPr>
+          <a:xfrm rot="16842141">
+            <a:off x="6099821" y="658144"/>
+            <a:ext cx="338692" cy="196670"/>
+          </a:xfrm>
+          <a:prstGeom prst="blockArc">
+            <a:avLst>
+              <a:gd name="adj1" fmla="val 10800000"/>
+              <a:gd name="adj2" fmla="val 58862"/>
+              <a:gd name="adj3" fmla="val 30068"/>
+            </a:avLst>
+          </a:prstGeom>
+          <a:solidFill>
+            <a:srgbClr val="FFDF79"/>
+          </a:solidFill>
+          <a:ln>
+            <a:noFill/>
+          </a:ln>
+          <a:effectLst>
+            <a:innerShdw blurRad="50800" dist="25400" dir="7800000">
+              <a:prstClr val="black">
+                <a:alpha val="50000"/>
+              </a:prstClr>
+            </a:innerShdw>
+          </a:effectLst>
+        </p:spPr>
+        <p:style>
+          <a:lnRef idx="2">
+            <a:schemeClr val="accent1">
+              <a:shade val="15000"/>
+            </a:schemeClr>
+          </a:lnRef>
+          <a:fillRef idx="1">
+            <a:schemeClr val="accent1"/>
+          </a:fillRef>
+          <a:effectRef idx="0">
+            <a:schemeClr val="accent1"/>
+          </a:effectRef>
+          <a:fontRef idx="minor">
+            <a:schemeClr val="lt1"/>
+          </a:fontRef>
+        </p:style>
+        <p:txBody>
+          <a:bodyPr rtlCol="0" anchor="ctr"/>
+          <a:lstStyle/>
+          <a:p>
+            <a:pPr algn="ctr"/>
+            <a:endParaRPr kumimoji="1" lang="ja-JP" altLang="en-US">
+              <a:solidFill>
+                <a:schemeClr val="tx1"/>
+              </a:solidFill>
+            </a:endParaRPr>
+          </a:p>
+        </p:txBody>
+      </p:sp>
+      <p:sp>
+        <p:nvSpPr>
+          <p:cNvPr id="102" name="アーチ 101">
+            <a:extLst>
+              <a:ext uri="{FF2B5EF4-FFF2-40B4-BE49-F238E27FC236}">
+                <a16:creationId xmlns:a16="http://schemas.microsoft.com/office/drawing/2014/main" id="{3AE41BD2-D9B7-8D00-E06F-9C82A600B6AE}"/>
+              </a:ext>
+            </a:extLst>
+          </p:cNvPr>
+          <p:cNvSpPr/>
+          <p:nvPr/>
+        </p:nvSpPr>
+        <p:spPr>
+          <a:xfrm rot="413176">
+            <a:off x="6336928" y="993883"/>
+            <a:ext cx="486889" cy="196670"/>
+          </a:xfrm>
+          <a:prstGeom prst="blockArc">
+            <a:avLst>
+              <a:gd name="adj1" fmla="val 10800000"/>
+              <a:gd name="adj2" fmla="val 58862"/>
+              <a:gd name="adj3" fmla="val 30068"/>
+            </a:avLst>
+          </a:prstGeom>
+          <a:solidFill>
+            <a:srgbClr val="FFDF79"/>
+          </a:solidFill>
+          <a:ln>
+            <a:noFill/>
+          </a:ln>
+          <a:effectLst>
+            <a:innerShdw blurRad="50800" dist="25400" dir="7800000">
+              <a:prstClr val="black">
+                <a:alpha val="50000"/>
+              </a:prstClr>
+            </a:innerShdw>
+          </a:effectLst>
+        </p:spPr>
+        <p:style>
+          <a:lnRef idx="2">
+            <a:schemeClr val="accent1">
+              <a:shade val="15000"/>
+            </a:schemeClr>
+          </a:lnRef>
+          <a:fillRef idx="1">
+            <a:schemeClr val="accent1"/>
+          </a:fillRef>
+          <a:effectRef idx="0">
+            <a:schemeClr val="accent1"/>
+          </a:effectRef>
+          <a:fontRef idx="minor">
+            <a:schemeClr val="lt1"/>
+          </a:fontRef>
+        </p:style>
+        <p:txBody>
+          <a:bodyPr rtlCol="0" anchor="ctr"/>
+          <a:lstStyle/>
+          <a:p>
+            <a:pPr algn="ctr"/>
+            <a:endParaRPr kumimoji="1" lang="ja-JP" altLang="en-US">
+              <a:solidFill>
+                <a:schemeClr val="tx1"/>
+              </a:solidFill>
+            </a:endParaRPr>
+          </a:p>
+        </p:txBody>
+      </p:sp>
+      <p:sp>
+        <p:nvSpPr>
+          <p:cNvPr id="103" name="アーチ 102">
+            <a:extLst>
+              <a:ext uri="{FF2B5EF4-FFF2-40B4-BE49-F238E27FC236}">
+                <a16:creationId xmlns:a16="http://schemas.microsoft.com/office/drawing/2014/main" id="{3A0FEB68-9584-CB2E-B9B6-1C772C40CC86}"/>
+              </a:ext>
+            </a:extLst>
+          </p:cNvPr>
+          <p:cNvSpPr/>
+          <p:nvPr/>
+        </p:nvSpPr>
+        <p:spPr>
+          <a:xfrm rot="413176">
+            <a:off x="6338341" y="1762240"/>
+            <a:ext cx="483966" cy="196670"/>
+          </a:xfrm>
+          <a:prstGeom prst="blockArc">
+            <a:avLst>
+              <a:gd name="adj1" fmla="val 10800000"/>
+              <a:gd name="adj2" fmla="val 58862"/>
+              <a:gd name="adj3" fmla="val 30068"/>
+            </a:avLst>
+          </a:prstGeom>
+          <a:solidFill>
+            <a:srgbClr val="FFDF79"/>
+          </a:solidFill>
+          <a:ln>
+            <a:noFill/>
+          </a:ln>
+          <a:effectLst>
+            <a:innerShdw blurRad="50800" dist="25400" dir="7800000">
+              <a:prstClr val="black">
+                <a:alpha val="50000"/>
+              </a:prstClr>
+            </a:innerShdw>
+          </a:effectLst>
+        </p:spPr>
+        <p:style>
+          <a:lnRef idx="2">
+            <a:schemeClr val="accent1">
+              <a:shade val="15000"/>
+            </a:schemeClr>
+          </a:lnRef>
+          <a:fillRef idx="1">
+            <a:schemeClr val="accent1"/>
+          </a:fillRef>
+          <a:effectRef idx="0">
+            <a:schemeClr val="accent1"/>
+          </a:effectRef>
+          <a:fontRef idx="minor">
+            <a:schemeClr val="lt1"/>
+          </a:fontRef>
+        </p:style>
+        <p:txBody>
+          <a:bodyPr rtlCol="0" anchor="ctr"/>
+          <a:lstStyle/>
+          <a:p>
+            <a:pPr algn="ctr"/>
+            <a:endParaRPr kumimoji="1" lang="ja-JP" altLang="en-US">
+              <a:solidFill>
+                <a:schemeClr val="tx1"/>
+              </a:solidFill>
+            </a:endParaRPr>
+          </a:p>
+        </p:txBody>
+      </p:sp>
+      <p:sp>
+        <p:nvSpPr>
+          <p:cNvPr id="104" name="アーチ 103">
+            <a:extLst>
+              <a:ext uri="{FF2B5EF4-FFF2-40B4-BE49-F238E27FC236}">
+                <a16:creationId xmlns:a16="http://schemas.microsoft.com/office/drawing/2014/main" id="{8A0ED9D8-8887-E812-3AC2-6E1DEBA54793}"/>
+              </a:ext>
+            </a:extLst>
+          </p:cNvPr>
+          <p:cNvSpPr/>
+          <p:nvPr/>
+        </p:nvSpPr>
+        <p:spPr>
+          <a:xfrm rot="413176">
+            <a:off x="6313482" y="1377704"/>
+            <a:ext cx="510420" cy="196670"/>
+          </a:xfrm>
+          <a:prstGeom prst="blockArc">
+            <a:avLst>
+              <a:gd name="adj1" fmla="val 10800000"/>
+              <a:gd name="adj2" fmla="val 58862"/>
+              <a:gd name="adj3" fmla="val 30068"/>
+            </a:avLst>
+          </a:prstGeom>
+          <a:solidFill>
+            <a:srgbClr val="FFDF79"/>
+          </a:solidFill>
+          <a:ln>
+            <a:noFill/>
+          </a:ln>
+          <a:effectLst>
+            <a:innerShdw blurRad="50800" dist="25400" dir="7800000">
+              <a:prstClr val="black">
+                <a:alpha val="50000"/>
+              </a:prstClr>
+            </a:innerShdw>
+          </a:effectLst>
+        </p:spPr>
+        <p:style>
+          <a:lnRef idx="2">
+            <a:schemeClr val="accent1">
+              <a:shade val="15000"/>
+            </a:schemeClr>
+          </a:lnRef>
+          <a:fillRef idx="1">
+            <a:schemeClr val="accent1"/>
+          </a:fillRef>
+          <a:effectRef idx="0">
+            <a:schemeClr val="accent1"/>
+          </a:effectRef>
+          <a:fontRef idx="minor">
+            <a:schemeClr val="lt1"/>
+          </a:fontRef>
+        </p:style>
+        <p:txBody>
+          <a:bodyPr rtlCol="0" anchor="ctr"/>
+          <a:lstStyle/>
+          <a:p>
+            <a:pPr algn="ctr"/>
+            <a:endParaRPr kumimoji="1" lang="ja-JP" altLang="en-US">
+              <a:solidFill>
+                <a:schemeClr val="tx1"/>
+              </a:solidFill>
+            </a:endParaRPr>
+          </a:p>
+        </p:txBody>
+      </p:sp>
+      <p:sp>
+        <p:nvSpPr>
+          <p:cNvPr id="105" name="アーチ 104">
+            <a:extLst>
+              <a:ext uri="{FF2B5EF4-FFF2-40B4-BE49-F238E27FC236}">
+                <a16:creationId xmlns:a16="http://schemas.microsoft.com/office/drawing/2014/main" id="{F307C8BE-64F0-60EB-2EBA-18EFC7F1E486}"/>
+              </a:ext>
+            </a:extLst>
+          </p:cNvPr>
+          <p:cNvSpPr/>
+          <p:nvPr/>
+        </p:nvSpPr>
+        <p:spPr>
+          <a:xfrm rot="413176">
+            <a:off x="6377075" y="2147806"/>
+            <a:ext cx="447342" cy="196670"/>
+          </a:xfrm>
+          <a:prstGeom prst="blockArc">
+            <a:avLst>
+              <a:gd name="adj1" fmla="val 10800000"/>
+              <a:gd name="adj2" fmla="val 58862"/>
+              <a:gd name="adj3" fmla="val 30068"/>
+            </a:avLst>
+          </a:prstGeom>
+          <a:solidFill>
+            <a:srgbClr val="FFDF79"/>
+          </a:solidFill>
+          <a:ln>
+            <a:noFill/>
+          </a:ln>
+          <a:effectLst>
+            <a:innerShdw blurRad="50800" dist="25400" dir="7800000">
+              <a:prstClr val="black">
+                <a:alpha val="50000"/>
+              </a:prstClr>
+            </a:innerShdw>
+          </a:effectLst>
+        </p:spPr>
+        <p:style>
+          <a:lnRef idx="2">
+            <a:schemeClr val="accent1">
+              <a:shade val="15000"/>
+            </a:schemeClr>
+          </a:lnRef>
+          <a:fillRef idx="1">
+            <a:schemeClr val="accent1"/>
+          </a:fillRef>
+          <a:effectRef idx="0">
+            <a:schemeClr val="accent1"/>
+          </a:effectRef>
+          <a:fontRef idx="minor">
+            <a:schemeClr val="lt1"/>
+          </a:fontRef>
+        </p:style>
+        <p:txBody>
+          <a:bodyPr rtlCol="0" anchor="ctr"/>
+          <a:lstStyle/>
+          <a:p>
+            <a:pPr algn="ctr"/>
+            <a:endParaRPr kumimoji="1" lang="ja-JP" altLang="en-US">
+              <a:solidFill>
+                <a:schemeClr val="tx1"/>
+              </a:solidFill>
+            </a:endParaRPr>
+          </a:p>
+        </p:txBody>
+      </p:sp>
+      <p:sp>
+        <p:nvSpPr>
+          <p:cNvPr id="106" name="アーチ 105">
+            <a:extLst>
+              <a:ext uri="{FF2B5EF4-FFF2-40B4-BE49-F238E27FC236}">
+                <a16:creationId xmlns:a16="http://schemas.microsoft.com/office/drawing/2014/main" id="{59A6D71F-2BEF-FB2E-3C47-BA8204ADA04A}"/>
+              </a:ext>
+            </a:extLst>
+          </p:cNvPr>
+          <p:cNvSpPr/>
+          <p:nvPr/>
+        </p:nvSpPr>
+        <p:spPr>
+          <a:xfrm rot="413176">
+            <a:off x="6430301" y="2531968"/>
+            <a:ext cx="393856" cy="196670"/>
+          </a:xfrm>
+          <a:prstGeom prst="blockArc">
+            <a:avLst>
+              <a:gd name="adj1" fmla="val 10800000"/>
+              <a:gd name="adj2" fmla="val 58862"/>
+              <a:gd name="adj3" fmla="val 30068"/>
+            </a:avLst>
+          </a:prstGeom>
+          <a:solidFill>
+            <a:srgbClr val="FFDF79"/>
+          </a:solidFill>
+          <a:ln>
+            <a:noFill/>
+          </a:ln>
+          <a:effectLst>
+            <a:innerShdw blurRad="50800" dist="25400" dir="7800000">
+              <a:prstClr val="black">
+                <a:alpha val="50000"/>
+              </a:prstClr>
+            </a:innerShdw>
+          </a:effectLst>
+        </p:spPr>
+        <p:style>
+          <a:lnRef idx="2">
+            <a:schemeClr val="accent1">
+              <a:shade val="15000"/>
+            </a:schemeClr>
+          </a:lnRef>
+          <a:fillRef idx="1">
+            <a:schemeClr val="accent1"/>
+          </a:fillRef>
+          <a:effectRef idx="0">
+            <a:schemeClr val="accent1"/>
+          </a:effectRef>
+          <a:fontRef idx="minor">
+            <a:schemeClr val="lt1"/>
+          </a:fontRef>
+        </p:style>
+        <p:txBody>
+          <a:bodyPr rtlCol="0" anchor="ctr"/>
+          <a:lstStyle/>
+          <a:p>
+            <a:pPr algn="ctr"/>
+            <a:endParaRPr kumimoji="1" lang="ja-JP" altLang="en-US">
+              <a:solidFill>
+                <a:schemeClr val="tx1"/>
+              </a:solidFill>
+            </a:endParaRPr>
+          </a:p>
+        </p:txBody>
+      </p:sp>
+      <p:sp>
+        <p:nvSpPr>
+          <p:cNvPr id="107" name="アーチ 106">
+            <a:extLst>
+              <a:ext uri="{FF2B5EF4-FFF2-40B4-BE49-F238E27FC236}">
+                <a16:creationId xmlns:a16="http://schemas.microsoft.com/office/drawing/2014/main" id="{A491F644-9069-35DE-E14E-9463047DBFBC}"/>
+              </a:ext>
+            </a:extLst>
+          </p:cNvPr>
+          <p:cNvSpPr/>
+          <p:nvPr/>
+        </p:nvSpPr>
+        <p:spPr>
+          <a:xfrm rot="413176">
+            <a:off x="6464709" y="2912136"/>
+            <a:ext cx="359769" cy="196670"/>
+          </a:xfrm>
+          <a:prstGeom prst="blockArc">
+            <a:avLst>
+              <a:gd name="adj1" fmla="val 10800000"/>
+              <a:gd name="adj2" fmla="val 58862"/>
+              <a:gd name="adj3" fmla="val 30068"/>
+            </a:avLst>
+          </a:prstGeom>
+          <a:solidFill>
+            <a:srgbClr val="FFDF79"/>
+          </a:solidFill>
+          <a:ln>
+            <a:noFill/>
+          </a:ln>
+          <a:effectLst>
+            <a:innerShdw blurRad="50800" dist="25400" dir="7800000">
+              <a:prstClr val="black">
+                <a:alpha val="50000"/>
+              </a:prstClr>
+            </a:innerShdw>
+          </a:effectLst>
+        </p:spPr>
+        <p:style>
+          <a:lnRef idx="2">
+            <a:schemeClr val="accent1">
+              <a:shade val="15000"/>
+            </a:schemeClr>
+          </a:lnRef>
+          <a:fillRef idx="1">
+            <a:schemeClr val="accent1"/>
+          </a:fillRef>
+          <a:effectRef idx="0">
+            <a:schemeClr val="accent1"/>
+          </a:effectRef>
+          <a:fontRef idx="minor">
+            <a:schemeClr val="lt1"/>
+          </a:fontRef>
+        </p:style>
+        <p:txBody>
+          <a:bodyPr rtlCol="0" anchor="ctr"/>
+          <a:lstStyle/>
+          <a:p>
+            <a:pPr algn="ctr"/>
+            <a:endParaRPr kumimoji="1" lang="ja-JP" altLang="en-US">
+              <a:solidFill>
+                <a:schemeClr val="tx1"/>
+              </a:solidFill>
+            </a:endParaRPr>
+          </a:p>
+        </p:txBody>
+      </p:sp>
+      <p:sp>
+        <p:nvSpPr>
+          <p:cNvPr id="108" name="テキスト ボックス 107">
+            <a:extLst>
+              <a:ext uri="{FF2B5EF4-FFF2-40B4-BE49-F238E27FC236}">
+                <a16:creationId xmlns:a16="http://schemas.microsoft.com/office/drawing/2014/main" id="{2309D0D6-6C8D-6E92-72CB-4490875EFFEB}"/>
+              </a:ext>
+            </a:extLst>
+          </p:cNvPr>
+          <p:cNvSpPr txBox="1"/>
+          <p:nvPr/>
+        </p:nvSpPr>
+        <p:spPr>
+          <a:xfrm rot="289478">
+            <a:off x="5631798" y="1260220"/>
+            <a:ext cx="644317" cy="584775"/>
+          </a:xfrm>
+          <a:prstGeom prst="rect">
+            <a:avLst/>
+          </a:prstGeom>
+          <a:noFill/>
+        </p:spPr>
+        <p:txBody>
+          <a:bodyPr wrap="square" rtlCol="0">
+            <a:spAutoFit/>
+          </a:bodyPr>
+          <a:lstStyle/>
+          <a:p>
+            <a:r>
+              <a:rPr kumimoji="1" lang="ja-JP" altLang="en-US" sz="3200" dirty="0">
+                <a:solidFill>
+                  <a:srgbClr val="DEA900"/>
+                </a:solidFill>
+                <a:latin typeface="HGP行書体" panose="03000600000000000000" pitchFamily="66" charset="-128"/>
+                <a:ea typeface="HGP行書体" panose="03000600000000000000" pitchFamily="66" charset="-128"/>
+              </a:rPr>
+              <a:t>如</a:t>
+            </a:r>
+          </a:p>
+        </p:txBody>
+      </p:sp>
+      <p:sp>
+        <p:nvSpPr>
+          <p:cNvPr id="109" name="テキスト ボックス 108">
+            <a:extLst>
+              <a:ext uri="{FF2B5EF4-FFF2-40B4-BE49-F238E27FC236}">
+                <a16:creationId xmlns:a16="http://schemas.microsoft.com/office/drawing/2014/main" id="{CBD9E104-C00E-CE1C-BF28-F27DF72AD23A}"/>
+              </a:ext>
+            </a:extLst>
+          </p:cNvPr>
+          <p:cNvSpPr txBox="1"/>
+          <p:nvPr/>
+        </p:nvSpPr>
+        <p:spPr>
+          <a:xfrm rot="289478">
+            <a:off x="5669122" y="1653226"/>
+            <a:ext cx="644317" cy="584775"/>
+          </a:xfrm>
+          <a:prstGeom prst="rect">
+            <a:avLst/>
+          </a:prstGeom>
+          <a:noFill/>
+        </p:spPr>
+        <p:txBody>
+          <a:bodyPr wrap="square" rtlCol="0">
+            <a:spAutoFit/>
+          </a:bodyPr>
+          <a:lstStyle/>
+          <a:p>
+            <a:r>
+              <a:rPr kumimoji="1" lang="ja-JP" altLang="en-US" sz="3200" dirty="0">
+                <a:solidFill>
+                  <a:srgbClr val="DEA900"/>
+                </a:solidFill>
+                <a:latin typeface="HGP行書体" panose="03000600000000000000" pitchFamily="66" charset="-128"/>
+                <a:ea typeface="HGP行書体" panose="03000600000000000000" pitchFamily="66" charset="-128"/>
+              </a:rPr>
+              <a:t>風</a:t>
+            </a:r>
+          </a:p>
+        </p:txBody>
+      </p:sp>
+      <p:sp>
+        <p:nvSpPr>
+          <p:cNvPr id="110" name="テキスト ボックス 109">
+            <a:extLst>
+              <a:ext uri="{FF2B5EF4-FFF2-40B4-BE49-F238E27FC236}">
+                <a16:creationId xmlns:a16="http://schemas.microsoft.com/office/drawing/2014/main" id="{8FD56FC4-4698-79BD-6701-574965DC70BC}"/>
+              </a:ext>
+            </a:extLst>
+          </p:cNvPr>
+          <p:cNvSpPr txBox="1"/>
+          <p:nvPr/>
+        </p:nvSpPr>
+        <p:spPr>
+          <a:xfrm rot="289478">
+            <a:off x="5725108" y="2046232"/>
+            <a:ext cx="644317" cy="584775"/>
+          </a:xfrm>
+          <a:prstGeom prst="rect">
+            <a:avLst/>
+          </a:prstGeom>
+          <a:noFill/>
+        </p:spPr>
+        <p:txBody>
+          <a:bodyPr wrap="square" rtlCol="0">
+            <a:spAutoFit/>
+          </a:bodyPr>
+          <a:lstStyle/>
+          <a:p>
+            <a:r>
+              <a:rPr kumimoji="1" lang="ja-JP" altLang="en-US" sz="3200" dirty="0">
+                <a:solidFill>
+                  <a:srgbClr val="DEA900"/>
+                </a:solidFill>
+                <a:latin typeface="HGP行書体" panose="03000600000000000000" pitchFamily="66" charset="-128"/>
+                <a:ea typeface="HGP行書体" panose="03000600000000000000" pitchFamily="66" charset="-128"/>
+              </a:rPr>
+              <a:t>徐</a:t>
+            </a:r>
+          </a:p>
+        </p:txBody>
+      </p:sp>
+      <p:sp>
+        <p:nvSpPr>
+          <p:cNvPr id="113" name="テキスト ボックス 112">
+            <a:extLst>
+              <a:ext uri="{FF2B5EF4-FFF2-40B4-BE49-F238E27FC236}">
+                <a16:creationId xmlns:a16="http://schemas.microsoft.com/office/drawing/2014/main" id="{B9886162-4DFE-F53B-B3CE-00ED59A3DAA9}"/>
+              </a:ext>
+            </a:extLst>
+          </p:cNvPr>
+          <p:cNvSpPr txBox="1"/>
+          <p:nvPr/>
+        </p:nvSpPr>
+        <p:spPr>
+          <a:xfrm rot="289478">
+            <a:off x="5827745" y="2832244"/>
+            <a:ext cx="644317" cy="584775"/>
+          </a:xfrm>
+          <a:prstGeom prst="rect">
+            <a:avLst/>
+          </a:prstGeom>
+          <a:noFill/>
+        </p:spPr>
+        <p:txBody>
+          <a:bodyPr wrap="square" rtlCol="0">
+            <a:spAutoFit/>
+          </a:bodyPr>
+          <a:lstStyle/>
+          <a:p>
+            <a:r>
+              <a:rPr kumimoji="1" lang="ja-JP" altLang="en-US" sz="3200" dirty="0">
+                <a:solidFill>
+                  <a:srgbClr val="DEA900"/>
+                </a:solidFill>
+                <a:latin typeface="HGP行書体" panose="03000600000000000000" pitchFamily="66" charset="-128"/>
+                <a:ea typeface="HGP行書体" panose="03000600000000000000" pitchFamily="66" charset="-128"/>
+              </a:rPr>
+              <a:t>林</a:t>
+            </a:r>
+          </a:p>
+        </p:txBody>
+      </p:sp>
+      <p:sp>
+        <p:nvSpPr>
+          <p:cNvPr id="114" name="テキスト ボックス 113">
+            <a:extLst>
+              <a:ext uri="{FF2B5EF4-FFF2-40B4-BE49-F238E27FC236}">
+                <a16:creationId xmlns:a16="http://schemas.microsoft.com/office/drawing/2014/main" id="{2120F201-BFA6-7749-1E67-AC3F3562DBE0}"/>
+              </a:ext>
+            </a:extLst>
+          </p:cNvPr>
+          <p:cNvSpPr txBox="1"/>
+          <p:nvPr/>
+        </p:nvSpPr>
+        <p:spPr>
+          <a:xfrm rot="289478">
+            <a:off x="5781094" y="2439238"/>
+            <a:ext cx="644317" cy="584775"/>
+          </a:xfrm>
+          <a:prstGeom prst="rect">
+            <a:avLst/>
+          </a:prstGeom>
+          <a:noFill/>
+        </p:spPr>
+        <p:txBody>
+          <a:bodyPr wrap="square" rtlCol="0">
+            <a:spAutoFit/>
+          </a:bodyPr>
+          <a:lstStyle/>
+          <a:p>
+            <a:r>
+              <a:rPr kumimoji="1" lang="ja-JP" altLang="en-US" sz="3200" dirty="0">
+                <a:solidFill>
+                  <a:srgbClr val="DEA900"/>
+                </a:solidFill>
+                <a:latin typeface="HGP行書体" panose="03000600000000000000" pitchFamily="66" charset="-128"/>
+                <a:ea typeface="HGP行書体" panose="03000600000000000000" pitchFamily="66" charset="-128"/>
+              </a:rPr>
+              <a:t>如</a:t>
+            </a:r>
+          </a:p>
+        </p:txBody>
+      </p:sp>
+      <p:sp>
+        <p:nvSpPr>
+          <p:cNvPr id="115" name="テキスト ボックス 114">
+            <a:extLst>
+              <a:ext uri="{FF2B5EF4-FFF2-40B4-BE49-F238E27FC236}">
+                <a16:creationId xmlns:a16="http://schemas.microsoft.com/office/drawing/2014/main" id="{7EC5A88C-65FC-2543-1BAE-7996D84011EC}"/>
+              </a:ext>
+            </a:extLst>
+          </p:cNvPr>
+          <p:cNvSpPr txBox="1"/>
+          <p:nvPr/>
+        </p:nvSpPr>
+        <p:spPr>
+          <a:xfrm rot="289478">
+            <a:off x="5781091" y="3225250"/>
+            <a:ext cx="644317" cy="584775"/>
+          </a:xfrm>
+          <a:prstGeom prst="rect">
+            <a:avLst/>
+          </a:prstGeom>
+          <a:noFill/>
+        </p:spPr>
+        <p:txBody>
+          <a:bodyPr wrap="square" rtlCol="0">
+            <a:spAutoFit/>
+          </a:bodyPr>
+          <a:lstStyle/>
+          <a:p>
+            <a:r>
+              <a:rPr kumimoji="1" lang="ja-JP" altLang="en-US" sz="3200" dirty="0">
+                <a:solidFill>
+                  <a:srgbClr val="DEA900"/>
+                </a:solidFill>
+                <a:latin typeface="HGP行書体" panose="03000600000000000000" pitchFamily="66" charset="-128"/>
+                <a:ea typeface="HGP行書体" panose="03000600000000000000" pitchFamily="66" charset="-128"/>
+              </a:rPr>
+              <a:t>侵</a:t>
+            </a:r>
+          </a:p>
+        </p:txBody>
+      </p:sp>
+      <p:sp>
+        <p:nvSpPr>
+          <p:cNvPr id="116" name="テキスト ボックス 115">
+            <a:extLst>
+              <a:ext uri="{FF2B5EF4-FFF2-40B4-BE49-F238E27FC236}">
+                <a16:creationId xmlns:a16="http://schemas.microsoft.com/office/drawing/2014/main" id="{23AC400B-AD4E-FE7A-F255-40718C54407F}"/>
+              </a:ext>
+            </a:extLst>
+          </p:cNvPr>
+          <p:cNvSpPr txBox="1"/>
+          <p:nvPr/>
+        </p:nvSpPr>
+        <p:spPr>
+          <a:xfrm rot="289478">
+            <a:off x="5130273" y="871585"/>
+            <a:ext cx="644317" cy="584775"/>
+          </a:xfrm>
+          <a:prstGeom prst="rect">
+            <a:avLst/>
+          </a:prstGeom>
+          <a:noFill/>
+        </p:spPr>
+        <p:txBody>
+          <a:bodyPr wrap="square" rtlCol="0">
+            <a:spAutoFit/>
+          </a:bodyPr>
+          <a:lstStyle/>
+          <a:p>
+            <a:r>
+              <a:rPr kumimoji="1" lang="ja-JP" altLang="en-US" sz="3200" dirty="0">
+                <a:solidFill>
+                  <a:srgbClr val="DEA900"/>
+                </a:solidFill>
+                <a:latin typeface="HGP行書体" panose="03000600000000000000" pitchFamily="66" charset="-128"/>
+                <a:ea typeface="HGP行書体" panose="03000600000000000000" pitchFamily="66" charset="-128"/>
+              </a:rPr>
+              <a:t>掠</a:t>
+            </a:r>
+          </a:p>
+        </p:txBody>
+      </p:sp>
+      <p:sp>
+        <p:nvSpPr>
+          <p:cNvPr id="117" name="テキスト ボックス 116">
+            <a:extLst>
+              <a:ext uri="{FF2B5EF4-FFF2-40B4-BE49-F238E27FC236}">
+                <a16:creationId xmlns:a16="http://schemas.microsoft.com/office/drawing/2014/main" id="{041110C3-B618-3EB1-AF0E-93316F1DF77A}"/>
+              </a:ext>
+            </a:extLst>
+          </p:cNvPr>
+          <p:cNvSpPr txBox="1"/>
+          <p:nvPr/>
+        </p:nvSpPr>
+        <p:spPr>
+          <a:xfrm rot="289478">
+            <a:off x="5074287" y="1264591"/>
+            <a:ext cx="644317" cy="584775"/>
+          </a:xfrm>
+          <a:prstGeom prst="rect">
+            <a:avLst/>
+          </a:prstGeom>
+          <a:noFill/>
+        </p:spPr>
+        <p:txBody>
+          <a:bodyPr wrap="square" rtlCol="0">
+            <a:spAutoFit/>
+          </a:bodyPr>
+          <a:lstStyle/>
+          <a:p>
+            <a:r>
+              <a:rPr kumimoji="1" lang="ja-JP" altLang="en-US" sz="3200" dirty="0">
+                <a:solidFill>
+                  <a:srgbClr val="DEA900"/>
+                </a:solidFill>
+                <a:latin typeface="HGP行書体" panose="03000600000000000000" pitchFamily="66" charset="-128"/>
+                <a:ea typeface="HGP行書体" panose="03000600000000000000" pitchFamily="66" charset="-128"/>
+              </a:rPr>
+              <a:t>如</a:t>
+            </a:r>
+          </a:p>
+        </p:txBody>
+      </p:sp>
+      <p:sp>
+        <p:nvSpPr>
+          <p:cNvPr id="118" name="テキスト ボックス 117">
+            <a:extLst>
+              <a:ext uri="{FF2B5EF4-FFF2-40B4-BE49-F238E27FC236}">
+                <a16:creationId xmlns:a16="http://schemas.microsoft.com/office/drawing/2014/main" id="{F57F44B3-52D7-65B8-2F84-364573A2369C}"/>
+              </a:ext>
+            </a:extLst>
+          </p:cNvPr>
+          <p:cNvSpPr txBox="1"/>
+          <p:nvPr/>
+        </p:nvSpPr>
+        <p:spPr>
+          <a:xfrm rot="289478">
+            <a:off x="5111611" y="1657597"/>
+            <a:ext cx="644317" cy="584775"/>
+          </a:xfrm>
+          <a:prstGeom prst="rect">
+            <a:avLst/>
+          </a:prstGeom>
+          <a:noFill/>
+        </p:spPr>
+        <p:txBody>
+          <a:bodyPr wrap="square" rtlCol="0">
+            <a:spAutoFit/>
+          </a:bodyPr>
+          <a:lstStyle/>
+          <a:p>
+            <a:r>
+              <a:rPr kumimoji="1" lang="ja-JP" altLang="en-US" sz="3200" dirty="0">
+                <a:solidFill>
+                  <a:srgbClr val="DEA900"/>
+                </a:solidFill>
+                <a:latin typeface="HGP行書体" panose="03000600000000000000" pitchFamily="66" charset="-128"/>
+                <a:ea typeface="HGP行書体" panose="03000600000000000000" pitchFamily="66" charset="-128"/>
+              </a:rPr>
+              <a:t>火</a:t>
+            </a:r>
+          </a:p>
+        </p:txBody>
+      </p:sp>
+      <p:sp>
+        <p:nvSpPr>
+          <p:cNvPr id="119" name="テキスト ボックス 118">
+            <a:extLst>
+              <a:ext uri="{FF2B5EF4-FFF2-40B4-BE49-F238E27FC236}">
+                <a16:creationId xmlns:a16="http://schemas.microsoft.com/office/drawing/2014/main" id="{C22D9CA3-F7B4-58F9-4A85-C630C2E91CE5}"/>
+              </a:ext>
+            </a:extLst>
+          </p:cNvPr>
+          <p:cNvSpPr txBox="1"/>
+          <p:nvPr/>
+        </p:nvSpPr>
+        <p:spPr>
+          <a:xfrm rot="289478">
+            <a:off x="5167597" y="2050603"/>
+            <a:ext cx="644317" cy="584775"/>
+          </a:xfrm>
+          <a:prstGeom prst="rect">
+            <a:avLst/>
+          </a:prstGeom>
+          <a:noFill/>
+        </p:spPr>
+        <p:txBody>
+          <a:bodyPr wrap="square" rtlCol="0">
+            <a:spAutoFit/>
+          </a:bodyPr>
+          <a:lstStyle/>
+          <a:p>
+            <a:r>
+              <a:rPr kumimoji="1" lang="ja-JP" altLang="en-US" sz="3200" dirty="0">
+                <a:solidFill>
+                  <a:srgbClr val="DEA900"/>
+                </a:solidFill>
+                <a:latin typeface="HGP行書体" panose="03000600000000000000" pitchFamily="66" charset="-128"/>
+                <a:ea typeface="HGP行書体" panose="03000600000000000000" pitchFamily="66" charset="-128"/>
+              </a:rPr>
+              <a:t>不</a:t>
+            </a:r>
+          </a:p>
+        </p:txBody>
+      </p:sp>
+      <p:sp>
+        <p:nvSpPr>
+          <p:cNvPr id="120" name="テキスト ボックス 119">
+            <a:extLst>
+              <a:ext uri="{FF2B5EF4-FFF2-40B4-BE49-F238E27FC236}">
+                <a16:creationId xmlns:a16="http://schemas.microsoft.com/office/drawing/2014/main" id="{E5CBBFAD-4395-B42A-E414-3201F1516AA3}"/>
+              </a:ext>
+            </a:extLst>
+          </p:cNvPr>
+          <p:cNvSpPr txBox="1"/>
+          <p:nvPr/>
+        </p:nvSpPr>
+        <p:spPr>
+          <a:xfrm rot="289478">
+            <a:off x="5270234" y="2836615"/>
+            <a:ext cx="644317" cy="584775"/>
+          </a:xfrm>
+          <a:prstGeom prst="rect">
+            <a:avLst/>
+          </a:prstGeom>
+          <a:noFill/>
+        </p:spPr>
+        <p:txBody>
+          <a:bodyPr wrap="square" rtlCol="0">
+            <a:spAutoFit/>
+          </a:bodyPr>
+          <a:lstStyle/>
+          <a:p>
+            <a:r>
+              <a:rPr kumimoji="1" lang="ja-JP" altLang="en-US" sz="3200" dirty="0">
+                <a:solidFill>
+                  <a:srgbClr val="DEA900"/>
+                </a:solidFill>
+                <a:latin typeface="HGP行書体" panose="03000600000000000000" pitchFamily="66" charset="-128"/>
+                <a:ea typeface="HGP行書体" panose="03000600000000000000" pitchFamily="66" charset="-128"/>
+              </a:rPr>
+              <a:t>如</a:t>
+            </a:r>
+          </a:p>
+        </p:txBody>
+      </p:sp>
+      <p:sp>
+        <p:nvSpPr>
+          <p:cNvPr id="121" name="テキスト ボックス 120">
+            <a:extLst>
+              <a:ext uri="{FF2B5EF4-FFF2-40B4-BE49-F238E27FC236}">
+                <a16:creationId xmlns:a16="http://schemas.microsoft.com/office/drawing/2014/main" id="{3BB43619-476F-EC9B-D81E-1E12CDE28765}"/>
+              </a:ext>
+            </a:extLst>
+          </p:cNvPr>
+          <p:cNvSpPr txBox="1"/>
+          <p:nvPr/>
+        </p:nvSpPr>
+        <p:spPr>
+          <a:xfrm rot="289478">
+            <a:off x="5223583" y="2443609"/>
+            <a:ext cx="644317" cy="584775"/>
+          </a:xfrm>
+          <a:prstGeom prst="rect">
+            <a:avLst/>
+          </a:prstGeom>
+          <a:noFill/>
+        </p:spPr>
+        <p:txBody>
+          <a:bodyPr wrap="square" rtlCol="0">
+            <a:spAutoFit/>
+          </a:bodyPr>
+          <a:lstStyle/>
+          <a:p>
+            <a:r>
+              <a:rPr kumimoji="1" lang="ja-JP" altLang="en-US" sz="3200" dirty="0">
+                <a:solidFill>
+                  <a:srgbClr val="DEA900"/>
+                </a:solidFill>
+                <a:latin typeface="HGP行書体" panose="03000600000000000000" pitchFamily="66" charset="-128"/>
+                <a:ea typeface="HGP行書体" panose="03000600000000000000" pitchFamily="66" charset="-128"/>
+              </a:rPr>
+              <a:t>動</a:t>
+            </a:r>
+          </a:p>
+        </p:txBody>
+      </p:sp>
+      <p:sp>
+        <p:nvSpPr>
+          <p:cNvPr id="122" name="テキスト ボックス 121">
+            <a:extLst>
+              <a:ext uri="{FF2B5EF4-FFF2-40B4-BE49-F238E27FC236}">
+                <a16:creationId xmlns:a16="http://schemas.microsoft.com/office/drawing/2014/main" id="{07C9AA81-C472-5203-2D8B-EFCE942613F2}"/>
+              </a:ext>
+            </a:extLst>
+          </p:cNvPr>
+          <p:cNvSpPr txBox="1"/>
+          <p:nvPr/>
+        </p:nvSpPr>
+        <p:spPr>
+          <a:xfrm rot="289478">
+            <a:off x="5223580" y="3229621"/>
+            <a:ext cx="644317" cy="584775"/>
+          </a:xfrm>
+          <a:prstGeom prst="rect">
+            <a:avLst/>
+          </a:prstGeom>
+          <a:noFill/>
+        </p:spPr>
+        <p:txBody>
+          <a:bodyPr wrap="square" rtlCol="0">
+            <a:spAutoFit/>
+          </a:bodyPr>
+          <a:lstStyle/>
+          <a:p>
+            <a:r>
+              <a:rPr kumimoji="1" lang="ja-JP" altLang="en-US" sz="3200" dirty="0">
+                <a:solidFill>
+                  <a:srgbClr val="DEA900"/>
+                </a:solidFill>
+                <a:latin typeface="HGP行書体" panose="03000600000000000000" pitchFamily="66" charset="-128"/>
+                <a:ea typeface="HGP行書体" panose="03000600000000000000" pitchFamily="66" charset="-128"/>
+              </a:rPr>
+              <a:t>山</a:t>
+            </a:r>
+          </a:p>
+        </p:txBody>
+      </p:sp>
+      <p:sp>
+        <p:nvSpPr>
+          <p:cNvPr id="124" name="アーチ 123">
+            <a:extLst>
+              <a:ext uri="{FF2B5EF4-FFF2-40B4-BE49-F238E27FC236}">
+                <a16:creationId xmlns:a16="http://schemas.microsoft.com/office/drawing/2014/main" id="{8728F148-44FA-BD5C-F797-01DF31D435D4}"/>
+              </a:ext>
+            </a:extLst>
+          </p:cNvPr>
+          <p:cNvSpPr/>
+          <p:nvPr/>
+        </p:nvSpPr>
+        <p:spPr>
+          <a:xfrm rot="413176">
+            <a:off x="6466622" y="3295822"/>
+            <a:ext cx="357515" cy="196670"/>
+          </a:xfrm>
+          <a:prstGeom prst="blockArc">
+            <a:avLst>
+              <a:gd name="adj1" fmla="val 10800000"/>
+              <a:gd name="adj2" fmla="val 58862"/>
+              <a:gd name="adj3" fmla="val 30068"/>
+            </a:avLst>
+          </a:prstGeom>
+          <a:solidFill>
+            <a:srgbClr val="FFDF79"/>
+          </a:solidFill>
+          <a:ln>
+            <a:noFill/>
+          </a:ln>
+          <a:effectLst>
+            <a:innerShdw blurRad="50800" dist="25400" dir="7800000">
+              <a:prstClr val="black">
+                <a:alpha val="50000"/>
+              </a:prstClr>
+            </a:innerShdw>
+          </a:effectLst>
+        </p:spPr>
+        <p:style>
+          <a:lnRef idx="2">
+            <a:schemeClr val="accent1">
+              <a:shade val="15000"/>
+            </a:schemeClr>
+          </a:lnRef>
+          <a:fillRef idx="1">
+            <a:schemeClr val="accent1"/>
+          </a:fillRef>
+          <a:effectRef idx="0">
+            <a:schemeClr val="accent1"/>
+          </a:effectRef>
+          <a:fontRef idx="minor">
+            <a:schemeClr val="lt1"/>
+          </a:fontRef>
+        </p:style>
+        <p:txBody>
+          <a:bodyPr rtlCol="0" anchor="ctr"/>
+          <a:lstStyle/>
+          <a:p>
+            <a:pPr algn="ctr"/>
+            <a:endParaRPr kumimoji="1" lang="ja-JP" altLang="en-US">
+              <a:solidFill>
+                <a:schemeClr val="tx1"/>
+              </a:solidFill>
+            </a:endParaRPr>
+          </a:p>
+        </p:txBody>
+      </p:sp>
+      <p:sp>
+        <p:nvSpPr>
+          <p:cNvPr id="126" name="アーチ 125">
+            <a:extLst>
+              <a:ext uri="{FF2B5EF4-FFF2-40B4-BE49-F238E27FC236}">
+                <a16:creationId xmlns:a16="http://schemas.microsoft.com/office/drawing/2014/main" id="{BBB1AA34-FC8E-59C6-8F14-38F651A1958D}"/>
+              </a:ext>
+            </a:extLst>
+          </p:cNvPr>
+          <p:cNvSpPr/>
+          <p:nvPr/>
+        </p:nvSpPr>
+        <p:spPr>
+          <a:xfrm rot="413176">
+            <a:off x="6418828" y="3682450"/>
+            <a:ext cx="404334" cy="196670"/>
+          </a:xfrm>
+          <a:prstGeom prst="blockArc">
+            <a:avLst>
+              <a:gd name="adj1" fmla="val 10800000"/>
+              <a:gd name="adj2" fmla="val 58862"/>
+              <a:gd name="adj3" fmla="val 30068"/>
+            </a:avLst>
+          </a:prstGeom>
+          <a:solidFill>
+            <a:srgbClr val="FFDF79"/>
+          </a:solidFill>
+          <a:ln>
+            <a:noFill/>
+          </a:ln>
+          <a:effectLst>
+            <a:innerShdw blurRad="50800" dist="25400" dir="7800000">
+              <a:prstClr val="black">
+                <a:alpha val="50000"/>
+              </a:prstClr>
+            </a:innerShdw>
+          </a:effectLst>
+        </p:spPr>
+        <p:style>
+          <a:lnRef idx="2">
+            <a:schemeClr val="accent1">
+              <a:shade val="15000"/>
+            </a:schemeClr>
+          </a:lnRef>
+          <a:fillRef idx="1">
+            <a:schemeClr val="accent1"/>
+          </a:fillRef>
+          <a:effectRef idx="0">
+            <a:schemeClr val="accent1"/>
+          </a:effectRef>
+          <a:fontRef idx="minor">
+            <a:schemeClr val="lt1"/>
+          </a:fontRef>
+        </p:style>
+        <p:txBody>
+          <a:bodyPr rtlCol="0" anchor="ctr"/>
+          <a:lstStyle/>
+          <a:p>
+            <a:pPr algn="ctr"/>
+            <a:endParaRPr kumimoji="1" lang="ja-JP" altLang="en-US">
+              <a:solidFill>
+                <a:schemeClr val="tx1"/>
+              </a:solidFill>
+            </a:endParaRPr>
+          </a:p>
+        </p:txBody>
+      </p:sp>
     </p:spTree>
     <p:extLst>
       <p:ext uri="{BB962C8B-B14F-4D97-AF65-F5344CB8AC3E}">
